--- a/docs/pptx/whole/jx-linsubhr-ratio-grade2.pptx
+++ b/docs/pptx/whole/jx-linsubhr-ratio-grade2.pptx
@@ -2271,7 +2271,7 @@
           </p:nvSpPr>
           <p:spPr>
             <a:xfrm>
-              <a:off x="817517" y="5114368"/>
+              <a:off x="817517" y="5142518"/>
               <a:ext cx="7799693" cy="0"/>
             </a:xfrm>
             <a:custGeom>
@@ -2314,7 +2314,7 @@
           </p:nvSpPr>
           <p:spPr>
             <a:xfrm>
-              <a:off x="817517" y="4244691"/>
+              <a:off x="817517" y="4313054"/>
               <a:ext cx="7799693" cy="0"/>
             </a:xfrm>
             <a:custGeom>
@@ -2357,7 +2357,7 @@
           </p:nvSpPr>
           <p:spPr>
             <a:xfrm>
-              <a:off x="817517" y="3375014"/>
+              <a:off x="817517" y="3483591"/>
               <a:ext cx="7799693" cy="0"/>
             </a:xfrm>
             <a:custGeom>
@@ -2400,7 +2400,7 @@
           </p:nvSpPr>
           <p:spPr>
             <a:xfrm>
-              <a:off x="817517" y="2505337"/>
+              <a:off x="817517" y="2654127"/>
               <a:ext cx="7799693" cy="0"/>
             </a:xfrm>
             <a:custGeom>
@@ -2443,15 +2443,15 @@
           </p:nvSpPr>
           <p:spPr>
             <a:xfrm>
-              <a:off x="1615213" y="1896563"/>
-              <a:ext cx="0" cy="3826579"/>
+              <a:off x="1615213" y="2073503"/>
+              <a:ext cx="0" cy="3649639"/>
             </a:xfrm>
             <a:custGeom>
               <a:avLst/>
               <a:pathLst>
-                <a:path w="0" h="3826579">
+                <a:path w="0" h="3649639">
                   <a:moveTo>
-                    <a:pt x="0" y="3826579"/>
+                    <a:pt x="0" y="3649639"/>
                   </a:moveTo>
                   <a:lnTo>
                     <a:pt x="0" y="0"/>
@@ -2486,15 +2486,15 @@
           </p:nvSpPr>
           <p:spPr>
             <a:xfrm>
-              <a:off x="3387871" y="1896563"/>
-              <a:ext cx="0" cy="3826579"/>
+              <a:off x="3387871" y="2073503"/>
+              <a:ext cx="0" cy="3649639"/>
             </a:xfrm>
             <a:custGeom>
               <a:avLst/>
               <a:pathLst>
-                <a:path w="0" h="3826579">
+                <a:path w="0" h="3649639">
                   <a:moveTo>
-                    <a:pt x="0" y="3826579"/>
+                    <a:pt x="0" y="3649639"/>
                   </a:moveTo>
                   <a:lnTo>
                     <a:pt x="0" y="0"/>
@@ -2529,15 +2529,15 @@
           </p:nvSpPr>
           <p:spPr>
             <a:xfrm>
-              <a:off x="5160528" y="1896563"/>
-              <a:ext cx="0" cy="3826579"/>
+              <a:off x="5160528" y="2073503"/>
+              <a:ext cx="0" cy="3649639"/>
             </a:xfrm>
             <a:custGeom>
               <a:avLst/>
               <a:pathLst>
-                <a:path w="0" h="3826579">
+                <a:path w="0" h="3649639">
                   <a:moveTo>
-                    <a:pt x="0" y="3826579"/>
+                    <a:pt x="0" y="3649639"/>
                   </a:moveTo>
                   <a:lnTo>
                     <a:pt x="0" y="0"/>
@@ -2572,15 +2572,15 @@
           </p:nvSpPr>
           <p:spPr>
             <a:xfrm>
-              <a:off x="6933186" y="1896563"/>
-              <a:ext cx="0" cy="3826579"/>
+              <a:off x="6933186" y="2073503"/>
+              <a:ext cx="0" cy="3649639"/>
             </a:xfrm>
             <a:custGeom>
               <a:avLst/>
               <a:pathLst>
-                <a:path w="0" h="3826579">
+                <a:path w="0" h="3649639">
                   <a:moveTo>
-                    <a:pt x="0" y="3826579"/>
+                    <a:pt x="0" y="3649639"/>
                   </a:moveTo>
                   <a:lnTo>
                     <a:pt x="0" y="0"/>
@@ -2615,7 +2615,7 @@
           </p:nvSpPr>
           <p:spPr>
             <a:xfrm>
-              <a:off x="817517" y="5549207"/>
+              <a:off x="817517" y="5557249"/>
               <a:ext cx="7799693" cy="0"/>
             </a:xfrm>
             <a:custGeom>
@@ -2658,7 +2658,7 @@
           </p:nvSpPr>
           <p:spPr>
             <a:xfrm>
-              <a:off x="817517" y="4679530"/>
+              <a:off x="817517" y="4727786"/>
               <a:ext cx="7799693" cy="0"/>
             </a:xfrm>
             <a:custGeom>
@@ -2701,7 +2701,7 @@
           </p:nvSpPr>
           <p:spPr>
             <a:xfrm>
-              <a:off x="817517" y="3809853"/>
+              <a:off x="817517" y="3898322"/>
               <a:ext cx="7799693" cy="0"/>
             </a:xfrm>
             <a:custGeom>
@@ -2744,7 +2744,7 @@
           </p:nvSpPr>
           <p:spPr>
             <a:xfrm>
-              <a:off x="817517" y="2940175"/>
+              <a:off x="817517" y="3068859"/>
               <a:ext cx="7799693" cy="0"/>
             </a:xfrm>
             <a:custGeom>
@@ -2787,7 +2787,7 @@
           </p:nvSpPr>
           <p:spPr>
             <a:xfrm>
-              <a:off x="817517" y="2070498"/>
+              <a:off x="817517" y="2239395"/>
               <a:ext cx="7799693" cy="0"/>
             </a:xfrm>
             <a:custGeom>
@@ -2830,15 +2830,15 @@
           </p:nvSpPr>
           <p:spPr>
             <a:xfrm>
-              <a:off x="2501542" y="1896563"/>
-              <a:ext cx="0" cy="3826579"/>
+              <a:off x="2501542" y="2073503"/>
+              <a:ext cx="0" cy="3649639"/>
             </a:xfrm>
             <a:custGeom>
               <a:avLst/>
               <a:pathLst>
-                <a:path w="0" h="3826579">
+                <a:path w="0" h="3649639">
                   <a:moveTo>
-                    <a:pt x="0" y="3826579"/>
+                    <a:pt x="0" y="3649639"/>
                   </a:moveTo>
                   <a:lnTo>
                     <a:pt x="0" y="0"/>
@@ -2873,15 +2873,15 @@
           </p:nvSpPr>
           <p:spPr>
             <a:xfrm>
-              <a:off x="4274200" y="1896563"/>
-              <a:ext cx="0" cy="3826579"/>
+              <a:off x="4274200" y="2073503"/>
+              <a:ext cx="0" cy="3649639"/>
             </a:xfrm>
             <a:custGeom>
               <a:avLst/>
               <a:pathLst>
-                <a:path w="0" h="3826579">
+                <a:path w="0" h="3649639">
                   <a:moveTo>
-                    <a:pt x="0" y="3826579"/>
+                    <a:pt x="0" y="3649639"/>
                   </a:moveTo>
                   <a:lnTo>
                     <a:pt x="0" y="0"/>
@@ -2916,15 +2916,15 @@
           </p:nvSpPr>
           <p:spPr>
             <a:xfrm>
-              <a:off x="6046857" y="1896563"/>
-              <a:ext cx="0" cy="3826579"/>
+              <a:off x="6046857" y="2073503"/>
+              <a:ext cx="0" cy="3649639"/>
             </a:xfrm>
             <a:custGeom>
               <a:avLst/>
               <a:pathLst>
-                <a:path w="0" h="3826579">
+                <a:path w="0" h="3649639">
                   <a:moveTo>
-                    <a:pt x="0" y="3826579"/>
+                    <a:pt x="0" y="3649639"/>
                   </a:moveTo>
                   <a:lnTo>
                     <a:pt x="0" y="0"/>
@@ -2959,15 +2959,15 @@
           </p:nvSpPr>
           <p:spPr>
             <a:xfrm>
-              <a:off x="7819515" y="1896563"/>
-              <a:ext cx="0" cy="3826579"/>
+              <a:off x="7819515" y="2073503"/>
+              <a:ext cx="0" cy="3649639"/>
             </a:xfrm>
             <a:custGeom>
               <a:avLst/>
               <a:pathLst>
-                <a:path w="0" h="3826579">
+                <a:path w="0" h="3649639">
                   <a:moveTo>
-                    <a:pt x="0" y="3826579"/>
+                    <a:pt x="0" y="3649639"/>
                   </a:moveTo>
                   <a:lnTo>
                     <a:pt x="0" y="0"/>
@@ -3002,612 +3002,612 @@
           </p:nvSpPr>
           <p:spPr>
             <a:xfrm>
-              <a:off x="817517" y="2500931"/>
-              <a:ext cx="7235830" cy="2828388"/>
+              <a:off x="817517" y="2649925"/>
+              <a:ext cx="7235830" cy="2697605"/>
             </a:xfrm>
             <a:custGeom>
               <a:avLst/>
               <a:pathLst>
-                <a:path w="7235830" h="2828388">
+                <a:path w="7235830" h="2697605">
                   <a:moveTo>
                     <a:pt x="0" y="0"/>
                   </a:moveTo>
                   <a:lnTo>
-                    <a:pt x="7347" y="8226"/>
-                  </a:lnTo>
-                  <a:lnTo>
-                    <a:pt x="81107" y="88620"/>
-                  </a:lnTo>
-                  <a:lnTo>
-                    <a:pt x="154867" y="166889"/>
-                  </a:lnTo>
-                  <a:lnTo>
-                    <a:pt x="228627" y="243088"/>
-                  </a:lnTo>
-                  <a:lnTo>
-                    <a:pt x="302387" y="317272"/>
-                  </a:lnTo>
-                  <a:lnTo>
-                    <a:pt x="376147" y="389494"/>
-                  </a:lnTo>
-                  <a:lnTo>
-                    <a:pt x="449907" y="459806"/>
-                  </a:lnTo>
-                  <a:lnTo>
-                    <a:pt x="523667" y="528259"/>
-                  </a:lnTo>
-                  <a:lnTo>
-                    <a:pt x="597427" y="594901"/>
-                  </a:lnTo>
-                  <a:lnTo>
-                    <a:pt x="671187" y="659781"/>
-                  </a:lnTo>
-                  <a:lnTo>
-                    <a:pt x="744947" y="722946"/>
-                  </a:lnTo>
-                  <a:lnTo>
-                    <a:pt x="818707" y="784439"/>
-                  </a:lnTo>
-                  <a:lnTo>
-                    <a:pt x="892467" y="844307"/>
-                  </a:lnTo>
-                  <a:lnTo>
-                    <a:pt x="966227" y="902592"/>
-                  </a:lnTo>
-                  <a:lnTo>
-                    <a:pt x="1039987" y="959335"/>
-                  </a:lnTo>
-                  <a:lnTo>
-                    <a:pt x="1113747" y="1014577"/>
-                  </a:lnTo>
-                  <a:lnTo>
-                    <a:pt x="1187508" y="1068359"/>
-                  </a:lnTo>
-                  <a:lnTo>
-                    <a:pt x="1261268" y="1120718"/>
-                  </a:lnTo>
-                  <a:lnTo>
-                    <a:pt x="1335028" y="1171693"/>
-                  </a:lnTo>
-                  <a:lnTo>
-                    <a:pt x="1408788" y="1221320"/>
-                  </a:lnTo>
-                  <a:lnTo>
-                    <a:pt x="1482548" y="1269634"/>
-                  </a:lnTo>
-                  <a:lnTo>
-                    <a:pt x="1556308" y="1316670"/>
-                  </a:lnTo>
-                  <a:lnTo>
-                    <a:pt x="1630068" y="1362463"/>
-                  </a:lnTo>
-                  <a:lnTo>
-                    <a:pt x="1703828" y="1407045"/>
-                  </a:lnTo>
-                  <a:lnTo>
-                    <a:pt x="1777588" y="1450448"/>
-                  </a:lnTo>
-                  <a:lnTo>
-                    <a:pt x="1851348" y="1492702"/>
-                  </a:lnTo>
-                  <a:lnTo>
-                    <a:pt x="1925108" y="1533840"/>
-                  </a:lnTo>
-                  <a:lnTo>
-                    <a:pt x="1998868" y="1573890"/>
-                  </a:lnTo>
-                  <a:lnTo>
-                    <a:pt x="2072628" y="1612880"/>
-                  </a:lnTo>
-                  <a:lnTo>
-                    <a:pt x="2146388" y="1650839"/>
-                  </a:lnTo>
-                  <a:lnTo>
-                    <a:pt x="2220148" y="1687795"/>
-                  </a:lnTo>
-                  <a:lnTo>
-                    <a:pt x="2293908" y="1723773"/>
-                  </a:lnTo>
-                  <a:lnTo>
-                    <a:pt x="2367668" y="1758800"/>
-                  </a:lnTo>
-                  <a:lnTo>
-                    <a:pt x="2441428" y="1792900"/>
-                  </a:lnTo>
-                  <a:lnTo>
-                    <a:pt x="2515188" y="1826099"/>
-                  </a:lnTo>
-                  <a:lnTo>
-                    <a:pt x="2588948" y="1858420"/>
-                  </a:lnTo>
-                  <a:lnTo>
-                    <a:pt x="2662708" y="1889886"/>
-                  </a:lnTo>
-                  <a:lnTo>
-                    <a:pt x="2736468" y="1920520"/>
-                  </a:lnTo>
-                  <a:lnTo>
-                    <a:pt x="2810228" y="1950343"/>
-                  </a:lnTo>
-                  <a:lnTo>
-                    <a:pt x="2883988" y="1979378"/>
-                  </a:lnTo>
-                  <a:lnTo>
-                    <a:pt x="2957748" y="2007646"/>
-                  </a:lnTo>
-                  <a:lnTo>
-                    <a:pt x="3031508" y="2035165"/>
-                  </a:lnTo>
-                  <a:lnTo>
-                    <a:pt x="3105268" y="2061957"/>
-                  </a:lnTo>
-                  <a:lnTo>
-                    <a:pt x="3179028" y="2088041"/>
-                  </a:lnTo>
-                  <a:lnTo>
-                    <a:pt x="3252788" y="2113434"/>
-                  </a:lnTo>
-                  <a:lnTo>
-                    <a:pt x="3326548" y="2138156"/>
-                  </a:lnTo>
-                  <a:lnTo>
-                    <a:pt x="3400308" y="2162225"/>
-                  </a:lnTo>
-                  <a:lnTo>
-                    <a:pt x="3474068" y="2182787"/>
-                  </a:lnTo>
-                  <a:lnTo>
-                    <a:pt x="3547828" y="2196421"/>
-                  </a:lnTo>
-                  <a:lnTo>
-                    <a:pt x="3621588" y="2209840"/>
-                  </a:lnTo>
-                  <a:lnTo>
-                    <a:pt x="3695348" y="2223048"/>
-                  </a:lnTo>
-                  <a:lnTo>
-                    <a:pt x="3769108" y="2236048"/>
-                  </a:lnTo>
-                  <a:lnTo>
-                    <a:pt x="3842868" y="2248843"/>
-                  </a:lnTo>
-                  <a:lnTo>
-                    <a:pt x="3916628" y="2261436"/>
-                  </a:lnTo>
-                  <a:lnTo>
-                    <a:pt x="3990388" y="2273831"/>
-                  </a:lnTo>
-                  <a:lnTo>
-                    <a:pt x="4064149" y="2286031"/>
-                  </a:lnTo>
-                  <a:lnTo>
-                    <a:pt x="4137909" y="2298039"/>
-                  </a:lnTo>
-                  <a:lnTo>
-                    <a:pt x="4211669" y="2309857"/>
-                  </a:lnTo>
-                  <a:lnTo>
-                    <a:pt x="4285429" y="2321490"/>
-                  </a:lnTo>
-                  <a:lnTo>
-                    <a:pt x="4359189" y="2332939"/>
-                  </a:lnTo>
-                  <a:lnTo>
-                    <a:pt x="4432949" y="2344207"/>
-                  </a:lnTo>
-                  <a:lnTo>
-                    <a:pt x="4506709" y="2355299"/>
-                  </a:lnTo>
-                  <a:lnTo>
-                    <a:pt x="4580469" y="2366215"/>
-                  </a:lnTo>
-                  <a:lnTo>
-                    <a:pt x="4654229" y="2376960"/>
-                  </a:lnTo>
-                  <a:lnTo>
-                    <a:pt x="4727989" y="2387535"/>
-                  </a:lnTo>
-                  <a:lnTo>
-                    <a:pt x="4801749" y="2397943"/>
-                  </a:lnTo>
-                  <a:lnTo>
-                    <a:pt x="4875509" y="2408188"/>
-                  </a:lnTo>
-                  <a:lnTo>
-                    <a:pt x="4949269" y="2418271"/>
-                  </a:lnTo>
-                  <a:lnTo>
-                    <a:pt x="5023029" y="2428196"/>
-                  </a:lnTo>
-                  <a:lnTo>
-                    <a:pt x="5096789" y="2437964"/>
-                  </a:lnTo>
-                  <a:lnTo>
-                    <a:pt x="5170549" y="2447578"/>
-                  </a:lnTo>
-                  <a:lnTo>
-                    <a:pt x="5244309" y="2457041"/>
-                  </a:lnTo>
-                  <a:lnTo>
-                    <a:pt x="5318069" y="2466355"/>
-                  </a:lnTo>
-                  <a:lnTo>
-                    <a:pt x="5391829" y="2475522"/>
-                  </a:lnTo>
-                  <a:lnTo>
-                    <a:pt x="5465589" y="2484544"/>
-                  </a:lnTo>
-                  <a:lnTo>
-                    <a:pt x="5539349" y="2493425"/>
-                  </a:lnTo>
-                  <a:lnTo>
-                    <a:pt x="5613109" y="2502165"/>
-                  </a:lnTo>
-                  <a:lnTo>
-                    <a:pt x="5686869" y="2510768"/>
-                  </a:lnTo>
-                  <a:lnTo>
-                    <a:pt x="5760629" y="2519236"/>
-                  </a:lnTo>
-                  <a:lnTo>
-                    <a:pt x="5834389" y="2527570"/>
-                  </a:lnTo>
-                  <a:lnTo>
-                    <a:pt x="5908149" y="2535772"/>
-                  </a:lnTo>
-                  <a:lnTo>
-                    <a:pt x="5981909" y="2543846"/>
-                  </a:lnTo>
-                  <a:lnTo>
-                    <a:pt x="6055669" y="2551792"/>
-                  </a:lnTo>
-                  <a:lnTo>
-                    <a:pt x="6129429" y="2559613"/>
-                  </a:lnTo>
-                  <a:lnTo>
-                    <a:pt x="6203189" y="2567311"/>
-                  </a:lnTo>
-                  <a:lnTo>
-                    <a:pt x="6276949" y="2574888"/>
-                  </a:lnTo>
-                  <a:lnTo>
-                    <a:pt x="6350709" y="2582345"/>
-                  </a:lnTo>
-                  <a:lnTo>
-                    <a:pt x="6424469" y="2589685"/>
-                  </a:lnTo>
-                  <a:lnTo>
-                    <a:pt x="6498229" y="2596909"/>
-                  </a:lnTo>
-                  <a:lnTo>
-                    <a:pt x="6571989" y="2604019"/>
-                  </a:lnTo>
-                  <a:lnTo>
-                    <a:pt x="6645749" y="2611018"/>
-                  </a:lnTo>
-                  <a:lnTo>
-                    <a:pt x="6719509" y="2617906"/>
-                  </a:lnTo>
-                  <a:lnTo>
-                    <a:pt x="6793269" y="2624685"/>
-                  </a:lnTo>
-                  <a:lnTo>
-                    <a:pt x="6867029" y="2631358"/>
-                  </a:lnTo>
-                  <a:lnTo>
-                    <a:pt x="6940789" y="2637926"/>
-                  </a:lnTo>
-                  <a:lnTo>
-                    <a:pt x="7014550" y="2644390"/>
-                  </a:lnTo>
-                  <a:lnTo>
-                    <a:pt x="7088310" y="2650753"/>
-                  </a:lnTo>
-                  <a:lnTo>
-                    <a:pt x="7162070" y="2657015"/>
-                  </a:lnTo>
-                  <a:lnTo>
-                    <a:pt x="7235830" y="2663178"/>
-                  </a:lnTo>
-                  <a:lnTo>
-                    <a:pt x="7235830" y="2828388"/>
-                  </a:lnTo>
-                  <a:lnTo>
-                    <a:pt x="7162070" y="2822416"/>
-                  </a:lnTo>
-                  <a:lnTo>
-                    <a:pt x="7088310" y="2816280"/>
-                  </a:lnTo>
-                  <a:lnTo>
-                    <a:pt x="7014550" y="2809979"/>
-                  </a:lnTo>
-                  <a:lnTo>
-                    <a:pt x="6940789" y="2803506"/>
-                  </a:lnTo>
-                  <a:lnTo>
-                    <a:pt x="6867029" y="2796857"/>
-                  </a:lnTo>
-                  <a:lnTo>
-                    <a:pt x="6793269" y="2790027"/>
-                  </a:lnTo>
-                  <a:lnTo>
-                    <a:pt x="6719509" y="2783013"/>
-                  </a:lnTo>
-                  <a:lnTo>
-                    <a:pt x="6645749" y="2775807"/>
-                  </a:lnTo>
-                  <a:lnTo>
-                    <a:pt x="6571989" y="2768406"/>
-                  </a:lnTo>
-                  <a:lnTo>
-                    <a:pt x="6498229" y="2760804"/>
-                  </a:lnTo>
-                  <a:lnTo>
-                    <a:pt x="6424469" y="2752995"/>
-                  </a:lnTo>
-                  <a:lnTo>
-                    <a:pt x="6350709" y="2744974"/>
-                  </a:lnTo>
-                  <a:lnTo>
-                    <a:pt x="6276949" y="2736735"/>
-                  </a:lnTo>
-                  <a:lnTo>
-                    <a:pt x="6203189" y="2728273"/>
-                  </a:lnTo>
-                  <a:lnTo>
-                    <a:pt x="6129429" y="2719580"/>
-                  </a:lnTo>
-                  <a:lnTo>
-                    <a:pt x="6055669" y="2710652"/>
-                  </a:lnTo>
-                  <a:lnTo>
-                    <a:pt x="5981909" y="2701481"/>
-                  </a:lnTo>
-                  <a:lnTo>
-                    <a:pt x="5908149" y="2692061"/>
-                  </a:lnTo>
-                  <a:lnTo>
-                    <a:pt x="5834389" y="2682384"/>
-                  </a:lnTo>
-                  <a:lnTo>
-                    <a:pt x="5760629" y="2672446"/>
-                  </a:lnTo>
-                  <a:lnTo>
-                    <a:pt x="5686869" y="2662237"/>
-                  </a:lnTo>
-                  <a:lnTo>
-                    <a:pt x="5613109" y="2651751"/>
-                  </a:lnTo>
-                  <a:lnTo>
-                    <a:pt x="5539349" y="2640980"/>
-                  </a:lnTo>
-                  <a:lnTo>
-                    <a:pt x="5465589" y="2629916"/>
-                  </a:lnTo>
-                  <a:lnTo>
-                    <a:pt x="5391829" y="2618552"/>
-                  </a:lnTo>
-                  <a:lnTo>
-                    <a:pt x="5318069" y="2606879"/>
-                  </a:lnTo>
-                  <a:lnTo>
-                    <a:pt x="5244309" y="2594889"/>
-                  </a:lnTo>
-                  <a:lnTo>
-                    <a:pt x="5170549" y="2582573"/>
-                  </a:lnTo>
-                  <a:lnTo>
-                    <a:pt x="5096789" y="2569923"/>
-                  </a:lnTo>
-                  <a:lnTo>
-                    <a:pt x="5023029" y="2556930"/>
-                  </a:lnTo>
-                  <a:lnTo>
-                    <a:pt x="4949269" y="2543583"/>
-                  </a:lnTo>
-                  <a:lnTo>
-                    <a:pt x="4875509" y="2529874"/>
-                  </a:lnTo>
-                  <a:lnTo>
-                    <a:pt x="4801749" y="2515792"/>
-                  </a:lnTo>
-                  <a:lnTo>
-                    <a:pt x="4727989" y="2501328"/>
-                  </a:lnTo>
-                  <a:lnTo>
-                    <a:pt x="4654229" y="2486471"/>
-                  </a:lnTo>
-                  <a:lnTo>
-                    <a:pt x="4580469" y="2471210"/>
-                  </a:lnTo>
-                  <a:lnTo>
-                    <a:pt x="4506709" y="2455535"/>
-                  </a:lnTo>
-                  <a:lnTo>
-                    <a:pt x="4432949" y="2439434"/>
-                  </a:lnTo>
-                  <a:lnTo>
-                    <a:pt x="4359189" y="2422896"/>
-                  </a:lnTo>
-                  <a:lnTo>
-                    <a:pt x="4285429" y="2405908"/>
-                  </a:lnTo>
-                  <a:lnTo>
-                    <a:pt x="4211669" y="2388459"/>
-                  </a:lnTo>
-                  <a:lnTo>
-                    <a:pt x="4137909" y="2370536"/>
-                  </a:lnTo>
-                  <a:lnTo>
-                    <a:pt x="4064149" y="2352127"/>
-                  </a:lnTo>
-                  <a:lnTo>
-                    <a:pt x="3990388" y="2333217"/>
-                  </a:lnTo>
-                  <a:lnTo>
-                    <a:pt x="3916628" y="2313793"/>
-                  </a:lnTo>
-                  <a:lnTo>
-                    <a:pt x="3842868" y="2293842"/>
-                  </a:lnTo>
-                  <a:lnTo>
-                    <a:pt x="3769108" y="2273349"/>
-                  </a:lnTo>
-                  <a:lnTo>
-                    <a:pt x="3695348" y="2252299"/>
-                  </a:lnTo>
-                  <a:lnTo>
-                    <a:pt x="3621588" y="2230678"/>
-                  </a:lnTo>
-                  <a:lnTo>
-                    <a:pt x="3547828" y="2208469"/>
-                  </a:lnTo>
-                  <a:lnTo>
-                    <a:pt x="3474068" y="2185657"/>
-                  </a:lnTo>
-                  <a:lnTo>
-                    <a:pt x="3400308" y="2168934"/>
-                  </a:lnTo>
-                  <a:lnTo>
-                    <a:pt x="3326548" y="2154860"/>
-                  </a:lnTo>
-                  <a:lnTo>
-                    <a:pt x="3252788" y="2140561"/>
-                  </a:lnTo>
-                  <a:lnTo>
-                    <a:pt x="3179028" y="2126033"/>
-                  </a:lnTo>
-                  <a:lnTo>
-                    <a:pt x="3105268" y="2111272"/>
-                  </a:lnTo>
-                  <a:lnTo>
-                    <a:pt x="3031508" y="2096276"/>
-                  </a:lnTo>
-                  <a:lnTo>
-                    <a:pt x="2957748" y="2081039"/>
-                  </a:lnTo>
-                  <a:lnTo>
-                    <a:pt x="2883988" y="2065558"/>
-                  </a:lnTo>
-                  <a:lnTo>
-                    <a:pt x="2810228" y="2049829"/>
-                  </a:lnTo>
-                  <a:lnTo>
-                    <a:pt x="2736468" y="2033849"/>
-                  </a:lnTo>
-                  <a:lnTo>
-                    <a:pt x="2662708" y="2017613"/>
-                  </a:lnTo>
-                  <a:lnTo>
-                    <a:pt x="2588948" y="2001117"/>
-                  </a:lnTo>
-                  <a:lnTo>
-                    <a:pt x="2515188" y="1984357"/>
-                  </a:lnTo>
-                  <a:lnTo>
-                    <a:pt x="2441428" y="1967329"/>
-                  </a:lnTo>
-                  <a:lnTo>
-                    <a:pt x="2367668" y="1950028"/>
-                  </a:lnTo>
-                  <a:lnTo>
-                    <a:pt x="2293908" y="1932451"/>
-                  </a:lnTo>
-                  <a:lnTo>
-                    <a:pt x="2220148" y="1914592"/>
-                  </a:lnTo>
-                  <a:lnTo>
-                    <a:pt x="2146388" y="1896447"/>
-                  </a:lnTo>
-                  <a:lnTo>
-                    <a:pt x="2072628" y="1878012"/>
-                  </a:lnTo>
-                  <a:lnTo>
-                    <a:pt x="1998868" y="1859282"/>
-                  </a:lnTo>
-                  <a:lnTo>
-                    <a:pt x="1925108" y="1840252"/>
-                  </a:lnTo>
-                  <a:lnTo>
-                    <a:pt x="1851348" y="1820917"/>
-                  </a:lnTo>
-                  <a:lnTo>
-                    <a:pt x="1777588" y="1801273"/>
-                  </a:lnTo>
-                  <a:lnTo>
-                    <a:pt x="1703828" y="1781314"/>
-                  </a:lnTo>
-                  <a:lnTo>
-                    <a:pt x="1630068" y="1761037"/>
-                  </a:lnTo>
-                  <a:lnTo>
-                    <a:pt x="1556308" y="1740434"/>
-                  </a:lnTo>
-                  <a:lnTo>
-                    <a:pt x="1482548" y="1719502"/>
-                  </a:lnTo>
-                  <a:lnTo>
-                    <a:pt x="1408788" y="1698235"/>
-                  </a:lnTo>
-                  <a:lnTo>
-                    <a:pt x="1335028" y="1676627"/>
-                  </a:lnTo>
-                  <a:lnTo>
-                    <a:pt x="1261268" y="1654674"/>
-                  </a:lnTo>
-                  <a:lnTo>
-                    <a:pt x="1187508" y="1632369"/>
-                  </a:lnTo>
-                  <a:lnTo>
-                    <a:pt x="1113747" y="1609707"/>
-                  </a:lnTo>
-                  <a:lnTo>
-                    <a:pt x="1039987" y="1586682"/>
-                  </a:lnTo>
-                  <a:lnTo>
-                    <a:pt x="966227" y="1563289"/>
-                  </a:lnTo>
-                  <a:lnTo>
-                    <a:pt x="892467" y="1539522"/>
-                  </a:lnTo>
-                  <a:lnTo>
-                    <a:pt x="818707" y="1515374"/>
-                  </a:lnTo>
-                  <a:lnTo>
-                    <a:pt x="744947" y="1490840"/>
-                  </a:lnTo>
-                  <a:lnTo>
-                    <a:pt x="671187" y="1465913"/>
-                  </a:lnTo>
-                  <a:lnTo>
-                    <a:pt x="597427" y="1440587"/>
-                  </a:lnTo>
-                  <a:lnTo>
-                    <a:pt x="523667" y="1414856"/>
-                  </a:lnTo>
-                  <a:lnTo>
-                    <a:pt x="449907" y="1388713"/>
-                  </a:lnTo>
-                  <a:lnTo>
-                    <a:pt x="376147" y="1362151"/>
-                  </a:lnTo>
-                  <a:lnTo>
-                    <a:pt x="302387" y="1335164"/>
-                  </a:lnTo>
-                  <a:lnTo>
-                    <a:pt x="228627" y="1307746"/>
-                  </a:lnTo>
-                  <a:lnTo>
-                    <a:pt x="154867" y="1279888"/>
-                  </a:lnTo>
-                  <a:lnTo>
-                    <a:pt x="81107" y="1251585"/>
-                  </a:lnTo>
-                  <a:lnTo>
-                    <a:pt x="7347" y="1222829"/>
-                  </a:lnTo>
-                  <a:lnTo>
-                    <a:pt x="0" y="1219918"/>
+                    <a:pt x="7347" y="7845"/>
+                  </a:lnTo>
+                  <a:lnTo>
+                    <a:pt x="81107" y="84523"/>
+                  </a:lnTo>
+                  <a:lnTo>
+                    <a:pt x="154867" y="159172"/>
+                  </a:lnTo>
+                  <a:lnTo>
+                    <a:pt x="228627" y="231848"/>
+                  </a:lnTo>
+                  <a:lnTo>
+                    <a:pt x="302387" y="302601"/>
+                  </a:lnTo>
+                  <a:lnTo>
+                    <a:pt x="376147" y="371484"/>
+                  </a:lnTo>
+                  <a:lnTo>
+                    <a:pt x="449907" y="438545"/>
+                  </a:lnTo>
+                  <a:lnTo>
+                    <a:pt x="523667" y="503832"/>
+                  </a:lnTo>
+                  <a:lnTo>
+                    <a:pt x="597427" y="567393"/>
+                  </a:lnTo>
+                  <a:lnTo>
+                    <a:pt x="671187" y="629273"/>
+                  </a:lnTo>
+                  <a:lnTo>
+                    <a:pt x="744947" y="689517"/>
+                  </a:lnTo>
+                  <a:lnTo>
+                    <a:pt x="818707" y="748167"/>
+                  </a:lnTo>
+                  <a:lnTo>
+                    <a:pt x="892467" y="805267"/>
+                  </a:lnTo>
+                  <a:lnTo>
+                    <a:pt x="966227" y="860856"/>
+                  </a:lnTo>
+                  <a:lnTo>
+                    <a:pt x="1039987" y="914975"/>
+                  </a:lnTo>
+                  <a:lnTo>
+                    <a:pt x="1113747" y="967664"/>
+                  </a:lnTo>
+                  <a:lnTo>
+                    <a:pt x="1187508" y="1018958"/>
+                  </a:lnTo>
+                  <a:lnTo>
+                    <a:pt x="1261268" y="1068897"/>
+                  </a:lnTo>
+                  <a:lnTo>
+                    <a:pt x="1335028" y="1117514"/>
+                  </a:lnTo>
+                  <a:lnTo>
+                    <a:pt x="1408788" y="1164846"/>
+                  </a:lnTo>
+                  <a:lnTo>
+                    <a:pt x="1482548" y="1210926"/>
+                  </a:lnTo>
+                  <a:lnTo>
+                    <a:pt x="1556308" y="1255788"/>
+                  </a:lnTo>
+                  <a:lnTo>
+                    <a:pt x="1630068" y="1299463"/>
+                  </a:lnTo>
+                  <a:lnTo>
+                    <a:pt x="1703828" y="1341984"/>
+                  </a:lnTo>
+                  <a:lnTo>
+                    <a:pt x="1777588" y="1383379"/>
+                  </a:lnTo>
+                  <a:lnTo>
+                    <a:pt x="1851348" y="1423680"/>
+                  </a:lnTo>
+                  <a:lnTo>
+                    <a:pt x="1925108" y="1462916"/>
+                  </a:lnTo>
+                  <a:lnTo>
+                    <a:pt x="1998868" y="1501113"/>
+                  </a:lnTo>
+                  <a:lnTo>
+                    <a:pt x="2072628" y="1538301"/>
+                  </a:lnTo>
+                  <a:lnTo>
+                    <a:pt x="2146388" y="1574505"/>
+                  </a:lnTo>
+                  <a:lnTo>
+                    <a:pt x="2220148" y="1609752"/>
+                  </a:lnTo>
+                  <a:lnTo>
+                    <a:pt x="2293908" y="1644066"/>
+                  </a:lnTo>
+                  <a:lnTo>
+                    <a:pt x="2367668" y="1677474"/>
+                  </a:lnTo>
+                  <a:lnTo>
+                    <a:pt x="2441428" y="1709997"/>
+                  </a:lnTo>
+                  <a:lnTo>
+                    <a:pt x="2515188" y="1741661"/>
+                  </a:lnTo>
+                  <a:lnTo>
+                    <a:pt x="2588948" y="1772487"/>
+                  </a:lnTo>
+                  <a:lnTo>
+                    <a:pt x="2662708" y="1802498"/>
+                  </a:lnTo>
+                  <a:lnTo>
+                    <a:pt x="2736468" y="1831716"/>
+                  </a:lnTo>
+                  <a:lnTo>
+                    <a:pt x="2810228" y="1860160"/>
+                  </a:lnTo>
+                  <a:lnTo>
+                    <a:pt x="2883988" y="1887853"/>
+                  </a:lnTo>
+                  <a:lnTo>
+                    <a:pt x="2957748" y="1914813"/>
+                  </a:lnTo>
+                  <a:lnTo>
+                    <a:pt x="3031508" y="1941060"/>
+                  </a:lnTo>
+                  <a:lnTo>
+                    <a:pt x="3105268" y="1966613"/>
+                  </a:lnTo>
+                  <a:lnTo>
+                    <a:pt x="3179028" y="1991490"/>
+                  </a:lnTo>
+                  <a:lnTo>
+                    <a:pt x="3252788" y="2015710"/>
+                  </a:lnTo>
+                  <a:lnTo>
+                    <a:pt x="3326548" y="2039289"/>
+                  </a:lnTo>
+                  <a:lnTo>
+                    <a:pt x="3400308" y="2062244"/>
+                  </a:lnTo>
+                  <a:lnTo>
+                    <a:pt x="3474068" y="2081855"/>
+                  </a:lnTo>
+                  <a:lnTo>
+                    <a:pt x="3547828" y="2094859"/>
+                  </a:lnTo>
+                  <a:lnTo>
+                    <a:pt x="3621588" y="2107658"/>
+                  </a:lnTo>
+                  <a:lnTo>
+                    <a:pt x="3695348" y="2120255"/>
+                  </a:lnTo>
+                  <a:lnTo>
+                    <a:pt x="3769108" y="2132654"/>
+                  </a:lnTo>
+                  <a:lnTo>
+                    <a:pt x="3842868" y="2144857"/>
+                  </a:lnTo>
+                  <a:lnTo>
+                    <a:pt x="3916628" y="2156868"/>
+                  </a:lnTo>
+                  <a:lnTo>
+                    <a:pt x="3990388" y="2168690"/>
+                  </a:lnTo>
+                  <a:lnTo>
+                    <a:pt x="4064149" y="2180326"/>
+                  </a:lnTo>
+                  <a:lnTo>
+                    <a:pt x="4137909" y="2191778"/>
+                  </a:lnTo>
+                  <a:lnTo>
+                    <a:pt x="4211669" y="2203050"/>
+                  </a:lnTo>
+                  <a:lnTo>
+                    <a:pt x="4285429" y="2214145"/>
+                  </a:lnTo>
+                  <a:lnTo>
+                    <a:pt x="4359189" y="2225064"/>
+                  </a:lnTo>
+                  <a:lnTo>
+                    <a:pt x="4432949" y="2235812"/>
+                  </a:lnTo>
+                  <a:lnTo>
+                    <a:pt x="4506709" y="2246390"/>
+                  </a:lnTo>
+                  <a:lnTo>
+                    <a:pt x="4580469" y="2256802"/>
+                  </a:lnTo>
+                  <a:lnTo>
+                    <a:pt x="4654229" y="2267050"/>
+                  </a:lnTo>
+                  <a:lnTo>
+                    <a:pt x="4727989" y="2277136"/>
+                  </a:lnTo>
+                  <a:lnTo>
+                    <a:pt x="4801749" y="2287063"/>
+                  </a:lnTo>
+                  <a:lnTo>
+                    <a:pt x="4875509" y="2296834"/>
+                  </a:lnTo>
+                  <a:lnTo>
+                    <a:pt x="4949269" y="2306451"/>
+                  </a:lnTo>
+                  <a:lnTo>
+                    <a:pt x="5023029" y="2315917"/>
+                  </a:lnTo>
+                  <a:lnTo>
+                    <a:pt x="5096789" y="2325233"/>
+                  </a:lnTo>
+                  <a:lnTo>
+                    <a:pt x="5170549" y="2334403"/>
+                  </a:lnTo>
+                  <a:lnTo>
+                    <a:pt x="5244309" y="2343428"/>
+                  </a:lnTo>
+                  <a:lnTo>
+                    <a:pt x="5318069" y="2352311"/>
+                  </a:lnTo>
+                  <a:lnTo>
+                    <a:pt x="5391829" y="2361055"/>
+                  </a:lnTo>
+                  <a:lnTo>
+                    <a:pt x="5465589" y="2369660"/>
+                  </a:lnTo>
+                  <a:lnTo>
+                    <a:pt x="5539349" y="2378130"/>
+                  </a:lnTo>
+                  <a:lnTo>
+                    <a:pt x="5613109" y="2386466"/>
+                  </a:lnTo>
+                  <a:lnTo>
+                    <a:pt x="5686869" y="2394671"/>
+                  </a:lnTo>
+                  <a:lnTo>
+                    <a:pt x="5760629" y="2402747"/>
+                  </a:lnTo>
+                  <a:lnTo>
+                    <a:pt x="5834389" y="2410696"/>
+                  </a:lnTo>
+                  <a:lnTo>
+                    <a:pt x="5908149" y="2418519"/>
+                  </a:lnTo>
+                  <a:lnTo>
+                    <a:pt x="5981909" y="2426219"/>
+                  </a:lnTo>
+                  <a:lnTo>
+                    <a:pt x="6055669" y="2433798"/>
+                  </a:lnTo>
+                  <a:lnTo>
+                    <a:pt x="6129429" y="2441258"/>
+                  </a:lnTo>
+                  <a:lnTo>
+                    <a:pt x="6203189" y="2448600"/>
+                  </a:lnTo>
+                  <a:lnTo>
+                    <a:pt x="6276949" y="2455826"/>
+                  </a:lnTo>
+                  <a:lnTo>
+                    <a:pt x="6350709" y="2462938"/>
+                  </a:lnTo>
+                  <a:lnTo>
+                    <a:pt x="6424469" y="2469939"/>
+                  </a:lnTo>
+                  <a:lnTo>
+                    <a:pt x="6498229" y="2476829"/>
+                  </a:lnTo>
+                  <a:lnTo>
+                    <a:pt x="6571989" y="2483610"/>
+                  </a:lnTo>
+                  <a:lnTo>
+                    <a:pt x="6645749" y="2490285"/>
+                  </a:lnTo>
+                  <a:lnTo>
+                    <a:pt x="6719509" y="2496855"/>
+                  </a:lnTo>
+                  <a:lnTo>
+                    <a:pt x="6793269" y="2503321"/>
+                  </a:lnTo>
+                  <a:lnTo>
+                    <a:pt x="6867029" y="2509685"/>
+                  </a:lnTo>
+                  <a:lnTo>
+                    <a:pt x="6940789" y="2515949"/>
+                  </a:lnTo>
+                  <a:lnTo>
+                    <a:pt x="7014550" y="2522115"/>
+                  </a:lnTo>
+                  <a:lnTo>
+                    <a:pt x="7088310" y="2528183"/>
+                  </a:lnTo>
+                  <a:lnTo>
+                    <a:pt x="7162070" y="2534155"/>
+                  </a:lnTo>
+                  <a:lnTo>
+                    <a:pt x="7235830" y="2540034"/>
+                  </a:lnTo>
+                  <a:lnTo>
+                    <a:pt x="7235830" y="2697605"/>
+                  </a:lnTo>
+                  <a:lnTo>
+                    <a:pt x="7162070" y="2691908"/>
+                  </a:lnTo>
+                  <a:lnTo>
+                    <a:pt x="7088310" y="2686057"/>
+                  </a:lnTo>
+                  <a:lnTo>
+                    <a:pt x="7014550" y="2680046"/>
+                  </a:lnTo>
+                  <a:lnTo>
+                    <a:pt x="6940789" y="2673873"/>
+                  </a:lnTo>
+                  <a:lnTo>
+                    <a:pt x="6867029" y="2667531"/>
+                  </a:lnTo>
+                  <a:lnTo>
+                    <a:pt x="6793269" y="2661018"/>
+                  </a:lnTo>
+                  <a:lnTo>
+                    <a:pt x="6719509" y="2654327"/>
+                  </a:lnTo>
+                  <a:lnTo>
+                    <a:pt x="6645749" y="2647455"/>
+                  </a:lnTo>
+                  <a:lnTo>
+                    <a:pt x="6571989" y="2640396"/>
+                  </a:lnTo>
+                  <a:lnTo>
+                    <a:pt x="6498229" y="2633145"/>
+                  </a:lnTo>
+                  <a:lnTo>
+                    <a:pt x="6424469" y="2625697"/>
+                  </a:lnTo>
+                  <a:lnTo>
+                    <a:pt x="6350709" y="2618047"/>
+                  </a:lnTo>
+                  <a:lnTo>
+                    <a:pt x="6276949" y="2610190"/>
+                  </a:lnTo>
+                  <a:lnTo>
+                    <a:pt x="6203189" y="2602118"/>
+                  </a:lnTo>
+                  <a:lnTo>
+                    <a:pt x="6129429" y="2593828"/>
+                  </a:lnTo>
+                  <a:lnTo>
+                    <a:pt x="6055669" y="2585312"/>
+                  </a:lnTo>
+                  <a:lnTo>
+                    <a:pt x="5981909" y="2576565"/>
+                  </a:lnTo>
+                  <a:lnTo>
+                    <a:pt x="5908149" y="2567581"/>
+                  </a:lnTo>
+                  <a:lnTo>
+                    <a:pt x="5834389" y="2558352"/>
+                  </a:lnTo>
+                  <a:lnTo>
+                    <a:pt x="5760629" y="2548873"/>
+                  </a:lnTo>
+                  <a:lnTo>
+                    <a:pt x="5686869" y="2539136"/>
+                  </a:lnTo>
+                  <a:lnTo>
+                    <a:pt x="5613109" y="2529135"/>
+                  </a:lnTo>
+                  <a:lnTo>
+                    <a:pt x="5539349" y="2518862"/>
+                  </a:lnTo>
+                  <a:lnTo>
+                    <a:pt x="5465589" y="2508310"/>
+                  </a:lnTo>
+                  <a:lnTo>
+                    <a:pt x="5391829" y="2497471"/>
+                  </a:lnTo>
+                  <a:lnTo>
+                    <a:pt x="5318069" y="2486338"/>
+                  </a:lnTo>
+                  <a:lnTo>
+                    <a:pt x="5244309" y="2474902"/>
+                  </a:lnTo>
+                  <a:lnTo>
+                    <a:pt x="5170549" y="2463156"/>
+                  </a:lnTo>
+                  <a:lnTo>
+                    <a:pt x="5096789" y="2451091"/>
+                  </a:lnTo>
+                  <a:lnTo>
+                    <a:pt x="5023029" y="2438698"/>
+                  </a:lnTo>
+                  <a:lnTo>
+                    <a:pt x="4949269" y="2425969"/>
+                  </a:lnTo>
+                  <a:lnTo>
+                    <a:pt x="4875509" y="2412893"/>
+                  </a:lnTo>
+                  <a:lnTo>
+                    <a:pt x="4801749" y="2399463"/>
+                  </a:lnTo>
+                  <a:lnTo>
+                    <a:pt x="4727989" y="2385667"/>
+                  </a:lnTo>
+                  <a:lnTo>
+                    <a:pt x="4654229" y="2371497"/>
+                  </a:lnTo>
+                  <a:lnTo>
+                    <a:pt x="4580469" y="2356942"/>
+                  </a:lnTo>
+                  <a:lnTo>
+                    <a:pt x="4506709" y="2341992"/>
+                  </a:lnTo>
+                  <a:lnTo>
+                    <a:pt x="4432949" y="2326636"/>
+                  </a:lnTo>
+                  <a:lnTo>
+                    <a:pt x="4359189" y="2310862"/>
+                  </a:lnTo>
+                  <a:lnTo>
+                    <a:pt x="4285429" y="2294660"/>
+                  </a:lnTo>
+                  <a:lnTo>
+                    <a:pt x="4211669" y="2278018"/>
+                  </a:lnTo>
+                  <a:lnTo>
+                    <a:pt x="4137909" y="2260924"/>
+                  </a:lnTo>
+                  <a:lnTo>
+                    <a:pt x="4064149" y="2243365"/>
+                  </a:lnTo>
+                  <a:lnTo>
+                    <a:pt x="3990388" y="2225330"/>
+                  </a:lnTo>
+                  <a:lnTo>
+                    <a:pt x="3916628" y="2206804"/>
+                  </a:lnTo>
+                  <a:lnTo>
+                    <a:pt x="3842868" y="2187776"/>
+                  </a:lnTo>
+                  <a:lnTo>
+                    <a:pt x="3769108" y="2168230"/>
+                  </a:lnTo>
+                  <a:lnTo>
+                    <a:pt x="3695348" y="2148154"/>
+                  </a:lnTo>
+                  <a:lnTo>
+                    <a:pt x="3621588" y="2127532"/>
+                  </a:lnTo>
+                  <a:lnTo>
+                    <a:pt x="3547828" y="2106350"/>
+                  </a:lnTo>
+                  <a:lnTo>
+                    <a:pt x="3474068" y="2084593"/>
+                  </a:lnTo>
+                  <a:lnTo>
+                    <a:pt x="3400308" y="2068644"/>
+                  </a:lnTo>
+                  <a:lnTo>
+                    <a:pt x="3326548" y="2055220"/>
+                  </a:lnTo>
+                  <a:lnTo>
+                    <a:pt x="3252788" y="2041582"/>
+                  </a:lnTo>
+                  <a:lnTo>
+                    <a:pt x="3179028" y="2027726"/>
+                  </a:lnTo>
+                  <a:lnTo>
+                    <a:pt x="3105268" y="2013648"/>
+                  </a:lnTo>
+                  <a:lnTo>
+                    <a:pt x="3031508" y="1999345"/>
+                  </a:lnTo>
+                  <a:lnTo>
+                    <a:pt x="2957748" y="1984812"/>
+                  </a:lnTo>
+                  <a:lnTo>
+                    <a:pt x="2883988" y="1970047"/>
+                  </a:lnTo>
+                  <a:lnTo>
+                    <a:pt x="2810228" y="1955046"/>
+                  </a:lnTo>
+                  <a:lnTo>
+                    <a:pt x="2736468" y="1939805"/>
+                  </a:lnTo>
+                  <a:lnTo>
+                    <a:pt x="2662708" y="1924319"/>
+                  </a:lnTo>
+                  <a:lnTo>
+                    <a:pt x="2588948" y="1908586"/>
+                  </a:lnTo>
+                  <a:lnTo>
+                    <a:pt x="2515188" y="1892601"/>
+                  </a:lnTo>
+                  <a:lnTo>
+                    <a:pt x="2441428" y="1876360"/>
+                  </a:lnTo>
+                  <a:lnTo>
+                    <a:pt x="2367668" y="1859860"/>
+                  </a:lnTo>
+                  <a:lnTo>
+                    <a:pt x="2293908" y="1843095"/>
+                  </a:lnTo>
+                  <a:lnTo>
+                    <a:pt x="2220148" y="1826062"/>
+                  </a:lnTo>
+                  <a:lnTo>
+                    <a:pt x="2146388" y="1808756"/>
+                  </a:lnTo>
+                  <a:lnTo>
+                    <a:pt x="2072628" y="1791173"/>
+                  </a:lnTo>
+                  <a:lnTo>
+                    <a:pt x="1998868" y="1773309"/>
+                  </a:lnTo>
+                  <a:lnTo>
+                    <a:pt x="1925108" y="1755159"/>
+                  </a:lnTo>
+                  <a:lnTo>
+                    <a:pt x="1851348" y="1736718"/>
+                  </a:lnTo>
+                  <a:lnTo>
+                    <a:pt x="1777588" y="1717983"/>
+                  </a:lnTo>
+                  <a:lnTo>
+                    <a:pt x="1703828" y="1698947"/>
+                  </a:lnTo>
+                  <a:lnTo>
+                    <a:pt x="1630068" y="1679607"/>
+                  </a:lnTo>
+                  <a:lnTo>
+                    <a:pt x="1556308" y="1659957"/>
+                  </a:lnTo>
+                  <a:lnTo>
+                    <a:pt x="1482548" y="1639993"/>
+                  </a:lnTo>
+                  <a:lnTo>
+                    <a:pt x="1408788" y="1619709"/>
+                  </a:lnTo>
+                  <a:lnTo>
+                    <a:pt x="1335028" y="1599100"/>
+                  </a:lnTo>
+                  <a:lnTo>
+                    <a:pt x="1261268" y="1578162"/>
+                  </a:lnTo>
+                  <a:lnTo>
+                    <a:pt x="1187508" y="1556889"/>
+                  </a:lnTo>
+                  <a:lnTo>
+                    <a:pt x="1113747" y="1535275"/>
+                  </a:lnTo>
+                  <a:lnTo>
+                    <a:pt x="1039987" y="1513315"/>
+                  </a:lnTo>
+                  <a:lnTo>
+                    <a:pt x="966227" y="1491004"/>
+                  </a:lnTo>
+                  <a:lnTo>
+                    <a:pt x="892467" y="1468335"/>
+                  </a:lnTo>
+                  <a:lnTo>
+                    <a:pt x="818707" y="1445304"/>
+                  </a:lnTo>
+                  <a:lnTo>
+                    <a:pt x="744947" y="1421904"/>
+                  </a:lnTo>
+                  <a:lnTo>
+                    <a:pt x="671187" y="1398130"/>
+                  </a:lnTo>
+                  <a:lnTo>
+                    <a:pt x="597427" y="1373975"/>
+                  </a:lnTo>
+                  <a:lnTo>
+                    <a:pt x="523667" y="1349433"/>
+                  </a:lnTo>
+                  <a:lnTo>
+                    <a:pt x="449907" y="1324499"/>
+                  </a:lnTo>
+                  <a:lnTo>
+                    <a:pt x="376147" y="1299166"/>
+                  </a:lnTo>
+                  <a:lnTo>
+                    <a:pt x="302387" y="1273427"/>
+                  </a:lnTo>
+                  <a:lnTo>
+                    <a:pt x="228627" y="1247276"/>
+                  </a:lnTo>
+                  <a:lnTo>
+                    <a:pt x="154867" y="1220707"/>
+                  </a:lnTo>
+                  <a:lnTo>
+                    <a:pt x="81107" y="1193712"/>
+                  </a:lnTo>
+                  <a:lnTo>
+                    <a:pt x="7347" y="1166285"/>
+                  </a:lnTo>
+                  <a:lnTo>
+                    <a:pt x="0" y="1163510"/>
                   </a:lnTo>
                   <a:close/>
                 </a:path>
@@ -3633,312 +3633,312 @@
           </p:nvSpPr>
           <p:spPr>
             <a:xfrm>
-              <a:off x="817517" y="2500931"/>
-              <a:ext cx="7235830" cy="2663178"/>
+              <a:off x="817517" y="2649925"/>
+              <a:ext cx="7235830" cy="2540034"/>
             </a:xfrm>
             <a:custGeom>
               <a:avLst/>
               <a:pathLst>
-                <a:path w="7235830" h="2663178">
+                <a:path w="7235830" h="2540034">
                   <a:moveTo>
                     <a:pt x="0" y="0"/>
                   </a:moveTo>
                   <a:lnTo>
-                    <a:pt x="7347" y="8226"/>
-                  </a:lnTo>
-                  <a:lnTo>
-                    <a:pt x="81107" y="88620"/>
-                  </a:lnTo>
-                  <a:lnTo>
-                    <a:pt x="154867" y="166889"/>
-                  </a:lnTo>
-                  <a:lnTo>
-                    <a:pt x="228627" y="243088"/>
-                  </a:lnTo>
-                  <a:lnTo>
-                    <a:pt x="302387" y="317272"/>
-                  </a:lnTo>
-                  <a:lnTo>
-                    <a:pt x="376147" y="389494"/>
-                  </a:lnTo>
-                  <a:lnTo>
-                    <a:pt x="449907" y="459806"/>
-                  </a:lnTo>
-                  <a:lnTo>
-                    <a:pt x="523667" y="528259"/>
-                  </a:lnTo>
-                  <a:lnTo>
-                    <a:pt x="597427" y="594901"/>
-                  </a:lnTo>
-                  <a:lnTo>
-                    <a:pt x="671187" y="659781"/>
-                  </a:lnTo>
-                  <a:lnTo>
-                    <a:pt x="744947" y="722946"/>
-                  </a:lnTo>
-                  <a:lnTo>
-                    <a:pt x="818707" y="784439"/>
-                  </a:lnTo>
-                  <a:lnTo>
-                    <a:pt x="892467" y="844307"/>
-                  </a:lnTo>
-                  <a:lnTo>
-                    <a:pt x="966227" y="902592"/>
-                  </a:lnTo>
-                  <a:lnTo>
-                    <a:pt x="1039987" y="959335"/>
-                  </a:lnTo>
-                  <a:lnTo>
-                    <a:pt x="1113747" y="1014577"/>
-                  </a:lnTo>
-                  <a:lnTo>
-                    <a:pt x="1187508" y="1068359"/>
-                  </a:lnTo>
-                  <a:lnTo>
-                    <a:pt x="1261268" y="1120718"/>
-                  </a:lnTo>
-                  <a:lnTo>
-                    <a:pt x="1335028" y="1171693"/>
-                  </a:lnTo>
-                  <a:lnTo>
-                    <a:pt x="1408788" y="1221320"/>
-                  </a:lnTo>
-                  <a:lnTo>
-                    <a:pt x="1482548" y="1269634"/>
-                  </a:lnTo>
-                  <a:lnTo>
-                    <a:pt x="1556308" y="1316670"/>
-                  </a:lnTo>
-                  <a:lnTo>
-                    <a:pt x="1630068" y="1362463"/>
-                  </a:lnTo>
-                  <a:lnTo>
-                    <a:pt x="1703828" y="1407045"/>
-                  </a:lnTo>
-                  <a:lnTo>
-                    <a:pt x="1777588" y="1450448"/>
-                  </a:lnTo>
-                  <a:lnTo>
-                    <a:pt x="1851348" y="1492702"/>
-                  </a:lnTo>
-                  <a:lnTo>
-                    <a:pt x="1925108" y="1533840"/>
-                  </a:lnTo>
-                  <a:lnTo>
-                    <a:pt x="1998868" y="1573890"/>
-                  </a:lnTo>
-                  <a:lnTo>
-                    <a:pt x="2072628" y="1612880"/>
-                  </a:lnTo>
-                  <a:lnTo>
-                    <a:pt x="2146388" y="1650839"/>
-                  </a:lnTo>
-                  <a:lnTo>
-                    <a:pt x="2220148" y="1687795"/>
-                  </a:lnTo>
-                  <a:lnTo>
-                    <a:pt x="2293908" y="1723773"/>
-                  </a:lnTo>
-                  <a:lnTo>
-                    <a:pt x="2367668" y="1758800"/>
-                  </a:lnTo>
-                  <a:lnTo>
-                    <a:pt x="2441428" y="1792900"/>
-                  </a:lnTo>
-                  <a:lnTo>
-                    <a:pt x="2515188" y="1826099"/>
-                  </a:lnTo>
-                  <a:lnTo>
-                    <a:pt x="2588948" y="1858420"/>
-                  </a:lnTo>
-                  <a:lnTo>
-                    <a:pt x="2662708" y="1889886"/>
-                  </a:lnTo>
-                  <a:lnTo>
-                    <a:pt x="2736468" y="1920520"/>
-                  </a:lnTo>
-                  <a:lnTo>
-                    <a:pt x="2810228" y="1950343"/>
-                  </a:lnTo>
-                  <a:lnTo>
-                    <a:pt x="2883988" y="1979378"/>
-                  </a:lnTo>
-                  <a:lnTo>
-                    <a:pt x="2957748" y="2007646"/>
-                  </a:lnTo>
-                  <a:lnTo>
-                    <a:pt x="3031508" y="2035165"/>
-                  </a:lnTo>
-                  <a:lnTo>
-                    <a:pt x="3105268" y="2061957"/>
-                  </a:lnTo>
-                  <a:lnTo>
-                    <a:pt x="3179028" y="2088041"/>
-                  </a:lnTo>
-                  <a:lnTo>
-                    <a:pt x="3252788" y="2113434"/>
-                  </a:lnTo>
-                  <a:lnTo>
-                    <a:pt x="3326548" y="2138156"/>
-                  </a:lnTo>
-                  <a:lnTo>
-                    <a:pt x="3400308" y="2162225"/>
-                  </a:lnTo>
-                  <a:lnTo>
-                    <a:pt x="3474068" y="2182787"/>
-                  </a:lnTo>
-                  <a:lnTo>
-                    <a:pt x="3547828" y="2196421"/>
-                  </a:lnTo>
-                  <a:lnTo>
-                    <a:pt x="3621588" y="2209840"/>
-                  </a:lnTo>
-                  <a:lnTo>
-                    <a:pt x="3695348" y="2223048"/>
-                  </a:lnTo>
-                  <a:lnTo>
-                    <a:pt x="3769108" y="2236048"/>
-                  </a:lnTo>
-                  <a:lnTo>
-                    <a:pt x="3842868" y="2248843"/>
-                  </a:lnTo>
-                  <a:lnTo>
-                    <a:pt x="3916628" y="2261436"/>
-                  </a:lnTo>
-                  <a:lnTo>
-                    <a:pt x="3990388" y="2273831"/>
-                  </a:lnTo>
-                  <a:lnTo>
-                    <a:pt x="4064149" y="2286031"/>
-                  </a:lnTo>
-                  <a:lnTo>
-                    <a:pt x="4137909" y="2298039"/>
-                  </a:lnTo>
-                  <a:lnTo>
-                    <a:pt x="4211669" y="2309857"/>
-                  </a:lnTo>
-                  <a:lnTo>
-                    <a:pt x="4285429" y="2321490"/>
-                  </a:lnTo>
-                  <a:lnTo>
-                    <a:pt x="4359189" y="2332939"/>
-                  </a:lnTo>
-                  <a:lnTo>
-                    <a:pt x="4432949" y="2344207"/>
-                  </a:lnTo>
-                  <a:lnTo>
-                    <a:pt x="4506709" y="2355299"/>
-                  </a:lnTo>
-                  <a:lnTo>
-                    <a:pt x="4580469" y="2366215"/>
-                  </a:lnTo>
-                  <a:lnTo>
-                    <a:pt x="4654229" y="2376960"/>
-                  </a:lnTo>
-                  <a:lnTo>
-                    <a:pt x="4727989" y="2387535"/>
-                  </a:lnTo>
-                  <a:lnTo>
-                    <a:pt x="4801749" y="2397943"/>
-                  </a:lnTo>
-                  <a:lnTo>
-                    <a:pt x="4875509" y="2408188"/>
-                  </a:lnTo>
-                  <a:lnTo>
-                    <a:pt x="4949269" y="2418271"/>
-                  </a:lnTo>
-                  <a:lnTo>
-                    <a:pt x="5023029" y="2428196"/>
-                  </a:lnTo>
-                  <a:lnTo>
-                    <a:pt x="5096789" y="2437964"/>
-                  </a:lnTo>
-                  <a:lnTo>
-                    <a:pt x="5170549" y="2447578"/>
-                  </a:lnTo>
-                  <a:lnTo>
-                    <a:pt x="5244309" y="2457041"/>
-                  </a:lnTo>
-                  <a:lnTo>
-                    <a:pt x="5318069" y="2466355"/>
-                  </a:lnTo>
-                  <a:lnTo>
-                    <a:pt x="5391829" y="2475522"/>
-                  </a:lnTo>
-                  <a:lnTo>
-                    <a:pt x="5465589" y="2484544"/>
-                  </a:lnTo>
-                  <a:lnTo>
-                    <a:pt x="5539349" y="2493425"/>
-                  </a:lnTo>
-                  <a:lnTo>
-                    <a:pt x="5613109" y="2502165"/>
-                  </a:lnTo>
-                  <a:lnTo>
-                    <a:pt x="5686869" y="2510768"/>
-                  </a:lnTo>
-                  <a:lnTo>
-                    <a:pt x="5760629" y="2519236"/>
-                  </a:lnTo>
-                  <a:lnTo>
-                    <a:pt x="5834389" y="2527570"/>
-                  </a:lnTo>
-                  <a:lnTo>
-                    <a:pt x="5908149" y="2535772"/>
-                  </a:lnTo>
-                  <a:lnTo>
-                    <a:pt x="5981909" y="2543846"/>
-                  </a:lnTo>
-                  <a:lnTo>
-                    <a:pt x="6055669" y="2551792"/>
-                  </a:lnTo>
-                  <a:lnTo>
-                    <a:pt x="6129429" y="2559613"/>
-                  </a:lnTo>
-                  <a:lnTo>
-                    <a:pt x="6203189" y="2567311"/>
-                  </a:lnTo>
-                  <a:lnTo>
-                    <a:pt x="6276949" y="2574888"/>
-                  </a:lnTo>
-                  <a:lnTo>
-                    <a:pt x="6350709" y="2582345"/>
-                  </a:lnTo>
-                  <a:lnTo>
-                    <a:pt x="6424469" y="2589685"/>
-                  </a:lnTo>
-                  <a:lnTo>
-                    <a:pt x="6498229" y="2596909"/>
-                  </a:lnTo>
-                  <a:lnTo>
-                    <a:pt x="6571989" y="2604019"/>
-                  </a:lnTo>
-                  <a:lnTo>
-                    <a:pt x="6645749" y="2611018"/>
-                  </a:lnTo>
-                  <a:lnTo>
-                    <a:pt x="6719509" y="2617906"/>
-                  </a:lnTo>
-                  <a:lnTo>
-                    <a:pt x="6793269" y="2624685"/>
-                  </a:lnTo>
-                  <a:lnTo>
-                    <a:pt x="6867029" y="2631358"/>
-                  </a:lnTo>
-                  <a:lnTo>
-                    <a:pt x="6940789" y="2637926"/>
-                  </a:lnTo>
-                  <a:lnTo>
-                    <a:pt x="7014550" y="2644390"/>
-                  </a:lnTo>
-                  <a:lnTo>
-                    <a:pt x="7088310" y="2650753"/>
-                  </a:lnTo>
-                  <a:lnTo>
-                    <a:pt x="7162070" y="2657015"/>
-                  </a:lnTo>
-                  <a:lnTo>
-                    <a:pt x="7235830" y="2663178"/>
+                    <a:pt x="7347" y="7845"/>
+                  </a:lnTo>
+                  <a:lnTo>
+                    <a:pt x="81107" y="84523"/>
+                  </a:lnTo>
+                  <a:lnTo>
+                    <a:pt x="154867" y="159172"/>
+                  </a:lnTo>
+                  <a:lnTo>
+                    <a:pt x="228627" y="231848"/>
+                  </a:lnTo>
+                  <a:lnTo>
+                    <a:pt x="302387" y="302601"/>
+                  </a:lnTo>
+                  <a:lnTo>
+                    <a:pt x="376147" y="371484"/>
+                  </a:lnTo>
+                  <a:lnTo>
+                    <a:pt x="449907" y="438545"/>
+                  </a:lnTo>
+                  <a:lnTo>
+                    <a:pt x="523667" y="503832"/>
+                  </a:lnTo>
+                  <a:lnTo>
+                    <a:pt x="597427" y="567393"/>
+                  </a:lnTo>
+                  <a:lnTo>
+                    <a:pt x="671187" y="629273"/>
+                  </a:lnTo>
+                  <a:lnTo>
+                    <a:pt x="744947" y="689517"/>
+                  </a:lnTo>
+                  <a:lnTo>
+                    <a:pt x="818707" y="748167"/>
+                  </a:lnTo>
+                  <a:lnTo>
+                    <a:pt x="892467" y="805267"/>
+                  </a:lnTo>
+                  <a:lnTo>
+                    <a:pt x="966227" y="860856"/>
+                  </a:lnTo>
+                  <a:lnTo>
+                    <a:pt x="1039987" y="914975"/>
+                  </a:lnTo>
+                  <a:lnTo>
+                    <a:pt x="1113747" y="967664"/>
+                  </a:lnTo>
+                  <a:lnTo>
+                    <a:pt x="1187508" y="1018958"/>
+                  </a:lnTo>
+                  <a:lnTo>
+                    <a:pt x="1261268" y="1068897"/>
+                  </a:lnTo>
+                  <a:lnTo>
+                    <a:pt x="1335028" y="1117514"/>
+                  </a:lnTo>
+                  <a:lnTo>
+                    <a:pt x="1408788" y="1164846"/>
+                  </a:lnTo>
+                  <a:lnTo>
+                    <a:pt x="1482548" y="1210926"/>
+                  </a:lnTo>
+                  <a:lnTo>
+                    <a:pt x="1556308" y="1255788"/>
+                  </a:lnTo>
+                  <a:lnTo>
+                    <a:pt x="1630068" y="1299463"/>
+                  </a:lnTo>
+                  <a:lnTo>
+                    <a:pt x="1703828" y="1341984"/>
+                  </a:lnTo>
+                  <a:lnTo>
+                    <a:pt x="1777588" y="1383379"/>
+                  </a:lnTo>
+                  <a:lnTo>
+                    <a:pt x="1851348" y="1423680"/>
+                  </a:lnTo>
+                  <a:lnTo>
+                    <a:pt x="1925108" y="1462916"/>
+                  </a:lnTo>
+                  <a:lnTo>
+                    <a:pt x="1998868" y="1501113"/>
+                  </a:lnTo>
+                  <a:lnTo>
+                    <a:pt x="2072628" y="1538301"/>
+                  </a:lnTo>
+                  <a:lnTo>
+                    <a:pt x="2146388" y="1574505"/>
+                  </a:lnTo>
+                  <a:lnTo>
+                    <a:pt x="2220148" y="1609752"/>
+                  </a:lnTo>
+                  <a:lnTo>
+                    <a:pt x="2293908" y="1644066"/>
+                  </a:lnTo>
+                  <a:lnTo>
+                    <a:pt x="2367668" y="1677474"/>
+                  </a:lnTo>
+                  <a:lnTo>
+                    <a:pt x="2441428" y="1709997"/>
+                  </a:lnTo>
+                  <a:lnTo>
+                    <a:pt x="2515188" y="1741661"/>
+                  </a:lnTo>
+                  <a:lnTo>
+                    <a:pt x="2588948" y="1772487"/>
+                  </a:lnTo>
+                  <a:lnTo>
+                    <a:pt x="2662708" y="1802498"/>
+                  </a:lnTo>
+                  <a:lnTo>
+                    <a:pt x="2736468" y="1831716"/>
+                  </a:lnTo>
+                  <a:lnTo>
+                    <a:pt x="2810228" y="1860160"/>
+                  </a:lnTo>
+                  <a:lnTo>
+                    <a:pt x="2883988" y="1887853"/>
+                  </a:lnTo>
+                  <a:lnTo>
+                    <a:pt x="2957748" y="1914813"/>
+                  </a:lnTo>
+                  <a:lnTo>
+                    <a:pt x="3031508" y="1941060"/>
+                  </a:lnTo>
+                  <a:lnTo>
+                    <a:pt x="3105268" y="1966613"/>
+                  </a:lnTo>
+                  <a:lnTo>
+                    <a:pt x="3179028" y="1991490"/>
+                  </a:lnTo>
+                  <a:lnTo>
+                    <a:pt x="3252788" y="2015710"/>
+                  </a:lnTo>
+                  <a:lnTo>
+                    <a:pt x="3326548" y="2039289"/>
+                  </a:lnTo>
+                  <a:lnTo>
+                    <a:pt x="3400308" y="2062244"/>
+                  </a:lnTo>
+                  <a:lnTo>
+                    <a:pt x="3474068" y="2081855"/>
+                  </a:lnTo>
+                  <a:lnTo>
+                    <a:pt x="3547828" y="2094859"/>
+                  </a:lnTo>
+                  <a:lnTo>
+                    <a:pt x="3621588" y="2107658"/>
+                  </a:lnTo>
+                  <a:lnTo>
+                    <a:pt x="3695348" y="2120255"/>
+                  </a:lnTo>
+                  <a:lnTo>
+                    <a:pt x="3769108" y="2132654"/>
+                  </a:lnTo>
+                  <a:lnTo>
+                    <a:pt x="3842868" y="2144857"/>
+                  </a:lnTo>
+                  <a:lnTo>
+                    <a:pt x="3916628" y="2156868"/>
+                  </a:lnTo>
+                  <a:lnTo>
+                    <a:pt x="3990388" y="2168690"/>
+                  </a:lnTo>
+                  <a:lnTo>
+                    <a:pt x="4064149" y="2180326"/>
+                  </a:lnTo>
+                  <a:lnTo>
+                    <a:pt x="4137909" y="2191778"/>
+                  </a:lnTo>
+                  <a:lnTo>
+                    <a:pt x="4211669" y="2203050"/>
+                  </a:lnTo>
+                  <a:lnTo>
+                    <a:pt x="4285429" y="2214145"/>
+                  </a:lnTo>
+                  <a:lnTo>
+                    <a:pt x="4359189" y="2225064"/>
+                  </a:lnTo>
+                  <a:lnTo>
+                    <a:pt x="4432949" y="2235812"/>
+                  </a:lnTo>
+                  <a:lnTo>
+                    <a:pt x="4506709" y="2246390"/>
+                  </a:lnTo>
+                  <a:lnTo>
+                    <a:pt x="4580469" y="2256802"/>
+                  </a:lnTo>
+                  <a:lnTo>
+                    <a:pt x="4654229" y="2267050"/>
+                  </a:lnTo>
+                  <a:lnTo>
+                    <a:pt x="4727989" y="2277136"/>
+                  </a:lnTo>
+                  <a:lnTo>
+                    <a:pt x="4801749" y="2287063"/>
+                  </a:lnTo>
+                  <a:lnTo>
+                    <a:pt x="4875509" y="2296834"/>
+                  </a:lnTo>
+                  <a:lnTo>
+                    <a:pt x="4949269" y="2306451"/>
+                  </a:lnTo>
+                  <a:lnTo>
+                    <a:pt x="5023029" y="2315917"/>
+                  </a:lnTo>
+                  <a:lnTo>
+                    <a:pt x="5096789" y="2325233"/>
+                  </a:lnTo>
+                  <a:lnTo>
+                    <a:pt x="5170549" y="2334403"/>
+                  </a:lnTo>
+                  <a:lnTo>
+                    <a:pt x="5244309" y="2343428"/>
+                  </a:lnTo>
+                  <a:lnTo>
+                    <a:pt x="5318069" y="2352311"/>
+                  </a:lnTo>
+                  <a:lnTo>
+                    <a:pt x="5391829" y="2361055"/>
+                  </a:lnTo>
+                  <a:lnTo>
+                    <a:pt x="5465589" y="2369660"/>
+                  </a:lnTo>
+                  <a:lnTo>
+                    <a:pt x="5539349" y="2378130"/>
+                  </a:lnTo>
+                  <a:lnTo>
+                    <a:pt x="5613109" y="2386466"/>
+                  </a:lnTo>
+                  <a:lnTo>
+                    <a:pt x="5686869" y="2394671"/>
+                  </a:lnTo>
+                  <a:lnTo>
+                    <a:pt x="5760629" y="2402747"/>
+                  </a:lnTo>
+                  <a:lnTo>
+                    <a:pt x="5834389" y="2410696"/>
+                  </a:lnTo>
+                  <a:lnTo>
+                    <a:pt x="5908149" y="2418519"/>
+                  </a:lnTo>
+                  <a:lnTo>
+                    <a:pt x="5981909" y="2426219"/>
+                  </a:lnTo>
+                  <a:lnTo>
+                    <a:pt x="6055669" y="2433798"/>
+                  </a:lnTo>
+                  <a:lnTo>
+                    <a:pt x="6129429" y="2441258"/>
+                  </a:lnTo>
+                  <a:lnTo>
+                    <a:pt x="6203189" y="2448600"/>
+                  </a:lnTo>
+                  <a:lnTo>
+                    <a:pt x="6276949" y="2455826"/>
+                  </a:lnTo>
+                  <a:lnTo>
+                    <a:pt x="6350709" y="2462938"/>
+                  </a:lnTo>
+                  <a:lnTo>
+                    <a:pt x="6424469" y="2469939"/>
+                  </a:lnTo>
+                  <a:lnTo>
+                    <a:pt x="6498229" y="2476829"/>
+                  </a:lnTo>
+                  <a:lnTo>
+                    <a:pt x="6571989" y="2483610"/>
+                  </a:lnTo>
+                  <a:lnTo>
+                    <a:pt x="6645749" y="2490285"/>
+                  </a:lnTo>
+                  <a:lnTo>
+                    <a:pt x="6719509" y="2496855"/>
+                  </a:lnTo>
+                  <a:lnTo>
+                    <a:pt x="6793269" y="2503321"/>
+                  </a:lnTo>
+                  <a:lnTo>
+                    <a:pt x="6867029" y="2509685"/>
+                  </a:lnTo>
+                  <a:lnTo>
+                    <a:pt x="6940789" y="2515949"/>
+                  </a:lnTo>
+                  <a:lnTo>
+                    <a:pt x="7014550" y="2522115"/>
+                  </a:lnTo>
+                  <a:lnTo>
+                    <a:pt x="7088310" y="2528183"/>
+                  </a:lnTo>
+                  <a:lnTo>
+                    <a:pt x="7162070" y="2534155"/>
+                  </a:lnTo>
+                  <a:lnTo>
+                    <a:pt x="7235830" y="2540034"/>
                   </a:lnTo>
                 </a:path>
               </a:pathLst>
@@ -3958,309 +3958,309 @@
           </p:nvSpPr>
           <p:spPr>
             <a:xfrm>
-              <a:off x="817517" y="3720850"/>
-              <a:ext cx="7235830" cy="1608470"/>
+              <a:off x="817517" y="3813435"/>
+              <a:ext cx="7235830" cy="1534095"/>
             </a:xfrm>
             <a:custGeom>
               <a:avLst/>
               <a:pathLst>
-                <a:path w="7235830" h="1608470">
+                <a:path w="7235830" h="1534095">
                   <a:moveTo>
-                    <a:pt x="7235830" y="1608470"/>
+                    <a:pt x="7235830" y="1534095"/>
                   </a:moveTo>
                   <a:lnTo>
-                    <a:pt x="7162070" y="1602497"/>
-                  </a:lnTo>
-                  <a:lnTo>
-                    <a:pt x="7088310" y="1596362"/>
-                  </a:lnTo>
-                  <a:lnTo>
-                    <a:pt x="7014550" y="1590060"/>
-                  </a:lnTo>
-                  <a:lnTo>
-                    <a:pt x="6940789" y="1583587"/>
-                  </a:lnTo>
-                  <a:lnTo>
-                    <a:pt x="6867029" y="1576938"/>
-                  </a:lnTo>
-                  <a:lnTo>
-                    <a:pt x="6793269" y="1570109"/>
-                  </a:lnTo>
-                  <a:lnTo>
-                    <a:pt x="6719509" y="1563094"/>
-                  </a:lnTo>
-                  <a:lnTo>
-                    <a:pt x="6645749" y="1555888"/>
-                  </a:lnTo>
-                  <a:lnTo>
-                    <a:pt x="6571989" y="1548487"/>
-                  </a:lnTo>
-                  <a:lnTo>
-                    <a:pt x="6498229" y="1540885"/>
-                  </a:lnTo>
-                  <a:lnTo>
-                    <a:pt x="6424469" y="1533076"/>
-                  </a:lnTo>
-                  <a:lnTo>
-                    <a:pt x="6350709" y="1525055"/>
-                  </a:lnTo>
-                  <a:lnTo>
-                    <a:pt x="6276949" y="1516817"/>
-                  </a:lnTo>
-                  <a:lnTo>
-                    <a:pt x="6203189" y="1508354"/>
-                  </a:lnTo>
-                  <a:lnTo>
-                    <a:pt x="6129429" y="1499662"/>
-                  </a:lnTo>
-                  <a:lnTo>
-                    <a:pt x="6055669" y="1490733"/>
-                  </a:lnTo>
-                  <a:lnTo>
-                    <a:pt x="5981909" y="1481562"/>
-                  </a:lnTo>
-                  <a:lnTo>
-                    <a:pt x="5908149" y="1472142"/>
-                  </a:lnTo>
-                  <a:lnTo>
-                    <a:pt x="5834389" y="1462466"/>
-                  </a:lnTo>
-                  <a:lnTo>
-                    <a:pt x="5760629" y="1452527"/>
-                  </a:lnTo>
-                  <a:lnTo>
-                    <a:pt x="5686869" y="1442318"/>
-                  </a:lnTo>
-                  <a:lnTo>
-                    <a:pt x="5613109" y="1431832"/>
-                  </a:lnTo>
-                  <a:lnTo>
-                    <a:pt x="5539349" y="1421061"/>
-                  </a:lnTo>
-                  <a:lnTo>
-                    <a:pt x="5465589" y="1409997"/>
-                  </a:lnTo>
-                  <a:lnTo>
-                    <a:pt x="5391829" y="1398633"/>
-                  </a:lnTo>
-                  <a:lnTo>
-                    <a:pt x="5318069" y="1386960"/>
-                  </a:lnTo>
-                  <a:lnTo>
-                    <a:pt x="5244309" y="1374970"/>
-                  </a:lnTo>
-                  <a:lnTo>
-                    <a:pt x="5170549" y="1362655"/>
-                  </a:lnTo>
-                  <a:lnTo>
-                    <a:pt x="5096789" y="1350005"/>
-                  </a:lnTo>
-                  <a:lnTo>
-                    <a:pt x="5023029" y="1337011"/>
-                  </a:lnTo>
-                  <a:lnTo>
-                    <a:pt x="4949269" y="1323664"/>
-                  </a:lnTo>
-                  <a:lnTo>
-                    <a:pt x="4875509" y="1309955"/>
-                  </a:lnTo>
-                  <a:lnTo>
-                    <a:pt x="4801749" y="1295873"/>
-                  </a:lnTo>
-                  <a:lnTo>
-                    <a:pt x="4727989" y="1281409"/>
-                  </a:lnTo>
-                  <a:lnTo>
-                    <a:pt x="4654229" y="1266552"/>
-                  </a:lnTo>
-                  <a:lnTo>
-                    <a:pt x="4580469" y="1251292"/>
-                  </a:lnTo>
-                  <a:lnTo>
-                    <a:pt x="4506709" y="1235616"/>
-                  </a:lnTo>
-                  <a:lnTo>
-                    <a:pt x="4432949" y="1219515"/>
-                  </a:lnTo>
-                  <a:lnTo>
-                    <a:pt x="4359189" y="1202977"/>
-                  </a:lnTo>
-                  <a:lnTo>
-                    <a:pt x="4285429" y="1185990"/>
-                  </a:lnTo>
-                  <a:lnTo>
-                    <a:pt x="4211669" y="1168541"/>
-                  </a:lnTo>
-                  <a:lnTo>
-                    <a:pt x="4137909" y="1150618"/>
-                  </a:lnTo>
-                  <a:lnTo>
-                    <a:pt x="4064149" y="1132208"/>
-                  </a:lnTo>
-                  <a:lnTo>
-                    <a:pt x="3990388" y="1113298"/>
-                  </a:lnTo>
-                  <a:lnTo>
-                    <a:pt x="3916628" y="1093874"/>
-                  </a:lnTo>
-                  <a:lnTo>
-                    <a:pt x="3842868" y="1073923"/>
-                  </a:lnTo>
-                  <a:lnTo>
-                    <a:pt x="3769108" y="1053430"/>
-                  </a:lnTo>
-                  <a:lnTo>
-                    <a:pt x="3695348" y="1032380"/>
-                  </a:lnTo>
-                  <a:lnTo>
-                    <a:pt x="3621588" y="1010759"/>
-                  </a:lnTo>
-                  <a:lnTo>
-                    <a:pt x="3547828" y="988550"/>
-                  </a:lnTo>
-                  <a:lnTo>
-                    <a:pt x="3474068" y="965738"/>
-                  </a:lnTo>
-                  <a:lnTo>
-                    <a:pt x="3400308" y="949016"/>
-                  </a:lnTo>
-                  <a:lnTo>
-                    <a:pt x="3326548" y="934942"/>
-                  </a:lnTo>
-                  <a:lnTo>
-                    <a:pt x="3252788" y="920642"/>
-                  </a:lnTo>
-                  <a:lnTo>
-                    <a:pt x="3179028" y="906114"/>
-                  </a:lnTo>
-                  <a:lnTo>
-                    <a:pt x="3105268" y="891354"/>
-                  </a:lnTo>
-                  <a:lnTo>
-                    <a:pt x="3031508" y="876357"/>
-                  </a:lnTo>
-                  <a:lnTo>
-                    <a:pt x="2957748" y="861120"/>
-                  </a:lnTo>
-                  <a:lnTo>
-                    <a:pt x="2883988" y="845639"/>
-                  </a:lnTo>
-                  <a:lnTo>
-                    <a:pt x="2810228" y="829911"/>
-                  </a:lnTo>
-                  <a:lnTo>
-                    <a:pt x="2736468" y="813930"/>
-                  </a:lnTo>
-                  <a:lnTo>
-                    <a:pt x="2662708" y="797694"/>
-                  </a:lnTo>
-                  <a:lnTo>
-                    <a:pt x="2588948" y="781198"/>
-                  </a:lnTo>
-                  <a:lnTo>
-                    <a:pt x="2515188" y="764439"/>
-                  </a:lnTo>
-                  <a:lnTo>
-                    <a:pt x="2441428" y="747410"/>
-                  </a:lnTo>
-                  <a:lnTo>
-                    <a:pt x="2367668" y="730110"/>
-                  </a:lnTo>
-                  <a:lnTo>
-                    <a:pt x="2293908" y="712532"/>
-                  </a:lnTo>
-                  <a:lnTo>
-                    <a:pt x="2220148" y="694673"/>
-                  </a:lnTo>
-                  <a:lnTo>
-                    <a:pt x="2146388" y="676528"/>
-                  </a:lnTo>
-                  <a:lnTo>
-                    <a:pt x="2072628" y="658093"/>
-                  </a:lnTo>
-                  <a:lnTo>
-                    <a:pt x="1998868" y="639363"/>
-                  </a:lnTo>
-                  <a:lnTo>
-                    <a:pt x="1925108" y="620333"/>
-                  </a:lnTo>
-                  <a:lnTo>
-                    <a:pt x="1851348" y="600998"/>
-                  </a:lnTo>
-                  <a:lnTo>
-                    <a:pt x="1777588" y="581354"/>
-                  </a:lnTo>
-                  <a:lnTo>
-                    <a:pt x="1703828" y="561396"/>
-                  </a:lnTo>
-                  <a:lnTo>
-                    <a:pt x="1630068" y="541118"/>
-                  </a:lnTo>
-                  <a:lnTo>
-                    <a:pt x="1556308" y="520515"/>
-                  </a:lnTo>
-                  <a:lnTo>
-                    <a:pt x="1482548" y="499583"/>
-                  </a:lnTo>
-                  <a:lnTo>
-                    <a:pt x="1408788" y="478316"/>
-                  </a:lnTo>
-                  <a:lnTo>
-                    <a:pt x="1335028" y="456708"/>
-                  </a:lnTo>
-                  <a:lnTo>
-                    <a:pt x="1261268" y="434755"/>
-                  </a:lnTo>
-                  <a:lnTo>
-                    <a:pt x="1187508" y="412450"/>
-                  </a:lnTo>
-                  <a:lnTo>
-                    <a:pt x="1113747" y="389788"/>
-                  </a:lnTo>
-                  <a:lnTo>
-                    <a:pt x="1039987" y="366764"/>
-                  </a:lnTo>
-                  <a:lnTo>
-                    <a:pt x="966227" y="343371"/>
-                  </a:lnTo>
-                  <a:lnTo>
-                    <a:pt x="892467" y="319603"/>
-                  </a:lnTo>
-                  <a:lnTo>
-                    <a:pt x="818707" y="295456"/>
-                  </a:lnTo>
-                  <a:lnTo>
-                    <a:pt x="744947" y="270921"/>
-                  </a:lnTo>
-                  <a:lnTo>
-                    <a:pt x="671187" y="245994"/>
-                  </a:lnTo>
-                  <a:lnTo>
-                    <a:pt x="597427" y="220668"/>
-                  </a:lnTo>
-                  <a:lnTo>
-                    <a:pt x="523667" y="194937"/>
-                  </a:lnTo>
-                  <a:lnTo>
-                    <a:pt x="449907" y="168794"/>
-                  </a:lnTo>
-                  <a:lnTo>
-                    <a:pt x="376147" y="142232"/>
-                  </a:lnTo>
-                  <a:lnTo>
-                    <a:pt x="302387" y="115246"/>
-                  </a:lnTo>
-                  <a:lnTo>
-                    <a:pt x="228627" y="87827"/>
-                  </a:lnTo>
-                  <a:lnTo>
-                    <a:pt x="154867" y="59970"/>
-                  </a:lnTo>
-                  <a:lnTo>
-                    <a:pt x="81107" y="31666"/>
-                  </a:lnTo>
-                  <a:lnTo>
-                    <a:pt x="7347" y="2910"/>
+                    <a:pt x="7162070" y="1528398"/>
+                  </a:lnTo>
+                  <a:lnTo>
+                    <a:pt x="7088310" y="1522547"/>
+                  </a:lnTo>
+                  <a:lnTo>
+                    <a:pt x="7014550" y="1516536"/>
+                  </a:lnTo>
+                  <a:lnTo>
+                    <a:pt x="6940789" y="1510362"/>
+                  </a:lnTo>
+                  <a:lnTo>
+                    <a:pt x="6867029" y="1504021"/>
+                  </a:lnTo>
+                  <a:lnTo>
+                    <a:pt x="6793269" y="1497507"/>
+                  </a:lnTo>
+                  <a:lnTo>
+                    <a:pt x="6719509" y="1490817"/>
+                  </a:lnTo>
+                  <a:lnTo>
+                    <a:pt x="6645749" y="1483945"/>
+                  </a:lnTo>
+                  <a:lnTo>
+                    <a:pt x="6571989" y="1476886"/>
+                  </a:lnTo>
+                  <a:lnTo>
+                    <a:pt x="6498229" y="1469635"/>
+                  </a:lnTo>
+                  <a:lnTo>
+                    <a:pt x="6424469" y="1462187"/>
+                  </a:lnTo>
+                  <a:lnTo>
+                    <a:pt x="6350709" y="1454537"/>
+                  </a:lnTo>
+                  <a:lnTo>
+                    <a:pt x="6276949" y="1446679"/>
+                  </a:lnTo>
+                  <a:lnTo>
+                    <a:pt x="6203189" y="1438608"/>
+                  </a:lnTo>
+                  <a:lnTo>
+                    <a:pt x="6129429" y="1430318"/>
+                  </a:lnTo>
+                  <a:lnTo>
+                    <a:pt x="6055669" y="1421802"/>
+                  </a:lnTo>
+                  <a:lnTo>
+                    <a:pt x="5981909" y="1413055"/>
+                  </a:lnTo>
+                  <a:lnTo>
+                    <a:pt x="5908149" y="1404071"/>
+                  </a:lnTo>
+                  <a:lnTo>
+                    <a:pt x="5834389" y="1394842"/>
+                  </a:lnTo>
+                  <a:lnTo>
+                    <a:pt x="5760629" y="1385363"/>
+                  </a:lnTo>
+                  <a:lnTo>
+                    <a:pt x="5686869" y="1375626"/>
+                  </a:lnTo>
+                  <a:lnTo>
+                    <a:pt x="5613109" y="1365624"/>
+                  </a:lnTo>
+                  <a:lnTo>
+                    <a:pt x="5539349" y="1355351"/>
+                  </a:lnTo>
+                  <a:lnTo>
+                    <a:pt x="5465589" y="1344799"/>
+                  </a:lnTo>
+                  <a:lnTo>
+                    <a:pt x="5391829" y="1333961"/>
+                  </a:lnTo>
+                  <a:lnTo>
+                    <a:pt x="5318069" y="1322828"/>
+                  </a:lnTo>
+                  <a:lnTo>
+                    <a:pt x="5244309" y="1311392"/>
+                  </a:lnTo>
+                  <a:lnTo>
+                    <a:pt x="5170549" y="1299646"/>
+                  </a:lnTo>
+                  <a:lnTo>
+                    <a:pt x="5096789" y="1287581"/>
+                  </a:lnTo>
+                  <a:lnTo>
+                    <a:pt x="5023029" y="1275188"/>
+                  </a:lnTo>
+                  <a:lnTo>
+                    <a:pt x="4949269" y="1262458"/>
+                  </a:lnTo>
+                  <a:lnTo>
+                    <a:pt x="4875509" y="1249383"/>
+                  </a:lnTo>
+                  <a:lnTo>
+                    <a:pt x="4801749" y="1235953"/>
+                  </a:lnTo>
+                  <a:lnTo>
+                    <a:pt x="4727989" y="1222157"/>
+                  </a:lnTo>
+                  <a:lnTo>
+                    <a:pt x="4654229" y="1207987"/>
+                  </a:lnTo>
+                  <a:lnTo>
+                    <a:pt x="4580469" y="1193432"/>
+                  </a:lnTo>
+                  <a:lnTo>
+                    <a:pt x="4506709" y="1178482"/>
+                  </a:lnTo>
+                  <a:lnTo>
+                    <a:pt x="4432949" y="1163126"/>
+                  </a:lnTo>
+                  <a:lnTo>
+                    <a:pt x="4359189" y="1147352"/>
+                  </a:lnTo>
+                  <a:lnTo>
+                    <a:pt x="4285429" y="1131150"/>
+                  </a:lnTo>
+                  <a:lnTo>
+                    <a:pt x="4211669" y="1114508"/>
+                  </a:lnTo>
+                  <a:lnTo>
+                    <a:pt x="4137909" y="1097414"/>
+                  </a:lnTo>
+                  <a:lnTo>
+                    <a:pt x="4064149" y="1079855"/>
+                  </a:lnTo>
+                  <a:lnTo>
+                    <a:pt x="3990388" y="1061819"/>
+                  </a:lnTo>
+                  <a:lnTo>
+                    <a:pt x="3916628" y="1043294"/>
+                  </a:lnTo>
+                  <a:lnTo>
+                    <a:pt x="3842868" y="1024265"/>
+                  </a:lnTo>
+                  <a:lnTo>
+                    <a:pt x="3769108" y="1004720"/>
+                  </a:lnTo>
+                  <a:lnTo>
+                    <a:pt x="3695348" y="984644"/>
+                  </a:lnTo>
+                  <a:lnTo>
+                    <a:pt x="3621588" y="964022"/>
+                  </a:lnTo>
+                  <a:lnTo>
+                    <a:pt x="3547828" y="942840"/>
+                  </a:lnTo>
+                  <a:lnTo>
+                    <a:pt x="3474068" y="921082"/>
+                  </a:lnTo>
+                  <a:lnTo>
+                    <a:pt x="3400308" y="905134"/>
+                  </a:lnTo>
+                  <a:lnTo>
+                    <a:pt x="3326548" y="891710"/>
+                  </a:lnTo>
+                  <a:lnTo>
+                    <a:pt x="3252788" y="878072"/>
+                  </a:lnTo>
+                  <a:lnTo>
+                    <a:pt x="3179028" y="864216"/>
+                  </a:lnTo>
+                  <a:lnTo>
+                    <a:pt x="3105268" y="850138"/>
+                  </a:lnTo>
+                  <a:lnTo>
+                    <a:pt x="3031508" y="835834"/>
+                  </a:lnTo>
+                  <a:lnTo>
+                    <a:pt x="2957748" y="821302"/>
+                  </a:lnTo>
+                  <a:lnTo>
+                    <a:pt x="2883988" y="806537"/>
+                  </a:lnTo>
+                  <a:lnTo>
+                    <a:pt x="2810228" y="791536"/>
+                  </a:lnTo>
+                  <a:lnTo>
+                    <a:pt x="2736468" y="776295"/>
+                  </a:lnTo>
+                  <a:lnTo>
+                    <a:pt x="2662708" y="760809"/>
+                  </a:lnTo>
+                  <a:lnTo>
+                    <a:pt x="2588948" y="745076"/>
+                  </a:lnTo>
+                  <a:lnTo>
+                    <a:pt x="2515188" y="729091"/>
+                  </a:lnTo>
+                  <a:lnTo>
+                    <a:pt x="2441428" y="712850"/>
+                  </a:lnTo>
+                  <a:lnTo>
+                    <a:pt x="2367668" y="696350"/>
+                  </a:lnTo>
+                  <a:lnTo>
+                    <a:pt x="2293908" y="679585"/>
+                  </a:lnTo>
+                  <a:lnTo>
+                    <a:pt x="2220148" y="662552"/>
+                  </a:lnTo>
+                  <a:lnTo>
+                    <a:pt x="2146388" y="645246"/>
+                  </a:lnTo>
+                  <a:lnTo>
+                    <a:pt x="2072628" y="627663"/>
+                  </a:lnTo>
+                  <a:lnTo>
+                    <a:pt x="1998868" y="609799"/>
+                  </a:lnTo>
+                  <a:lnTo>
+                    <a:pt x="1925108" y="591649"/>
+                  </a:lnTo>
+                  <a:lnTo>
+                    <a:pt x="1851348" y="573208"/>
+                  </a:lnTo>
+                  <a:lnTo>
+                    <a:pt x="1777588" y="554473"/>
+                  </a:lnTo>
+                  <a:lnTo>
+                    <a:pt x="1703828" y="535437"/>
+                  </a:lnTo>
+                  <a:lnTo>
+                    <a:pt x="1630068" y="516097"/>
+                  </a:lnTo>
+                  <a:lnTo>
+                    <a:pt x="1556308" y="496447"/>
+                  </a:lnTo>
+                  <a:lnTo>
+                    <a:pt x="1482548" y="476483"/>
+                  </a:lnTo>
+                  <a:lnTo>
+                    <a:pt x="1408788" y="456199"/>
+                  </a:lnTo>
+                  <a:lnTo>
+                    <a:pt x="1335028" y="435590"/>
+                  </a:lnTo>
+                  <a:lnTo>
+                    <a:pt x="1261268" y="414652"/>
+                  </a:lnTo>
+                  <a:lnTo>
+                    <a:pt x="1187508" y="393379"/>
+                  </a:lnTo>
+                  <a:lnTo>
+                    <a:pt x="1113747" y="371765"/>
+                  </a:lnTo>
+                  <a:lnTo>
+                    <a:pt x="1039987" y="349805"/>
+                  </a:lnTo>
+                  <a:lnTo>
+                    <a:pt x="966227" y="327493"/>
+                  </a:lnTo>
+                  <a:lnTo>
+                    <a:pt x="892467" y="304825"/>
+                  </a:lnTo>
+                  <a:lnTo>
+                    <a:pt x="818707" y="281794"/>
+                  </a:lnTo>
+                  <a:lnTo>
+                    <a:pt x="744947" y="258394"/>
+                  </a:lnTo>
+                  <a:lnTo>
+                    <a:pt x="671187" y="234620"/>
+                  </a:lnTo>
+                  <a:lnTo>
+                    <a:pt x="597427" y="210465"/>
+                  </a:lnTo>
+                  <a:lnTo>
+                    <a:pt x="523667" y="185923"/>
+                  </a:lnTo>
+                  <a:lnTo>
+                    <a:pt x="449907" y="160989"/>
+                  </a:lnTo>
+                  <a:lnTo>
+                    <a:pt x="376147" y="135655"/>
+                  </a:lnTo>
+                  <a:lnTo>
+                    <a:pt x="302387" y="109917"/>
+                  </a:lnTo>
+                  <a:lnTo>
+                    <a:pt x="228627" y="83766"/>
+                  </a:lnTo>
+                  <a:lnTo>
+                    <a:pt x="154867" y="57197"/>
+                  </a:lnTo>
+                  <a:lnTo>
+                    <a:pt x="81107" y="30202"/>
+                  </a:lnTo>
+                  <a:lnTo>
+                    <a:pt x="7347" y="2775"/>
                   </a:lnTo>
                   <a:lnTo>
                     <a:pt x="0" y="0"/>
@@ -4283,312 +4283,312 @@
           </p:nvSpPr>
           <p:spPr>
             <a:xfrm>
-              <a:off x="817517" y="3188419"/>
-              <a:ext cx="7235830" cy="2069793"/>
+              <a:off x="817517" y="3305624"/>
+              <a:ext cx="7235830" cy="1974087"/>
             </a:xfrm>
             <a:custGeom>
               <a:avLst/>
               <a:pathLst>
-                <a:path w="7235830" h="2069793">
+                <a:path w="7235830" h="1974087">
                   <a:moveTo>
                     <a:pt x="0" y="0"/>
                   </a:moveTo>
                   <a:lnTo>
-                    <a:pt x="7347" y="5061"/>
-                  </a:lnTo>
-                  <a:lnTo>
-                    <a:pt x="81107" y="54799"/>
-                  </a:lnTo>
-                  <a:lnTo>
-                    <a:pt x="154867" y="103487"/>
-                  </a:lnTo>
-                  <a:lnTo>
-                    <a:pt x="228627" y="151147"/>
-                  </a:lnTo>
-                  <a:lnTo>
-                    <a:pt x="302387" y="197801"/>
-                  </a:lnTo>
-                  <a:lnTo>
-                    <a:pt x="376147" y="243470"/>
-                  </a:lnTo>
-                  <a:lnTo>
-                    <a:pt x="449907" y="288174"/>
-                  </a:lnTo>
-                  <a:lnTo>
-                    <a:pt x="523667" y="331935"/>
-                  </a:lnTo>
-                  <a:lnTo>
-                    <a:pt x="597427" y="374771"/>
-                  </a:lnTo>
-                  <a:lnTo>
-                    <a:pt x="671187" y="416704"/>
-                  </a:lnTo>
-                  <a:lnTo>
-                    <a:pt x="744947" y="457751"/>
-                  </a:lnTo>
-                  <a:lnTo>
-                    <a:pt x="818707" y="497931"/>
-                  </a:lnTo>
-                  <a:lnTo>
-                    <a:pt x="892467" y="537263"/>
-                  </a:lnTo>
-                  <a:lnTo>
-                    <a:pt x="966227" y="575764"/>
-                  </a:lnTo>
-                  <a:lnTo>
-                    <a:pt x="1039987" y="613453"/>
-                  </a:lnTo>
-                  <a:lnTo>
-                    <a:pt x="1113747" y="650345"/>
-                  </a:lnTo>
-                  <a:lnTo>
-                    <a:pt x="1187508" y="686459"/>
-                  </a:lnTo>
-                  <a:lnTo>
-                    <a:pt x="1261268" y="721810"/>
-                  </a:lnTo>
-                  <a:lnTo>
-                    <a:pt x="1335028" y="756415"/>
-                  </a:lnTo>
-                  <a:lnTo>
-                    <a:pt x="1408788" y="790290"/>
-                  </a:lnTo>
-                  <a:lnTo>
-                    <a:pt x="1482548" y="823449"/>
-                  </a:lnTo>
-                  <a:lnTo>
-                    <a:pt x="1556308" y="855908"/>
-                  </a:lnTo>
-                  <a:lnTo>
-                    <a:pt x="1630068" y="887681"/>
-                  </a:lnTo>
-                  <a:lnTo>
-                    <a:pt x="1703828" y="918784"/>
-                  </a:lnTo>
-                  <a:lnTo>
-                    <a:pt x="1777588" y="949230"/>
-                  </a:lnTo>
-                  <a:lnTo>
-                    <a:pt x="1851348" y="979033"/>
-                  </a:lnTo>
-                  <a:lnTo>
-                    <a:pt x="1925108" y="1008207"/>
-                  </a:lnTo>
-                  <a:lnTo>
-                    <a:pt x="1998868" y="1036765"/>
-                  </a:lnTo>
-                  <a:lnTo>
-                    <a:pt x="2072628" y="1064720"/>
-                  </a:lnTo>
-                  <a:lnTo>
-                    <a:pt x="2146388" y="1092085"/>
-                  </a:lnTo>
-                  <a:lnTo>
-                    <a:pt x="2220148" y="1118872"/>
-                  </a:lnTo>
-                  <a:lnTo>
-                    <a:pt x="2293908" y="1145094"/>
-                  </a:lnTo>
-                  <a:lnTo>
-                    <a:pt x="2367668" y="1170762"/>
-                  </a:lnTo>
-                  <a:lnTo>
-                    <a:pt x="2441428" y="1195887"/>
-                  </a:lnTo>
-                  <a:lnTo>
-                    <a:pt x="2515188" y="1220483"/>
-                  </a:lnTo>
-                  <a:lnTo>
-                    <a:pt x="2588948" y="1244559"/>
-                  </a:lnTo>
-                  <a:lnTo>
-                    <a:pt x="2662708" y="1268127"/>
-                  </a:lnTo>
-                  <a:lnTo>
-                    <a:pt x="2736468" y="1291197"/>
-                  </a:lnTo>
-                  <a:lnTo>
-                    <a:pt x="2810228" y="1313780"/>
-                  </a:lnTo>
-                  <a:lnTo>
-                    <a:pt x="2883988" y="1335886"/>
-                  </a:lnTo>
-                  <a:lnTo>
-                    <a:pt x="2957748" y="1357526"/>
-                  </a:lnTo>
-                  <a:lnTo>
-                    <a:pt x="3031508" y="1378708"/>
-                  </a:lnTo>
-                  <a:lnTo>
-                    <a:pt x="3105268" y="1399444"/>
-                  </a:lnTo>
-                  <a:lnTo>
-                    <a:pt x="3179028" y="1419741"/>
-                  </a:lnTo>
-                  <a:lnTo>
-                    <a:pt x="3252788" y="1439610"/>
-                  </a:lnTo>
-                  <a:lnTo>
-                    <a:pt x="3326548" y="1459060"/>
-                  </a:lnTo>
-                  <a:lnTo>
-                    <a:pt x="3400308" y="1478098"/>
-                  </a:lnTo>
-                  <a:lnTo>
-                    <a:pt x="3474068" y="1496735"/>
-                  </a:lnTo>
-                  <a:lnTo>
-                    <a:pt x="3547828" y="1514979"/>
-                  </a:lnTo>
-                  <a:lnTo>
-                    <a:pt x="3621588" y="1532837"/>
-                  </a:lnTo>
-                  <a:lnTo>
-                    <a:pt x="3695348" y="1550318"/>
-                  </a:lnTo>
-                  <a:lnTo>
-                    <a:pt x="3769108" y="1567430"/>
-                  </a:lnTo>
-                  <a:lnTo>
-                    <a:pt x="3842868" y="1584181"/>
-                  </a:lnTo>
-                  <a:lnTo>
-                    <a:pt x="3916628" y="1600578"/>
-                  </a:lnTo>
-                  <a:lnTo>
-                    <a:pt x="3990388" y="1616629"/>
-                  </a:lnTo>
-                  <a:lnTo>
-                    <a:pt x="4064149" y="1632341"/>
-                  </a:lnTo>
-                  <a:lnTo>
-                    <a:pt x="4137909" y="1647721"/>
-                  </a:lnTo>
-                  <a:lnTo>
-                    <a:pt x="4211669" y="1662776"/>
-                  </a:lnTo>
-                  <a:lnTo>
-                    <a:pt x="4285429" y="1677514"/>
-                  </a:lnTo>
-                  <a:lnTo>
-                    <a:pt x="4359189" y="1691940"/>
-                  </a:lnTo>
-                  <a:lnTo>
-                    <a:pt x="4432949" y="1706062"/>
-                  </a:lnTo>
-                  <a:lnTo>
-                    <a:pt x="4506709" y="1719886"/>
-                  </a:lnTo>
-                  <a:lnTo>
-                    <a:pt x="4580469" y="1733418"/>
-                  </a:lnTo>
-                  <a:lnTo>
-                    <a:pt x="4654229" y="1746664"/>
-                  </a:lnTo>
-                  <a:lnTo>
-                    <a:pt x="4727989" y="1759630"/>
-                  </a:lnTo>
-                  <a:lnTo>
-                    <a:pt x="4801749" y="1772323"/>
-                  </a:lnTo>
-                  <a:lnTo>
-                    <a:pt x="4875509" y="1784748"/>
-                  </a:lnTo>
-                  <a:lnTo>
-                    <a:pt x="4949269" y="1796910"/>
-                  </a:lnTo>
-                  <a:lnTo>
-                    <a:pt x="5023029" y="1808816"/>
-                  </a:lnTo>
-                  <a:lnTo>
-                    <a:pt x="5096789" y="1820470"/>
-                  </a:lnTo>
-                  <a:lnTo>
-                    <a:pt x="5170549" y="1831878"/>
-                  </a:lnTo>
-                  <a:lnTo>
-                    <a:pt x="5244309" y="1843045"/>
-                  </a:lnTo>
-                  <a:lnTo>
-                    <a:pt x="5318069" y="1853977"/>
-                  </a:lnTo>
-                  <a:lnTo>
-                    <a:pt x="5391829" y="1864677"/>
-                  </a:lnTo>
-                  <a:lnTo>
-                    <a:pt x="5465589" y="1875152"/>
-                  </a:lnTo>
-                  <a:lnTo>
-                    <a:pt x="5539349" y="1885406"/>
-                  </a:lnTo>
-                  <a:lnTo>
-                    <a:pt x="5613109" y="1895443"/>
-                  </a:lnTo>
-                  <a:lnTo>
-                    <a:pt x="5686869" y="1905268"/>
-                  </a:lnTo>
-                  <a:lnTo>
-                    <a:pt x="5760629" y="1914886"/>
-                  </a:lnTo>
-                  <a:lnTo>
-                    <a:pt x="5834389" y="1924300"/>
-                  </a:lnTo>
-                  <a:lnTo>
-                    <a:pt x="5908149" y="1933516"/>
-                  </a:lnTo>
-                  <a:lnTo>
-                    <a:pt x="5981909" y="1942537"/>
-                  </a:lnTo>
-                  <a:lnTo>
-                    <a:pt x="6055669" y="1951368"/>
-                  </a:lnTo>
-                  <a:lnTo>
-                    <a:pt x="6129429" y="1960013"/>
-                  </a:lnTo>
-                  <a:lnTo>
-                    <a:pt x="6203189" y="1968474"/>
-                  </a:lnTo>
-                  <a:lnTo>
-                    <a:pt x="6276949" y="1976758"/>
-                  </a:lnTo>
-                  <a:lnTo>
-                    <a:pt x="6350709" y="1984866"/>
-                  </a:lnTo>
-                  <a:lnTo>
-                    <a:pt x="6424469" y="1992803"/>
-                  </a:lnTo>
-                  <a:lnTo>
-                    <a:pt x="6498229" y="2000573"/>
-                  </a:lnTo>
-                  <a:lnTo>
-                    <a:pt x="6571989" y="2008178"/>
-                  </a:lnTo>
-                  <a:lnTo>
-                    <a:pt x="6645749" y="2015623"/>
-                  </a:lnTo>
-                  <a:lnTo>
-                    <a:pt x="6719509" y="2022911"/>
-                  </a:lnTo>
-                  <a:lnTo>
-                    <a:pt x="6793269" y="2030044"/>
-                  </a:lnTo>
-                  <a:lnTo>
-                    <a:pt x="6867029" y="2037028"/>
-                  </a:lnTo>
-                  <a:lnTo>
-                    <a:pt x="6940789" y="2043863"/>
-                  </a:lnTo>
-                  <a:lnTo>
-                    <a:pt x="7014550" y="2050555"/>
-                  </a:lnTo>
-                  <a:lnTo>
-                    <a:pt x="7088310" y="2057105"/>
-                  </a:lnTo>
-                  <a:lnTo>
-                    <a:pt x="7162070" y="2063517"/>
-                  </a:lnTo>
-                  <a:lnTo>
-                    <a:pt x="7235830" y="2069793"/>
+                    <a:pt x="7347" y="4827"/>
+                  </a:lnTo>
+                  <a:lnTo>
+                    <a:pt x="81107" y="52265"/>
+                  </a:lnTo>
+                  <a:lnTo>
+                    <a:pt x="154867" y="98702"/>
+                  </a:lnTo>
+                  <a:lnTo>
+                    <a:pt x="228627" y="144158"/>
+                  </a:lnTo>
+                  <a:lnTo>
+                    <a:pt x="302387" y="188655"/>
+                  </a:lnTo>
+                  <a:lnTo>
+                    <a:pt x="376147" y="232212"/>
+                  </a:lnTo>
+                  <a:lnTo>
+                    <a:pt x="449907" y="274849"/>
+                  </a:lnTo>
+                  <a:lnTo>
+                    <a:pt x="523667" y="316586"/>
+                  </a:lnTo>
+                  <a:lnTo>
+                    <a:pt x="597427" y="357442"/>
+                  </a:lnTo>
+                  <a:lnTo>
+                    <a:pt x="671187" y="397435"/>
+                  </a:lnTo>
+                  <a:lnTo>
+                    <a:pt x="744947" y="436584"/>
+                  </a:lnTo>
+                  <a:lnTo>
+                    <a:pt x="818707" y="474907"/>
+                  </a:lnTo>
+                  <a:lnTo>
+                    <a:pt x="892467" y="512420"/>
+                  </a:lnTo>
+                  <a:lnTo>
+                    <a:pt x="966227" y="549141"/>
+                  </a:lnTo>
+                  <a:lnTo>
+                    <a:pt x="1039987" y="585087"/>
+                  </a:lnTo>
+                  <a:lnTo>
+                    <a:pt x="1113747" y="620274"/>
+                  </a:lnTo>
+                  <a:lnTo>
+                    <a:pt x="1187508" y="654717"/>
+                  </a:lnTo>
+                  <a:lnTo>
+                    <a:pt x="1261268" y="688434"/>
+                  </a:lnTo>
+                  <a:lnTo>
+                    <a:pt x="1335028" y="721439"/>
+                  </a:lnTo>
+                  <a:lnTo>
+                    <a:pt x="1408788" y="753747"/>
+                  </a:lnTo>
+                  <a:lnTo>
+                    <a:pt x="1482548" y="785373"/>
+                  </a:lnTo>
+                  <a:lnTo>
+                    <a:pt x="1556308" y="816331"/>
+                  </a:lnTo>
+                  <a:lnTo>
+                    <a:pt x="1630068" y="846635"/>
+                  </a:lnTo>
+                  <a:lnTo>
+                    <a:pt x="1703828" y="876300"/>
+                  </a:lnTo>
+                  <a:lnTo>
+                    <a:pt x="1777588" y="905338"/>
+                  </a:lnTo>
+                  <a:lnTo>
+                    <a:pt x="1851348" y="933763"/>
+                  </a:lnTo>
+                  <a:lnTo>
+                    <a:pt x="1925108" y="961588"/>
+                  </a:lnTo>
+                  <a:lnTo>
+                    <a:pt x="1998868" y="988826"/>
+                  </a:lnTo>
+                  <a:lnTo>
+                    <a:pt x="2072628" y="1015488"/>
+                  </a:lnTo>
+                  <a:lnTo>
+                    <a:pt x="2146388" y="1041588"/>
+                  </a:lnTo>
+                  <a:lnTo>
+                    <a:pt x="2220148" y="1067136"/>
+                  </a:lnTo>
+                  <a:lnTo>
+                    <a:pt x="2293908" y="1092145"/>
+                  </a:lnTo>
+                  <a:lnTo>
+                    <a:pt x="2367668" y="1116626"/>
+                  </a:lnTo>
+                  <a:lnTo>
+                    <a:pt x="2441428" y="1140590"/>
+                  </a:lnTo>
+                  <a:lnTo>
+                    <a:pt x="2515188" y="1164048"/>
+                  </a:lnTo>
+                  <a:lnTo>
+                    <a:pt x="2588948" y="1187011"/>
+                  </a:lnTo>
+                  <a:lnTo>
+                    <a:pt x="2662708" y="1209489"/>
+                  </a:lnTo>
+                  <a:lnTo>
+                    <a:pt x="2736468" y="1231492"/>
+                  </a:lnTo>
+                  <a:lnTo>
+                    <a:pt x="2810228" y="1253031"/>
+                  </a:lnTo>
+                  <a:lnTo>
+                    <a:pt x="2883988" y="1274115"/>
+                  </a:lnTo>
+                  <a:lnTo>
+                    <a:pt x="2957748" y="1294754"/>
+                  </a:lnTo>
+                  <a:lnTo>
+                    <a:pt x="3031508" y="1314957"/>
+                  </a:lnTo>
+                  <a:lnTo>
+                    <a:pt x="3105268" y="1334734"/>
+                  </a:lnTo>
+                  <a:lnTo>
+                    <a:pt x="3179028" y="1354093"/>
+                  </a:lnTo>
+                  <a:lnTo>
+                    <a:pt x="3252788" y="1373043"/>
+                  </a:lnTo>
+                  <a:lnTo>
+                    <a:pt x="3326548" y="1391593"/>
+                  </a:lnTo>
+                  <a:lnTo>
+                    <a:pt x="3400308" y="1409752"/>
+                  </a:lnTo>
+                  <a:lnTo>
+                    <a:pt x="3474068" y="1427527"/>
+                  </a:lnTo>
+                  <a:lnTo>
+                    <a:pt x="3547828" y="1444927"/>
+                  </a:lnTo>
+                  <a:lnTo>
+                    <a:pt x="3621588" y="1461959"/>
+                  </a:lnTo>
+                  <a:lnTo>
+                    <a:pt x="3695348" y="1478632"/>
+                  </a:lnTo>
+                  <a:lnTo>
+                    <a:pt x="3769108" y="1494953"/>
+                  </a:lnTo>
+                  <a:lnTo>
+                    <a:pt x="3842868" y="1510929"/>
+                  </a:lnTo>
+                  <a:lnTo>
+                    <a:pt x="3916628" y="1526568"/>
+                  </a:lnTo>
+                  <a:lnTo>
+                    <a:pt x="3990388" y="1541876"/>
+                  </a:lnTo>
+                  <a:lnTo>
+                    <a:pt x="4064149" y="1556862"/>
+                  </a:lnTo>
+                  <a:lnTo>
+                    <a:pt x="4137909" y="1571531"/>
+                  </a:lnTo>
+                  <a:lnTo>
+                    <a:pt x="4211669" y="1585890"/>
+                  </a:lnTo>
+                  <a:lnTo>
+                    <a:pt x="4285429" y="1599946"/>
+                  </a:lnTo>
+                  <a:lnTo>
+                    <a:pt x="4359189" y="1613706"/>
+                  </a:lnTo>
+                  <a:lnTo>
+                    <a:pt x="4432949" y="1627175"/>
+                  </a:lnTo>
+                  <a:lnTo>
+                    <a:pt x="4506709" y="1640359"/>
+                  </a:lnTo>
+                  <a:lnTo>
+                    <a:pt x="4580469" y="1653265"/>
+                  </a:lnTo>
+                  <a:lnTo>
+                    <a:pt x="4654229" y="1665899"/>
+                  </a:lnTo>
+                  <a:lnTo>
+                    <a:pt x="4727989" y="1678266"/>
+                  </a:lnTo>
+                  <a:lnTo>
+                    <a:pt x="4801749" y="1690371"/>
+                  </a:lnTo>
+                  <a:lnTo>
+                    <a:pt x="4875509" y="1702222"/>
+                  </a:lnTo>
+                  <a:lnTo>
+                    <a:pt x="4949269" y="1713822"/>
+                  </a:lnTo>
+                  <a:lnTo>
+                    <a:pt x="5023029" y="1725177"/>
+                  </a:lnTo>
+                  <a:lnTo>
+                    <a:pt x="5096789" y="1736292"/>
+                  </a:lnTo>
+                  <a:lnTo>
+                    <a:pt x="5170549" y="1747173"/>
+                  </a:lnTo>
+                  <a:lnTo>
+                    <a:pt x="5244309" y="1757823"/>
+                  </a:lnTo>
+                  <a:lnTo>
+                    <a:pt x="5318069" y="1768249"/>
+                  </a:lnTo>
+                  <a:lnTo>
+                    <a:pt x="5391829" y="1778455"/>
+                  </a:lnTo>
+                  <a:lnTo>
+                    <a:pt x="5465589" y="1788446"/>
+                  </a:lnTo>
+                  <a:lnTo>
+                    <a:pt x="5539349" y="1798225"/>
+                  </a:lnTo>
+                  <a:lnTo>
+                    <a:pt x="5613109" y="1807798"/>
+                  </a:lnTo>
+                  <a:lnTo>
+                    <a:pt x="5686869" y="1817169"/>
+                  </a:lnTo>
+                  <a:lnTo>
+                    <a:pt x="5760629" y="1826342"/>
+                  </a:lnTo>
+                  <a:lnTo>
+                    <a:pt x="5834389" y="1835321"/>
+                  </a:lnTo>
+                  <a:lnTo>
+                    <a:pt x="5908149" y="1844111"/>
+                  </a:lnTo>
+                  <a:lnTo>
+                    <a:pt x="5981909" y="1852715"/>
+                  </a:lnTo>
+                  <a:lnTo>
+                    <a:pt x="6055669" y="1861138"/>
+                  </a:lnTo>
+                  <a:lnTo>
+                    <a:pt x="6129429" y="1869382"/>
+                  </a:lnTo>
+                  <a:lnTo>
+                    <a:pt x="6203189" y="1877453"/>
+                  </a:lnTo>
+                  <a:lnTo>
+                    <a:pt x="6276949" y="1885353"/>
+                  </a:lnTo>
+                  <a:lnTo>
+                    <a:pt x="6350709" y="1893086"/>
+                  </a:lnTo>
+                  <a:lnTo>
+                    <a:pt x="6424469" y="1900657"/>
+                  </a:lnTo>
+                  <a:lnTo>
+                    <a:pt x="6498229" y="1908067"/>
+                  </a:lnTo>
+                  <a:lnTo>
+                    <a:pt x="6571989" y="1915321"/>
+                  </a:lnTo>
+                  <a:lnTo>
+                    <a:pt x="6645749" y="1922421"/>
+                  </a:lnTo>
+                  <a:lnTo>
+                    <a:pt x="6719509" y="1929372"/>
+                  </a:lnTo>
+                  <a:lnTo>
+                    <a:pt x="6793269" y="1936176"/>
+                  </a:lnTo>
+                  <a:lnTo>
+                    <a:pt x="6867029" y="1942836"/>
+                  </a:lnTo>
+                  <a:lnTo>
+                    <a:pt x="6940789" y="1949356"/>
+                  </a:lnTo>
+                  <a:lnTo>
+                    <a:pt x="7014550" y="1955738"/>
+                  </a:lnTo>
+                  <a:lnTo>
+                    <a:pt x="7088310" y="1961985"/>
+                  </a:lnTo>
+                  <a:lnTo>
+                    <a:pt x="7162070" y="1968101"/>
+                  </a:lnTo>
+                  <a:lnTo>
+                    <a:pt x="7235830" y="1974087"/>
                   </a:lnTo>
                 </a:path>
               </a:pathLst>
@@ -4617,7 +4617,7 @@
           </p:nvSpPr>
           <p:spPr>
             <a:xfrm>
-              <a:off x="817517" y="4679530"/>
+              <a:off x="817517" y="4727786"/>
               <a:ext cx="7799693" cy="0"/>
             </a:xfrm>
             <a:custGeom>
@@ -4660,15 +4660,15 @@
           </p:nvSpPr>
           <p:spPr>
             <a:xfrm>
-              <a:off x="4269157" y="1896563"/>
-              <a:ext cx="0" cy="3826579"/>
+              <a:off x="4269157" y="2073503"/>
+              <a:ext cx="0" cy="3649639"/>
             </a:xfrm>
             <a:custGeom>
               <a:avLst/>
               <a:pathLst>
-                <a:path w="0" h="3826579">
+                <a:path w="0" h="3649639">
                   <a:moveTo>
-                    <a:pt x="0" y="3826579"/>
+                    <a:pt x="0" y="3649639"/>
                   </a:moveTo>
                   <a:lnTo>
                     <a:pt x="0" y="0"/>
@@ -4703,7 +4703,7 @@
           </p:nvSpPr>
           <p:spPr>
             <a:xfrm>
-              <a:off x="692708" y="5509156"/>
+              <a:off x="692708" y="5517199"/>
               <a:ext cx="62179" cy="80101"/>
             </a:xfrm>
             <a:prstGeom prst="rect">
@@ -4749,7 +4749,7 @@
           </p:nvSpPr>
           <p:spPr>
             <a:xfrm>
-              <a:off x="692708" y="4639479"/>
+              <a:off x="692708" y="4687735"/>
               <a:ext cx="62179" cy="80101"/>
             </a:xfrm>
             <a:prstGeom prst="rect">
@@ -4795,7 +4795,7 @@
           </p:nvSpPr>
           <p:spPr>
             <a:xfrm>
-              <a:off x="692708" y="3769802"/>
+              <a:off x="692708" y="3858272"/>
               <a:ext cx="62179" cy="80101"/>
             </a:xfrm>
             <a:prstGeom prst="rect">
@@ -4841,7 +4841,7 @@
           </p:nvSpPr>
           <p:spPr>
             <a:xfrm>
-              <a:off x="692708" y="2900125"/>
+              <a:off x="692708" y="3028808"/>
               <a:ext cx="62179" cy="80101"/>
             </a:xfrm>
             <a:prstGeom prst="rect">
@@ -4887,7 +4887,7 @@
           </p:nvSpPr>
           <p:spPr>
             <a:xfrm>
-              <a:off x="692708" y="2030448"/>
+              <a:off x="692708" y="2199345"/>
               <a:ext cx="62179" cy="80101"/>
             </a:xfrm>
             <a:prstGeom prst="rect">
@@ -5163,7 +5163,7 @@
           </p:nvSpPr>
           <p:spPr>
             <a:xfrm rot="-5400000">
-              <a:off x="68446" y="3759743"/>
+              <a:off x="68446" y="3848213"/>
               <a:ext cx="1016904" cy="100218"/>
             </a:xfrm>
             <a:prstGeom prst="rect">
@@ -5204,6 +5204,52 @@
         <p:sp>
           <p:nvSpPr>
             <p:cNvPr id="38" name="tx38"/>
+            <p:cNvSpPr/>
+            <p:nvPr/>
+          </p:nvSpPr>
+          <p:spPr>
+            <a:xfrm>
+              <a:off x="817517" y="1896563"/>
+              <a:ext cx="5626211" cy="82021"/>
+            </a:xfrm>
+            <a:prstGeom prst="rect">
+              <a:avLst/>
+            </a:prstGeom>
+            <a:noFill/>
+          </p:spPr>
+          <p:txBody>
+            <a:bodyPr lIns="0" rIns="0" tIns="0" bIns="0" anchorCtr="1" anchor="ctr" wrap="none"/>
+            <a:lstStyle/>
+            <a:p>
+              <a:pPr algn="l" marL="0" marR="0" indent="0">
+                <a:lnSpc>
+                  <a:spcPts val="900"/>
+                </a:lnSpc>
+                <a:spcBef>
+                  <a:spcPts val="0"/>
+                </a:spcBef>
+                <a:spcAft>
+                  <a:spcPts val="0"/>
+                </a:spcAft>
+              </a:pPr>
+              <a:r>
+                <a:rPr sz="900">
+                  <a:solidFill>
+                    <a:srgbClr val="404040">
+                      <a:alpha val="100000"/>
+                    </a:srgbClr>
+                  </a:solidFill>
+                  <a:latin typeface="Helvetica"/>
+                  <a:cs typeface="Helvetica"/>
+                </a:rPr>
+                <a:t>subHR per 0.1 ratio decline: 1.29 (1.21-1.38)  |  per IQR decline (Δ = 0.29): 2.12 (1.75-2.57)  |  IQR: [0.85, 1.15]</a:t>
+              </a:r>
+            </a:p>
+          </p:txBody>
+        </p:sp>
+        <p:sp>
+          <p:nvSpPr>
+            <p:cNvPr id="39" name="tx39"/>
             <p:cNvSpPr/>
             <p:nvPr/>
           </p:nvSpPr>

--- a/docs/pptx/whole/jx-linsubhr-ratio-grade2.pptx
+++ b/docs/pptx/whole/jx-linsubhr-ratio-grade2.pptx
@@ -5210,7 +5210,7 @@
           <p:spPr>
             <a:xfrm>
               <a:off x="817517" y="1896563"/>
-              <a:ext cx="5626211" cy="82021"/>
+              <a:ext cx="6236116" cy="82021"/>
             </a:xfrm>
             <a:prstGeom prst="rect">
               <a:avLst/>
@@ -5242,7 +5242,7 @@
                   <a:latin typeface="Helvetica"/>
                   <a:cs typeface="Helvetica"/>
                 </a:rPr>
-                <a:t>subHR per 0.1 ratio decline: 1.29 (1.21-1.38)  |  per IQR decline (Δ = 0.29): 2.12 (1.75-2.57)  |  IQR: [0.85, 1.15]</a:t>
+                <a:t>subHR per 0.1 ratio decline: 1.29 (1.21-1.38), p = &lt;0.001  |  per IQR decline (Δ = 0.29): 2.12 (1.75-2.57)  |  IQR: [0.85, 1.15]</a:t>
               </a:r>
             </a:p>
           </p:txBody>

--- a/docs/pptx/whole/jx-linsubhr-ratio-grade2.pptx
+++ b/docs/pptx/whole/jx-linsubhr-ratio-grade2.pptx
@@ -5210,7 +5210,7 @@
           <p:spPr>
             <a:xfrm>
               <a:off x="817517" y="1896563"/>
-              <a:ext cx="6236116" cy="82021"/>
+              <a:ext cx="6899879" cy="82021"/>
             </a:xfrm>
             <a:prstGeom prst="rect">
               <a:avLst/>
@@ -5242,7 +5242,7 @@
                   <a:latin typeface="Helvetica"/>
                   <a:cs typeface="Helvetica"/>
                 </a:rPr>
-                <a:t>subHR per 0.1 ratio decline: 1.29 (1.21-1.38), p = &lt;0.001  |  per IQR decline (Δ = 0.29): 2.12 (1.75-2.57)  |  IQR: [0.85, 1.15]</a:t>
+                <a:t>subHR per 0.1 ratio decline: 1.29 (1.21-1.38), p_Bonf = &lt;0.001 (n = 6)  |  per IQR decline (Δ = 0.29): 2.12 (1.75-2.57)  |  IQR: [0.85, 1.15]</a:t>
               </a:r>
             </a:p>
           </p:txBody>

--- a/docs/pptx/whole/jx-linsubhr-ratio-grade2.pptx
+++ b/docs/pptx/whole/jx-linsubhr-ratio-grade2.pptx
@@ -2443,7 +2443,7 @@
           </p:nvSpPr>
           <p:spPr>
             <a:xfrm>
-              <a:off x="1615213" y="2073503"/>
+              <a:off x="1365633" y="2073503"/>
               <a:ext cx="0" cy="3649639"/>
             </a:xfrm>
             <a:custGeom>
@@ -2486,7 +2486,7 @@
           </p:nvSpPr>
           <p:spPr>
             <a:xfrm>
-              <a:off x="3387871" y="2073503"/>
+              <a:off x="3517243" y="2073503"/>
               <a:ext cx="0" cy="3649639"/>
             </a:xfrm>
             <a:custGeom>
@@ -2529,7 +2529,7 @@
           </p:nvSpPr>
           <p:spPr>
             <a:xfrm>
-              <a:off x="5160528" y="2073503"/>
+              <a:off x="5668852" y="2073503"/>
               <a:ext cx="0" cy="3649639"/>
             </a:xfrm>
             <a:custGeom>
@@ -2572,7 +2572,7 @@
           </p:nvSpPr>
           <p:spPr>
             <a:xfrm>
-              <a:off x="6933186" y="2073503"/>
+              <a:off x="7820461" y="2073503"/>
               <a:ext cx="0" cy="3649639"/>
             </a:xfrm>
             <a:custGeom>
@@ -2830,7 +2830,7 @@
           </p:nvSpPr>
           <p:spPr>
             <a:xfrm>
-              <a:off x="2501542" y="2073503"/>
+              <a:off x="2441438" y="2073503"/>
               <a:ext cx="0" cy="3649639"/>
             </a:xfrm>
             <a:custGeom>
@@ -2873,7 +2873,7 @@
           </p:nvSpPr>
           <p:spPr>
             <a:xfrm>
-              <a:off x="4274200" y="2073503"/>
+              <a:off x="4593047" y="2073503"/>
               <a:ext cx="0" cy="3649639"/>
             </a:xfrm>
             <a:custGeom>
@@ -2916,7 +2916,7 @@
           </p:nvSpPr>
           <p:spPr>
             <a:xfrm>
-              <a:off x="6046857" y="2073503"/>
+              <a:off x="6744657" y="2073503"/>
               <a:ext cx="0" cy="3649639"/>
             </a:xfrm>
             <a:custGeom>
@@ -2953,661 +2953,618 @@
         </p:sp>
         <p:sp>
           <p:nvSpPr>
-            <p:cNvPr id="20" name="pl20"/>
+            <p:cNvPr id="20" name="pg20"/>
             <p:cNvSpPr/>
             <p:nvPr/>
           </p:nvSpPr>
           <p:spPr>
             <a:xfrm>
-              <a:off x="7819515" y="2073503"/>
-              <a:ext cx="0" cy="3649639"/>
+              <a:off x="1172049" y="2579011"/>
+              <a:ext cx="7090630" cy="2768519"/>
             </a:xfrm>
             <a:custGeom>
               <a:avLst/>
               <a:pathLst>
-                <a:path w="0" h="3649639">
-                  <a:moveTo>
-                    <a:pt x="0" y="3649639"/>
-                  </a:moveTo>
-                  <a:lnTo>
-                    <a:pt x="0" y="0"/>
-                  </a:lnTo>
-                  <a:lnTo>
-                    <a:pt x="0" y="0"/>
-                  </a:lnTo>
-                </a:path>
-              </a:pathLst>
-            </a:custGeom>
-            <a:ln w="13550" cap="flat">
-              <a:solidFill>
-                <a:srgbClr val="EBEBEB">
-                  <a:alpha val="100000"/>
-                </a:srgbClr>
-              </a:solidFill>
-              <a:prstDash val="solid"/>
-              <a:round/>
-            </a:ln>
-          </p:spPr>
-          <p:txBody>
-            <a:bodyPr/>
-            <a:lstStyle/>
-            <a:p/>
-          </p:txBody>
-        </p:sp>
-        <p:sp>
-          <p:nvSpPr>
-            <p:cNvPr id="21" name="pg21"/>
-            <p:cNvSpPr/>
-            <p:nvPr/>
-          </p:nvSpPr>
-          <p:spPr>
-            <a:xfrm>
-              <a:off x="817517" y="2649925"/>
-              <a:ext cx="7235830" cy="2697605"/>
-            </a:xfrm>
-            <a:custGeom>
-              <a:avLst/>
-              <a:pathLst>
-                <a:path w="7235830" h="2697605">
+                <a:path w="7090630" h="2768519">
                   <a:moveTo>
                     <a:pt x="0" y="0"/>
                   </a:moveTo>
                   <a:lnTo>
-                    <a:pt x="7347" y="7845"/>
-                  </a:lnTo>
-                  <a:lnTo>
-                    <a:pt x="81107" y="84523"/>
-                  </a:lnTo>
-                  <a:lnTo>
-                    <a:pt x="154867" y="159172"/>
-                  </a:lnTo>
-                  <a:lnTo>
-                    <a:pt x="228627" y="231848"/>
-                  </a:lnTo>
-                  <a:lnTo>
-                    <a:pt x="302387" y="302601"/>
-                  </a:lnTo>
-                  <a:lnTo>
-                    <a:pt x="376147" y="371484"/>
-                  </a:lnTo>
-                  <a:lnTo>
-                    <a:pt x="449907" y="438545"/>
-                  </a:lnTo>
-                  <a:lnTo>
-                    <a:pt x="523667" y="503832"/>
-                  </a:lnTo>
-                  <a:lnTo>
-                    <a:pt x="597427" y="567393"/>
-                  </a:lnTo>
-                  <a:lnTo>
-                    <a:pt x="671187" y="629273"/>
-                  </a:lnTo>
-                  <a:lnTo>
-                    <a:pt x="744947" y="689517"/>
-                  </a:lnTo>
-                  <a:lnTo>
-                    <a:pt x="818707" y="748167"/>
-                  </a:lnTo>
-                  <a:lnTo>
-                    <a:pt x="892467" y="805267"/>
-                  </a:lnTo>
-                  <a:lnTo>
-                    <a:pt x="966227" y="860856"/>
-                  </a:lnTo>
-                  <a:lnTo>
-                    <a:pt x="1039987" y="914975"/>
-                  </a:lnTo>
-                  <a:lnTo>
-                    <a:pt x="1113747" y="967664"/>
-                  </a:lnTo>
-                  <a:lnTo>
-                    <a:pt x="1187508" y="1018958"/>
-                  </a:lnTo>
-                  <a:lnTo>
-                    <a:pt x="1261268" y="1068897"/>
-                  </a:lnTo>
-                  <a:lnTo>
-                    <a:pt x="1335028" y="1117514"/>
-                  </a:lnTo>
-                  <a:lnTo>
-                    <a:pt x="1408788" y="1164846"/>
-                  </a:lnTo>
-                  <a:lnTo>
-                    <a:pt x="1482548" y="1210926"/>
-                  </a:lnTo>
-                  <a:lnTo>
-                    <a:pt x="1556308" y="1255788"/>
-                  </a:lnTo>
-                  <a:lnTo>
-                    <a:pt x="1630068" y="1299463"/>
-                  </a:lnTo>
-                  <a:lnTo>
-                    <a:pt x="1703828" y="1341984"/>
-                  </a:lnTo>
-                  <a:lnTo>
-                    <a:pt x="1777588" y="1383379"/>
-                  </a:lnTo>
-                  <a:lnTo>
-                    <a:pt x="1851348" y="1423680"/>
-                  </a:lnTo>
-                  <a:lnTo>
-                    <a:pt x="1925108" y="1462916"/>
-                  </a:lnTo>
-                  <a:lnTo>
-                    <a:pt x="1998868" y="1501113"/>
-                  </a:lnTo>
-                  <a:lnTo>
-                    <a:pt x="2072628" y="1538301"/>
-                  </a:lnTo>
-                  <a:lnTo>
-                    <a:pt x="2146388" y="1574505"/>
-                  </a:lnTo>
-                  <a:lnTo>
-                    <a:pt x="2220148" y="1609752"/>
-                  </a:lnTo>
-                  <a:lnTo>
-                    <a:pt x="2293908" y="1644066"/>
-                  </a:lnTo>
-                  <a:lnTo>
-                    <a:pt x="2367668" y="1677474"/>
-                  </a:lnTo>
-                  <a:lnTo>
-                    <a:pt x="2441428" y="1709997"/>
-                  </a:lnTo>
-                  <a:lnTo>
-                    <a:pt x="2515188" y="1741661"/>
-                  </a:lnTo>
-                  <a:lnTo>
-                    <a:pt x="2588948" y="1772487"/>
-                  </a:lnTo>
-                  <a:lnTo>
-                    <a:pt x="2662708" y="1802498"/>
-                  </a:lnTo>
-                  <a:lnTo>
-                    <a:pt x="2736468" y="1831716"/>
-                  </a:lnTo>
-                  <a:lnTo>
-                    <a:pt x="2810228" y="1860160"/>
-                  </a:lnTo>
-                  <a:lnTo>
-                    <a:pt x="2883988" y="1887853"/>
-                  </a:lnTo>
-                  <a:lnTo>
-                    <a:pt x="2957748" y="1914813"/>
-                  </a:lnTo>
-                  <a:lnTo>
-                    <a:pt x="3031508" y="1941060"/>
-                  </a:lnTo>
-                  <a:lnTo>
-                    <a:pt x="3105268" y="1966613"/>
-                  </a:lnTo>
-                  <a:lnTo>
-                    <a:pt x="3179028" y="1991490"/>
-                  </a:lnTo>
-                  <a:lnTo>
-                    <a:pt x="3252788" y="2015710"/>
-                  </a:lnTo>
-                  <a:lnTo>
-                    <a:pt x="3326548" y="2039289"/>
-                  </a:lnTo>
-                  <a:lnTo>
-                    <a:pt x="3400308" y="2062244"/>
-                  </a:lnTo>
-                  <a:lnTo>
-                    <a:pt x="3474068" y="2081855"/>
-                  </a:lnTo>
-                  <a:lnTo>
-                    <a:pt x="3547828" y="2094859"/>
-                  </a:lnTo>
-                  <a:lnTo>
-                    <a:pt x="3621588" y="2107658"/>
-                  </a:lnTo>
-                  <a:lnTo>
-                    <a:pt x="3695348" y="2120255"/>
-                  </a:lnTo>
-                  <a:lnTo>
-                    <a:pt x="3769108" y="2132654"/>
-                  </a:lnTo>
-                  <a:lnTo>
-                    <a:pt x="3842868" y="2144857"/>
-                  </a:lnTo>
-                  <a:lnTo>
-                    <a:pt x="3916628" y="2156868"/>
-                  </a:lnTo>
-                  <a:lnTo>
-                    <a:pt x="3990388" y="2168690"/>
-                  </a:lnTo>
-                  <a:lnTo>
-                    <a:pt x="4064149" y="2180326"/>
-                  </a:lnTo>
-                  <a:lnTo>
-                    <a:pt x="4137909" y="2191778"/>
-                  </a:lnTo>
-                  <a:lnTo>
-                    <a:pt x="4211669" y="2203050"/>
-                  </a:lnTo>
-                  <a:lnTo>
-                    <a:pt x="4285429" y="2214145"/>
-                  </a:lnTo>
-                  <a:lnTo>
-                    <a:pt x="4359189" y="2225064"/>
-                  </a:lnTo>
-                  <a:lnTo>
-                    <a:pt x="4432949" y="2235812"/>
-                  </a:lnTo>
-                  <a:lnTo>
-                    <a:pt x="4506709" y="2246390"/>
-                  </a:lnTo>
-                  <a:lnTo>
-                    <a:pt x="4580469" y="2256802"/>
-                  </a:lnTo>
-                  <a:lnTo>
-                    <a:pt x="4654229" y="2267050"/>
-                  </a:lnTo>
-                  <a:lnTo>
-                    <a:pt x="4727989" y="2277136"/>
-                  </a:lnTo>
-                  <a:lnTo>
-                    <a:pt x="4801749" y="2287063"/>
-                  </a:lnTo>
-                  <a:lnTo>
-                    <a:pt x="4875509" y="2296834"/>
-                  </a:lnTo>
-                  <a:lnTo>
-                    <a:pt x="4949269" y="2306451"/>
-                  </a:lnTo>
-                  <a:lnTo>
-                    <a:pt x="5023029" y="2315917"/>
-                  </a:lnTo>
-                  <a:lnTo>
-                    <a:pt x="5096789" y="2325233"/>
-                  </a:lnTo>
-                  <a:lnTo>
-                    <a:pt x="5170549" y="2334403"/>
-                  </a:lnTo>
-                  <a:lnTo>
-                    <a:pt x="5244309" y="2343428"/>
-                  </a:lnTo>
-                  <a:lnTo>
-                    <a:pt x="5318069" y="2352311"/>
-                  </a:lnTo>
-                  <a:lnTo>
-                    <a:pt x="5391829" y="2361055"/>
-                  </a:lnTo>
-                  <a:lnTo>
-                    <a:pt x="5465589" y="2369660"/>
-                  </a:lnTo>
-                  <a:lnTo>
-                    <a:pt x="5539349" y="2378130"/>
-                  </a:lnTo>
-                  <a:lnTo>
-                    <a:pt x="5613109" y="2386466"/>
-                  </a:lnTo>
-                  <a:lnTo>
-                    <a:pt x="5686869" y="2394671"/>
-                  </a:lnTo>
-                  <a:lnTo>
-                    <a:pt x="5760629" y="2402747"/>
-                  </a:lnTo>
-                  <a:lnTo>
-                    <a:pt x="5834389" y="2410696"/>
-                  </a:lnTo>
-                  <a:lnTo>
-                    <a:pt x="5908149" y="2418519"/>
-                  </a:lnTo>
-                  <a:lnTo>
-                    <a:pt x="5981909" y="2426219"/>
-                  </a:lnTo>
-                  <a:lnTo>
-                    <a:pt x="6055669" y="2433798"/>
-                  </a:lnTo>
-                  <a:lnTo>
-                    <a:pt x="6129429" y="2441258"/>
-                  </a:lnTo>
-                  <a:lnTo>
-                    <a:pt x="6203189" y="2448600"/>
-                  </a:lnTo>
-                  <a:lnTo>
-                    <a:pt x="6276949" y="2455826"/>
-                  </a:lnTo>
-                  <a:lnTo>
-                    <a:pt x="6350709" y="2462938"/>
-                  </a:lnTo>
-                  <a:lnTo>
-                    <a:pt x="6424469" y="2469939"/>
-                  </a:lnTo>
-                  <a:lnTo>
-                    <a:pt x="6498229" y="2476829"/>
-                  </a:lnTo>
-                  <a:lnTo>
-                    <a:pt x="6571989" y="2483610"/>
-                  </a:lnTo>
-                  <a:lnTo>
-                    <a:pt x="6645749" y="2490285"/>
-                  </a:lnTo>
-                  <a:lnTo>
-                    <a:pt x="6719509" y="2496855"/>
-                  </a:lnTo>
-                  <a:lnTo>
-                    <a:pt x="6793269" y="2503321"/>
-                  </a:lnTo>
-                  <a:lnTo>
-                    <a:pt x="6867029" y="2509685"/>
-                  </a:lnTo>
-                  <a:lnTo>
-                    <a:pt x="6940789" y="2515949"/>
-                  </a:lnTo>
-                  <a:lnTo>
-                    <a:pt x="7014550" y="2522115"/>
-                  </a:lnTo>
-                  <a:lnTo>
-                    <a:pt x="7088310" y="2528183"/>
-                  </a:lnTo>
-                  <a:lnTo>
-                    <a:pt x="7162070" y="2534155"/>
-                  </a:lnTo>
-                  <a:lnTo>
-                    <a:pt x="7235830" y="2540034"/>
-                  </a:lnTo>
-                  <a:lnTo>
-                    <a:pt x="7235830" y="2697605"/>
-                  </a:lnTo>
-                  <a:lnTo>
-                    <a:pt x="7162070" y="2691908"/>
-                  </a:lnTo>
-                  <a:lnTo>
-                    <a:pt x="7088310" y="2686057"/>
-                  </a:lnTo>
-                  <a:lnTo>
-                    <a:pt x="7014550" y="2680046"/>
-                  </a:lnTo>
-                  <a:lnTo>
-                    <a:pt x="6940789" y="2673873"/>
-                  </a:lnTo>
-                  <a:lnTo>
-                    <a:pt x="6867029" y="2667531"/>
-                  </a:lnTo>
-                  <a:lnTo>
-                    <a:pt x="6793269" y="2661018"/>
-                  </a:lnTo>
-                  <a:lnTo>
-                    <a:pt x="6719509" y="2654327"/>
-                  </a:lnTo>
-                  <a:lnTo>
-                    <a:pt x="6645749" y="2647455"/>
-                  </a:lnTo>
-                  <a:lnTo>
-                    <a:pt x="6571989" y="2640396"/>
-                  </a:lnTo>
-                  <a:lnTo>
-                    <a:pt x="6498229" y="2633145"/>
-                  </a:lnTo>
-                  <a:lnTo>
-                    <a:pt x="6424469" y="2625697"/>
-                  </a:lnTo>
-                  <a:lnTo>
-                    <a:pt x="6350709" y="2618047"/>
-                  </a:lnTo>
-                  <a:lnTo>
-                    <a:pt x="6276949" y="2610190"/>
-                  </a:lnTo>
-                  <a:lnTo>
-                    <a:pt x="6203189" y="2602118"/>
-                  </a:lnTo>
-                  <a:lnTo>
-                    <a:pt x="6129429" y="2593828"/>
-                  </a:lnTo>
-                  <a:lnTo>
-                    <a:pt x="6055669" y="2585312"/>
-                  </a:lnTo>
-                  <a:lnTo>
-                    <a:pt x="5981909" y="2576565"/>
-                  </a:lnTo>
-                  <a:lnTo>
-                    <a:pt x="5908149" y="2567581"/>
-                  </a:lnTo>
-                  <a:lnTo>
-                    <a:pt x="5834389" y="2558352"/>
-                  </a:lnTo>
-                  <a:lnTo>
-                    <a:pt x="5760629" y="2548873"/>
-                  </a:lnTo>
-                  <a:lnTo>
-                    <a:pt x="5686869" y="2539136"/>
-                  </a:lnTo>
-                  <a:lnTo>
-                    <a:pt x="5613109" y="2529135"/>
-                  </a:lnTo>
-                  <a:lnTo>
-                    <a:pt x="5539349" y="2518862"/>
-                  </a:lnTo>
-                  <a:lnTo>
-                    <a:pt x="5465589" y="2508310"/>
-                  </a:lnTo>
-                  <a:lnTo>
-                    <a:pt x="5391829" y="2497471"/>
-                  </a:lnTo>
-                  <a:lnTo>
-                    <a:pt x="5318069" y="2486338"/>
-                  </a:lnTo>
-                  <a:lnTo>
-                    <a:pt x="5244309" y="2474902"/>
-                  </a:lnTo>
-                  <a:lnTo>
-                    <a:pt x="5170549" y="2463156"/>
-                  </a:lnTo>
-                  <a:lnTo>
-                    <a:pt x="5096789" y="2451091"/>
-                  </a:lnTo>
-                  <a:lnTo>
-                    <a:pt x="5023029" y="2438698"/>
-                  </a:lnTo>
-                  <a:lnTo>
-                    <a:pt x="4949269" y="2425969"/>
-                  </a:lnTo>
-                  <a:lnTo>
-                    <a:pt x="4875509" y="2412893"/>
-                  </a:lnTo>
-                  <a:lnTo>
-                    <a:pt x="4801749" y="2399463"/>
-                  </a:lnTo>
-                  <a:lnTo>
-                    <a:pt x="4727989" y="2385667"/>
-                  </a:lnTo>
-                  <a:lnTo>
-                    <a:pt x="4654229" y="2371497"/>
-                  </a:lnTo>
-                  <a:lnTo>
-                    <a:pt x="4580469" y="2356942"/>
-                  </a:lnTo>
-                  <a:lnTo>
-                    <a:pt x="4506709" y="2341992"/>
-                  </a:lnTo>
-                  <a:lnTo>
-                    <a:pt x="4432949" y="2326636"/>
-                  </a:lnTo>
-                  <a:lnTo>
-                    <a:pt x="4359189" y="2310862"/>
-                  </a:lnTo>
-                  <a:lnTo>
-                    <a:pt x="4285429" y="2294660"/>
-                  </a:lnTo>
-                  <a:lnTo>
-                    <a:pt x="4211669" y="2278018"/>
-                  </a:lnTo>
-                  <a:lnTo>
-                    <a:pt x="4137909" y="2260924"/>
-                  </a:lnTo>
-                  <a:lnTo>
-                    <a:pt x="4064149" y="2243365"/>
-                  </a:lnTo>
-                  <a:lnTo>
-                    <a:pt x="3990388" y="2225330"/>
-                  </a:lnTo>
-                  <a:lnTo>
-                    <a:pt x="3916628" y="2206804"/>
-                  </a:lnTo>
-                  <a:lnTo>
-                    <a:pt x="3842868" y="2187776"/>
-                  </a:lnTo>
-                  <a:lnTo>
-                    <a:pt x="3769108" y="2168230"/>
-                  </a:lnTo>
-                  <a:lnTo>
-                    <a:pt x="3695348" y="2148154"/>
-                  </a:lnTo>
-                  <a:lnTo>
-                    <a:pt x="3621588" y="2127532"/>
-                  </a:lnTo>
-                  <a:lnTo>
-                    <a:pt x="3547828" y="2106350"/>
-                  </a:lnTo>
-                  <a:lnTo>
-                    <a:pt x="3474068" y="2084593"/>
-                  </a:lnTo>
-                  <a:lnTo>
-                    <a:pt x="3400308" y="2068644"/>
-                  </a:lnTo>
-                  <a:lnTo>
-                    <a:pt x="3326548" y="2055220"/>
-                  </a:lnTo>
-                  <a:lnTo>
-                    <a:pt x="3252788" y="2041582"/>
-                  </a:lnTo>
-                  <a:lnTo>
-                    <a:pt x="3179028" y="2027726"/>
-                  </a:lnTo>
-                  <a:lnTo>
-                    <a:pt x="3105268" y="2013648"/>
-                  </a:lnTo>
-                  <a:lnTo>
-                    <a:pt x="3031508" y="1999345"/>
-                  </a:lnTo>
-                  <a:lnTo>
-                    <a:pt x="2957748" y="1984812"/>
-                  </a:lnTo>
-                  <a:lnTo>
-                    <a:pt x="2883988" y="1970047"/>
-                  </a:lnTo>
-                  <a:lnTo>
-                    <a:pt x="2810228" y="1955046"/>
-                  </a:lnTo>
-                  <a:lnTo>
-                    <a:pt x="2736468" y="1939805"/>
-                  </a:lnTo>
-                  <a:lnTo>
-                    <a:pt x="2662708" y="1924319"/>
-                  </a:lnTo>
-                  <a:lnTo>
-                    <a:pt x="2588948" y="1908586"/>
-                  </a:lnTo>
-                  <a:lnTo>
-                    <a:pt x="2515188" y="1892601"/>
-                  </a:lnTo>
-                  <a:lnTo>
-                    <a:pt x="2441428" y="1876360"/>
-                  </a:lnTo>
-                  <a:lnTo>
-                    <a:pt x="2367668" y="1859860"/>
-                  </a:lnTo>
-                  <a:lnTo>
-                    <a:pt x="2293908" y="1843095"/>
-                  </a:lnTo>
-                  <a:lnTo>
-                    <a:pt x="2220148" y="1826062"/>
-                  </a:lnTo>
-                  <a:lnTo>
-                    <a:pt x="2146388" y="1808756"/>
-                  </a:lnTo>
-                  <a:lnTo>
-                    <a:pt x="2072628" y="1791173"/>
-                  </a:lnTo>
-                  <a:lnTo>
-                    <a:pt x="1998868" y="1773309"/>
-                  </a:lnTo>
-                  <a:lnTo>
-                    <a:pt x="1925108" y="1755159"/>
-                  </a:lnTo>
-                  <a:lnTo>
-                    <a:pt x="1851348" y="1736718"/>
-                  </a:lnTo>
-                  <a:lnTo>
-                    <a:pt x="1777588" y="1717983"/>
-                  </a:lnTo>
-                  <a:lnTo>
-                    <a:pt x="1703828" y="1698947"/>
-                  </a:lnTo>
-                  <a:lnTo>
-                    <a:pt x="1630068" y="1679607"/>
-                  </a:lnTo>
-                  <a:lnTo>
-                    <a:pt x="1556308" y="1659957"/>
-                  </a:lnTo>
-                  <a:lnTo>
-                    <a:pt x="1482548" y="1639993"/>
-                  </a:lnTo>
-                  <a:lnTo>
-                    <a:pt x="1408788" y="1619709"/>
-                  </a:lnTo>
-                  <a:lnTo>
-                    <a:pt x="1335028" y="1599100"/>
-                  </a:lnTo>
-                  <a:lnTo>
-                    <a:pt x="1261268" y="1578162"/>
-                  </a:lnTo>
-                  <a:lnTo>
-                    <a:pt x="1187508" y="1556889"/>
-                  </a:lnTo>
-                  <a:lnTo>
-                    <a:pt x="1113747" y="1535275"/>
-                  </a:lnTo>
-                  <a:lnTo>
-                    <a:pt x="1039987" y="1513315"/>
-                  </a:lnTo>
-                  <a:lnTo>
-                    <a:pt x="966227" y="1491004"/>
-                  </a:lnTo>
-                  <a:lnTo>
-                    <a:pt x="892467" y="1468335"/>
-                  </a:lnTo>
-                  <a:lnTo>
-                    <a:pt x="818707" y="1445304"/>
-                  </a:lnTo>
-                  <a:lnTo>
-                    <a:pt x="744947" y="1421904"/>
-                  </a:lnTo>
-                  <a:lnTo>
-                    <a:pt x="671187" y="1398130"/>
-                  </a:lnTo>
-                  <a:lnTo>
-                    <a:pt x="597427" y="1373975"/>
-                  </a:lnTo>
-                  <a:lnTo>
-                    <a:pt x="523667" y="1349433"/>
-                  </a:lnTo>
-                  <a:lnTo>
-                    <a:pt x="449907" y="1324499"/>
-                  </a:lnTo>
-                  <a:lnTo>
-                    <a:pt x="376147" y="1299166"/>
-                  </a:lnTo>
-                  <a:lnTo>
-                    <a:pt x="302387" y="1273427"/>
-                  </a:lnTo>
-                  <a:lnTo>
-                    <a:pt x="228627" y="1247276"/>
-                  </a:lnTo>
-                  <a:lnTo>
-                    <a:pt x="154867" y="1220707"/>
-                  </a:lnTo>
-                  <a:lnTo>
-                    <a:pt x="81107" y="1193712"/>
-                  </a:lnTo>
-                  <a:lnTo>
-                    <a:pt x="7347" y="1166285"/>
-                  </a:lnTo>
-                  <a:lnTo>
-                    <a:pt x="0" y="1163510"/>
+                    <a:pt x="71622" y="78760"/>
+                  </a:lnTo>
+                  <a:lnTo>
+                    <a:pt x="143245" y="155437"/>
+                  </a:lnTo>
+                  <a:lnTo>
+                    <a:pt x="214867" y="230087"/>
+                  </a:lnTo>
+                  <a:lnTo>
+                    <a:pt x="286490" y="302762"/>
+                  </a:lnTo>
+                  <a:lnTo>
+                    <a:pt x="358112" y="373516"/>
+                  </a:lnTo>
+                  <a:lnTo>
+                    <a:pt x="429735" y="442398"/>
+                  </a:lnTo>
+                  <a:lnTo>
+                    <a:pt x="501357" y="509459"/>
+                  </a:lnTo>
+                  <a:lnTo>
+                    <a:pt x="572980" y="574747"/>
+                  </a:lnTo>
+                  <a:lnTo>
+                    <a:pt x="644602" y="638308"/>
+                  </a:lnTo>
+                  <a:lnTo>
+                    <a:pt x="716225" y="700188"/>
+                  </a:lnTo>
+                  <a:lnTo>
+                    <a:pt x="787847" y="760431"/>
+                  </a:lnTo>
+                  <a:lnTo>
+                    <a:pt x="859470" y="819082"/>
+                  </a:lnTo>
+                  <a:lnTo>
+                    <a:pt x="931092" y="876181"/>
+                  </a:lnTo>
+                  <a:lnTo>
+                    <a:pt x="1002715" y="931771"/>
+                  </a:lnTo>
+                  <a:lnTo>
+                    <a:pt x="1074337" y="985890"/>
+                  </a:lnTo>
+                  <a:lnTo>
+                    <a:pt x="1145960" y="1038578"/>
+                  </a:lnTo>
+                  <a:lnTo>
+                    <a:pt x="1217582" y="1089873"/>
+                  </a:lnTo>
+                  <a:lnTo>
+                    <a:pt x="1289205" y="1139811"/>
+                  </a:lnTo>
+                  <a:lnTo>
+                    <a:pt x="1360827" y="1188429"/>
+                  </a:lnTo>
+                  <a:lnTo>
+                    <a:pt x="1432450" y="1235761"/>
+                  </a:lnTo>
+                  <a:lnTo>
+                    <a:pt x="1504073" y="1281841"/>
+                  </a:lnTo>
+                  <a:lnTo>
+                    <a:pt x="1575695" y="1326703"/>
+                  </a:lnTo>
+                  <a:lnTo>
+                    <a:pt x="1647318" y="1370378"/>
+                  </a:lnTo>
+                  <a:lnTo>
+                    <a:pt x="1718940" y="1412898"/>
+                  </a:lnTo>
+                  <a:lnTo>
+                    <a:pt x="1790563" y="1454294"/>
+                  </a:lnTo>
+                  <a:lnTo>
+                    <a:pt x="1862185" y="1494595"/>
+                  </a:lnTo>
+                  <a:lnTo>
+                    <a:pt x="1933808" y="1533830"/>
+                  </a:lnTo>
+                  <a:lnTo>
+                    <a:pt x="2005430" y="1572028"/>
+                  </a:lnTo>
+                  <a:lnTo>
+                    <a:pt x="2077053" y="1609216"/>
+                  </a:lnTo>
+                  <a:lnTo>
+                    <a:pt x="2148675" y="1645420"/>
+                  </a:lnTo>
+                  <a:lnTo>
+                    <a:pt x="2220298" y="1680666"/>
+                  </a:lnTo>
+                  <a:lnTo>
+                    <a:pt x="2291920" y="1714981"/>
+                  </a:lnTo>
+                  <a:lnTo>
+                    <a:pt x="2363543" y="1748388"/>
+                  </a:lnTo>
+                  <a:lnTo>
+                    <a:pt x="2435165" y="1780912"/>
+                  </a:lnTo>
+                  <a:lnTo>
+                    <a:pt x="2506788" y="1812575"/>
+                  </a:lnTo>
+                  <a:lnTo>
+                    <a:pt x="2578410" y="1843402"/>
+                  </a:lnTo>
+                  <a:lnTo>
+                    <a:pt x="2650033" y="1873413"/>
+                  </a:lnTo>
+                  <a:lnTo>
+                    <a:pt x="2721655" y="1902630"/>
+                  </a:lnTo>
+                  <a:lnTo>
+                    <a:pt x="2793278" y="1931075"/>
+                  </a:lnTo>
+                  <a:lnTo>
+                    <a:pt x="2864901" y="1958767"/>
+                  </a:lnTo>
+                  <a:lnTo>
+                    <a:pt x="2936523" y="1985727"/>
+                  </a:lnTo>
+                  <a:lnTo>
+                    <a:pt x="3008146" y="2011975"/>
+                  </a:lnTo>
+                  <a:lnTo>
+                    <a:pt x="3079768" y="2037528"/>
+                  </a:lnTo>
+                  <a:lnTo>
+                    <a:pt x="3151391" y="2062405"/>
+                  </a:lnTo>
+                  <a:lnTo>
+                    <a:pt x="3223013" y="2086624"/>
+                  </a:lnTo>
+                  <a:lnTo>
+                    <a:pt x="3294636" y="2110203"/>
+                  </a:lnTo>
+                  <a:lnTo>
+                    <a:pt x="3366258" y="2133159"/>
+                  </a:lnTo>
+                  <a:lnTo>
+                    <a:pt x="3437881" y="2152770"/>
+                  </a:lnTo>
+                  <a:lnTo>
+                    <a:pt x="3509503" y="2165774"/>
+                  </a:lnTo>
+                  <a:lnTo>
+                    <a:pt x="3581126" y="2178572"/>
+                  </a:lnTo>
+                  <a:lnTo>
+                    <a:pt x="3652748" y="2191170"/>
+                  </a:lnTo>
+                  <a:lnTo>
+                    <a:pt x="3724371" y="2203568"/>
+                  </a:lnTo>
+                  <a:lnTo>
+                    <a:pt x="3795993" y="2215772"/>
+                  </a:lnTo>
+                  <a:lnTo>
+                    <a:pt x="3867616" y="2227783"/>
+                  </a:lnTo>
+                  <a:lnTo>
+                    <a:pt x="3939238" y="2239605"/>
+                  </a:lnTo>
+                  <a:lnTo>
+                    <a:pt x="4010861" y="2251240"/>
+                  </a:lnTo>
+                  <a:lnTo>
+                    <a:pt x="4082483" y="2262693"/>
+                  </a:lnTo>
+                  <a:lnTo>
+                    <a:pt x="4154106" y="2273965"/>
+                  </a:lnTo>
+                  <a:lnTo>
+                    <a:pt x="4225729" y="2285059"/>
+                  </a:lnTo>
+                  <a:lnTo>
+                    <a:pt x="4297351" y="2295979"/>
+                  </a:lnTo>
+                  <a:lnTo>
+                    <a:pt x="4368974" y="2306727"/>
+                  </a:lnTo>
+                  <a:lnTo>
+                    <a:pt x="4440596" y="2317305"/>
+                  </a:lnTo>
+                  <a:lnTo>
+                    <a:pt x="4512219" y="2327717"/>
+                  </a:lnTo>
+                  <a:lnTo>
+                    <a:pt x="4583841" y="2337964"/>
+                  </a:lnTo>
+                  <a:lnTo>
+                    <a:pt x="4655464" y="2348051"/>
+                  </a:lnTo>
+                  <a:lnTo>
+                    <a:pt x="4727086" y="2357978"/>
+                  </a:lnTo>
+                  <a:lnTo>
+                    <a:pt x="4798709" y="2367749"/>
+                  </a:lnTo>
+                  <a:lnTo>
+                    <a:pt x="4870331" y="2377366"/>
+                  </a:lnTo>
+                  <a:lnTo>
+                    <a:pt x="4941954" y="2386832"/>
+                  </a:lnTo>
+                  <a:lnTo>
+                    <a:pt x="5013576" y="2396148"/>
+                  </a:lnTo>
+                  <a:lnTo>
+                    <a:pt x="5085199" y="2405318"/>
+                  </a:lnTo>
+                  <a:lnTo>
+                    <a:pt x="5156821" y="2414343"/>
+                  </a:lnTo>
+                  <a:lnTo>
+                    <a:pt x="5228444" y="2423226"/>
+                  </a:lnTo>
+                  <a:lnTo>
+                    <a:pt x="5300066" y="2431969"/>
+                  </a:lnTo>
+                  <a:lnTo>
+                    <a:pt x="5371689" y="2440575"/>
+                  </a:lnTo>
+                  <a:lnTo>
+                    <a:pt x="5443311" y="2449044"/>
+                  </a:lnTo>
+                  <a:lnTo>
+                    <a:pt x="5514934" y="2457381"/>
+                  </a:lnTo>
+                  <a:lnTo>
+                    <a:pt x="5586557" y="2465586"/>
+                  </a:lnTo>
+                  <a:lnTo>
+                    <a:pt x="5658179" y="2473662"/>
+                  </a:lnTo>
+                  <a:lnTo>
+                    <a:pt x="5729802" y="2481610"/>
+                  </a:lnTo>
+                  <a:lnTo>
+                    <a:pt x="5801424" y="2489434"/>
+                  </a:lnTo>
+                  <a:lnTo>
+                    <a:pt x="5873047" y="2497134"/>
+                  </a:lnTo>
+                  <a:lnTo>
+                    <a:pt x="5944669" y="2504713"/>
+                  </a:lnTo>
+                  <a:lnTo>
+                    <a:pt x="6016292" y="2512172"/>
+                  </a:lnTo>
+                  <a:lnTo>
+                    <a:pt x="6087914" y="2519514"/>
+                  </a:lnTo>
+                  <a:lnTo>
+                    <a:pt x="6159537" y="2526740"/>
+                  </a:lnTo>
+                  <a:lnTo>
+                    <a:pt x="6231159" y="2533853"/>
+                  </a:lnTo>
+                  <a:lnTo>
+                    <a:pt x="6302782" y="2540853"/>
+                  </a:lnTo>
+                  <a:lnTo>
+                    <a:pt x="6374404" y="2547743"/>
+                  </a:lnTo>
+                  <a:lnTo>
+                    <a:pt x="6446027" y="2554525"/>
+                  </a:lnTo>
+                  <a:lnTo>
+                    <a:pt x="6517649" y="2561200"/>
+                  </a:lnTo>
+                  <a:lnTo>
+                    <a:pt x="6589272" y="2567769"/>
+                  </a:lnTo>
+                  <a:lnTo>
+                    <a:pt x="6660894" y="2574235"/>
+                  </a:lnTo>
+                  <a:lnTo>
+                    <a:pt x="6732517" y="2580600"/>
+                  </a:lnTo>
+                  <a:lnTo>
+                    <a:pt x="6804139" y="2586864"/>
+                  </a:lnTo>
+                  <a:lnTo>
+                    <a:pt x="6875762" y="2593029"/>
+                  </a:lnTo>
+                  <a:lnTo>
+                    <a:pt x="6947385" y="2599097"/>
+                  </a:lnTo>
+                  <a:lnTo>
+                    <a:pt x="7019007" y="2605070"/>
+                  </a:lnTo>
+                  <a:lnTo>
+                    <a:pt x="7090630" y="2610948"/>
+                  </a:lnTo>
+                  <a:lnTo>
+                    <a:pt x="7090630" y="2768519"/>
+                  </a:lnTo>
+                  <a:lnTo>
+                    <a:pt x="7019007" y="2762823"/>
+                  </a:lnTo>
+                  <a:lnTo>
+                    <a:pt x="6947385" y="2756971"/>
+                  </a:lnTo>
+                  <a:lnTo>
+                    <a:pt x="6875762" y="2750961"/>
+                  </a:lnTo>
+                  <a:lnTo>
+                    <a:pt x="6804139" y="2744787"/>
+                  </a:lnTo>
+                  <a:lnTo>
+                    <a:pt x="6732517" y="2738446"/>
+                  </a:lnTo>
+                  <a:lnTo>
+                    <a:pt x="6660894" y="2731932"/>
+                  </a:lnTo>
+                  <a:lnTo>
+                    <a:pt x="6589272" y="2725242"/>
+                  </a:lnTo>
+                  <a:lnTo>
+                    <a:pt x="6517649" y="2718369"/>
+                  </a:lnTo>
+                  <a:lnTo>
+                    <a:pt x="6446027" y="2711310"/>
+                  </a:lnTo>
+                  <a:lnTo>
+                    <a:pt x="6374404" y="2704060"/>
+                  </a:lnTo>
+                  <a:lnTo>
+                    <a:pt x="6302782" y="2696612"/>
+                  </a:lnTo>
+                  <a:lnTo>
+                    <a:pt x="6231159" y="2688962"/>
+                  </a:lnTo>
+                  <a:lnTo>
+                    <a:pt x="6159537" y="2681104"/>
+                  </a:lnTo>
+                  <a:lnTo>
+                    <a:pt x="6087914" y="2673033"/>
+                  </a:lnTo>
+                  <a:lnTo>
+                    <a:pt x="6016292" y="2664742"/>
+                  </a:lnTo>
+                  <a:lnTo>
+                    <a:pt x="5944669" y="2656227"/>
+                  </a:lnTo>
+                  <a:lnTo>
+                    <a:pt x="5873047" y="2647480"/>
+                  </a:lnTo>
+                  <a:lnTo>
+                    <a:pt x="5801424" y="2638495"/>
+                  </a:lnTo>
+                  <a:lnTo>
+                    <a:pt x="5729802" y="2629267"/>
+                  </a:lnTo>
+                  <a:lnTo>
+                    <a:pt x="5658179" y="2619787"/>
+                  </a:lnTo>
+                  <a:lnTo>
+                    <a:pt x="5586557" y="2610050"/>
+                  </a:lnTo>
+                  <a:lnTo>
+                    <a:pt x="5514934" y="2600049"/>
+                  </a:lnTo>
+                  <a:lnTo>
+                    <a:pt x="5443311" y="2589776"/>
+                  </a:lnTo>
+                  <a:lnTo>
+                    <a:pt x="5371689" y="2579224"/>
+                  </a:lnTo>
+                  <a:lnTo>
+                    <a:pt x="5300066" y="2568385"/>
+                  </a:lnTo>
+                  <a:lnTo>
+                    <a:pt x="5228444" y="2557252"/>
+                  </a:lnTo>
+                  <a:lnTo>
+                    <a:pt x="5156821" y="2545817"/>
+                  </a:lnTo>
+                  <a:lnTo>
+                    <a:pt x="5085199" y="2534071"/>
+                  </a:lnTo>
+                  <a:lnTo>
+                    <a:pt x="5013576" y="2522006"/>
+                  </a:lnTo>
+                  <a:lnTo>
+                    <a:pt x="4941954" y="2509613"/>
+                  </a:lnTo>
+                  <a:lnTo>
+                    <a:pt x="4870331" y="2496883"/>
+                  </a:lnTo>
+                  <a:lnTo>
+                    <a:pt x="4798709" y="2483808"/>
+                  </a:lnTo>
+                  <a:lnTo>
+                    <a:pt x="4727086" y="2470377"/>
+                  </a:lnTo>
+                  <a:lnTo>
+                    <a:pt x="4655464" y="2456582"/>
+                  </a:lnTo>
+                  <a:lnTo>
+                    <a:pt x="4583841" y="2442412"/>
+                  </a:lnTo>
+                  <a:lnTo>
+                    <a:pt x="4512219" y="2427857"/>
+                  </a:lnTo>
+                  <a:lnTo>
+                    <a:pt x="4440596" y="2412907"/>
+                  </a:lnTo>
+                  <a:lnTo>
+                    <a:pt x="4368974" y="2397550"/>
+                  </a:lnTo>
+                  <a:lnTo>
+                    <a:pt x="4297351" y="2381777"/>
+                  </a:lnTo>
+                  <a:lnTo>
+                    <a:pt x="4225729" y="2365575"/>
+                  </a:lnTo>
+                  <a:lnTo>
+                    <a:pt x="4154106" y="2348932"/>
+                  </a:lnTo>
+                  <a:lnTo>
+                    <a:pt x="4082483" y="2331838"/>
+                  </a:lnTo>
+                  <a:lnTo>
+                    <a:pt x="4010861" y="2314280"/>
+                  </a:lnTo>
+                  <a:lnTo>
+                    <a:pt x="3939238" y="2296244"/>
+                  </a:lnTo>
+                  <a:lnTo>
+                    <a:pt x="3867616" y="2277719"/>
+                  </a:lnTo>
+                  <a:lnTo>
+                    <a:pt x="3795993" y="2258690"/>
+                  </a:lnTo>
+                  <a:lnTo>
+                    <a:pt x="3724371" y="2239145"/>
+                  </a:lnTo>
+                  <a:lnTo>
+                    <a:pt x="3652748" y="2219068"/>
+                  </a:lnTo>
+                  <a:lnTo>
+                    <a:pt x="3581126" y="2198446"/>
+                  </a:lnTo>
+                  <a:lnTo>
+                    <a:pt x="3509503" y="2177264"/>
+                  </a:lnTo>
+                  <a:lnTo>
+                    <a:pt x="3437881" y="2155507"/>
+                  </a:lnTo>
+                  <a:lnTo>
+                    <a:pt x="3366258" y="2139558"/>
+                  </a:lnTo>
+                  <a:lnTo>
+                    <a:pt x="3294636" y="2126135"/>
+                  </a:lnTo>
+                  <a:lnTo>
+                    <a:pt x="3223013" y="2112497"/>
+                  </a:lnTo>
+                  <a:lnTo>
+                    <a:pt x="3151391" y="2098641"/>
+                  </a:lnTo>
+                  <a:lnTo>
+                    <a:pt x="3079768" y="2084563"/>
+                  </a:lnTo>
+                  <a:lnTo>
+                    <a:pt x="3008146" y="2070259"/>
+                  </a:lnTo>
+                  <a:lnTo>
+                    <a:pt x="2936523" y="2055727"/>
+                  </a:lnTo>
+                  <a:lnTo>
+                    <a:pt x="2864901" y="2040962"/>
+                  </a:lnTo>
+                  <a:lnTo>
+                    <a:pt x="2793278" y="2025961"/>
+                  </a:lnTo>
+                  <a:lnTo>
+                    <a:pt x="2721655" y="2010719"/>
+                  </a:lnTo>
+                  <a:lnTo>
+                    <a:pt x="2650033" y="1995234"/>
+                  </a:lnTo>
+                  <a:lnTo>
+                    <a:pt x="2578410" y="1979501"/>
+                  </a:lnTo>
+                  <a:lnTo>
+                    <a:pt x="2506788" y="1963516"/>
+                  </a:lnTo>
+                  <a:lnTo>
+                    <a:pt x="2435165" y="1947275"/>
+                  </a:lnTo>
+                  <a:lnTo>
+                    <a:pt x="2363543" y="1930774"/>
+                  </a:lnTo>
+                  <a:lnTo>
+                    <a:pt x="2291920" y="1914009"/>
+                  </a:lnTo>
+                  <a:lnTo>
+                    <a:pt x="2220298" y="1896976"/>
+                  </a:lnTo>
+                  <a:lnTo>
+                    <a:pt x="2148675" y="1879671"/>
+                  </a:lnTo>
+                  <a:lnTo>
+                    <a:pt x="2077053" y="1862088"/>
+                  </a:lnTo>
+                  <a:lnTo>
+                    <a:pt x="2005430" y="1844224"/>
+                  </a:lnTo>
+                  <a:lnTo>
+                    <a:pt x="1933808" y="1826074"/>
+                  </a:lnTo>
+                  <a:lnTo>
+                    <a:pt x="1862185" y="1807633"/>
+                  </a:lnTo>
+                  <a:lnTo>
+                    <a:pt x="1790563" y="1788897"/>
+                  </a:lnTo>
+                  <a:lnTo>
+                    <a:pt x="1718940" y="1769862"/>
+                  </a:lnTo>
+                  <a:lnTo>
+                    <a:pt x="1647318" y="1750521"/>
+                  </a:lnTo>
+                  <a:lnTo>
+                    <a:pt x="1575695" y="1730872"/>
+                  </a:lnTo>
+                  <a:lnTo>
+                    <a:pt x="1504073" y="1710907"/>
+                  </a:lnTo>
+                  <a:lnTo>
+                    <a:pt x="1432450" y="1690623"/>
+                  </a:lnTo>
+                  <a:lnTo>
+                    <a:pt x="1360827" y="1670015"/>
+                  </a:lnTo>
+                  <a:lnTo>
+                    <a:pt x="1289205" y="1649077"/>
+                  </a:lnTo>
+                  <a:lnTo>
+                    <a:pt x="1217582" y="1627803"/>
+                  </a:lnTo>
+                  <a:lnTo>
+                    <a:pt x="1145960" y="1606189"/>
+                  </a:lnTo>
+                  <a:lnTo>
+                    <a:pt x="1074337" y="1584229"/>
+                  </a:lnTo>
+                  <a:lnTo>
+                    <a:pt x="1002715" y="1561918"/>
+                  </a:lnTo>
+                  <a:lnTo>
+                    <a:pt x="931092" y="1539250"/>
+                  </a:lnTo>
+                  <a:lnTo>
+                    <a:pt x="859470" y="1516218"/>
+                  </a:lnTo>
+                  <a:lnTo>
+                    <a:pt x="787847" y="1492819"/>
+                  </a:lnTo>
+                  <a:lnTo>
+                    <a:pt x="716225" y="1469044"/>
+                  </a:lnTo>
+                  <a:lnTo>
+                    <a:pt x="644602" y="1444889"/>
+                  </a:lnTo>
+                  <a:lnTo>
+                    <a:pt x="572980" y="1420348"/>
+                  </a:lnTo>
+                  <a:lnTo>
+                    <a:pt x="501357" y="1395413"/>
+                  </a:lnTo>
+                  <a:lnTo>
+                    <a:pt x="429735" y="1370080"/>
+                  </a:lnTo>
+                  <a:lnTo>
+                    <a:pt x="358112" y="1344341"/>
+                  </a:lnTo>
+                  <a:lnTo>
+                    <a:pt x="286490" y="1318191"/>
+                  </a:lnTo>
+                  <a:lnTo>
+                    <a:pt x="214867" y="1291621"/>
+                  </a:lnTo>
+                  <a:lnTo>
+                    <a:pt x="143245" y="1264627"/>
+                  </a:lnTo>
+                  <a:lnTo>
+                    <a:pt x="71622" y="1237200"/>
+                  </a:lnTo>
+                  <a:lnTo>
+                    <a:pt x="0" y="1209334"/>
                   </a:lnTo>
                   <a:close/>
                 </a:path>
@@ -3627,318 +3584,643 @@
         </p:sp>
         <p:sp>
           <p:nvSpPr>
+            <p:cNvPr id="21" name="pl21"/>
+            <p:cNvSpPr/>
+            <p:nvPr/>
+          </p:nvSpPr>
+          <p:spPr>
+            <a:xfrm>
+              <a:off x="1172049" y="2579011"/>
+              <a:ext cx="7090630" cy="2610948"/>
+            </a:xfrm>
+            <a:custGeom>
+              <a:avLst/>
+              <a:pathLst>
+                <a:path w="7090630" h="2610948">
+                  <a:moveTo>
+                    <a:pt x="0" y="0"/>
+                  </a:moveTo>
+                  <a:lnTo>
+                    <a:pt x="71622" y="78760"/>
+                  </a:lnTo>
+                  <a:lnTo>
+                    <a:pt x="143245" y="155437"/>
+                  </a:lnTo>
+                  <a:lnTo>
+                    <a:pt x="214867" y="230087"/>
+                  </a:lnTo>
+                  <a:lnTo>
+                    <a:pt x="286490" y="302762"/>
+                  </a:lnTo>
+                  <a:lnTo>
+                    <a:pt x="358112" y="373516"/>
+                  </a:lnTo>
+                  <a:lnTo>
+                    <a:pt x="429735" y="442398"/>
+                  </a:lnTo>
+                  <a:lnTo>
+                    <a:pt x="501357" y="509459"/>
+                  </a:lnTo>
+                  <a:lnTo>
+                    <a:pt x="572980" y="574747"/>
+                  </a:lnTo>
+                  <a:lnTo>
+                    <a:pt x="644602" y="638308"/>
+                  </a:lnTo>
+                  <a:lnTo>
+                    <a:pt x="716225" y="700188"/>
+                  </a:lnTo>
+                  <a:lnTo>
+                    <a:pt x="787847" y="760431"/>
+                  </a:lnTo>
+                  <a:lnTo>
+                    <a:pt x="859470" y="819082"/>
+                  </a:lnTo>
+                  <a:lnTo>
+                    <a:pt x="931092" y="876181"/>
+                  </a:lnTo>
+                  <a:lnTo>
+                    <a:pt x="1002715" y="931771"/>
+                  </a:lnTo>
+                  <a:lnTo>
+                    <a:pt x="1074337" y="985890"/>
+                  </a:lnTo>
+                  <a:lnTo>
+                    <a:pt x="1145960" y="1038578"/>
+                  </a:lnTo>
+                  <a:lnTo>
+                    <a:pt x="1217582" y="1089873"/>
+                  </a:lnTo>
+                  <a:lnTo>
+                    <a:pt x="1289205" y="1139811"/>
+                  </a:lnTo>
+                  <a:lnTo>
+                    <a:pt x="1360827" y="1188429"/>
+                  </a:lnTo>
+                  <a:lnTo>
+                    <a:pt x="1432450" y="1235761"/>
+                  </a:lnTo>
+                  <a:lnTo>
+                    <a:pt x="1504073" y="1281841"/>
+                  </a:lnTo>
+                  <a:lnTo>
+                    <a:pt x="1575695" y="1326703"/>
+                  </a:lnTo>
+                  <a:lnTo>
+                    <a:pt x="1647318" y="1370378"/>
+                  </a:lnTo>
+                  <a:lnTo>
+                    <a:pt x="1718940" y="1412898"/>
+                  </a:lnTo>
+                  <a:lnTo>
+                    <a:pt x="1790563" y="1454294"/>
+                  </a:lnTo>
+                  <a:lnTo>
+                    <a:pt x="1862185" y="1494595"/>
+                  </a:lnTo>
+                  <a:lnTo>
+                    <a:pt x="1933808" y="1533830"/>
+                  </a:lnTo>
+                  <a:lnTo>
+                    <a:pt x="2005430" y="1572028"/>
+                  </a:lnTo>
+                  <a:lnTo>
+                    <a:pt x="2077053" y="1609216"/>
+                  </a:lnTo>
+                  <a:lnTo>
+                    <a:pt x="2148675" y="1645420"/>
+                  </a:lnTo>
+                  <a:lnTo>
+                    <a:pt x="2220298" y="1680666"/>
+                  </a:lnTo>
+                  <a:lnTo>
+                    <a:pt x="2291920" y="1714981"/>
+                  </a:lnTo>
+                  <a:lnTo>
+                    <a:pt x="2363543" y="1748388"/>
+                  </a:lnTo>
+                  <a:lnTo>
+                    <a:pt x="2435165" y="1780912"/>
+                  </a:lnTo>
+                  <a:lnTo>
+                    <a:pt x="2506788" y="1812575"/>
+                  </a:lnTo>
+                  <a:lnTo>
+                    <a:pt x="2578410" y="1843402"/>
+                  </a:lnTo>
+                  <a:lnTo>
+                    <a:pt x="2650033" y="1873413"/>
+                  </a:lnTo>
+                  <a:lnTo>
+                    <a:pt x="2721655" y="1902630"/>
+                  </a:lnTo>
+                  <a:lnTo>
+                    <a:pt x="2793278" y="1931075"/>
+                  </a:lnTo>
+                  <a:lnTo>
+                    <a:pt x="2864901" y="1958767"/>
+                  </a:lnTo>
+                  <a:lnTo>
+                    <a:pt x="2936523" y="1985727"/>
+                  </a:lnTo>
+                  <a:lnTo>
+                    <a:pt x="3008146" y="2011975"/>
+                  </a:lnTo>
+                  <a:lnTo>
+                    <a:pt x="3079768" y="2037528"/>
+                  </a:lnTo>
+                  <a:lnTo>
+                    <a:pt x="3151391" y="2062405"/>
+                  </a:lnTo>
+                  <a:lnTo>
+                    <a:pt x="3223013" y="2086624"/>
+                  </a:lnTo>
+                  <a:lnTo>
+                    <a:pt x="3294636" y="2110203"/>
+                  </a:lnTo>
+                  <a:lnTo>
+                    <a:pt x="3366258" y="2133159"/>
+                  </a:lnTo>
+                  <a:lnTo>
+                    <a:pt x="3437881" y="2152770"/>
+                  </a:lnTo>
+                  <a:lnTo>
+                    <a:pt x="3509503" y="2165774"/>
+                  </a:lnTo>
+                  <a:lnTo>
+                    <a:pt x="3581126" y="2178572"/>
+                  </a:lnTo>
+                  <a:lnTo>
+                    <a:pt x="3652748" y="2191170"/>
+                  </a:lnTo>
+                  <a:lnTo>
+                    <a:pt x="3724371" y="2203568"/>
+                  </a:lnTo>
+                  <a:lnTo>
+                    <a:pt x="3795993" y="2215772"/>
+                  </a:lnTo>
+                  <a:lnTo>
+                    <a:pt x="3867616" y="2227783"/>
+                  </a:lnTo>
+                  <a:lnTo>
+                    <a:pt x="3939238" y="2239605"/>
+                  </a:lnTo>
+                  <a:lnTo>
+                    <a:pt x="4010861" y="2251240"/>
+                  </a:lnTo>
+                  <a:lnTo>
+                    <a:pt x="4082483" y="2262693"/>
+                  </a:lnTo>
+                  <a:lnTo>
+                    <a:pt x="4154106" y="2273965"/>
+                  </a:lnTo>
+                  <a:lnTo>
+                    <a:pt x="4225729" y="2285059"/>
+                  </a:lnTo>
+                  <a:lnTo>
+                    <a:pt x="4297351" y="2295979"/>
+                  </a:lnTo>
+                  <a:lnTo>
+                    <a:pt x="4368974" y="2306727"/>
+                  </a:lnTo>
+                  <a:lnTo>
+                    <a:pt x="4440596" y="2317305"/>
+                  </a:lnTo>
+                  <a:lnTo>
+                    <a:pt x="4512219" y="2327717"/>
+                  </a:lnTo>
+                  <a:lnTo>
+                    <a:pt x="4583841" y="2337964"/>
+                  </a:lnTo>
+                  <a:lnTo>
+                    <a:pt x="4655464" y="2348051"/>
+                  </a:lnTo>
+                  <a:lnTo>
+                    <a:pt x="4727086" y="2357978"/>
+                  </a:lnTo>
+                  <a:lnTo>
+                    <a:pt x="4798709" y="2367749"/>
+                  </a:lnTo>
+                  <a:lnTo>
+                    <a:pt x="4870331" y="2377366"/>
+                  </a:lnTo>
+                  <a:lnTo>
+                    <a:pt x="4941954" y="2386832"/>
+                  </a:lnTo>
+                  <a:lnTo>
+                    <a:pt x="5013576" y="2396148"/>
+                  </a:lnTo>
+                  <a:lnTo>
+                    <a:pt x="5085199" y="2405318"/>
+                  </a:lnTo>
+                  <a:lnTo>
+                    <a:pt x="5156821" y="2414343"/>
+                  </a:lnTo>
+                  <a:lnTo>
+                    <a:pt x="5228444" y="2423226"/>
+                  </a:lnTo>
+                  <a:lnTo>
+                    <a:pt x="5300066" y="2431969"/>
+                  </a:lnTo>
+                  <a:lnTo>
+                    <a:pt x="5371689" y="2440575"/>
+                  </a:lnTo>
+                  <a:lnTo>
+                    <a:pt x="5443311" y="2449044"/>
+                  </a:lnTo>
+                  <a:lnTo>
+                    <a:pt x="5514934" y="2457381"/>
+                  </a:lnTo>
+                  <a:lnTo>
+                    <a:pt x="5586557" y="2465586"/>
+                  </a:lnTo>
+                  <a:lnTo>
+                    <a:pt x="5658179" y="2473662"/>
+                  </a:lnTo>
+                  <a:lnTo>
+                    <a:pt x="5729802" y="2481610"/>
+                  </a:lnTo>
+                  <a:lnTo>
+                    <a:pt x="5801424" y="2489434"/>
+                  </a:lnTo>
+                  <a:lnTo>
+                    <a:pt x="5873047" y="2497134"/>
+                  </a:lnTo>
+                  <a:lnTo>
+                    <a:pt x="5944669" y="2504713"/>
+                  </a:lnTo>
+                  <a:lnTo>
+                    <a:pt x="6016292" y="2512172"/>
+                  </a:lnTo>
+                  <a:lnTo>
+                    <a:pt x="6087914" y="2519514"/>
+                  </a:lnTo>
+                  <a:lnTo>
+                    <a:pt x="6159537" y="2526740"/>
+                  </a:lnTo>
+                  <a:lnTo>
+                    <a:pt x="6231159" y="2533853"/>
+                  </a:lnTo>
+                  <a:lnTo>
+                    <a:pt x="6302782" y="2540853"/>
+                  </a:lnTo>
+                  <a:lnTo>
+                    <a:pt x="6374404" y="2547743"/>
+                  </a:lnTo>
+                  <a:lnTo>
+                    <a:pt x="6446027" y="2554525"/>
+                  </a:lnTo>
+                  <a:lnTo>
+                    <a:pt x="6517649" y="2561200"/>
+                  </a:lnTo>
+                  <a:lnTo>
+                    <a:pt x="6589272" y="2567769"/>
+                  </a:lnTo>
+                  <a:lnTo>
+                    <a:pt x="6660894" y="2574235"/>
+                  </a:lnTo>
+                  <a:lnTo>
+                    <a:pt x="6732517" y="2580600"/>
+                  </a:lnTo>
+                  <a:lnTo>
+                    <a:pt x="6804139" y="2586864"/>
+                  </a:lnTo>
+                  <a:lnTo>
+                    <a:pt x="6875762" y="2593029"/>
+                  </a:lnTo>
+                  <a:lnTo>
+                    <a:pt x="6947385" y="2599097"/>
+                  </a:lnTo>
+                  <a:lnTo>
+                    <a:pt x="7019007" y="2605070"/>
+                  </a:lnTo>
+                  <a:lnTo>
+                    <a:pt x="7090630" y="2610948"/>
+                  </a:lnTo>
+                </a:path>
+              </a:pathLst>
+            </a:custGeom>
+          </p:spPr>
+          <p:txBody>
+            <a:bodyPr/>
+            <a:lstStyle/>
+            <a:p/>
+          </p:txBody>
+        </p:sp>
+        <p:sp>
+          <p:nvSpPr>
             <p:cNvPr id="22" name="pl22"/>
             <p:cNvSpPr/>
             <p:nvPr/>
           </p:nvSpPr>
           <p:spPr>
             <a:xfrm>
-              <a:off x="817517" y="2649925"/>
-              <a:ext cx="7235830" cy="2540034"/>
+              <a:off x="1172049" y="3788346"/>
+              <a:ext cx="7090630" cy="1559184"/>
             </a:xfrm>
             <a:custGeom>
               <a:avLst/>
               <a:pathLst>
-                <a:path w="7235830" h="2540034">
+                <a:path w="7090630" h="1559184">
                   <a:moveTo>
+                    <a:pt x="7090630" y="1559184"/>
+                  </a:moveTo>
+                  <a:lnTo>
+                    <a:pt x="7019007" y="1553488"/>
+                  </a:lnTo>
+                  <a:lnTo>
+                    <a:pt x="6947385" y="1547636"/>
+                  </a:lnTo>
+                  <a:lnTo>
+                    <a:pt x="6875762" y="1541626"/>
+                  </a:lnTo>
+                  <a:lnTo>
+                    <a:pt x="6804139" y="1535452"/>
+                  </a:lnTo>
+                  <a:lnTo>
+                    <a:pt x="6732517" y="1529111"/>
+                  </a:lnTo>
+                  <a:lnTo>
+                    <a:pt x="6660894" y="1522597"/>
+                  </a:lnTo>
+                  <a:lnTo>
+                    <a:pt x="6589272" y="1515907"/>
+                  </a:lnTo>
+                  <a:lnTo>
+                    <a:pt x="6517649" y="1509034"/>
+                  </a:lnTo>
+                  <a:lnTo>
+                    <a:pt x="6446027" y="1501975"/>
+                  </a:lnTo>
+                  <a:lnTo>
+                    <a:pt x="6374404" y="1494725"/>
+                  </a:lnTo>
+                  <a:lnTo>
+                    <a:pt x="6302782" y="1487277"/>
+                  </a:lnTo>
+                  <a:lnTo>
+                    <a:pt x="6231159" y="1479627"/>
+                  </a:lnTo>
+                  <a:lnTo>
+                    <a:pt x="6159537" y="1471769"/>
+                  </a:lnTo>
+                  <a:lnTo>
+                    <a:pt x="6087914" y="1463698"/>
+                  </a:lnTo>
+                  <a:lnTo>
+                    <a:pt x="6016292" y="1455408"/>
+                  </a:lnTo>
+                  <a:lnTo>
+                    <a:pt x="5944669" y="1446892"/>
+                  </a:lnTo>
+                  <a:lnTo>
+                    <a:pt x="5873047" y="1438145"/>
+                  </a:lnTo>
+                  <a:lnTo>
+                    <a:pt x="5801424" y="1429160"/>
+                  </a:lnTo>
+                  <a:lnTo>
+                    <a:pt x="5729802" y="1419932"/>
+                  </a:lnTo>
+                  <a:lnTo>
+                    <a:pt x="5658179" y="1410452"/>
+                  </a:lnTo>
+                  <a:lnTo>
+                    <a:pt x="5586557" y="1400716"/>
+                  </a:lnTo>
+                  <a:lnTo>
+                    <a:pt x="5514934" y="1390714"/>
+                  </a:lnTo>
+                  <a:lnTo>
+                    <a:pt x="5443311" y="1380441"/>
+                  </a:lnTo>
+                  <a:lnTo>
+                    <a:pt x="5371689" y="1369889"/>
+                  </a:lnTo>
+                  <a:lnTo>
+                    <a:pt x="5300066" y="1359051"/>
+                  </a:lnTo>
+                  <a:lnTo>
+                    <a:pt x="5228444" y="1347917"/>
+                  </a:lnTo>
+                  <a:lnTo>
+                    <a:pt x="5156821" y="1336482"/>
+                  </a:lnTo>
+                  <a:lnTo>
+                    <a:pt x="5085199" y="1324736"/>
+                  </a:lnTo>
+                  <a:lnTo>
+                    <a:pt x="5013576" y="1312671"/>
+                  </a:lnTo>
+                  <a:lnTo>
+                    <a:pt x="4941954" y="1300278"/>
+                  </a:lnTo>
+                  <a:lnTo>
+                    <a:pt x="4870331" y="1287548"/>
+                  </a:lnTo>
+                  <a:lnTo>
+                    <a:pt x="4798709" y="1274473"/>
+                  </a:lnTo>
+                  <a:lnTo>
+                    <a:pt x="4727086" y="1261042"/>
+                  </a:lnTo>
+                  <a:lnTo>
+                    <a:pt x="4655464" y="1247247"/>
+                  </a:lnTo>
+                  <a:lnTo>
+                    <a:pt x="4583841" y="1233077"/>
+                  </a:lnTo>
+                  <a:lnTo>
+                    <a:pt x="4512219" y="1218522"/>
+                  </a:lnTo>
+                  <a:lnTo>
+                    <a:pt x="4440596" y="1203572"/>
+                  </a:lnTo>
+                  <a:lnTo>
+                    <a:pt x="4368974" y="1188215"/>
+                  </a:lnTo>
+                  <a:lnTo>
+                    <a:pt x="4297351" y="1172442"/>
+                  </a:lnTo>
+                  <a:lnTo>
+                    <a:pt x="4225729" y="1156240"/>
+                  </a:lnTo>
+                  <a:lnTo>
+                    <a:pt x="4154106" y="1139598"/>
+                  </a:lnTo>
+                  <a:lnTo>
+                    <a:pt x="4082483" y="1122503"/>
+                  </a:lnTo>
+                  <a:lnTo>
+                    <a:pt x="4010861" y="1104945"/>
+                  </a:lnTo>
+                  <a:lnTo>
+                    <a:pt x="3939238" y="1086909"/>
+                  </a:lnTo>
+                  <a:lnTo>
+                    <a:pt x="3867616" y="1068384"/>
+                  </a:lnTo>
+                  <a:lnTo>
+                    <a:pt x="3795993" y="1049355"/>
+                  </a:lnTo>
+                  <a:lnTo>
+                    <a:pt x="3724371" y="1029810"/>
+                  </a:lnTo>
+                  <a:lnTo>
+                    <a:pt x="3652748" y="1009733"/>
+                  </a:lnTo>
+                  <a:lnTo>
+                    <a:pt x="3581126" y="989111"/>
+                  </a:lnTo>
+                  <a:lnTo>
+                    <a:pt x="3509503" y="967930"/>
+                  </a:lnTo>
+                  <a:lnTo>
+                    <a:pt x="3437881" y="946172"/>
+                  </a:lnTo>
+                  <a:lnTo>
+                    <a:pt x="3366258" y="930223"/>
+                  </a:lnTo>
+                  <a:lnTo>
+                    <a:pt x="3294636" y="916800"/>
+                  </a:lnTo>
+                  <a:lnTo>
+                    <a:pt x="3223013" y="903162"/>
+                  </a:lnTo>
+                  <a:lnTo>
+                    <a:pt x="3151391" y="889306"/>
+                  </a:lnTo>
+                  <a:lnTo>
+                    <a:pt x="3079768" y="875228"/>
+                  </a:lnTo>
+                  <a:lnTo>
+                    <a:pt x="3008146" y="860924"/>
+                  </a:lnTo>
+                  <a:lnTo>
+                    <a:pt x="2936523" y="846392"/>
+                  </a:lnTo>
+                  <a:lnTo>
+                    <a:pt x="2864901" y="831627"/>
+                  </a:lnTo>
+                  <a:lnTo>
+                    <a:pt x="2793278" y="816626"/>
+                  </a:lnTo>
+                  <a:lnTo>
+                    <a:pt x="2721655" y="801384"/>
+                  </a:lnTo>
+                  <a:lnTo>
+                    <a:pt x="2650033" y="785899"/>
+                  </a:lnTo>
+                  <a:lnTo>
+                    <a:pt x="2578410" y="770166"/>
+                  </a:lnTo>
+                  <a:lnTo>
+                    <a:pt x="2506788" y="754181"/>
+                  </a:lnTo>
+                  <a:lnTo>
+                    <a:pt x="2435165" y="737940"/>
+                  </a:lnTo>
+                  <a:lnTo>
+                    <a:pt x="2363543" y="721439"/>
+                  </a:lnTo>
+                  <a:lnTo>
+                    <a:pt x="2291920" y="704675"/>
+                  </a:lnTo>
+                  <a:lnTo>
+                    <a:pt x="2220298" y="687641"/>
+                  </a:lnTo>
+                  <a:lnTo>
+                    <a:pt x="2148675" y="670336"/>
+                  </a:lnTo>
+                  <a:lnTo>
+                    <a:pt x="2077053" y="652753"/>
+                  </a:lnTo>
+                  <a:lnTo>
+                    <a:pt x="2005430" y="634889"/>
+                  </a:lnTo>
+                  <a:lnTo>
+                    <a:pt x="1933808" y="616739"/>
+                  </a:lnTo>
+                  <a:lnTo>
+                    <a:pt x="1862185" y="598298"/>
+                  </a:lnTo>
+                  <a:lnTo>
+                    <a:pt x="1790563" y="579562"/>
+                  </a:lnTo>
+                  <a:lnTo>
+                    <a:pt x="1718940" y="560527"/>
+                  </a:lnTo>
+                  <a:lnTo>
+                    <a:pt x="1647318" y="541186"/>
+                  </a:lnTo>
+                  <a:lnTo>
+                    <a:pt x="1575695" y="521537"/>
+                  </a:lnTo>
+                  <a:lnTo>
+                    <a:pt x="1504073" y="501572"/>
+                  </a:lnTo>
+                  <a:lnTo>
+                    <a:pt x="1432450" y="481289"/>
+                  </a:lnTo>
+                  <a:lnTo>
+                    <a:pt x="1360827" y="460680"/>
+                  </a:lnTo>
+                  <a:lnTo>
+                    <a:pt x="1289205" y="439742"/>
+                  </a:lnTo>
+                  <a:lnTo>
+                    <a:pt x="1217582" y="418468"/>
+                  </a:lnTo>
+                  <a:lnTo>
+                    <a:pt x="1145960" y="396854"/>
+                  </a:lnTo>
+                  <a:lnTo>
+                    <a:pt x="1074337" y="374895"/>
+                  </a:lnTo>
+                  <a:lnTo>
+                    <a:pt x="1002715" y="352583"/>
+                  </a:lnTo>
+                  <a:lnTo>
+                    <a:pt x="931092" y="329915"/>
+                  </a:lnTo>
+                  <a:lnTo>
+                    <a:pt x="859470" y="306883"/>
+                  </a:lnTo>
+                  <a:lnTo>
+                    <a:pt x="787847" y="283484"/>
+                  </a:lnTo>
+                  <a:lnTo>
+                    <a:pt x="716225" y="259709"/>
+                  </a:lnTo>
+                  <a:lnTo>
+                    <a:pt x="644602" y="235554"/>
+                  </a:lnTo>
+                  <a:lnTo>
+                    <a:pt x="572980" y="211013"/>
+                  </a:lnTo>
+                  <a:lnTo>
+                    <a:pt x="501357" y="186079"/>
+                  </a:lnTo>
+                  <a:lnTo>
+                    <a:pt x="429735" y="160745"/>
+                  </a:lnTo>
+                  <a:lnTo>
+                    <a:pt x="358112" y="135006"/>
+                  </a:lnTo>
+                  <a:lnTo>
+                    <a:pt x="286490" y="108856"/>
+                  </a:lnTo>
+                  <a:lnTo>
+                    <a:pt x="214867" y="82286"/>
+                  </a:lnTo>
+                  <a:lnTo>
+                    <a:pt x="143245" y="55292"/>
+                  </a:lnTo>
+                  <a:lnTo>
+                    <a:pt x="71622" y="27865"/>
+                  </a:lnTo>
+                  <a:lnTo>
                     <a:pt x="0" y="0"/>
-                  </a:moveTo>
-                  <a:lnTo>
-                    <a:pt x="7347" y="7845"/>
-                  </a:lnTo>
-                  <a:lnTo>
-                    <a:pt x="81107" y="84523"/>
-                  </a:lnTo>
-                  <a:lnTo>
-                    <a:pt x="154867" y="159172"/>
-                  </a:lnTo>
-                  <a:lnTo>
-                    <a:pt x="228627" y="231848"/>
-                  </a:lnTo>
-                  <a:lnTo>
-                    <a:pt x="302387" y="302601"/>
-                  </a:lnTo>
-                  <a:lnTo>
-                    <a:pt x="376147" y="371484"/>
-                  </a:lnTo>
-                  <a:lnTo>
-                    <a:pt x="449907" y="438545"/>
-                  </a:lnTo>
-                  <a:lnTo>
-                    <a:pt x="523667" y="503832"/>
-                  </a:lnTo>
-                  <a:lnTo>
-                    <a:pt x="597427" y="567393"/>
-                  </a:lnTo>
-                  <a:lnTo>
-                    <a:pt x="671187" y="629273"/>
-                  </a:lnTo>
-                  <a:lnTo>
-                    <a:pt x="744947" y="689517"/>
-                  </a:lnTo>
-                  <a:lnTo>
-                    <a:pt x="818707" y="748167"/>
-                  </a:lnTo>
-                  <a:lnTo>
-                    <a:pt x="892467" y="805267"/>
-                  </a:lnTo>
-                  <a:lnTo>
-                    <a:pt x="966227" y="860856"/>
-                  </a:lnTo>
-                  <a:lnTo>
-                    <a:pt x="1039987" y="914975"/>
-                  </a:lnTo>
-                  <a:lnTo>
-                    <a:pt x="1113747" y="967664"/>
-                  </a:lnTo>
-                  <a:lnTo>
-                    <a:pt x="1187508" y="1018958"/>
-                  </a:lnTo>
-                  <a:lnTo>
-                    <a:pt x="1261268" y="1068897"/>
-                  </a:lnTo>
-                  <a:lnTo>
-                    <a:pt x="1335028" y="1117514"/>
-                  </a:lnTo>
-                  <a:lnTo>
-                    <a:pt x="1408788" y="1164846"/>
-                  </a:lnTo>
-                  <a:lnTo>
-                    <a:pt x="1482548" y="1210926"/>
-                  </a:lnTo>
-                  <a:lnTo>
-                    <a:pt x="1556308" y="1255788"/>
-                  </a:lnTo>
-                  <a:lnTo>
-                    <a:pt x="1630068" y="1299463"/>
-                  </a:lnTo>
-                  <a:lnTo>
-                    <a:pt x="1703828" y="1341984"/>
-                  </a:lnTo>
-                  <a:lnTo>
-                    <a:pt x="1777588" y="1383379"/>
-                  </a:lnTo>
-                  <a:lnTo>
-                    <a:pt x="1851348" y="1423680"/>
-                  </a:lnTo>
-                  <a:lnTo>
-                    <a:pt x="1925108" y="1462916"/>
-                  </a:lnTo>
-                  <a:lnTo>
-                    <a:pt x="1998868" y="1501113"/>
-                  </a:lnTo>
-                  <a:lnTo>
-                    <a:pt x="2072628" y="1538301"/>
-                  </a:lnTo>
-                  <a:lnTo>
-                    <a:pt x="2146388" y="1574505"/>
-                  </a:lnTo>
-                  <a:lnTo>
-                    <a:pt x="2220148" y="1609752"/>
-                  </a:lnTo>
-                  <a:lnTo>
-                    <a:pt x="2293908" y="1644066"/>
-                  </a:lnTo>
-                  <a:lnTo>
-                    <a:pt x="2367668" y="1677474"/>
-                  </a:lnTo>
-                  <a:lnTo>
-                    <a:pt x="2441428" y="1709997"/>
-                  </a:lnTo>
-                  <a:lnTo>
-                    <a:pt x="2515188" y="1741661"/>
-                  </a:lnTo>
-                  <a:lnTo>
-                    <a:pt x="2588948" y="1772487"/>
-                  </a:lnTo>
-                  <a:lnTo>
-                    <a:pt x="2662708" y="1802498"/>
-                  </a:lnTo>
-                  <a:lnTo>
-                    <a:pt x="2736468" y="1831716"/>
-                  </a:lnTo>
-                  <a:lnTo>
-                    <a:pt x="2810228" y="1860160"/>
-                  </a:lnTo>
-                  <a:lnTo>
-                    <a:pt x="2883988" y="1887853"/>
-                  </a:lnTo>
-                  <a:lnTo>
-                    <a:pt x="2957748" y="1914813"/>
-                  </a:lnTo>
-                  <a:lnTo>
-                    <a:pt x="3031508" y="1941060"/>
-                  </a:lnTo>
-                  <a:lnTo>
-                    <a:pt x="3105268" y="1966613"/>
-                  </a:lnTo>
-                  <a:lnTo>
-                    <a:pt x="3179028" y="1991490"/>
-                  </a:lnTo>
-                  <a:lnTo>
-                    <a:pt x="3252788" y="2015710"/>
-                  </a:lnTo>
-                  <a:lnTo>
-                    <a:pt x="3326548" y="2039289"/>
-                  </a:lnTo>
-                  <a:lnTo>
-                    <a:pt x="3400308" y="2062244"/>
-                  </a:lnTo>
-                  <a:lnTo>
-                    <a:pt x="3474068" y="2081855"/>
-                  </a:lnTo>
-                  <a:lnTo>
-                    <a:pt x="3547828" y="2094859"/>
-                  </a:lnTo>
-                  <a:lnTo>
-                    <a:pt x="3621588" y="2107658"/>
-                  </a:lnTo>
-                  <a:lnTo>
-                    <a:pt x="3695348" y="2120255"/>
-                  </a:lnTo>
-                  <a:lnTo>
-                    <a:pt x="3769108" y="2132654"/>
-                  </a:lnTo>
-                  <a:lnTo>
-                    <a:pt x="3842868" y="2144857"/>
-                  </a:lnTo>
-                  <a:lnTo>
-                    <a:pt x="3916628" y="2156868"/>
-                  </a:lnTo>
-                  <a:lnTo>
-                    <a:pt x="3990388" y="2168690"/>
-                  </a:lnTo>
-                  <a:lnTo>
-                    <a:pt x="4064149" y="2180326"/>
-                  </a:lnTo>
-                  <a:lnTo>
-                    <a:pt x="4137909" y="2191778"/>
-                  </a:lnTo>
-                  <a:lnTo>
-                    <a:pt x="4211669" y="2203050"/>
-                  </a:lnTo>
-                  <a:lnTo>
-                    <a:pt x="4285429" y="2214145"/>
-                  </a:lnTo>
-                  <a:lnTo>
-                    <a:pt x="4359189" y="2225064"/>
-                  </a:lnTo>
-                  <a:lnTo>
-                    <a:pt x="4432949" y="2235812"/>
-                  </a:lnTo>
-                  <a:lnTo>
-                    <a:pt x="4506709" y="2246390"/>
-                  </a:lnTo>
-                  <a:lnTo>
-                    <a:pt x="4580469" y="2256802"/>
-                  </a:lnTo>
-                  <a:lnTo>
-                    <a:pt x="4654229" y="2267050"/>
-                  </a:lnTo>
-                  <a:lnTo>
-                    <a:pt x="4727989" y="2277136"/>
-                  </a:lnTo>
-                  <a:lnTo>
-                    <a:pt x="4801749" y="2287063"/>
-                  </a:lnTo>
-                  <a:lnTo>
-                    <a:pt x="4875509" y="2296834"/>
-                  </a:lnTo>
-                  <a:lnTo>
-                    <a:pt x="4949269" y="2306451"/>
-                  </a:lnTo>
-                  <a:lnTo>
-                    <a:pt x="5023029" y="2315917"/>
-                  </a:lnTo>
-                  <a:lnTo>
-                    <a:pt x="5096789" y="2325233"/>
-                  </a:lnTo>
-                  <a:lnTo>
-                    <a:pt x="5170549" y="2334403"/>
-                  </a:lnTo>
-                  <a:lnTo>
-                    <a:pt x="5244309" y="2343428"/>
-                  </a:lnTo>
-                  <a:lnTo>
-                    <a:pt x="5318069" y="2352311"/>
-                  </a:lnTo>
-                  <a:lnTo>
-                    <a:pt x="5391829" y="2361055"/>
-                  </a:lnTo>
-                  <a:lnTo>
-                    <a:pt x="5465589" y="2369660"/>
-                  </a:lnTo>
-                  <a:lnTo>
-                    <a:pt x="5539349" y="2378130"/>
-                  </a:lnTo>
-                  <a:lnTo>
-                    <a:pt x="5613109" y="2386466"/>
-                  </a:lnTo>
-                  <a:lnTo>
-                    <a:pt x="5686869" y="2394671"/>
-                  </a:lnTo>
-                  <a:lnTo>
-                    <a:pt x="5760629" y="2402747"/>
-                  </a:lnTo>
-                  <a:lnTo>
-                    <a:pt x="5834389" y="2410696"/>
-                  </a:lnTo>
-                  <a:lnTo>
-                    <a:pt x="5908149" y="2418519"/>
-                  </a:lnTo>
-                  <a:lnTo>
-                    <a:pt x="5981909" y="2426219"/>
-                  </a:lnTo>
-                  <a:lnTo>
-                    <a:pt x="6055669" y="2433798"/>
-                  </a:lnTo>
-                  <a:lnTo>
-                    <a:pt x="6129429" y="2441258"/>
-                  </a:lnTo>
-                  <a:lnTo>
-                    <a:pt x="6203189" y="2448600"/>
-                  </a:lnTo>
-                  <a:lnTo>
-                    <a:pt x="6276949" y="2455826"/>
-                  </a:lnTo>
-                  <a:lnTo>
-                    <a:pt x="6350709" y="2462938"/>
-                  </a:lnTo>
-                  <a:lnTo>
-                    <a:pt x="6424469" y="2469939"/>
-                  </a:lnTo>
-                  <a:lnTo>
-                    <a:pt x="6498229" y="2476829"/>
-                  </a:lnTo>
-                  <a:lnTo>
-                    <a:pt x="6571989" y="2483610"/>
-                  </a:lnTo>
-                  <a:lnTo>
-                    <a:pt x="6645749" y="2490285"/>
-                  </a:lnTo>
-                  <a:lnTo>
-                    <a:pt x="6719509" y="2496855"/>
-                  </a:lnTo>
-                  <a:lnTo>
-                    <a:pt x="6793269" y="2503321"/>
-                  </a:lnTo>
-                  <a:lnTo>
-                    <a:pt x="6867029" y="2509685"/>
-                  </a:lnTo>
-                  <a:lnTo>
-                    <a:pt x="6940789" y="2515949"/>
-                  </a:lnTo>
-                  <a:lnTo>
-                    <a:pt x="7014550" y="2522115"/>
-                  </a:lnTo>
-                  <a:lnTo>
-                    <a:pt x="7088310" y="2528183"/>
-                  </a:lnTo>
-                  <a:lnTo>
-                    <a:pt x="7162070" y="2534155"/>
-                  </a:lnTo>
-                  <a:lnTo>
-                    <a:pt x="7235830" y="2540034"/>
                   </a:lnTo>
                 </a:path>
               </a:pathLst>
@@ -3958,637 +4240,312 @@
           </p:nvSpPr>
           <p:spPr>
             <a:xfrm>
-              <a:off x="817517" y="3813435"/>
-              <a:ext cx="7235830" cy="1534095"/>
+              <a:off x="1172049" y="3261990"/>
+              <a:ext cx="7090630" cy="2017721"/>
             </a:xfrm>
             <a:custGeom>
               <a:avLst/>
               <a:pathLst>
-                <a:path w="7235830" h="1534095">
-                  <a:moveTo>
-                    <a:pt x="7235830" y="1534095"/>
-                  </a:moveTo>
-                  <a:lnTo>
-                    <a:pt x="7162070" y="1528398"/>
-                  </a:lnTo>
-                  <a:lnTo>
-                    <a:pt x="7088310" y="1522547"/>
-                  </a:lnTo>
-                  <a:lnTo>
-                    <a:pt x="7014550" y="1516536"/>
-                  </a:lnTo>
-                  <a:lnTo>
-                    <a:pt x="6940789" y="1510362"/>
-                  </a:lnTo>
-                  <a:lnTo>
-                    <a:pt x="6867029" y="1504021"/>
-                  </a:lnTo>
-                  <a:lnTo>
-                    <a:pt x="6793269" y="1497507"/>
-                  </a:lnTo>
-                  <a:lnTo>
-                    <a:pt x="6719509" y="1490817"/>
-                  </a:lnTo>
-                  <a:lnTo>
-                    <a:pt x="6645749" y="1483945"/>
-                  </a:lnTo>
-                  <a:lnTo>
-                    <a:pt x="6571989" y="1476886"/>
-                  </a:lnTo>
-                  <a:lnTo>
-                    <a:pt x="6498229" y="1469635"/>
-                  </a:lnTo>
-                  <a:lnTo>
-                    <a:pt x="6424469" y="1462187"/>
-                  </a:lnTo>
-                  <a:lnTo>
-                    <a:pt x="6350709" y="1454537"/>
-                  </a:lnTo>
-                  <a:lnTo>
-                    <a:pt x="6276949" y="1446679"/>
-                  </a:lnTo>
-                  <a:lnTo>
-                    <a:pt x="6203189" y="1438608"/>
-                  </a:lnTo>
-                  <a:lnTo>
-                    <a:pt x="6129429" y="1430318"/>
-                  </a:lnTo>
-                  <a:lnTo>
-                    <a:pt x="6055669" y="1421802"/>
-                  </a:lnTo>
-                  <a:lnTo>
-                    <a:pt x="5981909" y="1413055"/>
-                  </a:lnTo>
-                  <a:lnTo>
-                    <a:pt x="5908149" y="1404071"/>
-                  </a:lnTo>
-                  <a:lnTo>
-                    <a:pt x="5834389" y="1394842"/>
-                  </a:lnTo>
-                  <a:lnTo>
-                    <a:pt x="5760629" y="1385363"/>
-                  </a:lnTo>
-                  <a:lnTo>
-                    <a:pt x="5686869" y="1375626"/>
-                  </a:lnTo>
-                  <a:lnTo>
-                    <a:pt x="5613109" y="1365624"/>
-                  </a:lnTo>
-                  <a:lnTo>
-                    <a:pt x="5539349" y="1355351"/>
-                  </a:lnTo>
-                  <a:lnTo>
-                    <a:pt x="5465589" y="1344799"/>
-                  </a:lnTo>
-                  <a:lnTo>
-                    <a:pt x="5391829" y="1333961"/>
-                  </a:lnTo>
-                  <a:lnTo>
-                    <a:pt x="5318069" y="1322828"/>
-                  </a:lnTo>
-                  <a:lnTo>
-                    <a:pt x="5244309" y="1311392"/>
-                  </a:lnTo>
-                  <a:lnTo>
-                    <a:pt x="5170549" y="1299646"/>
-                  </a:lnTo>
-                  <a:lnTo>
-                    <a:pt x="5096789" y="1287581"/>
-                  </a:lnTo>
-                  <a:lnTo>
-                    <a:pt x="5023029" y="1275188"/>
-                  </a:lnTo>
-                  <a:lnTo>
-                    <a:pt x="4949269" y="1262458"/>
-                  </a:lnTo>
-                  <a:lnTo>
-                    <a:pt x="4875509" y="1249383"/>
-                  </a:lnTo>
-                  <a:lnTo>
-                    <a:pt x="4801749" y="1235953"/>
-                  </a:lnTo>
-                  <a:lnTo>
-                    <a:pt x="4727989" y="1222157"/>
-                  </a:lnTo>
-                  <a:lnTo>
-                    <a:pt x="4654229" y="1207987"/>
-                  </a:lnTo>
-                  <a:lnTo>
-                    <a:pt x="4580469" y="1193432"/>
-                  </a:lnTo>
-                  <a:lnTo>
-                    <a:pt x="4506709" y="1178482"/>
-                  </a:lnTo>
-                  <a:lnTo>
-                    <a:pt x="4432949" y="1163126"/>
-                  </a:lnTo>
-                  <a:lnTo>
-                    <a:pt x="4359189" y="1147352"/>
-                  </a:lnTo>
-                  <a:lnTo>
-                    <a:pt x="4285429" y="1131150"/>
-                  </a:lnTo>
-                  <a:lnTo>
-                    <a:pt x="4211669" y="1114508"/>
-                  </a:lnTo>
-                  <a:lnTo>
-                    <a:pt x="4137909" y="1097414"/>
-                  </a:lnTo>
-                  <a:lnTo>
-                    <a:pt x="4064149" y="1079855"/>
-                  </a:lnTo>
-                  <a:lnTo>
-                    <a:pt x="3990388" y="1061819"/>
-                  </a:lnTo>
-                  <a:lnTo>
-                    <a:pt x="3916628" y="1043294"/>
-                  </a:lnTo>
-                  <a:lnTo>
-                    <a:pt x="3842868" y="1024265"/>
-                  </a:lnTo>
-                  <a:lnTo>
-                    <a:pt x="3769108" y="1004720"/>
-                  </a:lnTo>
-                  <a:lnTo>
-                    <a:pt x="3695348" y="984644"/>
-                  </a:lnTo>
-                  <a:lnTo>
-                    <a:pt x="3621588" y="964022"/>
-                  </a:lnTo>
-                  <a:lnTo>
-                    <a:pt x="3547828" y="942840"/>
-                  </a:lnTo>
-                  <a:lnTo>
-                    <a:pt x="3474068" y="921082"/>
-                  </a:lnTo>
-                  <a:lnTo>
-                    <a:pt x="3400308" y="905134"/>
-                  </a:lnTo>
-                  <a:lnTo>
-                    <a:pt x="3326548" y="891710"/>
-                  </a:lnTo>
-                  <a:lnTo>
-                    <a:pt x="3252788" y="878072"/>
-                  </a:lnTo>
-                  <a:lnTo>
-                    <a:pt x="3179028" y="864216"/>
-                  </a:lnTo>
-                  <a:lnTo>
-                    <a:pt x="3105268" y="850138"/>
-                  </a:lnTo>
-                  <a:lnTo>
-                    <a:pt x="3031508" y="835834"/>
-                  </a:lnTo>
-                  <a:lnTo>
-                    <a:pt x="2957748" y="821302"/>
-                  </a:lnTo>
-                  <a:lnTo>
-                    <a:pt x="2883988" y="806537"/>
-                  </a:lnTo>
-                  <a:lnTo>
-                    <a:pt x="2810228" y="791536"/>
-                  </a:lnTo>
-                  <a:lnTo>
-                    <a:pt x="2736468" y="776295"/>
-                  </a:lnTo>
-                  <a:lnTo>
-                    <a:pt x="2662708" y="760809"/>
-                  </a:lnTo>
-                  <a:lnTo>
-                    <a:pt x="2588948" y="745076"/>
-                  </a:lnTo>
-                  <a:lnTo>
-                    <a:pt x="2515188" y="729091"/>
-                  </a:lnTo>
-                  <a:lnTo>
-                    <a:pt x="2441428" y="712850"/>
-                  </a:lnTo>
-                  <a:lnTo>
-                    <a:pt x="2367668" y="696350"/>
-                  </a:lnTo>
-                  <a:lnTo>
-                    <a:pt x="2293908" y="679585"/>
-                  </a:lnTo>
-                  <a:lnTo>
-                    <a:pt x="2220148" y="662552"/>
-                  </a:lnTo>
-                  <a:lnTo>
-                    <a:pt x="2146388" y="645246"/>
-                  </a:lnTo>
-                  <a:lnTo>
-                    <a:pt x="2072628" y="627663"/>
-                  </a:lnTo>
-                  <a:lnTo>
-                    <a:pt x="1998868" y="609799"/>
-                  </a:lnTo>
-                  <a:lnTo>
-                    <a:pt x="1925108" y="591649"/>
-                  </a:lnTo>
-                  <a:lnTo>
-                    <a:pt x="1851348" y="573208"/>
-                  </a:lnTo>
-                  <a:lnTo>
-                    <a:pt x="1777588" y="554473"/>
-                  </a:lnTo>
-                  <a:lnTo>
-                    <a:pt x="1703828" y="535437"/>
-                  </a:lnTo>
-                  <a:lnTo>
-                    <a:pt x="1630068" y="516097"/>
-                  </a:lnTo>
-                  <a:lnTo>
-                    <a:pt x="1556308" y="496447"/>
-                  </a:lnTo>
-                  <a:lnTo>
-                    <a:pt x="1482548" y="476483"/>
-                  </a:lnTo>
-                  <a:lnTo>
-                    <a:pt x="1408788" y="456199"/>
-                  </a:lnTo>
-                  <a:lnTo>
-                    <a:pt x="1335028" y="435590"/>
-                  </a:lnTo>
-                  <a:lnTo>
-                    <a:pt x="1261268" y="414652"/>
-                  </a:lnTo>
-                  <a:lnTo>
-                    <a:pt x="1187508" y="393379"/>
-                  </a:lnTo>
-                  <a:lnTo>
-                    <a:pt x="1113747" y="371765"/>
-                  </a:lnTo>
-                  <a:lnTo>
-                    <a:pt x="1039987" y="349805"/>
-                  </a:lnTo>
-                  <a:lnTo>
-                    <a:pt x="966227" y="327493"/>
-                  </a:lnTo>
-                  <a:lnTo>
-                    <a:pt x="892467" y="304825"/>
-                  </a:lnTo>
-                  <a:lnTo>
-                    <a:pt x="818707" y="281794"/>
-                  </a:lnTo>
-                  <a:lnTo>
-                    <a:pt x="744947" y="258394"/>
-                  </a:lnTo>
-                  <a:lnTo>
-                    <a:pt x="671187" y="234620"/>
-                  </a:lnTo>
-                  <a:lnTo>
-                    <a:pt x="597427" y="210465"/>
-                  </a:lnTo>
-                  <a:lnTo>
-                    <a:pt x="523667" y="185923"/>
-                  </a:lnTo>
-                  <a:lnTo>
-                    <a:pt x="449907" y="160989"/>
-                  </a:lnTo>
-                  <a:lnTo>
-                    <a:pt x="376147" y="135655"/>
-                  </a:lnTo>
-                  <a:lnTo>
-                    <a:pt x="302387" y="109917"/>
-                  </a:lnTo>
-                  <a:lnTo>
-                    <a:pt x="228627" y="83766"/>
-                  </a:lnTo>
-                  <a:lnTo>
-                    <a:pt x="154867" y="57197"/>
-                  </a:lnTo>
-                  <a:lnTo>
-                    <a:pt x="81107" y="30202"/>
-                  </a:lnTo>
-                  <a:lnTo>
-                    <a:pt x="7347" y="2775"/>
-                  </a:lnTo>
-                  <a:lnTo>
-                    <a:pt x="0" y="0"/>
-                  </a:lnTo>
-                </a:path>
-              </a:pathLst>
-            </a:custGeom>
-          </p:spPr>
-          <p:txBody>
-            <a:bodyPr/>
-            <a:lstStyle/>
-            <a:p/>
-          </p:txBody>
-        </p:sp>
-        <p:sp>
-          <p:nvSpPr>
-            <p:cNvPr id="24" name="pl24"/>
-            <p:cNvSpPr/>
-            <p:nvPr/>
-          </p:nvSpPr>
-          <p:spPr>
-            <a:xfrm>
-              <a:off x="817517" y="3305624"/>
-              <a:ext cx="7235830" cy="1974087"/>
-            </a:xfrm>
-            <a:custGeom>
-              <a:avLst/>
-              <a:pathLst>
-                <a:path w="7235830" h="1974087">
+                <a:path w="7090630" h="2017721">
                   <a:moveTo>
                     <a:pt x="0" y="0"/>
                   </a:moveTo>
                   <a:lnTo>
-                    <a:pt x="7347" y="4827"/>
-                  </a:lnTo>
-                  <a:lnTo>
-                    <a:pt x="81107" y="52265"/>
-                  </a:lnTo>
-                  <a:lnTo>
-                    <a:pt x="154867" y="98702"/>
-                  </a:lnTo>
-                  <a:lnTo>
-                    <a:pt x="228627" y="144158"/>
-                  </a:lnTo>
-                  <a:lnTo>
-                    <a:pt x="302387" y="188655"/>
-                  </a:lnTo>
-                  <a:lnTo>
-                    <a:pt x="376147" y="232212"/>
-                  </a:lnTo>
-                  <a:lnTo>
-                    <a:pt x="449907" y="274849"/>
-                  </a:lnTo>
-                  <a:lnTo>
-                    <a:pt x="523667" y="316586"/>
-                  </a:lnTo>
-                  <a:lnTo>
-                    <a:pt x="597427" y="357442"/>
-                  </a:lnTo>
-                  <a:lnTo>
-                    <a:pt x="671187" y="397435"/>
-                  </a:lnTo>
-                  <a:lnTo>
-                    <a:pt x="744947" y="436584"/>
-                  </a:lnTo>
-                  <a:lnTo>
-                    <a:pt x="818707" y="474907"/>
-                  </a:lnTo>
-                  <a:lnTo>
-                    <a:pt x="892467" y="512420"/>
-                  </a:lnTo>
-                  <a:lnTo>
-                    <a:pt x="966227" y="549141"/>
-                  </a:lnTo>
-                  <a:lnTo>
-                    <a:pt x="1039987" y="585087"/>
-                  </a:lnTo>
-                  <a:lnTo>
-                    <a:pt x="1113747" y="620274"/>
-                  </a:lnTo>
-                  <a:lnTo>
-                    <a:pt x="1187508" y="654717"/>
-                  </a:lnTo>
-                  <a:lnTo>
-                    <a:pt x="1261268" y="688434"/>
-                  </a:lnTo>
-                  <a:lnTo>
-                    <a:pt x="1335028" y="721439"/>
-                  </a:lnTo>
-                  <a:lnTo>
-                    <a:pt x="1408788" y="753747"/>
-                  </a:lnTo>
-                  <a:lnTo>
-                    <a:pt x="1482548" y="785373"/>
-                  </a:lnTo>
-                  <a:lnTo>
-                    <a:pt x="1556308" y="816331"/>
-                  </a:lnTo>
-                  <a:lnTo>
-                    <a:pt x="1630068" y="846635"/>
-                  </a:lnTo>
-                  <a:lnTo>
-                    <a:pt x="1703828" y="876300"/>
-                  </a:lnTo>
-                  <a:lnTo>
-                    <a:pt x="1777588" y="905338"/>
-                  </a:lnTo>
-                  <a:lnTo>
-                    <a:pt x="1851348" y="933763"/>
-                  </a:lnTo>
-                  <a:lnTo>
-                    <a:pt x="1925108" y="961588"/>
-                  </a:lnTo>
-                  <a:lnTo>
-                    <a:pt x="1998868" y="988826"/>
-                  </a:lnTo>
-                  <a:lnTo>
-                    <a:pt x="2072628" y="1015488"/>
-                  </a:lnTo>
-                  <a:lnTo>
-                    <a:pt x="2146388" y="1041588"/>
-                  </a:lnTo>
-                  <a:lnTo>
-                    <a:pt x="2220148" y="1067136"/>
-                  </a:lnTo>
-                  <a:lnTo>
-                    <a:pt x="2293908" y="1092145"/>
-                  </a:lnTo>
-                  <a:lnTo>
-                    <a:pt x="2367668" y="1116626"/>
-                  </a:lnTo>
-                  <a:lnTo>
-                    <a:pt x="2441428" y="1140590"/>
-                  </a:lnTo>
-                  <a:lnTo>
-                    <a:pt x="2515188" y="1164048"/>
-                  </a:lnTo>
-                  <a:lnTo>
-                    <a:pt x="2588948" y="1187011"/>
-                  </a:lnTo>
-                  <a:lnTo>
-                    <a:pt x="2662708" y="1209489"/>
-                  </a:lnTo>
-                  <a:lnTo>
-                    <a:pt x="2736468" y="1231492"/>
-                  </a:lnTo>
-                  <a:lnTo>
-                    <a:pt x="2810228" y="1253031"/>
-                  </a:lnTo>
-                  <a:lnTo>
-                    <a:pt x="2883988" y="1274115"/>
-                  </a:lnTo>
-                  <a:lnTo>
-                    <a:pt x="2957748" y="1294754"/>
-                  </a:lnTo>
-                  <a:lnTo>
-                    <a:pt x="3031508" y="1314957"/>
-                  </a:lnTo>
-                  <a:lnTo>
-                    <a:pt x="3105268" y="1334734"/>
-                  </a:lnTo>
-                  <a:lnTo>
-                    <a:pt x="3179028" y="1354093"/>
-                  </a:lnTo>
-                  <a:lnTo>
-                    <a:pt x="3252788" y="1373043"/>
-                  </a:lnTo>
-                  <a:lnTo>
-                    <a:pt x="3326548" y="1391593"/>
-                  </a:lnTo>
-                  <a:lnTo>
-                    <a:pt x="3400308" y="1409752"/>
-                  </a:lnTo>
-                  <a:lnTo>
-                    <a:pt x="3474068" y="1427527"/>
-                  </a:lnTo>
-                  <a:lnTo>
-                    <a:pt x="3547828" y="1444927"/>
-                  </a:lnTo>
-                  <a:lnTo>
-                    <a:pt x="3621588" y="1461959"/>
-                  </a:lnTo>
-                  <a:lnTo>
-                    <a:pt x="3695348" y="1478632"/>
-                  </a:lnTo>
-                  <a:lnTo>
-                    <a:pt x="3769108" y="1494953"/>
-                  </a:lnTo>
-                  <a:lnTo>
-                    <a:pt x="3842868" y="1510929"/>
-                  </a:lnTo>
-                  <a:lnTo>
-                    <a:pt x="3916628" y="1526568"/>
-                  </a:lnTo>
-                  <a:lnTo>
-                    <a:pt x="3990388" y="1541876"/>
-                  </a:lnTo>
-                  <a:lnTo>
-                    <a:pt x="4064149" y="1556862"/>
-                  </a:lnTo>
-                  <a:lnTo>
-                    <a:pt x="4137909" y="1571531"/>
-                  </a:lnTo>
-                  <a:lnTo>
-                    <a:pt x="4211669" y="1585890"/>
-                  </a:lnTo>
-                  <a:lnTo>
-                    <a:pt x="4285429" y="1599946"/>
-                  </a:lnTo>
-                  <a:lnTo>
-                    <a:pt x="4359189" y="1613706"/>
-                  </a:lnTo>
-                  <a:lnTo>
-                    <a:pt x="4432949" y="1627175"/>
-                  </a:lnTo>
-                  <a:lnTo>
-                    <a:pt x="4506709" y="1640359"/>
-                  </a:lnTo>
-                  <a:lnTo>
-                    <a:pt x="4580469" y="1653265"/>
-                  </a:lnTo>
-                  <a:lnTo>
-                    <a:pt x="4654229" y="1665899"/>
-                  </a:lnTo>
-                  <a:lnTo>
-                    <a:pt x="4727989" y="1678266"/>
-                  </a:lnTo>
-                  <a:lnTo>
-                    <a:pt x="4801749" y="1690371"/>
-                  </a:lnTo>
-                  <a:lnTo>
-                    <a:pt x="4875509" y="1702222"/>
-                  </a:lnTo>
-                  <a:lnTo>
-                    <a:pt x="4949269" y="1713822"/>
-                  </a:lnTo>
-                  <a:lnTo>
-                    <a:pt x="5023029" y="1725177"/>
-                  </a:lnTo>
-                  <a:lnTo>
-                    <a:pt x="5096789" y="1736292"/>
-                  </a:lnTo>
-                  <a:lnTo>
-                    <a:pt x="5170549" y="1747173"/>
-                  </a:lnTo>
-                  <a:lnTo>
-                    <a:pt x="5244309" y="1757823"/>
-                  </a:lnTo>
-                  <a:lnTo>
-                    <a:pt x="5318069" y="1768249"/>
-                  </a:lnTo>
-                  <a:lnTo>
-                    <a:pt x="5391829" y="1778455"/>
-                  </a:lnTo>
-                  <a:lnTo>
-                    <a:pt x="5465589" y="1788446"/>
-                  </a:lnTo>
-                  <a:lnTo>
-                    <a:pt x="5539349" y="1798225"/>
-                  </a:lnTo>
-                  <a:lnTo>
-                    <a:pt x="5613109" y="1807798"/>
-                  </a:lnTo>
-                  <a:lnTo>
-                    <a:pt x="5686869" y="1817169"/>
-                  </a:lnTo>
-                  <a:lnTo>
-                    <a:pt x="5760629" y="1826342"/>
-                  </a:lnTo>
-                  <a:lnTo>
-                    <a:pt x="5834389" y="1835321"/>
-                  </a:lnTo>
-                  <a:lnTo>
-                    <a:pt x="5908149" y="1844111"/>
-                  </a:lnTo>
-                  <a:lnTo>
-                    <a:pt x="5981909" y="1852715"/>
-                  </a:lnTo>
-                  <a:lnTo>
-                    <a:pt x="6055669" y="1861138"/>
-                  </a:lnTo>
-                  <a:lnTo>
-                    <a:pt x="6129429" y="1869382"/>
-                  </a:lnTo>
-                  <a:lnTo>
-                    <a:pt x="6203189" y="1877453"/>
-                  </a:lnTo>
-                  <a:lnTo>
-                    <a:pt x="6276949" y="1885353"/>
-                  </a:lnTo>
-                  <a:lnTo>
-                    <a:pt x="6350709" y="1893086"/>
-                  </a:lnTo>
-                  <a:lnTo>
-                    <a:pt x="6424469" y="1900657"/>
-                  </a:lnTo>
-                  <a:lnTo>
-                    <a:pt x="6498229" y="1908067"/>
-                  </a:lnTo>
-                  <a:lnTo>
-                    <a:pt x="6571989" y="1915321"/>
-                  </a:lnTo>
-                  <a:lnTo>
-                    <a:pt x="6645749" y="1922421"/>
-                  </a:lnTo>
-                  <a:lnTo>
-                    <a:pt x="6719509" y="1929372"/>
-                  </a:lnTo>
-                  <a:lnTo>
-                    <a:pt x="6793269" y="1936176"/>
-                  </a:lnTo>
-                  <a:lnTo>
-                    <a:pt x="6867029" y="1942836"/>
-                  </a:lnTo>
-                  <a:lnTo>
-                    <a:pt x="6940789" y="1949356"/>
-                  </a:lnTo>
-                  <a:lnTo>
-                    <a:pt x="7014550" y="1955738"/>
-                  </a:lnTo>
-                  <a:lnTo>
-                    <a:pt x="7088310" y="1961985"/>
-                  </a:lnTo>
-                  <a:lnTo>
-                    <a:pt x="7162070" y="1968101"/>
-                  </a:lnTo>
-                  <a:lnTo>
-                    <a:pt x="7235830" y="1974087"/>
+                    <a:pt x="71622" y="48461"/>
+                  </a:lnTo>
+                  <a:lnTo>
+                    <a:pt x="143245" y="95899"/>
+                  </a:lnTo>
+                  <a:lnTo>
+                    <a:pt x="214867" y="142336"/>
+                  </a:lnTo>
+                  <a:lnTo>
+                    <a:pt x="286490" y="187792"/>
+                  </a:lnTo>
+                  <a:lnTo>
+                    <a:pt x="358112" y="232289"/>
+                  </a:lnTo>
+                  <a:lnTo>
+                    <a:pt x="429735" y="275846"/>
+                  </a:lnTo>
+                  <a:lnTo>
+                    <a:pt x="501357" y="318483"/>
+                  </a:lnTo>
+                  <a:lnTo>
+                    <a:pt x="572980" y="360220"/>
+                  </a:lnTo>
+                  <a:lnTo>
+                    <a:pt x="644602" y="401076"/>
+                  </a:lnTo>
+                  <a:lnTo>
+                    <a:pt x="716225" y="441069"/>
+                  </a:lnTo>
+                  <a:lnTo>
+                    <a:pt x="787847" y="480218"/>
+                  </a:lnTo>
+                  <a:lnTo>
+                    <a:pt x="859470" y="518541"/>
+                  </a:lnTo>
+                  <a:lnTo>
+                    <a:pt x="931092" y="556054"/>
+                  </a:lnTo>
+                  <a:lnTo>
+                    <a:pt x="1002715" y="592775"/>
+                  </a:lnTo>
+                  <a:lnTo>
+                    <a:pt x="1074337" y="628721"/>
+                  </a:lnTo>
+                  <a:lnTo>
+                    <a:pt x="1145960" y="663908"/>
+                  </a:lnTo>
+                  <a:lnTo>
+                    <a:pt x="1217582" y="698351"/>
+                  </a:lnTo>
+                  <a:lnTo>
+                    <a:pt x="1289205" y="732068"/>
+                  </a:lnTo>
+                  <a:lnTo>
+                    <a:pt x="1360827" y="765073"/>
+                  </a:lnTo>
+                  <a:lnTo>
+                    <a:pt x="1432450" y="797381"/>
+                  </a:lnTo>
+                  <a:lnTo>
+                    <a:pt x="1504073" y="829007"/>
+                  </a:lnTo>
+                  <a:lnTo>
+                    <a:pt x="1575695" y="859965"/>
+                  </a:lnTo>
+                  <a:lnTo>
+                    <a:pt x="1647318" y="890269"/>
+                  </a:lnTo>
+                  <a:lnTo>
+                    <a:pt x="1718940" y="919934"/>
+                  </a:lnTo>
+                  <a:lnTo>
+                    <a:pt x="1790563" y="948972"/>
+                  </a:lnTo>
+                  <a:lnTo>
+                    <a:pt x="1862185" y="977397"/>
+                  </a:lnTo>
+                  <a:lnTo>
+                    <a:pt x="1933808" y="1005222"/>
+                  </a:lnTo>
+                  <a:lnTo>
+                    <a:pt x="2005430" y="1032460"/>
+                  </a:lnTo>
+                  <a:lnTo>
+                    <a:pt x="2077053" y="1059122"/>
+                  </a:lnTo>
+                  <a:lnTo>
+                    <a:pt x="2148675" y="1085222"/>
+                  </a:lnTo>
+                  <a:lnTo>
+                    <a:pt x="2220298" y="1110770"/>
+                  </a:lnTo>
+                  <a:lnTo>
+                    <a:pt x="2291920" y="1135779"/>
+                  </a:lnTo>
+                  <a:lnTo>
+                    <a:pt x="2363543" y="1160260"/>
+                  </a:lnTo>
+                  <a:lnTo>
+                    <a:pt x="2435165" y="1184224"/>
+                  </a:lnTo>
+                  <a:lnTo>
+                    <a:pt x="2506788" y="1207682"/>
+                  </a:lnTo>
+                  <a:lnTo>
+                    <a:pt x="2578410" y="1230645"/>
+                  </a:lnTo>
+                  <a:lnTo>
+                    <a:pt x="2650033" y="1253123"/>
+                  </a:lnTo>
+                  <a:lnTo>
+                    <a:pt x="2721655" y="1275126"/>
+                  </a:lnTo>
+                  <a:lnTo>
+                    <a:pt x="2793278" y="1296665"/>
+                  </a:lnTo>
+                  <a:lnTo>
+                    <a:pt x="2864901" y="1317749"/>
+                  </a:lnTo>
+                  <a:lnTo>
+                    <a:pt x="2936523" y="1338388"/>
+                  </a:lnTo>
+                  <a:lnTo>
+                    <a:pt x="3008146" y="1358591"/>
+                  </a:lnTo>
+                  <a:lnTo>
+                    <a:pt x="3079768" y="1378368"/>
+                  </a:lnTo>
+                  <a:lnTo>
+                    <a:pt x="3151391" y="1397727"/>
+                  </a:lnTo>
+                  <a:lnTo>
+                    <a:pt x="3223013" y="1416677"/>
+                  </a:lnTo>
+                  <a:lnTo>
+                    <a:pt x="3294636" y="1435227"/>
+                  </a:lnTo>
+                  <a:lnTo>
+                    <a:pt x="3366258" y="1453386"/>
+                  </a:lnTo>
+                  <a:lnTo>
+                    <a:pt x="3437881" y="1471161"/>
+                  </a:lnTo>
+                  <a:lnTo>
+                    <a:pt x="3509503" y="1488561"/>
+                  </a:lnTo>
+                  <a:lnTo>
+                    <a:pt x="3581126" y="1505593"/>
+                  </a:lnTo>
+                  <a:lnTo>
+                    <a:pt x="3652748" y="1522266"/>
+                  </a:lnTo>
+                  <a:lnTo>
+                    <a:pt x="3724371" y="1538587"/>
+                  </a:lnTo>
+                  <a:lnTo>
+                    <a:pt x="3795993" y="1554563"/>
+                  </a:lnTo>
+                  <a:lnTo>
+                    <a:pt x="3867616" y="1570202"/>
+                  </a:lnTo>
+                  <a:lnTo>
+                    <a:pt x="3939238" y="1585510"/>
+                  </a:lnTo>
+                  <a:lnTo>
+                    <a:pt x="4010861" y="1600496"/>
+                  </a:lnTo>
+                  <a:lnTo>
+                    <a:pt x="4082483" y="1615165"/>
+                  </a:lnTo>
+                  <a:lnTo>
+                    <a:pt x="4154106" y="1629524"/>
+                  </a:lnTo>
+                  <a:lnTo>
+                    <a:pt x="4225729" y="1643580"/>
+                  </a:lnTo>
+                  <a:lnTo>
+                    <a:pt x="4297351" y="1657340"/>
+                  </a:lnTo>
+                  <a:lnTo>
+                    <a:pt x="4368974" y="1670809"/>
+                  </a:lnTo>
+                  <a:lnTo>
+                    <a:pt x="4440596" y="1683993"/>
+                  </a:lnTo>
+                  <a:lnTo>
+                    <a:pt x="4512219" y="1696899"/>
+                  </a:lnTo>
+                  <a:lnTo>
+                    <a:pt x="4583841" y="1709533"/>
+                  </a:lnTo>
+                  <a:lnTo>
+                    <a:pt x="4655464" y="1721900"/>
+                  </a:lnTo>
+                  <a:lnTo>
+                    <a:pt x="4727086" y="1734005"/>
+                  </a:lnTo>
+                  <a:lnTo>
+                    <a:pt x="4798709" y="1745856"/>
+                  </a:lnTo>
+                  <a:lnTo>
+                    <a:pt x="4870331" y="1757456"/>
+                  </a:lnTo>
+                  <a:lnTo>
+                    <a:pt x="4941954" y="1768811"/>
+                  </a:lnTo>
+                  <a:lnTo>
+                    <a:pt x="5013576" y="1779926"/>
+                  </a:lnTo>
+                  <a:lnTo>
+                    <a:pt x="5085199" y="1790807"/>
+                  </a:lnTo>
+                  <a:lnTo>
+                    <a:pt x="5156821" y="1801457"/>
+                  </a:lnTo>
+                  <a:lnTo>
+                    <a:pt x="5228444" y="1811883"/>
+                  </a:lnTo>
+                  <a:lnTo>
+                    <a:pt x="5300066" y="1822089"/>
+                  </a:lnTo>
+                  <a:lnTo>
+                    <a:pt x="5371689" y="1832080"/>
+                  </a:lnTo>
+                  <a:lnTo>
+                    <a:pt x="5443311" y="1841859"/>
+                  </a:lnTo>
+                  <a:lnTo>
+                    <a:pt x="5514934" y="1851432"/>
+                  </a:lnTo>
+                  <a:lnTo>
+                    <a:pt x="5586557" y="1860803"/>
+                  </a:lnTo>
+                  <a:lnTo>
+                    <a:pt x="5658179" y="1869976"/>
+                  </a:lnTo>
+                  <a:lnTo>
+                    <a:pt x="5729802" y="1878955"/>
+                  </a:lnTo>
+                  <a:lnTo>
+                    <a:pt x="5801424" y="1887745"/>
+                  </a:lnTo>
+                  <a:lnTo>
+                    <a:pt x="5873047" y="1896349"/>
+                  </a:lnTo>
+                  <a:lnTo>
+                    <a:pt x="5944669" y="1904772"/>
+                  </a:lnTo>
+                  <a:lnTo>
+                    <a:pt x="6016292" y="1913016"/>
+                  </a:lnTo>
+                  <a:lnTo>
+                    <a:pt x="6087914" y="1921087"/>
+                  </a:lnTo>
+                  <a:lnTo>
+                    <a:pt x="6159537" y="1928987"/>
+                  </a:lnTo>
+                  <a:lnTo>
+                    <a:pt x="6231159" y="1936720"/>
+                  </a:lnTo>
+                  <a:lnTo>
+                    <a:pt x="6302782" y="1944291"/>
+                  </a:lnTo>
+                  <a:lnTo>
+                    <a:pt x="6374404" y="1951701"/>
+                  </a:lnTo>
+                  <a:lnTo>
+                    <a:pt x="6446027" y="1958955"/>
+                  </a:lnTo>
+                  <a:lnTo>
+                    <a:pt x="6517649" y="1966055"/>
+                  </a:lnTo>
+                  <a:lnTo>
+                    <a:pt x="6589272" y="1973006"/>
+                  </a:lnTo>
+                  <a:lnTo>
+                    <a:pt x="6660894" y="1979810"/>
+                  </a:lnTo>
+                  <a:lnTo>
+                    <a:pt x="6732517" y="1986470"/>
+                  </a:lnTo>
+                  <a:lnTo>
+                    <a:pt x="6804139" y="1992990"/>
+                  </a:lnTo>
+                  <a:lnTo>
+                    <a:pt x="6875762" y="1999372"/>
+                  </a:lnTo>
+                  <a:lnTo>
+                    <a:pt x="6947385" y="2005619"/>
+                  </a:lnTo>
+                  <a:lnTo>
+                    <a:pt x="7019007" y="2011735"/>
+                  </a:lnTo>
+                  <a:lnTo>
+                    <a:pt x="7090630" y="2017721"/>
                   </a:lnTo>
                 </a:path>
               </a:pathLst>
@@ -4611,7 +4568,7 @@
         </p:sp>
         <p:sp>
           <p:nvSpPr>
-            <p:cNvPr id="25" name="pl25"/>
+            <p:cNvPr id="24" name="pl24"/>
             <p:cNvSpPr/>
             <p:nvPr/>
           </p:nvSpPr>
@@ -4654,13 +4611,13 @@
         </p:sp>
         <p:sp>
           <p:nvSpPr>
-            <p:cNvPr id="26" name="pl26"/>
+            <p:cNvPr id="25" name="pl25"/>
             <p:cNvSpPr/>
             <p:nvPr/>
           </p:nvSpPr>
           <p:spPr>
             <a:xfrm>
-              <a:off x="4269157" y="2073503"/>
+              <a:off x="4588151" y="2073503"/>
               <a:ext cx="0" cy="3649639"/>
             </a:xfrm>
             <a:custGeom>
@@ -4697,7 +4654,7 @@
         </p:sp>
         <p:sp>
           <p:nvSpPr>
-            <p:cNvPr id="27" name="tx27"/>
+            <p:cNvPr id="26" name="tx26"/>
             <p:cNvSpPr/>
             <p:nvPr/>
           </p:nvSpPr>
@@ -4743,7 +4700,7 @@
         </p:sp>
         <p:sp>
           <p:nvSpPr>
-            <p:cNvPr id="28" name="tx28"/>
+            <p:cNvPr id="27" name="tx27"/>
             <p:cNvSpPr/>
             <p:nvPr/>
           </p:nvSpPr>
@@ -4789,7 +4746,7 @@
         </p:sp>
         <p:sp>
           <p:nvSpPr>
-            <p:cNvPr id="29" name="tx29"/>
+            <p:cNvPr id="28" name="tx28"/>
             <p:cNvSpPr/>
             <p:nvPr/>
           </p:nvSpPr>
@@ -4835,7 +4792,7 @@
         </p:sp>
         <p:sp>
           <p:nvSpPr>
-            <p:cNvPr id="30" name="tx30"/>
+            <p:cNvPr id="29" name="tx29"/>
             <p:cNvSpPr/>
             <p:nvPr/>
           </p:nvSpPr>
@@ -4881,7 +4838,7 @@
         </p:sp>
         <p:sp>
           <p:nvSpPr>
-            <p:cNvPr id="31" name="tx31"/>
+            <p:cNvPr id="30" name="tx30"/>
             <p:cNvSpPr/>
             <p:nvPr/>
           </p:nvSpPr>
@@ -4927,14 +4884,14 @@
         </p:sp>
         <p:sp>
           <p:nvSpPr>
-            <p:cNvPr id="32" name="tx32"/>
+            <p:cNvPr id="31" name="tx31"/>
             <p:cNvSpPr/>
             <p:nvPr/>
           </p:nvSpPr>
           <p:spPr>
             <a:xfrm>
-              <a:off x="2423864" y="5785772"/>
-              <a:ext cx="155356" cy="80101"/>
+              <a:off x="2360651" y="5785772"/>
+              <a:ext cx="161574" cy="80101"/>
             </a:xfrm>
             <a:prstGeom prst="rect">
               <a:avLst/>
@@ -4966,21 +4923,21 @@
                   <a:latin typeface="Helvetica"/>
                   <a:cs typeface="Helvetica"/>
                 </a:rPr>
-                <a:t>0.8</a:t>
+                <a:t>-25</a:t>
               </a:r>
             </a:p>
           </p:txBody>
         </p:sp>
         <p:sp>
           <p:nvSpPr>
-            <p:cNvPr id="33" name="tx33"/>
+            <p:cNvPr id="32" name="tx32"/>
             <p:cNvSpPr/>
             <p:nvPr/>
           </p:nvSpPr>
           <p:spPr>
             <a:xfrm>
-              <a:off x="4196521" y="5785772"/>
-              <a:ext cx="155356" cy="80101"/>
+              <a:off x="4561958" y="5785772"/>
+              <a:ext cx="62179" cy="80101"/>
             </a:xfrm>
             <a:prstGeom prst="rect">
               <a:avLst/>
@@ -5012,21 +4969,21 @@
                   <a:latin typeface="Helvetica"/>
                   <a:cs typeface="Helvetica"/>
                 </a:rPr>
-                <a:t>1.0</a:t>
+                <a:t>0</a:t>
               </a:r>
             </a:p>
           </p:txBody>
         </p:sp>
         <p:sp>
           <p:nvSpPr>
-            <p:cNvPr id="34" name="tx34"/>
+            <p:cNvPr id="33" name="tx33"/>
             <p:cNvSpPr/>
             <p:nvPr/>
           </p:nvSpPr>
           <p:spPr>
             <a:xfrm>
-              <a:off x="5969179" y="5785772"/>
-              <a:ext cx="155356" cy="80101"/>
+              <a:off x="6682478" y="5785772"/>
+              <a:ext cx="124358" cy="80101"/>
             </a:xfrm>
             <a:prstGeom prst="rect">
               <a:avLst/>
@@ -5058,67 +5015,21 @@
                   <a:latin typeface="Helvetica"/>
                   <a:cs typeface="Helvetica"/>
                 </a:rPr>
-                <a:t>1.2</a:t>
+                <a:t>25</a:t>
               </a:r>
             </a:p>
           </p:txBody>
         </p:sp>
         <p:sp>
           <p:nvSpPr>
-            <p:cNvPr id="35" name="tx35"/>
+            <p:cNvPr id="34" name="tx34"/>
             <p:cNvSpPr/>
             <p:nvPr/>
           </p:nvSpPr>
           <p:spPr>
             <a:xfrm>
-              <a:off x="7741836" y="5785772"/>
-              <a:ext cx="155356" cy="80101"/>
-            </a:xfrm>
-            <a:prstGeom prst="rect">
-              <a:avLst/>
-            </a:prstGeom>
-            <a:noFill/>
-          </p:spPr>
-          <p:txBody>
-            <a:bodyPr lIns="0" rIns="0" tIns="0" bIns="0" anchorCtr="1" anchor="ctr" wrap="none"/>
-            <a:lstStyle/>
-            <a:p>
-              <a:pPr algn="l" marL="0" marR="0" indent="0">
-                <a:lnSpc>
-                  <a:spcPts val="880"/>
-                </a:lnSpc>
-                <a:spcBef>
-                  <a:spcPts val="0"/>
-                </a:spcBef>
-                <a:spcAft>
-                  <a:spcPts val="0"/>
-                </a:spcAft>
-              </a:pPr>
-              <a:r>
-                <a:rPr sz="880">
-                  <a:solidFill>
-                    <a:srgbClr val="4D4D4D">
-                      <a:alpha val="100000"/>
-                    </a:srgbClr>
-                  </a:solidFill>
-                  <a:latin typeface="Helvetica"/>
-                  <a:cs typeface="Helvetica"/>
-                </a:rPr>
-                <a:t>1.4</a:t>
-              </a:r>
-            </a:p>
-          </p:txBody>
-        </p:sp>
-        <p:sp>
-          <p:nvSpPr>
-            <p:cNvPr id="36" name="tx36"/>
-            <p:cNvSpPr/>
-            <p:nvPr/>
-          </p:nvSpPr>
-          <p:spPr>
-            <a:xfrm>
-              <a:off x="3879271" y="5925448"/>
-              <a:ext cx="1676186" cy="100218"/>
+              <a:off x="2928340" y="5925448"/>
+              <a:ext cx="3578047" cy="100218"/>
             </a:xfrm>
             <a:prstGeom prst="rect">
               <a:avLst/>
@@ -5150,14 +5061,14 @@
                   <a:latin typeface="Helvetica"/>
                   <a:cs typeface="Helvetica"/>
                 </a:rPr>
-                <a:t>CKD-EPI Cr-Cys / CG ratio</a:t>
+                <a:t>eGFR difference (%): 100 × (CKD-EPI Cr-Cys − CG) / CG</a:t>
               </a:r>
             </a:p>
           </p:txBody>
         </p:sp>
         <p:sp>
           <p:nvSpPr>
-            <p:cNvPr id="37" name="tx37"/>
+            <p:cNvPr id="35" name="tx35"/>
             <p:cNvSpPr/>
             <p:nvPr/>
           </p:nvSpPr>
@@ -5203,14 +5114,14 @@
         </p:sp>
         <p:sp>
           <p:nvSpPr>
-            <p:cNvPr id="38" name="tx38"/>
+            <p:cNvPr id="36" name="tx36"/>
             <p:cNvSpPr/>
             <p:nvPr/>
           </p:nvSpPr>
           <p:spPr>
             <a:xfrm>
               <a:off x="817517" y="1896563"/>
-              <a:ext cx="6899879" cy="82021"/>
+              <a:ext cx="7052127" cy="82021"/>
             </a:xfrm>
             <a:prstGeom prst="rect">
               <a:avLst/>
@@ -5242,14 +5153,14 @@
                   <a:latin typeface="Helvetica"/>
                   <a:cs typeface="Helvetica"/>
                 </a:rPr>
-                <a:t>subHR per 0.1 ratio decline: 1.29 (1.21-1.38), p_Bonf = &lt;0.001 (n = 6)  |  per IQR decline (Δ = 0.29): 2.12 (1.75-2.57)  |  IQR: [0.85, 1.15]</a:t>
+                <a:t>subHR per 10 % decline: 1.29 (1.21-1.38), p_Bonf = &lt;0.001 (n = 6)  |  per IQR decline (Δ = 29.3 %): 2.12 (1.75-2.57)  |  IQR: [-14.6, 14.7] %</a:t>
               </a:r>
             </a:p>
           </p:txBody>
         </p:sp>
         <p:sp>
           <p:nvSpPr>
-            <p:cNvPr id="39" name="tx39"/>
+            <p:cNvPr id="37" name="tx37"/>
             <p:cNvSpPr/>
             <p:nvPr/>
           </p:nvSpPr>

--- a/docs/pptx/whole/jx-linsubhr-ratio-grade2.pptx
+++ b/docs/pptx/whole/jx-linsubhr-ratio-grade2.pptx
@@ -2265,34 +2265,26 @@
         </p:sp>
         <p:sp>
           <p:nvSpPr>
-            <p:cNvPr id="4" name="pl4"/>
+            <p:cNvPr id="4" name="rc4"/>
             <p:cNvSpPr/>
             <p:nvPr/>
           </p:nvSpPr>
           <p:spPr>
             <a:xfrm>
-              <a:off x="817517" y="5142518"/>
-              <a:ext cx="7799693" cy="0"/>
+              <a:off x="457200" y="1600200"/>
+              <a:ext cx="8229600" cy="4525962"/>
             </a:xfrm>
-            <a:custGeom>
+            <a:prstGeom prst="rect">
               <a:avLst/>
-              <a:pathLst>
-                <a:path w="7799693" h="0">
-                  <a:moveTo>
-                    <a:pt x="0" y="0"/>
-                  </a:moveTo>
-                  <a:lnTo>
-                    <a:pt x="7799693" y="0"/>
-                  </a:lnTo>
-                  <a:lnTo>
-                    <a:pt x="7799693" y="0"/>
-                  </a:lnTo>
-                </a:path>
-              </a:pathLst>
-            </a:custGeom>
-            <a:ln w="6775" cap="flat">
+            </a:prstGeom>
+            <a:solidFill>
+              <a:srgbClr val="FFFFFF">
+                <a:alpha val="100000"/>
+              </a:srgbClr>
+            </a:solidFill>
+            <a:ln w="13550" cap="rnd">
               <a:solidFill>
-                <a:srgbClr val="EBEBEB">
+                <a:srgbClr val="FFFFFF">
                   <a:alpha val="100000"/>
                 </a:srgbClr>
               </a:solidFill>
@@ -2314,21 +2306,21 @@
           </p:nvSpPr>
           <p:spPr>
             <a:xfrm>
-              <a:off x="817517" y="4313054"/>
-              <a:ext cx="7799693" cy="0"/>
+              <a:off x="887106" y="3250627"/>
+              <a:ext cx="7660515" cy="0"/>
             </a:xfrm>
             <a:custGeom>
               <a:avLst/>
               <a:pathLst>
-                <a:path w="7799693" h="0">
+                <a:path w="7660515" h="0">
                   <a:moveTo>
                     <a:pt x="0" y="0"/>
                   </a:moveTo>
                   <a:lnTo>
-                    <a:pt x="7799693" y="0"/>
-                  </a:lnTo>
-                  <a:lnTo>
-                    <a:pt x="7799693" y="0"/>
+                    <a:pt x="7660515" y="0"/>
+                  </a:lnTo>
+                  <a:lnTo>
+                    <a:pt x="7660515" y="0"/>
                   </a:lnTo>
                 </a:path>
               </a:pathLst>
@@ -2357,21 +2349,21 @@
           </p:nvSpPr>
           <p:spPr>
             <a:xfrm>
-              <a:off x="817517" y="3483591"/>
-              <a:ext cx="7799693" cy="0"/>
+              <a:off x="887106" y="2951293"/>
+              <a:ext cx="7660515" cy="0"/>
             </a:xfrm>
             <a:custGeom>
               <a:avLst/>
               <a:pathLst>
-                <a:path w="7799693" h="0">
+                <a:path w="7660515" h="0">
                   <a:moveTo>
                     <a:pt x="0" y="0"/>
                   </a:moveTo>
                   <a:lnTo>
-                    <a:pt x="7799693" y="0"/>
-                  </a:lnTo>
-                  <a:lnTo>
-                    <a:pt x="7799693" y="0"/>
+                    <a:pt x="7660515" y="0"/>
+                  </a:lnTo>
+                  <a:lnTo>
+                    <a:pt x="7660515" y="0"/>
                   </a:lnTo>
                 </a:path>
               </a:pathLst>
@@ -2400,21 +2392,21 @@
           </p:nvSpPr>
           <p:spPr>
             <a:xfrm>
-              <a:off x="817517" y="2654127"/>
-              <a:ext cx="7799693" cy="0"/>
+              <a:off x="887106" y="2651959"/>
+              <a:ext cx="7660515" cy="0"/>
             </a:xfrm>
             <a:custGeom>
               <a:avLst/>
               <a:pathLst>
-                <a:path w="7799693" h="0">
+                <a:path w="7660515" h="0">
                   <a:moveTo>
                     <a:pt x="0" y="0"/>
                   </a:moveTo>
                   <a:lnTo>
-                    <a:pt x="7799693" y="0"/>
-                  </a:lnTo>
-                  <a:lnTo>
-                    <a:pt x="7799693" y="0"/>
+                    <a:pt x="7660515" y="0"/>
+                  </a:lnTo>
+                  <a:lnTo>
+                    <a:pt x="7660515" y="0"/>
                   </a:lnTo>
                 </a:path>
               </a:pathLst>
@@ -2443,21 +2435,21 @@
           </p:nvSpPr>
           <p:spPr>
             <a:xfrm>
-              <a:off x="1365633" y="2073503"/>
-              <a:ext cx="0" cy="3649639"/>
+              <a:off x="887106" y="2352625"/>
+              <a:ext cx="7660515" cy="0"/>
             </a:xfrm>
             <a:custGeom>
               <a:avLst/>
               <a:pathLst>
-                <a:path w="0" h="3649639">
+                <a:path w="7660515" h="0">
                   <a:moveTo>
-                    <a:pt x="0" y="3649639"/>
+                    <a:pt x="0" y="0"/>
                   </a:moveTo>
                   <a:lnTo>
-                    <a:pt x="0" y="0"/>
-                  </a:lnTo>
-                  <a:lnTo>
-                    <a:pt x="0" y="0"/>
+                    <a:pt x="7660515" y="0"/>
+                  </a:lnTo>
+                  <a:lnTo>
+                    <a:pt x="7660515" y="0"/>
                   </a:lnTo>
                 </a:path>
               </a:pathLst>
@@ -2486,15 +2478,15 @@
           </p:nvSpPr>
           <p:spPr>
             <a:xfrm>
-              <a:off x="3517243" y="2073503"/>
-              <a:ext cx="0" cy="3649639"/>
+              <a:off x="1425442" y="2143092"/>
+              <a:ext cx="0" cy="1317069"/>
             </a:xfrm>
             <a:custGeom>
               <a:avLst/>
               <a:pathLst>
-                <a:path w="0" h="3649639">
+                <a:path w="0" h="1317069">
                   <a:moveTo>
-                    <a:pt x="0" y="3649639"/>
+                    <a:pt x="0" y="1317069"/>
                   </a:moveTo>
                   <a:lnTo>
                     <a:pt x="0" y="0"/>
@@ -2529,15 +2521,15 @@
           </p:nvSpPr>
           <p:spPr>
             <a:xfrm>
-              <a:off x="5668852" y="2073503"/>
-              <a:ext cx="0" cy="3649639"/>
+              <a:off x="3538658" y="2143092"/>
+              <a:ext cx="0" cy="1317069"/>
             </a:xfrm>
             <a:custGeom>
               <a:avLst/>
               <a:pathLst>
-                <a:path w="0" h="3649639">
+                <a:path w="0" h="1317069">
                   <a:moveTo>
-                    <a:pt x="0" y="3649639"/>
+                    <a:pt x="0" y="1317069"/>
                   </a:moveTo>
                   <a:lnTo>
                     <a:pt x="0" y="0"/>
@@ -2572,15 +2564,15 @@
           </p:nvSpPr>
           <p:spPr>
             <a:xfrm>
-              <a:off x="7820461" y="2073503"/>
-              <a:ext cx="0" cy="3649639"/>
+              <a:off x="5651874" y="2143092"/>
+              <a:ext cx="0" cy="1317069"/>
             </a:xfrm>
             <a:custGeom>
               <a:avLst/>
               <a:pathLst>
-                <a:path w="0" h="3649639">
+                <a:path w="0" h="1317069">
                   <a:moveTo>
-                    <a:pt x="0" y="3649639"/>
+                    <a:pt x="0" y="1317069"/>
                   </a:moveTo>
                   <a:lnTo>
                     <a:pt x="0" y="0"/>
@@ -2615,26 +2607,26 @@
           </p:nvSpPr>
           <p:spPr>
             <a:xfrm>
-              <a:off x="817517" y="5557249"/>
-              <a:ext cx="7799693" cy="0"/>
+              <a:off x="7765090" y="2143092"/>
+              <a:ext cx="0" cy="1317069"/>
             </a:xfrm>
             <a:custGeom>
               <a:avLst/>
               <a:pathLst>
-                <a:path w="7799693" h="0">
+                <a:path w="0" h="1317069">
                   <a:moveTo>
+                    <a:pt x="0" y="1317069"/>
+                  </a:moveTo>
+                  <a:lnTo>
                     <a:pt x="0" y="0"/>
-                  </a:moveTo>
-                  <a:lnTo>
-                    <a:pt x="7799693" y="0"/>
-                  </a:lnTo>
-                  <a:lnTo>
-                    <a:pt x="7799693" y="0"/>
+                  </a:lnTo>
+                  <a:lnTo>
+                    <a:pt x="0" y="0"/>
                   </a:lnTo>
                 </a:path>
               </a:pathLst>
             </a:custGeom>
-            <a:ln w="13550" cap="flat">
+            <a:ln w="6775" cap="flat">
               <a:solidFill>
                 <a:srgbClr val="EBEBEB">
                   <a:alpha val="100000"/>
@@ -2658,21 +2650,21 @@
           </p:nvSpPr>
           <p:spPr>
             <a:xfrm>
-              <a:off x="817517" y="4727786"/>
-              <a:ext cx="7799693" cy="0"/>
+              <a:off x="887106" y="3400294"/>
+              <a:ext cx="7660515" cy="0"/>
             </a:xfrm>
             <a:custGeom>
               <a:avLst/>
               <a:pathLst>
-                <a:path w="7799693" h="0">
+                <a:path w="7660515" h="0">
                   <a:moveTo>
                     <a:pt x="0" y="0"/>
                   </a:moveTo>
                   <a:lnTo>
-                    <a:pt x="7799693" y="0"/>
-                  </a:lnTo>
-                  <a:lnTo>
-                    <a:pt x="7799693" y="0"/>
+                    <a:pt x="7660515" y="0"/>
+                  </a:lnTo>
+                  <a:lnTo>
+                    <a:pt x="7660515" y="0"/>
                   </a:lnTo>
                 </a:path>
               </a:pathLst>
@@ -2701,21 +2693,21 @@
           </p:nvSpPr>
           <p:spPr>
             <a:xfrm>
-              <a:off x="817517" y="3898322"/>
-              <a:ext cx="7799693" cy="0"/>
+              <a:off x="887106" y="3100960"/>
+              <a:ext cx="7660515" cy="0"/>
             </a:xfrm>
             <a:custGeom>
               <a:avLst/>
               <a:pathLst>
-                <a:path w="7799693" h="0">
+                <a:path w="7660515" h="0">
                   <a:moveTo>
                     <a:pt x="0" y="0"/>
                   </a:moveTo>
                   <a:lnTo>
-                    <a:pt x="7799693" y="0"/>
-                  </a:lnTo>
-                  <a:lnTo>
-                    <a:pt x="7799693" y="0"/>
+                    <a:pt x="7660515" y="0"/>
+                  </a:lnTo>
+                  <a:lnTo>
+                    <a:pt x="7660515" y="0"/>
                   </a:lnTo>
                 </a:path>
               </a:pathLst>
@@ -2744,21 +2736,21 @@
           </p:nvSpPr>
           <p:spPr>
             <a:xfrm>
-              <a:off x="817517" y="3068859"/>
-              <a:ext cx="7799693" cy="0"/>
+              <a:off x="887106" y="2801626"/>
+              <a:ext cx="7660515" cy="0"/>
             </a:xfrm>
             <a:custGeom>
               <a:avLst/>
               <a:pathLst>
-                <a:path w="7799693" h="0">
+                <a:path w="7660515" h="0">
                   <a:moveTo>
                     <a:pt x="0" y="0"/>
                   </a:moveTo>
                   <a:lnTo>
-                    <a:pt x="7799693" y="0"/>
-                  </a:lnTo>
-                  <a:lnTo>
-                    <a:pt x="7799693" y="0"/>
+                    <a:pt x="7660515" y="0"/>
+                  </a:lnTo>
+                  <a:lnTo>
+                    <a:pt x="7660515" y="0"/>
                   </a:lnTo>
                 </a:path>
               </a:pathLst>
@@ -2787,21 +2779,21 @@
           </p:nvSpPr>
           <p:spPr>
             <a:xfrm>
-              <a:off x="817517" y="2239395"/>
-              <a:ext cx="7799693" cy="0"/>
+              <a:off x="887106" y="2502292"/>
+              <a:ext cx="7660515" cy="0"/>
             </a:xfrm>
             <a:custGeom>
               <a:avLst/>
               <a:pathLst>
-                <a:path w="7799693" h="0">
+                <a:path w="7660515" h="0">
                   <a:moveTo>
                     <a:pt x="0" y="0"/>
                   </a:moveTo>
                   <a:lnTo>
-                    <a:pt x="7799693" y="0"/>
-                  </a:lnTo>
-                  <a:lnTo>
-                    <a:pt x="7799693" y="0"/>
+                    <a:pt x="7660515" y="0"/>
+                  </a:lnTo>
+                  <a:lnTo>
+                    <a:pt x="7660515" y="0"/>
                   </a:lnTo>
                 </a:path>
               </a:pathLst>
@@ -2830,21 +2822,21 @@
           </p:nvSpPr>
           <p:spPr>
             <a:xfrm>
-              <a:off x="2441438" y="2073503"/>
-              <a:ext cx="0" cy="3649639"/>
+              <a:off x="887106" y="2202958"/>
+              <a:ext cx="7660515" cy="0"/>
             </a:xfrm>
             <a:custGeom>
               <a:avLst/>
               <a:pathLst>
-                <a:path w="0" h="3649639">
+                <a:path w="7660515" h="0">
                   <a:moveTo>
-                    <a:pt x="0" y="3649639"/>
+                    <a:pt x="0" y="0"/>
                   </a:moveTo>
                   <a:lnTo>
-                    <a:pt x="0" y="0"/>
-                  </a:lnTo>
-                  <a:lnTo>
-                    <a:pt x="0" y="0"/>
+                    <a:pt x="7660515" y="0"/>
+                  </a:lnTo>
+                  <a:lnTo>
+                    <a:pt x="7660515" y="0"/>
                   </a:lnTo>
                 </a:path>
               </a:pathLst>
@@ -2873,15 +2865,15 @@
           </p:nvSpPr>
           <p:spPr>
             <a:xfrm>
-              <a:off x="4593047" y="2073503"/>
-              <a:ext cx="0" cy="3649639"/>
+              <a:off x="2482050" y="2143092"/>
+              <a:ext cx="0" cy="1317069"/>
             </a:xfrm>
             <a:custGeom>
               <a:avLst/>
               <a:pathLst>
-                <a:path w="0" h="3649639">
+                <a:path w="0" h="1317069">
                   <a:moveTo>
-                    <a:pt x="0" y="3649639"/>
+                    <a:pt x="0" y="1317069"/>
                   </a:moveTo>
                   <a:lnTo>
                     <a:pt x="0" y="0"/>
@@ -2916,15 +2908,15 @@
           </p:nvSpPr>
           <p:spPr>
             <a:xfrm>
-              <a:off x="6744657" y="2073503"/>
-              <a:ext cx="0" cy="3649639"/>
+              <a:off x="4595266" y="2143092"/>
+              <a:ext cx="0" cy="1317069"/>
             </a:xfrm>
             <a:custGeom>
               <a:avLst/>
               <a:pathLst>
-                <a:path w="0" h="3649639">
+                <a:path w="0" h="1317069">
                   <a:moveTo>
-                    <a:pt x="0" y="3649639"/>
+                    <a:pt x="0" y="1317069"/>
                   </a:moveTo>
                   <a:lnTo>
                     <a:pt x="0" y="0"/>
@@ -2953,618 +2945,661 @@
         </p:sp>
         <p:sp>
           <p:nvSpPr>
-            <p:cNvPr id="20" name="pg20"/>
+            <p:cNvPr id="20" name="pl20"/>
             <p:cNvSpPr/>
             <p:nvPr/>
           </p:nvSpPr>
           <p:spPr>
             <a:xfrm>
-              <a:off x="1172049" y="2579011"/>
-              <a:ext cx="7090630" cy="2768519"/>
+              <a:off x="6708482" y="2143092"/>
+              <a:ext cx="0" cy="1317069"/>
             </a:xfrm>
             <a:custGeom>
               <a:avLst/>
               <a:pathLst>
-                <a:path w="7090630" h="2768519">
+                <a:path w="0" h="1317069">
+                  <a:moveTo>
+                    <a:pt x="0" y="1317069"/>
+                  </a:moveTo>
+                  <a:lnTo>
+                    <a:pt x="0" y="0"/>
+                  </a:lnTo>
+                  <a:lnTo>
+                    <a:pt x="0" y="0"/>
+                  </a:lnTo>
+                </a:path>
+              </a:pathLst>
+            </a:custGeom>
+            <a:ln w="13550" cap="flat">
+              <a:solidFill>
+                <a:srgbClr val="EBEBEB">
+                  <a:alpha val="100000"/>
+                </a:srgbClr>
+              </a:solidFill>
+              <a:prstDash val="solid"/>
+              <a:round/>
+            </a:ln>
+          </p:spPr>
+          <p:txBody>
+            <a:bodyPr/>
+            <a:lstStyle/>
+            <a:p/>
+          </p:txBody>
+        </p:sp>
+        <p:sp>
+          <p:nvSpPr>
+            <p:cNvPr id="21" name="pg21"/>
+            <p:cNvSpPr/>
+            <p:nvPr/>
+          </p:nvSpPr>
+          <p:spPr>
+            <a:xfrm>
+              <a:off x="1235312" y="2325518"/>
+              <a:ext cx="6964104" cy="999093"/>
+            </a:xfrm>
+            <a:custGeom>
+              <a:avLst/>
+              <a:pathLst>
+                <a:path w="6964104" h="999093">
                   <a:moveTo>
                     <a:pt x="0" y="0"/>
                   </a:moveTo>
                   <a:lnTo>
-                    <a:pt x="71622" y="78760"/>
-                  </a:lnTo>
-                  <a:lnTo>
-                    <a:pt x="143245" y="155437"/>
-                  </a:lnTo>
-                  <a:lnTo>
-                    <a:pt x="214867" y="230087"/>
-                  </a:lnTo>
-                  <a:lnTo>
-                    <a:pt x="286490" y="302762"/>
-                  </a:lnTo>
-                  <a:lnTo>
-                    <a:pt x="358112" y="373516"/>
-                  </a:lnTo>
-                  <a:lnTo>
-                    <a:pt x="429735" y="442398"/>
-                  </a:lnTo>
-                  <a:lnTo>
-                    <a:pt x="501357" y="509459"/>
-                  </a:lnTo>
-                  <a:lnTo>
-                    <a:pt x="572980" y="574747"/>
-                  </a:lnTo>
-                  <a:lnTo>
-                    <a:pt x="644602" y="638308"/>
-                  </a:lnTo>
-                  <a:lnTo>
-                    <a:pt x="716225" y="700188"/>
-                  </a:lnTo>
-                  <a:lnTo>
-                    <a:pt x="787847" y="760431"/>
-                  </a:lnTo>
-                  <a:lnTo>
-                    <a:pt x="859470" y="819082"/>
-                  </a:lnTo>
-                  <a:lnTo>
-                    <a:pt x="931092" y="876181"/>
-                  </a:lnTo>
-                  <a:lnTo>
-                    <a:pt x="1002715" y="931771"/>
-                  </a:lnTo>
-                  <a:lnTo>
-                    <a:pt x="1074337" y="985890"/>
-                  </a:lnTo>
-                  <a:lnTo>
-                    <a:pt x="1145960" y="1038578"/>
-                  </a:lnTo>
-                  <a:lnTo>
-                    <a:pt x="1217582" y="1089873"/>
-                  </a:lnTo>
-                  <a:lnTo>
-                    <a:pt x="1289205" y="1139811"/>
-                  </a:lnTo>
-                  <a:lnTo>
-                    <a:pt x="1360827" y="1188429"/>
-                  </a:lnTo>
-                  <a:lnTo>
-                    <a:pt x="1432450" y="1235761"/>
-                  </a:lnTo>
-                  <a:lnTo>
-                    <a:pt x="1504073" y="1281841"/>
-                  </a:lnTo>
-                  <a:lnTo>
-                    <a:pt x="1575695" y="1326703"/>
-                  </a:lnTo>
-                  <a:lnTo>
-                    <a:pt x="1647318" y="1370378"/>
-                  </a:lnTo>
-                  <a:lnTo>
-                    <a:pt x="1718940" y="1412898"/>
-                  </a:lnTo>
-                  <a:lnTo>
-                    <a:pt x="1790563" y="1454294"/>
-                  </a:lnTo>
-                  <a:lnTo>
-                    <a:pt x="1862185" y="1494595"/>
-                  </a:lnTo>
-                  <a:lnTo>
-                    <a:pt x="1933808" y="1533830"/>
-                  </a:lnTo>
-                  <a:lnTo>
-                    <a:pt x="2005430" y="1572028"/>
-                  </a:lnTo>
-                  <a:lnTo>
-                    <a:pt x="2077053" y="1609216"/>
-                  </a:lnTo>
-                  <a:lnTo>
-                    <a:pt x="2148675" y="1645420"/>
-                  </a:lnTo>
-                  <a:lnTo>
-                    <a:pt x="2220298" y="1680666"/>
-                  </a:lnTo>
-                  <a:lnTo>
-                    <a:pt x="2291920" y="1714981"/>
-                  </a:lnTo>
-                  <a:lnTo>
-                    <a:pt x="2363543" y="1748388"/>
-                  </a:lnTo>
-                  <a:lnTo>
-                    <a:pt x="2435165" y="1780912"/>
-                  </a:lnTo>
-                  <a:lnTo>
-                    <a:pt x="2506788" y="1812575"/>
-                  </a:lnTo>
-                  <a:lnTo>
-                    <a:pt x="2578410" y="1843402"/>
-                  </a:lnTo>
-                  <a:lnTo>
-                    <a:pt x="2650033" y="1873413"/>
-                  </a:lnTo>
-                  <a:lnTo>
-                    <a:pt x="2721655" y="1902630"/>
-                  </a:lnTo>
-                  <a:lnTo>
-                    <a:pt x="2793278" y="1931075"/>
-                  </a:lnTo>
-                  <a:lnTo>
-                    <a:pt x="2864901" y="1958767"/>
-                  </a:lnTo>
-                  <a:lnTo>
-                    <a:pt x="2936523" y="1985727"/>
-                  </a:lnTo>
-                  <a:lnTo>
-                    <a:pt x="3008146" y="2011975"/>
-                  </a:lnTo>
-                  <a:lnTo>
-                    <a:pt x="3079768" y="2037528"/>
-                  </a:lnTo>
-                  <a:lnTo>
-                    <a:pt x="3151391" y="2062405"/>
-                  </a:lnTo>
-                  <a:lnTo>
-                    <a:pt x="3223013" y="2086624"/>
-                  </a:lnTo>
-                  <a:lnTo>
-                    <a:pt x="3294636" y="2110203"/>
-                  </a:lnTo>
-                  <a:lnTo>
-                    <a:pt x="3366258" y="2133159"/>
-                  </a:lnTo>
-                  <a:lnTo>
-                    <a:pt x="3437881" y="2152770"/>
-                  </a:lnTo>
-                  <a:lnTo>
-                    <a:pt x="3509503" y="2165774"/>
-                  </a:lnTo>
-                  <a:lnTo>
-                    <a:pt x="3581126" y="2178572"/>
-                  </a:lnTo>
-                  <a:lnTo>
-                    <a:pt x="3652748" y="2191170"/>
-                  </a:lnTo>
-                  <a:lnTo>
-                    <a:pt x="3724371" y="2203568"/>
-                  </a:lnTo>
-                  <a:lnTo>
-                    <a:pt x="3795993" y="2215772"/>
-                  </a:lnTo>
-                  <a:lnTo>
-                    <a:pt x="3867616" y="2227783"/>
-                  </a:lnTo>
-                  <a:lnTo>
-                    <a:pt x="3939238" y="2239605"/>
-                  </a:lnTo>
-                  <a:lnTo>
-                    <a:pt x="4010861" y="2251240"/>
-                  </a:lnTo>
-                  <a:lnTo>
-                    <a:pt x="4082483" y="2262693"/>
-                  </a:lnTo>
-                  <a:lnTo>
-                    <a:pt x="4154106" y="2273965"/>
-                  </a:lnTo>
-                  <a:lnTo>
-                    <a:pt x="4225729" y="2285059"/>
-                  </a:lnTo>
-                  <a:lnTo>
-                    <a:pt x="4297351" y="2295979"/>
-                  </a:lnTo>
-                  <a:lnTo>
-                    <a:pt x="4368974" y="2306727"/>
-                  </a:lnTo>
-                  <a:lnTo>
-                    <a:pt x="4440596" y="2317305"/>
-                  </a:lnTo>
-                  <a:lnTo>
-                    <a:pt x="4512219" y="2327717"/>
-                  </a:lnTo>
-                  <a:lnTo>
-                    <a:pt x="4583841" y="2337964"/>
-                  </a:lnTo>
-                  <a:lnTo>
-                    <a:pt x="4655464" y="2348051"/>
-                  </a:lnTo>
-                  <a:lnTo>
-                    <a:pt x="4727086" y="2357978"/>
-                  </a:lnTo>
-                  <a:lnTo>
-                    <a:pt x="4798709" y="2367749"/>
-                  </a:lnTo>
-                  <a:lnTo>
-                    <a:pt x="4870331" y="2377366"/>
-                  </a:lnTo>
-                  <a:lnTo>
-                    <a:pt x="4941954" y="2386832"/>
-                  </a:lnTo>
-                  <a:lnTo>
-                    <a:pt x="5013576" y="2396148"/>
-                  </a:lnTo>
-                  <a:lnTo>
-                    <a:pt x="5085199" y="2405318"/>
-                  </a:lnTo>
-                  <a:lnTo>
-                    <a:pt x="5156821" y="2414343"/>
-                  </a:lnTo>
-                  <a:lnTo>
-                    <a:pt x="5228444" y="2423226"/>
-                  </a:lnTo>
-                  <a:lnTo>
-                    <a:pt x="5300066" y="2431969"/>
-                  </a:lnTo>
-                  <a:lnTo>
-                    <a:pt x="5371689" y="2440575"/>
-                  </a:lnTo>
-                  <a:lnTo>
-                    <a:pt x="5443311" y="2449044"/>
-                  </a:lnTo>
-                  <a:lnTo>
-                    <a:pt x="5514934" y="2457381"/>
-                  </a:lnTo>
-                  <a:lnTo>
-                    <a:pt x="5586557" y="2465586"/>
-                  </a:lnTo>
-                  <a:lnTo>
-                    <a:pt x="5658179" y="2473662"/>
-                  </a:lnTo>
-                  <a:lnTo>
-                    <a:pt x="5729802" y="2481610"/>
-                  </a:lnTo>
-                  <a:lnTo>
-                    <a:pt x="5801424" y="2489434"/>
-                  </a:lnTo>
-                  <a:lnTo>
-                    <a:pt x="5873047" y="2497134"/>
-                  </a:lnTo>
-                  <a:lnTo>
-                    <a:pt x="5944669" y="2504713"/>
-                  </a:lnTo>
-                  <a:lnTo>
-                    <a:pt x="6016292" y="2512172"/>
-                  </a:lnTo>
-                  <a:lnTo>
-                    <a:pt x="6087914" y="2519514"/>
-                  </a:lnTo>
-                  <a:lnTo>
-                    <a:pt x="6159537" y="2526740"/>
-                  </a:lnTo>
-                  <a:lnTo>
-                    <a:pt x="6231159" y="2533853"/>
-                  </a:lnTo>
-                  <a:lnTo>
-                    <a:pt x="6302782" y="2540853"/>
-                  </a:lnTo>
-                  <a:lnTo>
-                    <a:pt x="6374404" y="2547743"/>
-                  </a:lnTo>
-                  <a:lnTo>
-                    <a:pt x="6446027" y="2554525"/>
-                  </a:lnTo>
-                  <a:lnTo>
-                    <a:pt x="6517649" y="2561200"/>
-                  </a:lnTo>
-                  <a:lnTo>
-                    <a:pt x="6589272" y="2567769"/>
-                  </a:lnTo>
-                  <a:lnTo>
-                    <a:pt x="6660894" y="2574235"/>
-                  </a:lnTo>
-                  <a:lnTo>
-                    <a:pt x="6732517" y="2580600"/>
-                  </a:lnTo>
-                  <a:lnTo>
-                    <a:pt x="6804139" y="2586864"/>
-                  </a:lnTo>
-                  <a:lnTo>
-                    <a:pt x="6875762" y="2593029"/>
-                  </a:lnTo>
-                  <a:lnTo>
-                    <a:pt x="6947385" y="2599097"/>
-                  </a:lnTo>
-                  <a:lnTo>
-                    <a:pt x="7019007" y="2605070"/>
-                  </a:lnTo>
-                  <a:lnTo>
-                    <a:pt x="7090630" y="2610948"/>
-                  </a:lnTo>
-                  <a:lnTo>
-                    <a:pt x="7090630" y="2768519"/>
-                  </a:lnTo>
-                  <a:lnTo>
-                    <a:pt x="7019007" y="2762823"/>
-                  </a:lnTo>
-                  <a:lnTo>
-                    <a:pt x="6947385" y="2756971"/>
-                  </a:lnTo>
-                  <a:lnTo>
-                    <a:pt x="6875762" y="2750961"/>
-                  </a:lnTo>
-                  <a:lnTo>
-                    <a:pt x="6804139" y="2744787"/>
-                  </a:lnTo>
-                  <a:lnTo>
-                    <a:pt x="6732517" y="2738446"/>
-                  </a:lnTo>
-                  <a:lnTo>
-                    <a:pt x="6660894" y="2731932"/>
-                  </a:lnTo>
-                  <a:lnTo>
-                    <a:pt x="6589272" y="2725242"/>
-                  </a:lnTo>
-                  <a:lnTo>
-                    <a:pt x="6517649" y="2718369"/>
-                  </a:lnTo>
-                  <a:lnTo>
-                    <a:pt x="6446027" y="2711310"/>
-                  </a:lnTo>
-                  <a:lnTo>
-                    <a:pt x="6374404" y="2704060"/>
-                  </a:lnTo>
-                  <a:lnTo>
-                    <a:pt x="6302782" y="2696612"/>
-                  </a:lnTo>
-                  <a:lnTo>
-                    <a:pt x="6231159" y="2688962"/>
-                  </a:lnTo>
-                  <a:lnTo>
-                    <a:pt x="6159537" y="2681104"/>
-                  </a:lnTo>
-                  <a:lnTo>
-                    <a:pt x="6087914" y="2673033"/>
-                  </a:lnTo>
-                  <a:lnTo>
-                    <a:pt x="6016292" y="2664742"/>
-                  </a:lnTo>
-                  <a:lnTo>
-                    <a:pt x="5944669" y="2656227"/>
-                  </a:lnTo>
-                  <a:lnTo>
-                    <a:pt x="5873047" y="2647480"/>
-                  </a:lnTo>
-                  <a:lnTo>
-                    <a:pt x="5801424" y="2638495"/>
-                  </a:lnTo>
-                  <a:lnTo>
-                    <a:pt x="5729802" y="2629267"/>
-                  </a:lnTo>
-                  <a:lnTo>
-                    <a:pt x="5658179" y="2619787"/>
-                  </a:lnTo>
-                  <a:lnTo>
-                    <a:pt x="5586557" y="2610050"/>
-                  </a:lnTo>
-                  <a:lnTo>
-                    <a:pt x="5514934" y="2600049"/>
-                  </a:lnTo>
-                  <a:lnTo>
-                    <a:pt x="5443311" y="2589776"/>
-                  </a:lnTo>
-                  <a:lnTo>
-                    <a:pt x="5371689" y="2579224"/>
-                  </a:lnTo>
-                  <a:lnTo>
-                    <a:pt x="5300066" y="2568385"/>
-                  </a:lnTo>
-                  <a:lnTo>
-                    <a:pt x="5228444" y="2557252"/>
-                  </a:lnTo>
-                  <a:lnTo>
-                    <a:pt x="5156821" y="2545817"/>
-                  </a:lnTo>
-                  <a:lnTo>
-                    <a:pt x="5085199" y="2534071"/>
-                  </a:lnTo>
-                  <a:lnTo>
-                    <a:pt x="5013576" y="2522006"/>
-                  </a:lnTo>
-                  <a:lnTo>
-                    <a:pt x="4941954" y="2509613"/>
-                  </a:lnTo>
-                  <a:lnTo>
-                    <a:pt x="4870331" y="2496883"/>
-                  </a:lnTo>
-                  <a:lnTo>
-                    <a:pt x="4798709" y="2483808"/>
-                  </a:lnTo>
-                  <a:lnTo>
-                    <a:pt x="4727086" y="2470377"/>
-                  </a:lnTo>
-                  <a:lnTo>
-                    <a:pt x="4655464" y="2456582"/>
-                  </a:lnTo>
-                  <a:lnTo>
-                    <a:pt x="4583841" y="2442412"/>
-                  </a:lnTo>
-                  <a:lnTo>
-                    <a:pt x="4512219" y="2427857"/>
-                  </a:lnTo>
-                  <a:lnTo>
-                    <a:pt x="4440596" y="2412907"/>
-                  </a:lnTo>
-                  <a:lnTo>
-                    <a:pt x="4368974" y="2397550"/>
-                  </a:lnTo>
-                  <a:lnTo>
-                    <a:pt x="4297351" y="2381777"/>
-                  </a:lnTo>
-                  <a:lnTo>
-                    <a:pt x="4225729" y="2365575"/>
-                  </a:lnTo>
-                  <a:lnTo>
-                    <a:pt x="4154106" y="2348932"/>
-                  </a:lnTo>
-                  <a:lnTo>
-                    <a:pt x="4082483" y="2331838"/>
-                  </a:lnTo>
-                  <a:lnTo>
-                    <a:pt x="4010861" y="2314280"/>
-                  </a:lnTo>
-                  <a:lnTo>
-                    <a:pt x="3939238" y="2296244"/>
-                  </a:lnTo>
-                  <a:lnTo>
-                    <a:pt x="3867616" y="2277719"/>
-                  </a:lnTo>
-                  <a:lnTo>
-                    <a:pt x="3795993" y="2258690"/>
-                  </a:lnTo>
-                  <a:lnTo>
-                    <a:pt x="3724371" y="2239145"/>
-                  </a:lnTo>
-                  <a:lnTo>
-                    <a:pt x="3652748" y="2219068"/>
-                  </a:lnTo>
-                  <a:lnTo>
-                    <a:pt x="3581126" y="2198446"/>
-                  </a:lnTo>
-                  <a:lnTo>
-                    <a:pt x="3509503" y="2177264"/>
-                  </a:lnTo>
-                  <a:lnTo>
-                    <a:pt x="3437881" y="2155507"/>
-                  </a:lnTo>
-                  <a:lnTo>
-                    <a:pt x="3366258" y="2139558"/>
-                  </a:lnTo>
-                  <a:lnTo>
-                    <a:pt x="3294636" y="2126135"/>
-                  </a:lnTo>
-                  <a:lnTo>
-                    <a:pt x="3223013" y="2112497"/>
-                  </a:lnTo>
-                  <a:lnTo>
-                    <a:pt x="3151391" y="2098641"/>
-                  </a:lnTo>
-                  <a:lnTo>
-                    <a:pt x="3079768" y="2084563"/>
-                  </a:lnTo>
-                  <a:lnTo>
-                    <a:pt x="3008146" y="2070259"/>
-                  </a:lnTo>
-                  <a:lnTo>
-                    <a:pt x="2936523" y="2055727"/>
-                  </a:lnTo>
-                  <a:lnTo>
-                    <a:pt x="2864901" y="2040962"/>
-                  </a:lnTo>
-                  <a:lnTo>
-                    <a:pt x="2793278" y="2025961"/>
-                  </a:lnTo>
-                  <a:lnTo>
-                    <a:pt x="2721655" y="2010719"/>
-                  </a:lnTo>
-                  <a:lnTo>
-                    <a:pt x="2650033" y="1995234"/>
-                  </a:lnTo>
-                  <a:lnTo>
-                    <a:pt x="2578410" y="1979501"/>
-                  </a:lnTo>
-                  <a:lnTo>
-                    <a:pt x="2506788" y="1963516"/>
-                  </a:lnTo>
-                  <a:lnTo>
-                    <a:pt x="2435165" y="1947275"/>
-                  </a:lnTo>
-                  <a:lnTo>
-                    <a:pt x="2363543" y="1930774"/>
-                  </a:lnTo>
-                  <a:lnTo>
-                    <a:pt x="2291920" y="1914009"/>
-                  </a:lnTo>
-                  <a:lnTo>
-                    <a:pt x="2220298" y="1896976"/>
-                  </a:lnTo>
-                  <a:lnTo>
-                    <a:pt x="2148675" y="1879671"/>
-                  </a:lnTo>
-                  <a:lnTo>
-                    <a:pt x="2077053" y="1862088"/>
-                  </a:lnTo>
-                  <a:lnTo>
-                    <a:pt x="2005430" y="1844224"/>
-                  </a:lnTo>
-                  <a:lnTo>
-                    <a:pt x="1933808" y="1826074"/>
-                  </a:lnTo>
-                  <a:lnTo>
-                    <a:pt x="1862185" y="1807633"/>
-                  </a:lnTo>
-                  <a:lnTo>
-                    <a:pt x="1790563" y="1788897"/>
-                  </a:lnTo>
-                  <a:lnTo>
-                    <a:pt x="1718940" y="1769862"/>
-                  </a:lnTo>
-                  <a:lnTo>
-                    <a:pt x="1647318" y="1750521"/>
-                  </a:lnTo>
-                  <a:lnTo>
-                    <a:pt x="1575695" y="1730872"/>
-                  </a:lnTo>
-                  <a:lnTo>
-                    <a:pt x="1504073" y="1710907"/>
-                  </a:lnTo>
-                  <a:lnTo>
-                    <a:pt x="1432450" y="1690623"/>
-                  </a:lnTo>
-                  <a:lnTo>
-                    <a:pt x="1360827" y="1670015"/>
-                  </a:lnTo>
-                  <a:lnTo>
-                    <a:pt x="1289205" y="1649077"/>
-                  </a:lnTo>
-                  <a:lnTo>
-                    <a:pt x="1217582" y="1627803"/>
-                  </a:lnTo>
-                  <a:lnTo>
-                    <a:pt x="1145960" y="1606189"/>
-                  </a:lnTo>
-                  <a:lnTo>
-                    <a:pt x="1074337" y="1584229"/>
-                  </a:lnTo>
-                  <a:lnTo>
-                    <a:pt x="1002715" y="1561918"/>
-                  </a:lnTo>
-                  <a:lnTo>
-                    <a:pt x="931092" y="1539250"/>
-                  </a:lnTo>
-                  <a:lnTo>
-                    <a:pt x="859470" y="1516218"/>
-                  </a:lnTo>
-                  <a:lnTo>
-                    <a:pt x="787847" y="1492819"/>
-                  </a:lnTo>
-                  <a:lnTo>
-                    <a:pt x="716225" y="1469044"/>
-                  </a:lnTo>
-                  <a:lnTo>
-                    <a:pt x="644602" y="1444889"/>
-                  </a:lnTo>
-                  <a:lnTo>
-                    <a:pt x="572980" y="1420348"/>
-                  </a:lnTo>
-                  <a:lnTo>
-                    <a:pt x="501357" y="1395413"/>
-                  </a:lnTo>
-                  <a:lnTo>
-                    <a:pt x="429735" y="1370080"/>
-                  </a:lnTo>
-                  <a:lnTo>
-                    <a:pt x="358112" y="1344341"/>
-                  </a:lnTo>
-                  <a:lnTo>
-                    <a:pt x="286490" y="1318191"/>
-                  </a:lnTo>
-                  <a:lnTo>
-                    <a:pt x="214867" y="1291621"/>
-                  </a:lnTo>
-                  <a:lnTo>
-                    <a:pt x="143245" y="1264627"/>
-                  </a:lnTo>
-                  <a:lnTo>
-                    <a:pt x="71622" y="1237200"/>
-                  </a:lnTo>
-                  <a:lnTo>
-                    <a:pt x="0" y="1209334"/>
+                    <a:pt x="70344" y="28422"/>
+                  </a:lnTo>
+                  <a:lnTo>
+                    <a:pt x="140688" y="56093"/>
+                  </a:lnTo>
+                  <a:lnTo>
+                    <a:pt x="211033" y="83033"/>
+                  </a:lnTo>
+                  <a:lnTo>
+                    <a:pt x="281377" y="109259"/>
+                  </a:lnTo>
+                  <a:lnTo>
+                    <a:pt x="351722" y="134793"/>
+                  </a:lnTo>
+                  <a:lnTo>
+                    <a:pt x="422066" y="159651"/>
+                  </a:lnTo>
+                  <a:lnTo>
+                    <a:pt x="492411" y="183852"/>
+                  </a:lnTo>
+                  <a:lnTo>
+                    <a:pt x="562755" y="207412"/>
+                  </a:lnTo>
+                  <a:lnTo>
+                    <a:pt x="633100" y="230350"/>
+                  </a:lnTo>
+                  <a:lnTo>
+                    <a:pt x="703444" y="252681"/>
+                  </a:lnTo>
+                  <a:lnTo>
+                    <a:pt x="773789" y="274421"/>
+                  </a:lnTo>
+                  <a:lnTo>
+                    <a:pt x="844133" y="295587"/>
+                  </a:lnTo>
+                  <a:lnTo>
+                    <a:pt x="914478" y="316193"/>
+                  </a:lnTo>
+                  <a:lnTo>
+                    <a:pt x="984822" y="336254"/>
+                  </a:lnTo>
+                  <a:lnTo>
+                    <a:pt x="1055167" y="355784"/>
+                  </a:lnTo>
+                  <a:lnTo>
+                    <a:pt x="1125511" y="374798"/>
+                  </a:lnTo>
+                  <a:lnTo>
+                    <a:pt x="1195856" y="393309"/>
+                  </a:lnTo>
+                  <a:lnTo>
+                    <a:pt x="1266200" y="411331"/>
+                  </a:lnTo>
+                  <a:lnTo>
+                    <a:pt x="1336545" y="428876"/>
+                  </a:lnTo>
+                  <a:lnTo>
+                    <a:pt x="1406889" y="445957"/>
+                  </a:lnTo>
+                  <a:lnTo>
+                    <a:pt x="1477234" y="462586"/>
+                  </a:lnTo>
+                  <a:lnTo>
+                    <a:pt x="1547578" y="478775"/>
+                  </a:lnTo>
+                  <a:lnTo>
+                    <a:pt x="1617923" y="494537"/>
+                  </a:lnTo>
+                  <a:lnTo>
+                    <a:pt x="1688267" y="509881"/>
+                  </a:lnTo>
+                  <a:lnTo>
+                    <a:pt x="1758612" y="524820"/>
+                  </a:lnTo>
+                  <a:lnTo>
+                    <a:pt x="1828956" y="539364"/>
+                  </a:lnTo>
+                  <a:lnTo>
+                    <a:pt x="1899301" y="553523"/>
+                  </a:lnTo>
+                  <a:lnTo>
+                    <a:pt x="1969645" y="567308"/>
+                  </a:lnTo>
+                  <a:lnTo>
+                    <a:pt x="2039990" y="580728"/>
+                  </a:lnTo>
+                  <a:lnTo>
+                    <a:pt x="2110334" y="593793"/>
+                  </a:lnTo>
+                  <a:lnTo>
+                    <a:pt x="2180679" y="606513"/>
+                  </a:lnTo>
+                  <a:lnTo>
+                    <a:pt x="2251023" y="618896"/>
+                  </a:lnTo>
+                  <a:lnTo>
+                    <a:pt x="2321368" y="630952"/>
+                  </a:lnTo>
+                  <a:lnTo>
+                    <a:pt x="2391712" y="642689"/>
+                  </a:lnTo>
+                  <a:lnTo>
+                    <a:pt x="2462057" y="654116"/>
+                  </a:lnTo>
+                  <a:lnTo>
+                    <a:pt x="2532401" y="665240"/>
+                  </a:lnTo>
+                  <a:lnTo>
+                    <a:pt x="2602746" y="676070"/>
+                  </a:lnTo>
+                  <a:lnTo>
+                    <a:pt x="2673090" y="686614"/>
+                  </a:lnTo>
+                  <a:lnTo>
+                    <a:pt x="2743435" y="696879"/>
+                  </a:lnTo>
+                  <a:lnTo>
+                    <a:pt x="2813779" y="706873"/>
+                  </a:lnTo>
+                  <a:lnTo>
+                    <a:pt x="2884124" y="716602"/>
+                  </a:lnTo>
+                  <a:lnTo>
+                    <a:pt x="2954468" y="726074"/>
+                  </a:lnTo>
+                  <a:lnTo>
+                    <a:pt x="3024813" y="735295"/>
+                  </a:lnTo>
+                  <a:lnTo>
+                    <a:pt x="3095157" y="744273"/>
+                  </a:lnTo>
+                  <a:lnTo>
+                    <a:pt x="3165502" y="753013"/>
+                  </a:lnTo>
+                  <a:lnTo>
+                    <a:pt x="3235846" y="761522"/>
+                  </a:lnTo>
+                  <a:lnTo>
+                    <a:pt x="3306191" y="769806"/>
+                  </a:lnTo>
+                  <a:lnTo>
+                    <a:pt x="3376535" y="776884"/>
+                  </a:lnTo>
+                  <a:lnTo>
+                    <a:pt x="3446880" y="781576"/>
+                  </a:lnTo>
+                  <a:lnTo>
+                    <a:pt x="3517224" y="786195"/>
+                  </a:lnTo>
+                  <a:lnTo>
+                    <a:pt x="3587569" y="790741"/>
+                  </a:lnTo>
+                  <a:lnTo>
+                    <a:pt x="3657913" y="795216"/>
+                  </a:lnTo>
+                  <a:lnTo>
+                    <a:pt x="3728257" y="799620"/>
+                  </a:lnTo>
+                  <a:lnTo>
+                    <a:pt x="3798602" y="803954"/>
+                  </a:lnTo>
+                  <a:lnTo>
+                    <a:pt x="3868946" y="808220"/>
+                  </a:lnTo>
+                  <a:lnTo>
+                    <a:pt x="3939291" y="812419"/>
+                  </a:lnTo>
+                  <a:lnTo>
+                    <a:pt x="4009635" y="816552"/>
+                  </a:lnTo>
+                  <a:lnTo>
+                    <a:pt x="4079980" y="820620"/>
+                  </a:lnTo>
+                  <a:lnTo>
+                    <a:pt x="4150324" y="824624"/>
+                  </a:lnTo>
+                  <a:lnTo>
+                    <a:pt x="4220669" y="828564"/>
+                  </a:lnTo>
+                  <a:lnTo>
+                    <a:pt x="4291013" y="832443"/>
+                  </a:lnTo>
+                  <a:lnTo>
+                    <a:pt x="4361358" y="836261"/>
+                  </a:lnTo>
+                  <a:lnTo>
+                    <a:pt x="4431702" y="840018"/>
+                  </a:lnTo>
+                  <a:lnTo>
+                    <a:pt x="4502047" y="843716"/>
+                  </a:lnTo>
+                  <a:lnTo>
+                    <a:pt x="4572391" y="847356"/>
+                  </a:lnTo>
+                  <a:lnTo>
+                    <a:pt x="4642736" y="850938"/>
+                  </a:lnTo>
+                  <a:lnTo>
+                    <a:pt x="4713080" y="854465"/>
+                  </a:lnTo>
+                  <a:lnTo>
+                    <a:pt x="4783425" y="857935"/>
+                  </a:lnTo>
+                  <a:lnTo>
+                    <a:pt x="4853769" y="861351"/>
+                  </a:lnTo>
+                  <a:lnTo>
+                    <a:pt x="4924114" y="864713"/>
+                  </a:lnTo>
+                  <a:lnTo>
+                    <a:pt x="4994458" y="868022"/>
+                  </a:lnTo>
+                  <a:lnTo>
+                    <a:pt x="5064803" y="871279"/>
+                  </a:lnTo>
+                  <a:lnTo>
+                    <a:pt x="5135147" y="874485"/>
+                  </a:lnTo>
+                  <a:lnTo>
+                    <a:pt x="5205492" y="877640"/>
+                  </a:lnTo>
+                  <a:lnTo>
+                    <a:pt x="5275836" y="880746"/>
+                  </a:lnTo>
+                  <a:lnTo>
+                    <a:pt x="5346181" y="883802"/>
+                  </a:lnTo>
+                  <a:lnTo>
+                    <a:pt x="5416525" y="886811"/>
+                  </a:lnTo>
+                  <a:lnTo>
+                    <a:pt x="5486870" y="889772"/>
+                  </a:lnTo>
+                  <a:lnTo>
+                    <a:pt x="5557214" y="892686"/>
+                  </a:lnTo>
+                  <a:lnTo>
+                    <a:pt x="5627559" y="895554"/>
+                  </a:lnTo>
+                  <a:lnTo>
+                    <a:pt x="5697903" y="898378"/>
+                  </a:lnTo>
+                  <a:lnTo>
+                    <a:pt x="5768248" y="901157"/>
+                  </a:lnTo>
+                  <a:lnTo>
+                    <a:pt x="5838592" y="903892"/>
+                  </a:lnTo>
+                  <a:lnTo>
+                    <a:pt x="5908937" y="906583"/>
+                  </a:lnTo>
+                  <a:lnTo>
+                    <a:pt x="5979281" y="909233"/>
+                  </a:lnTo>
+                  <a:lnTo>
+                    <a:pt x="6049626" y="911841"/>
+                  </a:lnTo>
+                  <a:lnTo>
+                    <a:pt x="6119970" y="914408"/>
+                  </a:lnTo>
+                  <a:lnTo>
+                    <a:pt x="6190315" y="916934"/>
+                  </a:lnTo>
+                  <a:lnTo>
+                    <a:pt x="6260659" y="919420"/>
+                  </a:lnTo>
+                  <a:lnTo>
+                    <a:pt x="6331004" y="921868"/>
+                  </a:lnTo>
+                  <a:lnTo>
+                    <a:pt x="6401348" y="924276"/>
+                  </a:lnTo>
+                  <a:lnTo>
+                    <a:pt x="6471693" y="926647"/>
+                  </a:lnTo>
+                  <a:lnTo>
+                    <a:pt x="6542037" y="928981"/>
+                  </a:lnTo>
+                  <a:lnTo>
+                    <a:pt x="6612382" y="931277"/>
+                  </a:lnTo>
+                  <a:lnTo>
+                    <a:pt x="6682726" y="933538"/>
+                  </a:lnTo>
+                  <a:lnTo>
+                    <a:pt x="6753071" y="935763"/>
+                  </a:lnTo>
+                  <a:lnTo>
+                    <a:pt x="6823415" y="937953"/>
+                  </a:lnTo>
+                  <a:lnTo>
+                    <a:pt x="6893760" y="940108"/>
+                  </a:lnTo>
+                  <a:lnTo>
+                    <a:pt x="6964104" y="942230"/>
+                  </a:lnTo>
+                  <a:lnTo>
+                    <a:pt x="6964104" y="999093"/>
+                  </a:lnTo>
+                  <a:lnTo>
+                    <a:pt x="6893760" y="997037"/>
+                  </a:lnTo>
+                  <a:lnTo>
+                    <a:pt x="6823415" y="994926"/>
+                  </a:lnTo>
+                  <a:lnTo>
+                    <a:pt x="6753071" y="992757"/>
+                  </a:lnTo>
+                  <a:lnTo>
+                    <a:pt x="6682726" y="990529"/>
+                  </a:lnTo>
+                  <a:lnTo>
+                    <a:pt x="6612382" y="988240"/>
+                  </a:lnTo>
+                  <a:lnTo>
+                    <a:pt x="6542037" y="985890"/>
+                  </a:lnTo>
+                  <a:lnTo>
+                    <a:pt x="6471693" y="983475"/>
+                  </a:lnTo>
+                  <a:lnTo>
+                    <a:pt x="6401348" y="980995"/>
+                  </a:lnTo>
+                  <a:lnTo>
+                    <a:pt x="6331004" y="978448"/>
+                  </a:lnTo>
+                  <a:lnTo>
+                    <a:pt x="6260659" y="975831"/>
+                  </a:lnTo>
+                  <a:lnTo>
+                    <a:pt x="6190315" y="973143"/>
+                  </a:lnTo>
+                  <a:lnTo>
+                    <a:pt x="6119970" y="970383"/>
+                  </a:lnTo>
+                  <a:lnTo>
+                    <a:pt x="6049626" y="967547"/>
+                  </a:lnTo>
+                  <a:lnTo>
+                    <a:pt x="5979281" y="964634"/>
+                  </a:lnTo>
+                  <a:lnTo>
+                    <a:pt x="5908937" y="961643"/>
+                  </a:lnTo>
+                  <a:lnTo>
+                    <a:pt x="5838592" y="958569"/>
+                  </a:lnTo>
+                  <a:lnTo>
+                    <a:pt x="5768248" y="955413"/>
+                  </a:lnTo>
+                  <a:lnTo>
+                    <a:pt x="5697903" y="952171"/>
+                  </a:lnTo>
+                  <a:lnTo>
+                    <a:pt x="5627559" y="948840"/>
+                  </a:lnTo>
+                  <a:lnTo>
+                    <a:pt x="5557214" y="945419"/>
+                  </a:lnTo>
+                  <a:lnTo>
+                    <a:pt x="5486870" y="941905"/>
+                  </a:lnTo>
+                  <a:lnTo>
+                    <a:pt x="5416525" y="938296"/>
+                  </a:lnTo>
+                  <a:lnTo>
+                    <a:pt x="5346181" y="934589"/>
+                  </a:lnTo>
+                  <a:lnTo>
+                    <a:pt x="5275836" y="930781"/>
+                  </a:lnTo>
+                  <a:lnTo>
+                    <a:pt x="5205492" y="926870"/>
+                  </a:lnTo>
+                  <a:lnTo>
+                    <a:pt x="5135147" y="922852"/>
+                  </a:lnTo>
+                  <a:lnTo>
+                    <a:pt x="5064803" y="918725"/>
+                  </a:lnTo>
+                  <a:lnTo>
+                    <a:pt x="4994458" y="914486"/>
+                  </a:lnTo>
+                  <a:lnTo>
+                    <a:pt x="4924114" y="910132"/>
+                  </a:lnTo>
+                  <a:lnTo>
+                    <a:pt x="4853769" y="905660"/>
+                  </a:lnTo>
+                  <a:lnTo>
+                    <a:pt x="4783425" y="901066"/>
+                  </a:lnTo>
+                  <a:lnTo>
+                    <a:pt x="4713080" y="896347"/>
+                  </a:lnTo>
+                  <a:lnTo>
+                    <a:pt x="4642736" y="891501"/>
+                  </a:lnTo>
+                  <a:lnTo>
+                    <a:pt x="4572391" y="886522"/>
+                  </a:lnTo>
+                  <a:lnTo>
+                    <a:pt x="4502047" y="881409"/>
+                  </a:lnTo>
+                  <a:lnTo>
+                    <a:pt x="4431702" y="876156"/>
+                  </a:lnTo>
+                  <a:lnTo>
+                    <a:pt x="4361358" y="870761"/>
+                  </a:lnTo>
+                  <a:lnTo>
+                    <a:pt x="4291013" y="865219"/>
+                  </a:lnTo>
+                  <a:lnTo>
+                    <a:pt x="4220669" y="859527"/>
+                  </a:lnTo>
+                  <a:lnTo>
+                    <a:pt x="4150324" y="853680"/>
+                  </a:lnTo>
+                  <a:lnTo>
+                    <a:pt x="4079980" y="847674"/>
+                  </a:lnTo>
+                  <a:lnTo>
+                    <a:pt x="4009635" y="841505"/>
+                  </a:lnTo>
+                  <a:lnTo>
+                    <a:pt x="3939291" y="835169"/>
+                  </a:lnTo>
+                  <a:lnTo>
+                    <a:pt x="3868946" y="828660"/>
+                  </a:lnTo>
+                  <a:lnTo>
+                    <a:pt x="3798602" y="821975"/>
+                  </a:lnTo>
+                  <a:lnTo>
+                    <a:pt x="3728257" y="815108"/>
+                  </a:lnTo>
+                  <a:lnTo>
+                    <a:pt x="3657913" y="808054"/>
+                  </a:lnTo>
+                  <a:lnTo>
+                    <a:pt x="3587569" y="800809"/>
+                  </a:lnTo>
+                  <a:lnTo>
+                    <a:pt x="3517224" y="793367"/>
+                  </a:lnTo>
+                  <a:lnTo>
+                    <a:pt x="3446880" y="785723"/>
+                  </a:lnTo>
+                  <a:lnTo>
+                    <a:pt x="3376535" y="777871"/>
+                  </a:lnTo>
+                  <a:lnTo>
+                    <a:pt x="3306191" y="772116"/>
+                  </a:lnTo>
+                  <a:lnTo>
+                    <a:pt x="3235846" y="767272"/>
+                  </a:lnTo>
+                  <a:lnTo>
+                    <a:pt x="3165502" y="762350"/>
+                  </a:lnTo>
+                  <a:lnTo>
+                    <a:pt x="3095157" y="757350"/>
+                  </a:lnTo>
+                  <a:lnTo>
+                    <a:pt x="3024813" y="752269"/>
+                  </a:lnTo>
+                  <a:lnTo>
+                    <a:pt x="2954468" y="747107"/>
+                  </a:lnTo>
+                  <a:lnTo>
+                    <a:pt x="2884124" y="741863"/>
+                  </a:lnTo>
+                  <a:lnTo>
+                    <a:pt x="2813779" y="736535"/>
+                  </a:lnTo>
+                  <a:lnTo>
+                    <a:pt x="2743435" y="731121"/>
+                  </a:lnTo>
+                  <a:lnTo>
+                    <a:pt x="2673090" y="725621"/>
+                  </a:lnTo>
+                  <a:lnTo>
+                    <a:pt x="2602746" y="720033"/>
+                  </a:lnTo>
+                  <a:lnTo>
+                    <a:pt x="2532401" y="714355"/>
+                  </a:lnTo>
+                  <a:lnTo>
+                    <a:pt x="2462057" y="708586"/>
+                  </a:lnTo>
+                  <a:lnTo>
+                    <a:pt x="2391712" y="702725"/>
+                  </a:lnTo>
+                  <a:lnTo>
+                    <a:pt x="2321368" y="696771"/>
+                  </a:lnTo>
+                  <a:lnTo>
+                    <a:pt x="2251023" y="690721"/>
+                  </a:lnTo>
+                  <a:lnTo>
+                    <a:pt x="2180679" y="684574"/>
+                  </a:lnTo>
+                  <a:lnTo>
+                    <a:pt x="2110334" y="678329"/>
+                  </a:lnTo>
+                  <a:lnTo>
+                    <a:pt x="2039990" y="671983"/>
+                  </a:lnTo>
+                  <a:lnTo>
+                    <a:pt x="1969645" y="665537"/>
+                  </a:lnTo>
+                  <a:lnTo>
+                    <a:pt x="1899301" y="658987"/>
+                  </a:lnTo>
+                  <a:lnTo>
+                    <a:pt x="1828956" y="652332"/>
+                  </a:lnTo>
+                  <a:lnTo>
+                    <a:pt x="1758612" y="645571"/>
+                  </a:lnTo>
+                  <a:lnTo>
+                    <a:pt x="1688267" y="638701"/>
+                  </a:lnTo>
+                  <a:lnTo>
+                    <a:pt x="1617923" y="631722"/>
+                  </a:lnTo>
+                  <a:lnTo>
+                    <a:pt x="1547578" y="624631"/>
+                  </a:lnTo>
+                  <a:lnTo>
+                    <a:pt x="1477234" y="617426"/>
+                  </a:lnTo>
+                  <a:lnTo>
+                    <a:pt x="1406889" y="610106"/>
+                  </a:lnTo>
+                  <a:lnTo>
+                    <a:pt x="1336545" y="602669"/>
+                  </a:lnTo>
+                  <a:lnTo>
+                    <a:pt x="1266200" y="595113"/>
+                  </a:lnTo>
+                  <a:lnTo>
+                    <a:pt x="1195856" y="587436"/>
+                  </a:lnTo>
+                  <a:lnTo>
+                    <a:pt x="1125511" y="579636"/>
+                  </a:lnTo>
+                  <a:lnTo>
+                    <a:pt x="1055167" y="571711"/>
+                  </a:lnTo>
+                  <a:lnTo>
+                    <a:pt x="984822" y="563659"/>
+                  </a:lnTo>
+                  <a:lnTo>
+                    <a:pt x="914478" y="555479"/>
+                  </a:lnTo>
+                  <a:lnTo>
+                    <a:pt x="844133" y="547167"/>
+                  </a:lnTo>
+                  <a:lnTo>
+                    <a:pt x="773789" y="538723"/>
+                  </a:lnTo>
+                  <a:lnTo>
+                    <a:pt x="703444" y="530143"/>
+                  </a:lnTo>
+                  <a:lnTo>
+                    <a:pt x="633100" y="521426"/>
+                  </a:lnTo>
+                  <a:lnTo>
+                    <a:pt x="562755" y="512570"/>
+                  </a:lnTo>
+                  <a:lnTo>
+                    <a:pt x="492411" y="503572"/>
+                  </a:lnTo>
+                  <a:lnTo>
+                    <a:pt x="422066" y="494429"/>
+                  </a:lnTo>
+                  <a:lnTo>
+                    <a:pt x="351722" y="485141"/>
+                  </a:lnTo>
+                  <a:lnTo>
+                    <a:pt x="281377" y="475704"/>
+                  </a:lnTo>
+                  <a:lnTo>
+                    <a:pt x="211033" y="466115"/>
+                  </a:lnTo>
+                  <a:lnTo>
+                    <a:pt x="140688" y="456374"/>
+                  </a:lnTo>
+                  <a:lnTo>
+                    <a:pt x="70344" y="446476"/>
+                  </a:lnTo>
+                  <a:lnTo>
+                    <a:pt x="0" y="436420"/>
                   </a:lnTo>
                   <a:close/>
                 </a:path>
@@ -3584,643 +3619,318 @@
         </p:sp>
         <p:sp>
           <p:nvSpPr>
-            <p:cNvPr id="21" name="pl21"/>
-            <p:cNvSpPr/>
-            <p:nvPr/>
-          </p:nvSpPr>
-          <p:spPr>
-            <a:xfrm>
-              <a:off x="1172049" y="2579011"/>
-              <a:ext cx="7090630" cy="2610948"/>
-            </a:xfrm>
-            <a:custGeom>
-              <a:avLst/>
-              <a:pathLst>
-                <a:path w="7090630" h="2610948">
-                  <a:moveTo>
-                    <a:pt x="0" y="0"/>
-                  </a:moveTo>
-                  <a:lnTo>
-                    <a:pt x="71622" y="78760"/>
-                  </a:lnTo>
-                  <a:lnTo>
-                    <a:pt x="143245" y="155437"/>
-                  </a:lnTo>
-                  <a:lnTo>
-                    <a:pt x="214867" y="230087"/>
-                  </a:lnTo>
-                  <a:lnTo>
-                    <a:pt x="286490" y="302762"/>
-                  </a:lnTo>
-                  <a:lnTo>
-                    <a:pt x="358112" y="373516"/>
-                  </a:lnTo>
-                  <a:lnTo>
-                    <a:pt x="429735" y="442398"/>
-                  </a:lnTo>
-                  <a:lnTo>
-                    <a:pt x="501357" y="509459"/>
-                  </a:lnTo>
-                  <a:lnTo>
-                    <a:pt x="572980" y="574747"/>
-                  </a:lnTo>
-                  <a:lnTo>
-                    <a:pt x="644602" y="638308"/>
-                  </a:lnTo>
-                  <a:lnTo>
-                    <a:pt x="716225" y="700188"/>
-                  </a:lnTo>
-                  <a:lnTo>
-                    <a:pt x="787847" y="760431"/>
-                  </a:lnTo>
-                  <a:lnTo>
-                    <a:pt x="859470" y="819082"/>
-                  </a:lnTo>
-                  <a:lnTo>
-                    <a:pt x="931092" y="876181"/>
-                  </a:lnTo>
-                  <a:lnTo>
-                    <a:pt x="1002715" y="931771"/>
-                  </a:lnTo>
-                  <a:lnTo>
-                    <a:pt x="1074337" y="985890"/>
-                  </a:lnTo>
-                  <a:lnTo>
-                    <a:pt x="1145960" y="1038578"/>
-                  </a:lnTo>
-                  <a:lnTo>
-                    <a:pt x="1217582" y="1089873"/>
-                  </a:lnTo>
-                  <a:lnTo>
-                    <a:pt x="1289205" y="1139811"/>
-                  </a:lnTo>
-                  <a:lnTo>
-                    <a:pt x="1360827" y="1188429"/>
-                  </a:lnTo>
-                  <a:lnTo>
-                    <a:pt x="1432450" y="1235761"/>
-                  </a:lnTo>
-                  <a:lnTo>
-                    <a:pt x="1504073" y="1281841"/>
-                  </a:lnTo>
-                  <a:lnTo>
-                    <a:pt x="1575695" y="1326703"/>
-                  </a:lnTo>
-                  <a:lnTo>
-                    <a:pt x="1647318" y="1370378"/>
-                  </a:lnTo>
-                  <a:lnTo>
-                    <a:pt x="1718940" y="1412898"/>
-                  </a:lnTo>
-                  <a:lnTo>
-                    <a:pt x="1790563" y="1454294"/>
-                  </a:lnTo>
-                  <a:lnTo>
-                    <a:pt x="1862185" y="1494595"/>
-                  </a:lnTo>
-                  <a:lnTo>
-                    <a:pt x="1933808" y="1533830"/>
-                  </a:lnTo>
-                  <a:lnTo>
-                    <a:pt x="2005430" y="1572028"/>
-                  </a:lnTo>
-                  <a:lnTo>
-                    <a:pt x="2077053" y="1609216"/>
-                  </a:lnTo>
-                  <a:lnTo>
-                    <a:pt x="2148675" y="1645420"/>
-                  </a:lnTo>
-                  <a:lnTo>
-                    <a:pt x="2220298" y="1680666"/>
-                  </a:lnTo>
-                  <a:lnTo>
-                    <a:pt x="2291920" y="1714981"/>
-                  </a:lnTo>
-                  <a:lnTo>
-                    <a:pt x="2363543" y="1748388"/>
-                  </a:lnTo>
-                  <a:lnTo>
-                    <a:pt x="2435165" y="1780912"/>
-                  </a:lnTo>
-                  <a:lnTo>
-                    <a:pt x="2506788" y="1812575"/>
-                  </a:lnTo>
-                  <a:lnTo>
-                    <a:pt x="2578410" y="1843402"/>
-                  </a:lnTo>
-                  <a:lnTo>
-                    <a:pt x="2650033" y="1873413"/>
-                  </a:lnTo>
-                  <a:lnTo>
-                    <a:pt x="2721655" y="1902630"/>
-                  </a:lnTo>
-                  <a:lnTo>
-                    <a:pt x="2793278" y="1931075"/>
-                  </a:lnTo>
-                  <a:lnTo>
-                    <a:pt x="2864901" y="1958767"/>
-                  </a:lnTo>
-                  <a:lnTo>
-                    <a:pt x="2936523" y="1985727"/>
-                  </a:lnTo>
-                  <a:lnTo>
-                    <a:pt x="3008146" y="2011975"/>
-                  </a:lnTo>
-                  <a:lnTo>
-                    <a:pt x="3079768" y="2037528"/>
-                  </a:lnTo>
-                  <a:lnTo>
-                    <a:pt x="3151391" y="2062405"/>
-                  </a:lnTo>
-                  <a:lnTo>
-                    <a:pt x="3223013" y="2086624"/>
-                  </a:lnTo>
-                  <a:lnTo>
-                    <a:pt x="3294636" y="2110203"/>
-                  </a:lnTo>
-                  <a:lnTo>
-                    <a:pt x="3366258" y="2133159"/>
-                  </a:lnTo>
-                  <a:lnTo>
-                    <a:pt x="3437881" y="2152770"/>
-                  </a:lnTo>
-                  <a:lnTo>
-                    <a:pt x="3509503" y="2165774"/>
-                  </a:lnTo>
-                  <a:lnTo>
-                    <a:pt x="3581126" y="2178572"/>
-                  </a:lnTo>
-                  <a:lnTo>
-                    <a:pt x="3652748" y="2191170"/>
-                  </a:lnTo>
-                  <a:lnTo>
-                    <a:pt x="3724371" y="2203568"/>
-                  </a:lnTo>
-                  <a:lnTo>
-                    <a:pt x="3795993" y="2215772"/>
-                  </a:lnTo>
-                  <a:lnTo>
-                    <a:pt x="3867616" y="2227783"/>
-                  </a:lnTo>
-                  <a:lnTo>
-                    <a:pt x="3939238" y="2239605"/>
-                  </a:lnTo>
-                  <a:lnTo>
-                    <a:pt x="4010861" y="2251240"/>
-                  </a:lnTo>
-                  <a:lnTo>
-                    <a:pt x="4082483" y="2262693"/>
-                  </a:lnTo>
-                  <a:lnTo>
-                    <a:pt x="4154106" y="2273965"/>
-                  </a:lnTo>
-                  <a:lnTo>
-                    <a:pt x="4225729" y="2285059"/>
-                  </a:lnTo>
-                  <a:lnTo>
-                    <a:pt x="4297351" y="2295979"/>
-                  </a:lnTo>
-                  <a:lnTo>
-                    <a:pt x="4368974" y="2306727"/>
-                  </a:lnTo>
-                  <a:lnTo>
-                    <a:pt x="4440596" y="2317305"/>
-                  </a:lnTo>
-                  <a:lnTo>
-                    <a:pt x="4512219" y="2327717"/>
-                  </a:lnTo>
-                  <a:lnTo>
-                    <a:pt x="4583841" y="2337964"/>
-                  </a:lnTo>
-                  <a:lnTo>
-                    <a:pt x="4655464" y="2348051"/>
-                  </a:lnTo>
-                  <a:lnTo>
-                    <a:pt x="4727086" y="2357978"/>
-                  </a:lnTo>
-                  <a:lnTo>
-                    <a:pt x="4798709" y="2367749"/>
-                  </a:lnTo>
-                  <a:lnTo>
-                    <a:pt x="4870331" y="2377366"/>
-                  </a:lnTo>
-                  <a:lnTo>
-                    <a:pt x="4941954" y="2386832"/>
-                  </a:lnTo>
-                  <a:lnTo>
-                    <a:pt x="5013576" y="2396148"/>
-                  </a:lnTo>
-                  <a:lnTo>
-                    <a:pt x="5085199" y="2405318"/>
-                  </a:lnTo>
-                  <a:lnTo>
-                    <a:pt x="5156821" y="2414343"/>
-                  </a:lnTo>
-                  <a:lnTo>
-                    <a:pt x="5228444" y="2423226"/>
-                  </a:lnTo>
-                  <a:lnTo>
-                    <a:pt x="5300066" y="2431969"/>
-                  </a:lnTo>
-                  <a:lnTo>
-                    <a:pt x="5371689" y="2440575"/>
-                  </a:lnTo>
-                  <a:lnTo>
-                    <a:pt x="5443311" y="2449044"/>
-                  </a:lnTo>
-                  <a:lnTo>
-                    <a:pt x="5514934" y="2457381"/>
-                  </a:lnTo>
-                  <a:lnTo>
-                    <a:pt x="5586557" y="2465586"/>
-                  </a:lnTo>
-                  <a:lnTo>
-                    <a:pt x="5658179" y="2473662"/>
-                  </a:lnTo>
-                  <a:lnTo>
-                    <a:pt x="5729802" y="2481610"/>
-                  </a:lnTo>
-                  <a:lnTo>
-                    <a:pt x="5801424" y="2489434"/>
-                  </a:lnTo>
-                  <a:lnTo>
-                    <a:pt x="5873047" y="2497134"/>
-                  </a:lnTo>
-                  <a:lnTo>
-                    <a:pt x="5944669" y="2504713"/>
-                  </a:lnTo>
-                  <a:lnTo>
-                    <a:pt x="6016292" y="2512172"/>
-                  </a:lnTo>
-                  <a:lnTo>
-                    <a:pt x="6087914" y="2519514"/>
-                  </a:lnTo>
-                  <a:lnTo>
-                    <a:pt x="6159537" y="2526740"/>
-                  </a:lnTo>
-                  <a:lnTo>
-                    <a:pt x="6231159" y="2533853"/>
-                  </a:lnTo>
-                  <a:lnTo>
-                    <a:pt x="6302782" y="2540853"/>
-                  </a:lnTo>
-                  <a:lnTo>
-                    <a:pt x="6374404" y="2547743"/>
-                  </a:lnTo>
-                  <a:lnTo>
-                    <a:pt x="6446027" y="2554525"/>
-                  </a:lnTo>
-                  <a:lnTo>
-                    <a:pt x="6517649" y="2561200"/>
-                  </a:lnTo>
-                  <a:lnTo>
-                    <a:pt x="6589272" y="2567769"/>
-                  </a:lnTo>
-                  <a:lnTo>
-                    <a:pt x="6660894" y="2574235"/>
-                  </a:lnTo>
-                  <a:lnTo>
-                    <a:pt x="6732517" y="2580600"/>
-                  </a:lnTo>
-                  <a:lnTo>
-                    <a:pt x="6804139" y="2586864"/>
-                  </a:lnTo>
-                  <a:lnTo>
-                    <a:pt x="6875762" y="2593029"/>
-                  </a:lnTo>
-                  <a:lnTo>
-                    <a:pt x="6947385" y="2599097"/>
-                  </a:lnTo>
-                  <a:lnTo>
-                    <a:pt x="7019007" y="2605070"/>
-                  </a:lnTo>
-                  <a:lnTo>
-                    <a:pt x="7090630" y="2610948"/>
-                  </a:lnTo>
-                </a:path>
-              </a:pathLst>
-            </a:custGeom>
-          </p:spPr>
-          <p:txBody>
-            <a:bodyPr/>
-            <a:lstStyle/>
-            <a:p/>
-          </p:txBody>
-        </p:sp>
-        <p:sp>
-          <p:nvSpPr>
             <p:cNvPr id="22" name="pl22"/>
             <p:cNvSpPr/>
             <p:nvPr/>
           </p:nvSpPr>
           <p:spPr>
             <a:xfrm>
-              <a:off x="1172049" y="3788346"/>
-              <a:ext cx="7090630" cy="1559184"/>
+              <a:off x="1235312" y="2325518"/>
+              <a:ext cx="6964104" cy="942230"/>
             </a:xfrm>
             <a:custGeom>
               <a:avLst/>
               <a:pathLst>
-                <a:path w="7090630" h="1559184">
+                <a:path w="6964104" h="942230">
                   <a:moveTo>
-                    <a:pt x="7090630" y="1559184"/>
+                    <a:pt x="0" y="0"/>
                   </a:moveTo>
                   <a:lnTo>
-                    <a:pt x="7019007" y="1553488"/>
-                  </a:lnTo>
-                  <a:lnTo>
-                    <a:pt x="6947385" y="1547636"/>
-                  </a:lnTo>
-                  <a:lnTo>
-                    <a:pt x="6875762" y="1541626"/>
-                  </a:lnTo>
-                  <a:lnTo>
-                    <a:pt x="6804139" y="1535452"/>
-                  </a:lnTo>
-                  <a:lnTo>
-                    <a:pt x="6732517" y="1529111"/>
-                  </a:lnTo>
-                  <a:lnTo>
-                    <a:pt x="6660894" y="1522597"/>
-                  </a:lnTo>
-                  <a:lnTo>
-                    <a:pt x="6589272" y="1515907"/>
-                  </a:lnTo>
-                  <a:lnTo>
-                    <a:pt x="6517649" y="1509034"/>
-                  </a:lnTo>
-                  <a:lnTo>
-                    <a:pt x="6446027" y="1501975"/>
-                  </a:lnTo>
-                  <a:lnTo>
-                    <a:pt x="6374404" y="1494725"/>
-                  </a:lnTo>
-                  <a:lnTo>
-                    <a:pt x="6302782" y="1487277"/>
-                  </a:lnTo>
-                  <a:lnTo>
-                    <a:pt x="6231159" y="1479627"/>
-                  </a:lnTo>
-                  <a:lnTo>
-                    <a:pt x="6159537" y="1471769"/>
-                  </a:lnTo>
-                  <a:lnTo>
-                    <a:pt x="6087914" y="1463698"/>
-                  </a:lnTo>
-                  <a:lnTo>
-                    <a:pt x="6016292" y="1455408"/>
-                  </a:lnTo>
-                  <a:lnTo>
-                    <a:pt x="5944669" y="1446892"/>
-                  </a:lnTo>
-                  <a:lnTo>
-                    <a:pt x="5873047" y="1438145"/>
-                  </a:lnTo>
-                  <a:lnTo>
-                    <a:pt x="5801424" y="1429160"/>
-                  </a:lnTo>
-                  <a:lnTo>
-                    <a:pt x="5729802" y="1419932"/>
-                  </a:lnTo>
-                  <a:lnTo>
-                    <a:pt x="5658179" y="1410452"/>
-                  </a:lnTo>
-                  <a:lnTo>
-                    <a:pt x="5586557" y="1400716"/>
-                  </a:lnTo>
-                  <a:lnTo>
-                    <a:pt x="5514934" y="1390714"/>
-                  </a:lnTo>
-                  <a:lnTo>
-                    <a:pt x="5443311" y="1380441"/>
-                  </a:lnTo>
-                  <a:lnTo>
-                    <a:pt x="5371689" y="1369889"/>
-                  </a:lnTo>
-                  <a:lnTo>
-                    <a:pt x="5300066" y="1359051"/>
-                  </a:lnTo>
-                  <a:lnTo>
-                    <a:pt x="5228444" y="1347917"/>
-                  </a:lnTo>
-                  <a:lnTo>
-                    <a:pt x="5156821" y="1336482"/>
-                  </a:lnTo>
-                  <a:lnTo>
-                    <a:pt x="5085199" y="1324736"/>
-                  </a:lnTo>
-                  <a:lnTo>
-                    <a:pt x="5013576" y="1312671"/>
-                  </a:lnTo>
-                  <a:lnTo>
-                    <a:pt x="4941954" y="1300278"/>
-                  </a:lnTo>
-                  <a:lnTo>
-                    <a:pt x="4870331" y="1287548"/>
-                  </a:lnTo>
-                  <a:lnTo>
-                    <a:pt x="4798709" y="1274473"/>
-                  </a:lnTo>
-                  <a:lnTo>
-                    <a:pt x="4727086" y="1261042"/>
-                  </a:lnTo>
-                  <a:lnTo>
-                    <a:pt x="4655464" y="1247247"/>
-                  </a:lnTo>
-                  <a:lnTo>
-                    <a:pt x="4583841" y="1233077"/>
-                  </a:lnTo>
-                  <a:lnTo>
-                    <a:pt x="4512219" y="1218522"/>
-                  </a:lnTo>
-                  <a:lnTo>
-                    <a:pt x="4440596" y="1203572"/>
-                  </a:lnTo>
-                  <a:lnTo>
-                    <a:pt x="4368974" y="1188215"/>
-                  </a:lnTo>
-                  <a:lnTo>
-                    <a:pt x="4297351" y="1172442"/>
-                  </a:lnTo>
-                  <a:lnTo>
-                    <a:pt x="4225729" y="1156240"/>
-                  </a:lnTo>
-                  <a:lnTo>
-                    <a:pt x="4154106" y="1139598"/>
-                  </a:lnTo>
-                  <a:lnTo>
-                    <a:pt x="4082483" y="1122503"/>
-                  </a:lnTo>
-                  <a:lnTo>
-                    <a:pt x="4010861" y="1104945"/>
-                  </a:lnTo>
-                  <a:lnTo>
-                    <a:pt x="3939238" y="1086909"/>
-                  </a:lnTo>
-                  <a:lnTo>
-                    <a:pt x="3867616" y="1068384"/>
-                  </a:lnTo>
-                  <a:lnTo>
-                    <a:pt x="3795993" y="1049355"/>
-                  </a:lnTo>
-                  <a:lnTo>
-                    <a:pt x="3724371" y="1029810"/>
-                  </a:lnTo>
-                  <a:lnTo>
-                    <a:pt x="3652748" y="1009733"/>
-                  </a:lnTo>
-                  <a:lnTo>
-                    <a:pt x="3581126" y="989111"/>
-                  </a:lnTo>
-                  <a:lnTo>
-                    <a:pt x="3509503" y="967930"/>
-                  </a:lnTo>
-                  <a:lnTo>
-                    <a:pt x="3437881" y="946172"/>
-                  </a:lnTo>
-                  <a:lnTo>
-                    <a:pt x="3366258" y="930223"/>
-                  </a:lnTo>
-                  <a:lnTo>
-                    <a:pt x="3294636" y="916800"/>
-                  </a:lnTo>
-                  <a:lnTo>
-                    <a:pt x="3223013" y="903162"/>
-                  </a:lnTo>
-                  <a:lnTo>
-                    <a:pt x="3151391" y="889306"/>
-                  </a:lnTo>
-                  <a:lnTo>
-                    <a:pt x="3079768" y="875228"/>
-                  </a:lnTo>
-                  <a:lnTo>
-                    <a:pt x="3008146" y="860924"/>
-                  </a:lnTo>
-                  <a:lnTo>
-                    <a:pt x="2936523" y="846392"/>
-                  </a:lnTo>
-                  <a:lnTo>
-                    <a:pt x="2864901" y="831627"/>
-                  </a:lnTo>
-                  <a:lnTo>
-                    <a:pt x="2793278" y="816626"/>
-                  </a:lnTo>
-                  <a:lnTo>
-                    <a:pt x="2721655" y="801384"/>
-                  </a:lnTo>
-                  <a:lnTo>
-                    <a:pt x="2650033" y="785899"/>
-                  </a:lnTo>
-                  <a:lnTo>
-                    <a:pt x="2578410" y="770166"/>
-                  </a:lnTo>
-                  <a:lnTo>
-                    <a:pt x="2506788" y="754181"/>
-                  </a:lnTo>
-                  <a:lnTo>
-                    <a:pt x="2435165" y="737940"/>
-                  </a:lnTo>
-                  <a:lnTo>
-                    <a:pt x="2363543" y="721439"/>
-                  </a:lnTo>
-                  <a:lnTo>
-                    <a:pt x="2291920" y="704675"/>
-                  </a:lnTo>
-                  <a:lnTo>
-                    <a:pt x="2220298" y="687641"/>
-                  </a:lnTo>
-                  <a:lnTo>
-                    <a:pt x="2148675" y="670336"/>
-                  </a:lnTo>
-                  <a:lnTo>
-                    <a:pt x="2077053" y="652753"/>
-                  </a:lnTo>
-                  <a:lnTo>
-                    <a:pt x="2005430" y="634889"/>
-                  </a:lnTo>
-                  <a:lnTo>
-                    <a:pt x="1933808" y="616739"/>
-                  </a:lnTo>
-                  <a:lnTo>
-                    <a:pt x="1862185" y="598298"/>
-                  </a:lnTo>
-                  <a:lnTo>
-                    <a:pt x="1790563" y="579562"/>
-                  </a:lnTo>
-                  <a:lnTo>
-                    <a:pt x="1718940" y="560527"/>
-                  </a:lnTo>
-                  <a:lnTo>
-                    <a:pt x="1647318" y="541186"/>
-                  </a:lnTo>
-                  <a:lnTo>
-                    <a:pt x="1575695" y="521537"/>
-                  </a:lnTo>
-                  <a:lnTo>
-                    <a:pt x="1504073" y="501572"/>
-                  </a:lnTo>
-                  <a:lnTo>
-                    <a:pt x="1432450" y="481289"/>
-                  </a:lnTo>
-                  <a:lnTo>
-                    <a:pt x="1360827" y="460680"/>
-                  </a:lnTo>
-                  <a:lnTo>
-                    <a:pt x="1289205" y="439742"/>
-                  </a:lnTo>
-                  <a:lnTo>
-                    <a:pt x="1217582" y="418468"/>
-                  </a:lnTo>
-                  <a:lnTo>
-                    <a:pt x="1145960" y="396854"/>
-                  </a:lnTo>
-                  <a:lnTo>
-                    <a:pt x="1074337" y="374895"/>
-                  </a:lnTo>
-                  <a:lnTo>
-                    <a:pt x="1002715" y="352583"/>
-                  </a:lnTo>
-                  <a:lnTo>
-                    <a:pt x="931092" y="329915"/>
-                  </a:lnTo>
-                  <a:lnTo>
-                    <a:pt x="859470" y="306883"/>
-                  </a:lnTo>
-                  <a:lnTo>
-                    <a:pt x="787847" y="283484"/>
-                  </a:lnTo>
-                  <a:lnTo>
-                    <a:pt x="716225" y="259709"/>
-                  </a:lnTo>
-                  <a:lnTo>
-                    <a:pt x="644602" y="235554"/>
-                  </a:lnTo>
-                  <a:lnTo>
-                    <a:pt x="572980" y="211013"/>
-                  </a:lnTo>
-                  <a:lnTo>
-                    <a:pt x="501357" y="186079"/>
-                  </a:lnTo>
-                  <a:lnTo>
-                    <a:pt x="429735" y="160745"/>
-                  </a:lnTo>
-                  <a:lnTo>
-                    <a:pt x="358112" y="135006"/>
-                  </a:lnTo>
-                  <a:lnTo>
-                    <a:pt x="286490" y="108856"/>
-                  </a:lnTo>
-                  <a:lnTo>
-                    <a:pt x="214867" y="82286"/>
-                  </a:lnTo>
-                  <a:lnTo>
-                    <a:pt x="143245" y="55292"/>
-                  </a:lnTo>
-                  <a:lnTo>
-                    <a:pt x="71622" y="27865"/>
-                  </a:lnTo>
-                  <a:lnTo>
-                    <a:pt x="0" y="0"/>
+                    <a:pt x="70344" y="28422"/>
+                  </a:lnTo>
+                  <a:lnTo>
+                    <a:pt x="140688" y="56093"/>
+                  </a:lnTo>
+                  <a:lnTo>
+                    <a:pt x="211033" y="83033"/>
+                  </a:lnTo>
+                  <a:lnTo>
+                    <a:pt x="281377" y="109259"/>
+                  </a:lnTo>
+                  <a:lnTo>
+                    <a:pt x="351722" y="134793"/>
+                  </a:lnTo>
+                  <a:lnTo>
+                    <a:pt x="422066" y="159651"/>
+                  </a:lnTo>
+                  <a:lnTo>
+                    <a:pt x="492411" y="183852"/>
+                  </a:lnTo>
+                  <a:lnTo>
+                    <a:pt x="562755" y="207412"/>
+                  </a:lnTo>
+                  <a:lnTo>
+                    <a:pt x="633100" y="230350"/>
+                  </a:lnTo>
+                  <a:lnTo>
+                    <a:pt x="703444" y="252681"/>
+                  </a:lnTo>
+                  <a:lnTo>
+                    <a:pt x="773789" y="274421"/>
+                  </a:lnTo>
+                  <a:lnTo>
+                    <a:pt x="844133" y="295587"/>
+                  </a:lnTo>
+                  <a:lnTo>
+                    <a:pt x="914478" y="316193"/>
+                  </a:lnTo>
+                  <a:lnTo>
+                    <a:pt x="984822" y="336254"/>
+                  </a:lnTo>
+                  <a:lnTo>
+                    <a:pt x="1055167" y="355784"/>
+                  </a:lnTo>
+                  <a:lnTo>
+                    <a:pt x="1125511" y="374798"/>
+                  </a:lnTo>
+                  <a:lnTo>
+                    <a:pt x="1195856" y="393309"/>
+                  </a:lnTo>
+                  <a:lnTo>
+                    <a:pt x="1266200" y="411331"/>
+                  </a:lnTo>
+                  <a:lnTo>
+                    <a:pt x="1336545" y="428876"/>
+                  </a:lnTo>
+                  <a:lnTo>
+                    <a:pt x="1406889" y="445957"/>
+                  </a:lnTo>
+                  <a:lnTo>
+                    <a:pt x="1477234" y="462586"/>
+                  </a:lnTo>
+                  <a:lnTo>
+                    <a:pt x="1547578" y="478775"/>
+                  </a:lnTo>
+                  <a:lnTo>
+                    <a:pt x="1617923" y="494537"/>
+                  </a:lnTo>
+                  <a:lnTo>
+                    <a:pt x="1688267" y="509881"/>
+                  </a:lnTo>
+                  <a:lnTo>
+                    <a:pt x="1758612" y="524820"/>
+                  </a:lnTo>
+                  <a:lnTo>
+                    <a:pt x="1828956" y="539364"/>
+                  </a:lnTo>
+                  <a:lnTo>
+                    <a:pt x="1899301" y="553523"/>
+                  </a:lnTo>
+                  <a:lnTo>
+                    <a:pt x="1969645" y="567308"/>
+                  </a:lnTo>
+                  <a:lnTo>
+                    <a:pt x="2039990" y="580728"/>
+                  </a:lnTo>
+                  <a:lnTo>
+                    <a:pt x="2110334" y="593793"/>
+                  </a:lnTo>
+                  <a:lnTo>
+                    <a:pt x="2180679" y="606513"/>
+                  </a:lnTo>
+                  <a:lnTo>
+                    <a:pt x="2251023" y="618896"/>
+                  </a:lnTo>
+                  <a:lnTo>
+                    <a:pt x="2321368" y="630952"/>
+                  </a:lnTo>
+                  <a:lnTo>
+                    <a:pt x="2391712" y="642689"/>
+                  </a:lnTo>
+                  <a:lnTo>
+                    <a:pt x="2462057" y="654116"/>
+                  </a:lnTo>
+                  <a:lnTo>
+                    <a:pt x="2532401" y="665240"/>
+                  </a:lnTo>
+                  <a:lnTo>
+                    <a:pt x="2602746" y="676070"/>
+                  </a:lnTo>
+                  <a:lnTo>
+                    <a:pt x="2673090" y="686614"/>
+                  </a:lnTo>
+                  <a:lnTo>
+                    <a:pt x="2743435" y="696879"/>
+                  </a:lnTo>
+                  <a:lnTo>
+                    <a:pt x="2813779" y="706873"/>
+                  </a:lnTo>
+                  <a:lnTo>
+                    <a:pt x="2884124" y="716602"/>
+                  </a:lnTo>
+                  <a:lnTo>
+                    <a:pt x="2954468" y="726074"/>
+                  </a:lnTo>
+                  <a:lnTo>
+                    <a:pt x="3024813" y="735295"/>
+                  </a:lnTo>
+                  <a:lnTo>
+                    <a:pt x="3095157" y="744273"/>
+                  </a:lnTo>
+                  <a:lnTo>
+                    <a:pt x="3165502" y="753013"/>
+                  </a:lnTo>
+                  <a:lnTo>
+                    <a:pt x="3235846" y="761522"/>
+                  </a:lnTo>
+                  <a:lnTo>
+                    <a:pt x="3306191" y="769806"/>
+                  </a:lnTo>
+                  <a:lnTo>
+                    <a:pt x="3376535" y="776884"/>
+                  </a:lnTo>
+                  <a:lnTo>
+                    <a:pt x="3446880" y="781576"/>
+                  </a:lnTo>
+                  <a:lnTo>
+                    <a:pt x="3517224" y="786195"/>
+                  </a:lnTo>
+                  <a:lnTo>
+                    <a:pt x="3587569" y="790741"/>
+                  </a:lnTo>
+                  <a:lnTo>
+                    <a:pt x="3657913" y="795216"/>
+                  </a:lnTo>
+                  <a:lnTo>
+                    <a:pt x="3728257" y="799620"/>
+                  </a:lnTo>
+                  <a:lnTo>
+                    <a:pt x="3798602" y="803954"/>
+                  </a:lnTo>
+                  <a:lnTo>
+                    <a:pt x="3868946" y="808220"/>
+                  </a:lnTo>
+                  <a:lnTo>
+                    <a:pt x="3939291" y="812419"/>
+                  </a:lnTo>
+                  <a:lnTo>
+                    <a:pt x="4009635" y="816552"/>
+                  </a:lnTo>
+                  <a:lnTo>
+                    <a:pt x="4079980" y="820620"/>
+                  </a:lnTo>
+                  <a:lnTo>
+                    <a:pt x="4150324" y="824624"/>
+                  </a:lnTo>
+                  <a:lnTo>
+                    <a:pt x="4220669" y="828564"/>
+                  </a:lnTo>
+                  <a:lnTo>
+                    <a:pt x="4291013" y="832443"/>
+                  </a:lnTo>
+                  <a:lnTo>
+                    <a:pt x="4361358" y="836261"/>
+                  </a:lnTo>
+                  <a:lnTo>
+                    <a:pt x="4431702" y="840018"/>
+                  </a:lnTo>
+                  <a:lnTo>
+                    <a:pt x="4502047" y="843716"/>
+                  </a:lnTo>
+                  <a:lnTo>
+                    <a:pt x="4572391" y="847356"/>
+                  </a:lnTo>
+                  <a:lnTo>
+                    <a:pt x="4642736" y="850938"/>
+                  </a:lnTo>
+                  <a:lnTo>
+                    <a:pt x="4713080" y="854465"/>
+                  </a:lnTo>
+                  <a:lnTo>
+                    <a:pt x="4783425" y="857935"/>
+                  </a:lnTo>
+                  <a:lnTo>
+                    <a:pt x="4853769" y="861351"/>
+                  </a:lnTo>
+                  <a:lnTo>
+                    <a:pt x="4924114" y="864713"/>
+                  </a:lnTo>
+                  <a:lnTo>
+                    <a:pt x="4994458" y="868022"/>
+                  </a:lnTo>
+                  <a:lnTo>
+                    <a:pt x="5064803" y="871279"/>
+                  </a:lnTo>
+                  <a:lnTo>
+                    <a:pt x="5135147" y="874485"/>
+                  </a:lnTo>
+                  <a:lnTo>
+                    <a:pt x="5205492" y="877640"/>
+                  </a:lnTo>
+                  <a:lnTo>
+                    <a:pt x="5275836" y="880746"/>
+                  </a:lnTo>
+                  <a:lnTo>
+                    <a:pt x="5346181" y="883802"/>
+                  </a:lnTo>
+                  <a:lnTo>
+                    <a:pt x="5416525" y="886811"/>
+                  </a:lnTo>
+                  <a:lnTo>
+                    <a:pt x="5486870" y="889772"/>
+                  </a:lnTo>
+                  <a:lnTo>
+                    <a:pt x="5557214" y="892686"/>
+                  </a:lnTo>
+                  <a:lnTo>
+                    <a:pt x="5627559" y="895554"/>
+                  </a:lnTo>
+                  <a:lnTo>
+                    <a:pt x="5697903" y="898378"/>
+                  </a:lnTo>
+                  <a:lnTo>
+                    <a:pt x="5768248" y="901157"/>
+                  </a:lnTo>
+                  <a:lnTo>
+                    <a:pt x="5838592" y="903892"/>
+                  </a:lnTo>
+                  <a:lnTo>
+                    <a:pt x="5908937" y="906583"/>
+                  </a:lnTo>
+                  <a:lnTo>
+                    <a:pt x="5979281" y="909233"/>
+                  </a:lnTo>
+                  <a:lnTo>
+                    <a:pt x="6049626" y="911841"/>
+                  </a:lnTo>
+                  <a:lnTo>
+                    <a:pt x="6119970" y="914408"/>
+                  </a:lnTo>
+                  <a:lnTo>
+                    <a:pt x="6190315" y="916934"/>
+                  </a:lnTo>
+                  <a:lnTo>
+                    <a:pt x="6260659" y="919420"/>
+                  </a:lnTo>
+                  <a:lnTo>
+                    <a:pt x="6331004" y="921868"/>
+                  </a:lnTo>
+                  <a:lnTo>
+                    <a:pt x="6401348" y="924276"/>
+                  </a:lnTo>
+                  <a:lnTo>
+                    <a:pt x="6471693" y="926647"/>
+                  </a:lnTo>
+                  <a:lnTo>
+                    <a:pt x="6542037" y="928981"/>
+                  </a:lnTo>
+                  <a:lnTo>
+                    <a:pt x="6612382" y="931277"/>
+                  </a:lnTo>
+                  <a:lnTo>
+                    <a:pt x="6682726" y="933538"/>
+                  </a:lnTo>
+                  <a:lnTo>
+                    <a:pt x="6753071" y="935763"/>
+                  </a:lnTo>
+                  <a:lnTo>
+                    <a:pt x="6823415" y="937953"/>
+                  </a:lnTo>
+                  <a:lnTo>
+                    <a:pt x="6893760" y="940108"/>
+                  </a:lnTo>
+                  <a:lnTo>
+                    <a:pt x="6964104" y="942230"/>
                   </a:lnTo>
                 </a:path>
               </a:pathLst>
@@ -4240,312 +3950,637 @@
           </p:nvSpPr>
           <p:spPr>
             <a:xfrm>
-              <a:off x="1172049" y="3261990"/>
-              <a:ext cx="7090630" cy="2017721"/>
+              <a:off x="1235312" y="2761938"/>
+              <a:ext cx="6964104" cy="562673"/>
             </a:xfrm>
             <a:custGeom>
               <a:avLst/>
               <a:pathLst>
-                <a:path w="7090630" h="2017721">
+                <a:path w="6964104" h="562673">
+                  <a:moveTo>
+                    <a:pt x="6964104" y="562673"/>
+                  </a:moveTo>
+                  <a:lnTo>
+                    <a:pt x="6893760" y="560617"/>
+                  </a:lnTo>
+                  <a:lnTo>
+                    <a:pt x="6823415" y="558505"/>
+                  </a:lnTo>
+                  <a:lnTo>
+                    <a:pt x="6753071" y="556336"/>
+                  </a:lnTo>
+                  <a:lnTo>
+                    <a:pt x="6682726" y="554108"/>
+                  </a:lnTo>
+                  <a:lnTo>
+                    <a:pt x="6612382" y="551820"/>
+                  </a:lnTo>
+                  <a:lnTo>
+                    <a:pt x="6542037" y="549469"/>
+                  </a:lnTo>
+                  <a:lnTo>
+                    <a:pt x="6471693" y="547055"/>
+                  </a:lnTo>
+                  <a:lnTo>
+                    <a:pt x="6401348" y="544575"/>
+                  </a:lnTo>
+                  <a:lnTo>
+                    <a:pt x="6331004" y="542027"/>
+                  </a:lnTo>
+                  <a:lnTo>
+                    <a:pt x="6260659" y="539411"/>
+                  </a:lnTo>
+                  <a:lnTo>
+                    <a:pt x="6190315" y="536723"/>
+                  </a:lnTo>
+                  <a:lnTo>
+                    <a:pt x="6119970" y="533962"/>
+                  </a:lnTo>
+                  <a:lnTo>
+                    <a:pt x="6049626" y="531127"/>
+                  </a:lnTo>
+                  <a:lnTo>
+                    <a:pt x="5979281" y="528214"/>
+                  </a:lnTo>
+                  <a:lnTo>
+                    <a:pt x="5908937" y="525222"/>
+                  </a:lnTo>
+                  <a:lnTo>
+                    <a:pt x="5838592" y="522149"/>
+                  </a:lnTo>
+                  <a:lnTo>
+                    <a:pt x="5768248" y="518992"/>
+                  </a:lnTo>
+                  <a:lnTo>
+                    <a:pt x="5697903" y="515750"/>
+                  </a:lnTo>
+                  <a:lnTo>
+                    <a:pt x="5627559" y="512420"/>
+                  </a:lnTo>
+                  <a:lnTo>
+                    <a:pt x="5557214" y="508999"/>
+                  </a:lnTo>
+                  <a:lnTo>
+                    <a:pt x="5486870" y="505485"/>
+                  </a:lnTo>
+                  <a:lnTo>
+                    <a:pt x="5416525" y="501876"/>
+                  </a:lnTo>
+                  <a:lnTo>
+                    <a:pt x="5346181" y="498168"/>
+                  </a:lnTo>
+                  <a:lnTo>
+                    <a:pt x="5275836" y="494360"/>
+                  </a:lnTo>
+                  <a:lnTo>
+                    <a:pt x="5205492" y="490449"/>
+                  </a:lnTo>
+                  <a:lnTo>
+                    <a:pt x="5135147" y="486431"/>
+                  </a:lnTo>
+                  <a:lnTo>
+                    <a:pt x="5064803" y="482305"/>
+                  </a:lnTo>
+                  <a:lnTo>
+                    <a:pt x="4994458" y="478066"/>
+                  </a:lnTo>
+                  <a:lnTo>
+                    <a:pt x="4924114" y="473712"/>
+                  </a:lnTo>
+                  <a:lnTo>
+                    <a:pt x="4853769" y="469239"/>
+                  </a:lnTo>
+                  <a:lnTo>
+                    <a:pt x="4783425" y="464646"/>
+                  </a:lnTo>
+                  <a:lnTo>
+                    <a:pt x="4713080" y="459927"/>
+                  </a:lnTo>
+                  <a:lnTo>
+                    <a:pt x="4642736" y="455080"/>
+                  </a:lnTo>
+                  <a:lnTo>
+                    <a:pt x="4572391" y="450102"/>
+                  </a:lnTo>
+                  <a:lnTo>
+                    <a:pt x="4502047" y="444988"/>
+                  </a:lnTo>
+                  <a:lnTo>
+                    <a:pt x="4431702" y="439736"/>
+                  </a:lnTo>
+                  <a:lnTo>
+                    <a:pt x="4361358" y="434340"/>
+                  </a:lnTo>
+                  <a:lnTo>
+                    <a:pt x="4291013" y="428799"/>
+                  </a:lnTo>
+                  <a:lnTo>
+                    <a:pt x="4220669" y="423106"/>
+                  </a:lnTo>
+                  <a:lnTo>
+                    <a:pt x="4150324" y="417259"/>
+                  </a:lnTo>
+                  <a:lnTo>
+                    <a:pt x="4079980" y="411254"/>
+                  </a:lnTo>
+                  <a:lnTo>
+                    <a:pt x="4009635" y="405085"/>
+                  </a:lnTo>
+                  <a:lnTo>
+                    <a:pt x="3939291" y="398748"/>
+                  </a:lnTo>
+                  <a:lnTo>
+                    <a:pt x="3868946" y="392240"/>
+                  </a:lnTo>
+                  <a:lnTo>
+                    <a:pt x="3798602" y="385554"/>
+                  </a:lnTo>
+                  <a:lnTo>
+                    <a:pt x="3728257" y="378687"/>
+                  </a:lnTo>
+                  <a:lnTo>
+                    <a:pt x="3657913" y="371634"/>
+                  </a:lnTo>
+                  <a:lnTo>
+                    <a:pt x="3587569" y="364389"/>
+                  </a:lnTo>
+                  <a:lnTo>
+                    <a:pt x="3517224" y="356947"/>
+                  </a:lnTo>
+                  <a:lnTo>
+                    <a:pt x="3446880" y="349303"/>
+                  </a:lnTo>
+                  <a:lnTo>
+                    <a:pt x="3376535" y="341451"/>
+                  </a:lnTo>
+                  <a:lnTo>
+                    <a:pt x="3306191" y="335695"/>
+                  </a:lnTo>
+                  <a:lnTo>
+                    <a:pt x="3235846" y="330851"/>
+                  </a:lnTo>
+                  <a:lnTo>
+                    <a:pt x="3165502" y="325930"/>
+                  </a:lnTo>
+                  <a:lnTo>
+                    <a:pt x="3095157" y="320929"/>
+                  </a:lnTo>
+                  <a:lnTo>
+                    <a:pt x="3024813" y="315849"/>
+                  </a:lnTo>
+                  <a:lnTo>
+                    <a:pt x="2954468" y="310687"/>
+                  </a:lnTo>
+                  <a:lnTo>
+                    <a:pt x="2884124" y="305443"/>
+                  </a:lnTo>
+                  <a:lnTo>
+                    <a:pt x="2813779" y="300114"/>
+                  </a:lnTo>
+                  <a:lnTo>
+                    <a:pt x="2743435" y="294701"/>
+                  </a:lnTo>
+                  <a:lnTo>
+                    <a:pt x="2673090" y="289200"/>
+                  </a:lnTo>
+                  <a:lnTo>
+                    <a:pt x="2602746" y="283612"/>
+                  </a:lnTo>
+                  <a:lnTo>
+                    <a:pt x="2532401" y="277934"/>
+                  </a:lnTo>
+                  <a:lnTo>
+                    <a:pt x="2462057" y="272166"/>
+                  </a:lnTo>
+                  <a:lnTo>
+                    <a:pt x="2391712" y="266305"/>
+                  </a:lnTo>
+                  <a:lnTo>
+                    <a:pt x="2321368" y="260350"/>
+                  </a:lnTo>
+                  <a:lnTo>
+                    <a:pt x="2251023" y="254300"/>
+                  </a:lnTo>
+                  <a:lnTo>
+                    <a:pt x="2180679" y="248153"/>
+                  </a:lnTo>
+                  <a:lnTo>
+                    <a:pt x="2110334" y="241908"/>
+                  </a:lnTo>
+                  <a:lnTo>
+                    <a:pt x="2039990" y="235563"/>
+                  </a:lnTo>
+                  <a:lnTo>
+                    <a:pt x="1969645" y="229116"/>
+                  </a:lnTo>
+                  <a:lnTo>
+                    <a:pt x="1899301" y="222566"/>
+                  </a:lnTo>
+                  <a:lnTo>
+                    <a:pt x="1828956" y="215911"/>
+                  </a:lnTo>
+                  <a:lnTo>
+                    <a:pt x="1758612" y="209150"/>
+                  </a:lnTo>
+                  <a:lnTo>
+                    <a:pt x="1688267" y="202281"/>
+                  </a:lnTo>
+                  <a:lnTo>
+                    <a:pt x="1617923" y="195301"/>
+                  </a:lnTo>
+                  <a:lnTo>
+                    <a:pt x="1547578" y="188210"/>
+                  </a:lnTo>
+                  <a:lnTo>
+                    <a:pt x="1477234" y="181005"/>
+                  </a:lnTo>
+                  <a:lnTo>
+                    <a:pt x="1406889" y="173685"/>
+                  </a:lnTo>
+                  <a:lnTo>
+                    <a:pt x="1336545" y="166248"/>
+                  </a:lnTo>
+                  <a:lnTo>
+                    <a:pt x="1266200" y="158692"/>
+                  </a:lnTo>
+                  <a:lnTo>
+                    <a:pt x="1195856" y="151015"/>
+                  </a:lnTo>
+                  <a:lnTo>
+                    <a:pt x="1125511" y="143215"/>
+                  </a:lnTo>
+                  <a:lnTo>
+                    <a:pt x="1055167" y="135290"/>
+                  </a:lnTo>
+                  <a:lnTo>
+                    <a:pt x="984822" y="127239"/>
+                  </a:lnTo>
+                  <a:lnTo>
+                    <a:pt x="914478" y="119058"/>
+                  </a:lnTo>
+                  <a:lnTo>
+                    <a:pt x="844133" y="110747"/>
+                  </a:lnTo>
+                  <a:lnTo>
+                    <a:pt x="773789" y="102302"/>
+                  </a:lnTo>
+                  <a:lnTo>
+                    <a:pt x="703444" y="93723"/>
+                  </a:lnTo>
+                  <a:lnTo>
+                    <a:pt x="633100" y="85006"/>
+                  </a:lnTo>
+                  <a:lnTo>
+                    <a:pt x="562755" y="76149"/>
+                  </a:lnTo>
+                  <a:lnTo>
+                    <a:pt x="492411" y="67151"/>
+                  </a:lnTo>
+                  <a:lnTo>
+                    <a:pt x="422066" y="58009"/>
+                  </a:lnTo>
+                  <a:lnTo>
+                    <a:pt x="351722" y="48720"/>
+                  </a:lnTo>
+                  <a:lnTo>
+                    <a:pt x="281377" y="39283"/>
+                  </a:lnTo>
+                  <a:lnTo>
+                    <a:pt x="211033" y="29695"/>
+                  </a:lnTo>
+                  <a:lnTo>
+                    <a:pt x="140688" y="19953"/>
+                  </a:lnTo>
+                  <a:lnTo>
+                    <a:pt x="70344" y="10056"/>
+                  </a:lnTo>
+                  <a:lnTo>
+                    <a:pt x="0" y="0"/>
+                  </a:lnTo>
+                </a:path>
+              </a:pathLst>
+            </a:custGeom>
+          </p:spPr>
+          <p:txBody>
+            <a:bodyPr/>
+            <a:lstStyle/>
+            <a:p/>
+          </p:txBody>
+        </p:sp>
+        <p:sp>
+          <p:nvSpPr>
+            <p:cNvPr id="24" name="pl24"/>
+            <p:cNvSpPr/>
+            <p:nvPr/>
+          </p:nvSpPr>
+          <p:spPr>
+            <a:xfrm>
+              <a:off x="1235312" y="2571989"/>
+              <a:ext cx="6964104" cy="728148"/>
+            </a:xfrm>
+            <a:custGeom>
+              <a:avLst/>
+              <a:pathLst>
+                <a:path w="6964104" h="728148">
                   <a:moveTo>
                     <a:pt x="0" y="0"/>
                   </a:moveTo>
                   <a:lnTo>
-                    <a:pt x="71622" y="48461"/>
-                  </a:lnTo>
-                  <a:lnTo>
-                    <a:pt x="143245" y="95899"/>
-                  </a:lnTo>
-                  <a:lnTo>
-                    <a:pt x="214867" y="142336"/>
-                  </a:lnTo>
-                  <a:lnTo>
-                    <a:pt x="286490" y="187792"/>
-                  </a:lnTo>
-                  <a:lnTo>
-                    <a:pt x="358112" y="232289"/>
-                  </a:lnTo>
-                  <a:lnTo>
-                    <a:pt x="429735" y="275846"/>
-                  </a:lnTo>
-                  <a:lnTo>
-                    <a:pt x="501357" y="318483"/>
-                  </a:lnTo>
-                  <a:lnTo>
-                    <a:pt x="572980" y="360220"/>
-                  </a:lnTo>
-                  <a:lnTo>
-                    <a:pt x="644602" y="401076"/>
-                  </a:lnTo>
-                  <a:lnTo>
-                    <a:pt x="716225" y="441069"/>
-                  </a:lnTo>
-                  <a:lnTo>
-                    <a:pt x="787847" y="480218"/>
-                  </a:lnTo>
-                  <a:lnTo>
-                    <a:pt x="859470" y="518541"/>
-                  </a:lnTo>
-                  <a:lnTo>
-                    <a:pt x="931092" y="556054"/>
-                  </a:lnTo>
-                  <a:lnTo>
-                    <a:pt x="1002715" y="592775"/>
-                  </a:lnTo>
-                  <a:lnTo>
-                    <a:pt x="1074337" y="628721"/>
-                  </a:lnTo>
-                  <a:lnTo>
-                    <a:pt x="1145960" y="663908"/>
-                  </a:lnTo>
-                  <a:lnTo>
-                    <a:pt x="1217582" y="698351"/>
-                  </a:lnTo>
-                  <a:lnTo>
-                    <a:pt x="1289205" y="732068"/>
-                  </a:lnTo>
-                  <a:lnTo>
-                    <a:pt x="1360827" y="765073"/>
-                  </a:lnTo>
-                  <a:lnTo>
-                    <a:pt x="1432450" y="797381"/>
-                  </a:lnTo>
-                  <a:lnTo>
-                    <a:pt x="1504073" y="829007"/>
-                  </a:lnTo>
-                  <a:lnTo>
-                    <a:pt x="1575695" y="859965"/>
-                  </a:lnTo>
-                  <a:lnTo>
-                    <a:pt x="1647318" y="890269"/>
-                  </a:lnTo>
-                  <a:lnTo>
-                    <a:pt x="1718940" y="919934"/>
-                  </a:lnTo>
-                  <a:lnTo>
-                    <a:pt x="1790563" y="948972"/>
-                  </a:lnTo>
-                  <a:lnTo>
-                    <a:pt x="1862185" y="977397"/>
-                  </a:lnTo>
-                  <a:lnTo>
-                    <a:pt x="1933808" y="1005222"/>
-                  </a:lnTo>
-                  <a:lnTo>
-                    <a:pt x="2005430" y="1032460"/>
-                  </a:lnTo>
-                  <a:lnTo>
-                    <a:pt x="2077053" y="1059122"/>
-                  </a:lnTo>
-                  <a:lnTo>
-                    <a:pt x="2148675" y="1085222"/>
-                  </a:lnTo>
-                  <a:lnTo>
-                    <a:pt x="2220298" y="1110770"/>
-                  </a:lnTo>
-                  <a:lnTo>
-                    <a:pt x="2291920" y="1135779"/>
-                  </a:lnTo>
-                  <a:lnTo>
-                    <a:pt x="2363543" y="1160260"/>
-                  </a:lnTo>
-                  <a:lnTo>
-                    <a:pt x="2435165" y="1184224"/>
-                  </a:lnTo>
-                  <a:lnTo>
-                    <a:pt x="2506788" y="1207682"/>
-                  </a:lnTo>
-                  <a:lnTo>
-                    <a:pt x="2578410" y="1230645"/>
-                  </a:lnTo>
-                  <a:lnTo>
-                    <a:pt x="2650033" y="1253123"/>
-                  </a:lnTo>
-                  <a:lnTo>
-                    <a:pt x="2721655" y="1275126"/>
-                  </a:lnTo>
-                  <a:lnTo>
-                    <a:pt x="2793278" y="1296665"/>
-                  </a:lnTo>
-                  <a:lnTo>
-                    <a:pt x="2864901" y="1317749"/>
-                  </a:lnTo>
-                  <a:lnTo>
-                    <a:pt x="2936523" y="1338388"/>
-                  </a:lnTo>
-                  <a:lnTo>
-                    <a:pt x="3008146" y="1358591"/>
-                  </a:lnTo>
-                  <a:lnTo>
-                    <a:pt x="3079768" y="1378368"/>
-                  </a:lnTo>
-                  <a:lnTo>
-                    <a:pt x="3151391" y="1397727"/>
-                  </a:lnTo>
-                  <a:lnTo>
-                    <a:pt x="3223013" y="1416677"/>
-                  </a:lnTo>
-                  <a:lnTo>
-                    <a:pt x="3294636" y="1435227"/>
-                  </a:lnTo>
-                  <a:lnTo>
-                    <a:pt x="3366258" y="1453386"/>
-                  </a:lnTo>
-                  <a:lnTo>
-                    <a:pt x="3437881" y="1471161"/>
-                  </a:lnTo>
-                  <a:lnTo>
-                    <a:pt x="3509503" y="1488561"/>
-                  </a:lnTo>
-                  <a:lnTo>
-                    <a:pt x="3581126" y="1505593"/>
-                  </a:lnTo>
-                  <a:lnTo>
-                    <a:pt x="3652748" y="1522266"/>
-                  </a:lnTo>
-                  <a:lnTo>
-                    <a:pt x="3724371" y="1538587"/>
-                  </a:lnTo>
-                  <a:lnTo>
-                    <a:pt x="3795993" y="1554563"/>
-                  </a:lnTo>
-                  <a:lnTo>
-                    <a:pt x="3867616" y="1570202"/>
-                  </a:lnTo>
-                  <a:lnTo>
-                    <a:pt x="3939238" y="1585510"/>
-                  </a:lnTo>
-                  <a:lnTo>
-                    <a:pt x="4010861" y="1600496"/>
-                  </a:lnTo>
-                  <a:lnTo>
-                    <a:pt x="4082483" y="1615165"/>
-                  </a:lnTo>
-                  <a:lnTo>
-                    <a:pt x="4154106" y="1629524"/>
-                  </a:lnTo>
-                  <a:lnTo>
-                    <a:pt x="4225729" y="1643580"/>
-                  </a:lnTo>
-                  <a:lnTo>
-                    <a:pt x="4297351" y="1657340"/>
-                  </a:lnTo>
-                  <a:lnTo>
-                    <a:pt x="4368974" y="1670809"/>
-                  </a:lnTo>
-                  <a:lnTo>
-                    <a:pt x="4440596" y="1683993"/>
-                  </a:lnTo>
-                  <a:lnTo>
-                    <a:pt x="4512219" y="1696899"/>
-                  </a:lnTo>
-                  <a:lnTo>
-                    <a:pt x="4583841" y="1709533"/>
-                  </a:lnTo>
-                  <a:lnTo>
-                    <a:pt x="4655464" y="1721900"/>
-                  </a:lnTo>
-                  <a:lnTo>
-                    <a:pt x="4727086" y="1734005"/>
-                  </a:lnTo>
-                  <a:lnTo>
-                    <a:pt x="4798709" y="1745856"/>
-                  </a:lnTo>
-                  <a:lnTo>
-                    <a:pt x="4870331" y="1757456"/>
-                  </a:lnTo>
-                  <a:lnTo>
-                    <a:pt x="4941954" y="1768811"/>
-                  </a:lnTo>
-                  <a:lnTo>
-                    <a:pt x="5013576" y="1779926"/>
-                  </a:lnTo>
-                  <a:lnTo>
-                    <a:pt x="5085199" y="1790807"/>
-                  </a:lnTo>
-                  <a:lnTo>
-                    <a:pt x="5156821" y="1801457"/>
-                  </a:lnTo>
-                  <a:lnTo>
-                    <a:pt x="5228444" y="1811883"/>
-                  </a:lnTo>
-                  <a:lnTo>
-                    <a:pt x="5300066" y="1822089"/>
-                  </a:lnTo>
-                  <a:lnTo>
-                    <a:pt x="5371689" y="1832080"/>
-                  </a:lnTo>
-                  <a:lnTo>
-                    <a:pt x="5443311" y="1841859"/>
-                  </a:lnTo>
-                  <a:lnTo>
-                    <a:pt x="5514934" y="1851432"/>
-                  </a:lnTo>
-                  <a:lnTo>
-                    <a:pt x="5586557" y="1860803"/>
-                  </a:lnTo>
-                  <a:lnTo>
-                    <a:pt x="5658179" y="1869976"/>
-                  </a:lnTo>
-                  <a:lnTo>
-                    <a:pt x="5729802" y="1878955"/>
-                  </a:lnTo>
-                  <a:lnTo>
-                    <a:pt x="5801424" y="1887745"/>
-                  </a:lnTo>
-                  <a:lnTo>
-                    <a:pt x="5873047" y="1896349"/>
-                  </a:lnTo>
-                  <a:lnTo>
-                    <a:pt x="5944669" y="1904772"/>
-                  </a:lnTo>
-                  <a:lnTo>
-                    <a:pt x="6016292" y="1913016"/>
-                  </a:lnTo>
-                  <a:lnTo>
-                    <a:pt x="6087914" y="1921087"/>
-                  </a:lnTo>
-                  <a:lnTo>
-                    <a:pt x="6159537" y="1928987"/>
-                  </a:lnTo>
-                  <a:lnTo>
-                    <a:pt x="6231159" y="1936720"/>
-                  </a:lnTo>
-                  <a:lnTo>
-                    <a:pt x="6302782" y="1944291"/>
-                  </a:lnTo>
-                  <a:lnTo>
-                    <a:pt x="6374404" y="1951701"/>
-                  </a:lnTo>
-                  <a:lnTo>
-                    <a:pt x="6446027" y="1958955"/>
-                  </a:lnTo>
-                  <a:lnTo>
-                    <a:pt x="6517649" y="1966055"/>
-                  </a:lnTo>
-                  <a:lnTo>
-                    <a:pt x="6589272" y="1973006"/>
-                  </a:lnTo>
-                  <a:lnTo>
-                    <a:pt x="6660894" y="1979810"/>
-                  </a:lnTo>
-                  <a:lnTo>
-                    <a:pt x="6732517" y="1986470"/>
-                  </a:lnTo>
-                  <a:lnTo>
-                    <a:pt x="6804139" y="1992990"/>
-                  </a:lnTo>
-                  <a:lnTo>
-                    <a:pt x="6875762" y="1999372"/>
-                  </a:lnTo>
-                  <a:lnTo>
-                    <a:pt x="6947385" y="2005619"/>
-                  </a:lnTo>
-                  <a:lnTo>
-                    <a:pt x="7019007" y="2011735"/>
-                  </a:lnTo>
-                  <a:lnTo>
-                    <a:pt x="7090630" y="2017721"/>
+                    <a:pt x="70344" y="17488"/>
+                  </a:lnTo>
+                  <a:lnTo>
+                    <a:pt x="140688" y="34607"/>
+                  </a:lnTo>
+                  <a:lnTo>
+                    <a:pt x="211033" y="51365"/>
+                  </a:lnTo>
+                  <a:lnTo>
+                    <a:pt x="281377" y="67769"/>
+                  </a:lnTo>
+                  <a:lnTo>
+                    <a:pt x="351722" y="83827"/>
+                  </a:lnTo>
+                  <a:lnTo>
+                    <a:pt x="422066" y="99546"/>
+                  </a:lnTo>
+                  <a:lnTo>
+                    <a:pt x="492411" y="114933"/>
+                  </a:lnTo>
+                  <a:lnTo>
+                    <a:pt x="562755" y="129995"/>
+                  </a:lnTo>
+                  <a:lnTo>
+                    <a:pt x="633100" y="144739"/>
+                  </a:lnTo>
+                  <a:lnTo>
+                    <a:pt x="703444" y="159171"/>
+                  </a:lnTo>
+                  <a:lnTo>
+                    <a:pt x="773789" y="173299"/>
+                  </a:lnTo>
+                  <a:lnTo>
+                    <a:pt x="844133" y="187129"/>
+                  </a:lnTo>
+                  <a:lnTo>
+                    <a:pt x="914478" y="200666"/>
+                  </a:lnTo>
+                  <a:lnTo>
+                    <a:pt x="984822" y="213918"/>
+                  </a:lnTo>
+                  <a:lnTo>
+                    <a:pt x="1055167" y="226890"/>
+                  </a:lnTo>
+                  <a:lnTo>
+                    <a:pt x="1125511" y="239588"/>
+                  </a:lnTo>
+                  <a:lnTo>
+                    <a:pt x="1195856" y="252018"/>
+                  </a:lnTo>
+                  <a:lnTo>
+                    <a:pt x="1266200" y="264186"/>
+                  </a:lnTo>
+                  <a:lnTo>
+                    <a:pt x="1336545" y="276097"/>
+                  </a:lnTo>
+                  <a:lnTo>
+                    <a:pt x="1406889" y="287756"/>
+                  </a:lnTo>
+                  <a:lnTo>
+                    <a:pt x="1477234" y="299169"/>
+                  </a:lnTo>
+                  <a:lnTo>
+                    <a:pt x="1547578" y="310341"/>
+                  </a:lnTo>
+                  <a:lnTo>
+                    <a:pt x="1617923" y="321277"/>
+                  </a:lnTo>
+                  <a:lnTo>
+                    <a:pt x="1688267" y="331982"/>
+                  </a:lnTo>
+                  <a:lnTo>
+                    <a:pt x="1758612" y="342461"/>
+                  </a:lnTo>
+                  <a:lnTo>
+                    <a:pt x="1828956" y="352719"/>
+                  </a:lnTo>
+                  <a:lnTo>
+                    <a:pt x="1899301" y="362761"/>
+                  </a:lnTo>
+                  <a:lnTo>
+                    <a:pt x="1969645" y="372590"/>
+                  </a:lnTo>
+                  <a:lnTo>
+                    <a:pt x="2039990" y="382212"/>
+                  </a:lnTo>
+                  <a:lnTo>
+                    <a:pt x="2110334" y="391631"/>
+                  </a:lnTo>
+                  <a:lnTo>
+                    <a:pt x="2180679" y="400850"/>
+                  </a:lnTo>
+                  <a:lnTo>
+                    <a:pt x="2251023" y="409876"/>
+                  </a:lnTo>
+                  <a:lnTo>
+                    <a:pt x="2321368" y="418710"/>
+                  </a:lnTo>
+                  <a:lnTo>
+                    <a:pt x="2391712" y="427358"/>
+                  </a:lnTo>
+                  <a:lnTo>
+                    <a:pt x="2462057" y="435824"/>
+                  </a:lnTo>
+                  <a:lnTo>
+                    <a:pt x="2532401" y="444111"/>
+                  </a:lnTo>
+                  <a:lnTo>
+                    <a:pt x="2602746" y="452222"/>
+                  </a:lnTo>
+                  <a:lnTo>
+                    <a:pt x="2673090" y="460163"/>
+                  </a:lnTo>
+                  <a:lnTo>
+                    <a:pt x="2743435" y="467936"/>
+                  </a:lnTo>
+                  <a:lnTo>
+                    <a:pt x="2813779" y="475544"/>
+                  </a:lnTo>
+                  <a:lnTo>
+                    <a:pt x="2884124" y="482992"/>
+                  </a:lnTo>
+                  <a:lnTo>
+                    <a:pt x="2954468" y="490283"/>
+                  </a:lnTo>
+                  <a:lnTo>
+                    <a:pt x="3024813" y="497420"/>
+                  </a:lnTo>
+                  <a:lnTo>
+                    <a:pt x="3095157" y="504406"/>
+                  </a:lnTo>
+                  <a:lnTo>
+                    <a:pt x="3165502" y="511245"/>
+                  </a:lnTo>
+                  <a:lnTo>
+                    <a:pt x="3235846" y="517939"/>
+                  </a:lnTo>
+                  <a:lnTo>
+                    <a:pt x="3306191" y="524492"/>
+                  </a:lnTo>
+                  <a:lnTo>
+                    <a:pt x="3376535" y="530907"/>
+                  </a:lnTo>
+                  <a:lnTo>
+                    <a:pt x="3446880" y="537186"/>
+                  </a:lnTo>
+                  <a:lnTo>
+                    <a:pt x="3517224" y="543333"/>
+                  </a:lnTo>
+                  <a:lnTo>
+                    <a:pt x="3587569" y="549350"/>
+                  </a:lnTo>
+                  <a:lnTo>
+                    <a:pt x="3657913" y="555239"/>
+                  </a:lnTo>
+                  <a:lnTo>
+                    <a:pt x="3728257" y="561005"/>
+                  </a:lnTo>
+                  <a:lnTo>
+                    <a:pt x="3798602" y="566649"/>
+                  </a:lnTo>
+                  <a:lnTo>
+                    <a:pt x="3868946" y="572173"/>
+                  </a:lnTo>
+                  <a:lnTo>
+                    <a:pt x="3939291" y="577581"/>
+                  </a:lnTo>
+                  <a:lnTo>
+                    <a:pt x="4009635" y="582875"/>
+                  </a:lnTo>
+                  <a:lnTo>
+                    <a:pt x="4079980" y="588057"/>
+                  </a:lnTo>
+                  <a:lnTo>
+                    <a:pt x="4150324" y="593129"/>
+                  </a:lnTo>
+                  <a:lnTo>
+                    <a:pt x="4220669" y="598095"/>
+                  </a:lnTo>
+                  <a:lnTo>
+                    <a:pt x="4291013" y="602955"/>
+                  </a:lnTo>
+                  <a:lnTo>
+                    <a:pt x="4361358" y="607713"/>
+                  </a:lnTo>
+                  <a:lnTo>
+                    <a:pt x="4431702" y="612371"/>
+                  </a:lnTo>
+                  <a:lnTo>
+                    <a:pt x="4502047" y="616930"/>
+                  </a:lnTo>
+                  <a:lnTo>
+                    <a:pt x="4572391" y="621393"/>
+                  </a:lnTo>
+                  <a:lnTo>
+                    <a:pt x="4642736" y="625761"/>
+                  </a:lnTo>
+                  <a:lnTo>
+                    <a:pt x="4713080" y="630038"/>
+                  </a:lnTo>
+                  <a:lnTo>
+                    <a:pt x="4783425" y="634224"/>
+                  </a:lnTo>
+                  <a:lnTo>
+                    <a:pt x="4853769" y="638322"/>
+                  </a:lnTo>
+                  <a:lnTo>
+                    <a:pt x="4924114" y="642333"/>
+                  </a:lnTo>
+                  <a:lnTo>
+                    <a:pt x="4994458" y="646260"/>
+                  </a:lnTo>
+                  <a:lnTo>
+                    <a:pt x="5064803" y="650103"/>
+                  </a:lnTo>
+                  <a:lnTo>
+                    <a:pt x="5135147" y="653866"/>
+                  </a:lnTo>
+                  <a:lnTo>
+                    <a:pt x="5205492" y="657549"/>
+                  </a:lnTo>
+                  <a:lnTo>
+                    <a:pt x="5275836" y="661154"/>
+                  </a:lnTo>
+                  <a:lnTo>
+                    <a:pt x="5346181" y="664683"/>
+                  </a:lnTo>
+                  <a:lnTo>
+                    <a:pt x="5416525" y="668138"/>
+                  </a:lnTo>
+                  <a:lnTo>
+                    <a:pt x="5486870" y="671520"/>
+                  </a:lnTo>
+                  <a:lnTo>
+                    <a:pt x="5557214" y="674830"/>
+                  </a:lnTo>
+                  <a:lnTo>
+                    <a:pt x="5627559" y="678070"/>
+                  </a:lnTo>
+                  <a:lnTo>
+                    <a:pt x="5697903" y="681242"/>
+                  </a:lnTo>
+                  <a:lnTo>
+                    <a:pt x="5768248" y="684347"/>
+                  </a:lnTo>
+                  <a:lnTo>
+                    <a:pt x="5838592" y="687387"/>
+                  </a:lnTo>
+                  <a:lnTo>
+                    <a:pt x="5908937" y="690362"/>
+                  </a:lnTo>
+                  <a:lnTo>
+                    <a:pt x="5979281" y="693275"/>
+                  </a:lnTo>
+                  <a:lnTo>
+                    <a:pt x="6049626" y="696126"/>
+                  </a:lnTo>
+                  <a:lnTo>
+                    <a:pt x="6119970" y="698917"/>
+                  </a:lnTo>
+                  <a:lnTo>
+                    <a:pt x="6190315" y="701648"/>
+                  </a:lnTo>
+                  <a:lnTo>
+                    <a:pt x="6260659" y="704323"/>
+                  </a:lnTo>
+                  <a:lnTo>
+                    <a:pt x="6331004" y="706940"/>
+                  </a:lnTo>
+                  <a:lnTo>
+                    <a:pt x="6401348" y="709503"/>
+                  </a:lnTo>
+                  <a:lnTo>
+                    <a:pt x="6471693" y="712011"/>
+                  </a:lnTo>
+                  <a:lnTo>
+                    <a:pt x="6542037" y="714467"/>
+                  </a:lnTo>
+                  <a:lnTo>
+                    <a:pt x="6612382" y="716870"/>
+                  </a:lnTo>
+                  <a:lnTo>
+                    <a:pt x="6682726" y="719223"/>
+                  </a:lnTo>
+                  <a:lnTo>
+                    <a:pt x="6753071" y="721526"/>
+                  </a:lnTo>
+                  <a:lnTo>
+                    <a:pt x="6823415" y="723780"/>
+                  </a:lnTo>
+                  <a:lnTo>
+                    <a:pt x="6893760" y="725987"/>
+                  </a:lnTo>
+                  <a:lnTo>
+                    <a:pt x="6964104" y="728148"/>
                   </a:lnTo>
                 </a:path>
               </a:pathLst>
@@ -4568,27 +4603,27 @@
         </p:sp>
         <p:sp>
           <p:nvSpPr>
-            <p:cNvPr id="24" name="pl24"/>
+            <p:cNvPr id="25" name="pl25"/>
             <p:cNvSpPr/>
             <p:nvPr/>
           </p:nvSpPr>
           <p:spPr>
             <a:xfrm>
-              <a:off x="817517" y="4727786"/>
-              <a:ext cx="7799693" cy="0"/>
+              <a:off x="887106" y="3100960"/>
+              <a:ext cx="7660515" cy="0"/>
             </a:xfrm>
             <a:custGeom>
               <a:avLst/>
               <a:pathLst>
-                <a:path w="7799693" h="0">
+                <a:path w="7660515" h="0">
                   <a:moveTo>
                     <a:pt x="0" y="0"/>
                   </a:moveTo>
                   <a:lnTo>
-                    <a:pt x="7799693" y="0"/>
-                  </a:lnTo>
-                  <a:lnTo>
-                    <a:pt x="7799693" y="0"/>
+                    <a:pt x="7660515" y="0"/>
+                  </a:lnTo>
+                  <a:lnTo>
+                    <a:pt x="7660515" y="0"/>
                   </a:lnTo>
                 </a:path>
               </a:pathLst>
@@ -4611,21 +4646,21 @@
         </p:sp>
         <p:sp>
           <p:nvSpPr>
-            <p:cNvPr id="25" name="pl25"/>
+            <p:cNvPr id="26" name="pl26"/>
             <p:cNvSpPr/>
             <p:nvPr/>
           </p:nvSpPr>
           <p:spPr>
             <a:xfrm>
-              <a:off x="4588151" y="2073503"/>
-              <a:ext cx="0" cy="3649639"/>
+              <a:off x="4590457" y="2143092"/>
+              <a:ext cx="0" cy="1317069"/>
             </a:xfrm>
             <a:custGeom>
               <a:avLst/>
               <a:pathLst>
-                <a:path w="0" h="3649639">
+                <a:path w="0" h="1317069">
                   <a:moveTo>
-                    <a:pt x="0" y="3649639"/>
+                    <a:pt x="0" y="1317069"/>
                   </a:moveTo>
                   <a:lnTo>
                     <a:pt x="0" y="0"/>
@@ -4654,13 +4689,13 @@
         </p:sp>
         <p:sp>
           <p:nvSpPr>
-            <p:cNvPr id="26" name="tx26"/>
+            <p:cNvPr id="27" name="tx27"/>
             <p:cNvSpPr/>
             <p:nvPr/>
           </p:nvSpPr>
           <p:spPr>
             <a:xfrm>
-              <a:off x="692708" y="5517199"/>
+              <a:off x="762297" y="3360243"/>
               <a:ext cx="62179" cy="80101"/>
             </a:xfrm>
             <a:prstGeom prst="rect">
@@ -4700,13 +4735,13 @@
         </p:sp>
         <p:sp>
           <p:nvSpPr>
-            <p:cNvPr id="27" name="tx27"/>
+            <p:cNvPr id="28" name="tx28"/>
             <p:cNvSpPr/>
             <p:nvPr/>
           </p:nvSpPr>
           <p:spPr>
             <a:xfrm>
-              <a:off x="692708" y="4687735"/>
+              <a:off x="762297" y="3060909"/>
               <a:ext cx="62179" cy="80101"/>
             </a:xfrm>
             <a:prstGeom prst="rect">
@@ -4746,13 +4781,13 @@
         </p:sp>
         <p:sp>
           <p:nvSpPr>
-            <p:cNvPr id="28" name="tx28"/>
+            <p:cNvPr id="29" name="tx29"/>
             <p:cNvSpPr/>
             <p:nvPr/>
           </p:nvSpPr>
           <p:spPr>
             <a:xfrm>
-              <a:off x="692708" y="3858272"/>
+              <a:off x="762297" y="2761575"/>
               <a:ext cx="62179" cy="80101"/>
             </a:xfrm>
             <a:prstGeom prst="rect">
@@ -4792,13 +4827,13 @@
         </p:sp>
         <p:sp>
           <p:nvSpPr>
-            <p:cNvPr id="29" name="tx29"/>
+            <p:cNvPr id="30" name="tx30"/>
             <p:cNvSpPr/>
             <p:nvPr/>
           </p:nvSpPr>
           <p:spPr>
             <a:xfrm>
-              <a:off x="692708" y="3028808"/>
+              <a:off x="762297" y="2462242"/>
               <a:ext cx="62179" cy="80101"/>
             </a:xfrm>
             <a:prstGeom prst="rect">
@@ -4838,13 +4873,13 @@
         </p:sp>
         <p:sp>
           <p:nvSpPr>
-            <p:cNvPr id="30" name="tx30"/>
+            <p:cNvPr id="31" name="tx31"/>
             <p:cNvSpPr/>
             <p:nvPr/>
           </p:nvSpPr>
           <p:spPr>
             <a:xfrm>
-              <a:off x="692708" y="2199345"/>
+              <a:off x="762297" y="2162908"/>
               <a:ext cx="62179" cy="80101"/>
             </a:xfrm>
             <a:prstGeom prst="rect">
@@ -4884,13 +4919,13 @@
         </p:sp>
         <p:sp>
           <p:nvSpPr>
-            <p:cNvPr id="31" name="tx31"/>
+            <p:cNvPr id="32" name="tx32"/>
             <p:cNvSpPr/>
             <p:nvPr/>
           </p:nvSpPr>
           <p:spPr>
             <a:xfrm>
-              <a:off x="2360651" y="5785772"/>
+              <a:off x="2401262" y="3522791"/>
               <a:ext cx="161574" cy="80101"/>
             </a:xfrm>
             <a:prstGeom prst="rect">
@@ -4930,13 +4965,13 @@
         </p:sp>
         <p:sp>
           <p:nvSpPr>
-            <p:cNvPr id="32" name="tx32"/>
+            <p:cNvPr id="33" name="tx33"/>
             <p:cNvSpPr/>
             <p:nvPr/>
           </p:nvSpPr>
           <p:spPr>
             <a:xfrm>
-              <a:off x="4561958" y="5785772"/>
+              <a:off x="4564176" y="3522791"/>
               <a:ext cx="62179" cy="80101"/>
             </a:xfrm>
             <a:prstGeom prst="rect">
@@ -4976,13 +5011,13 @@
         </p:sp>
         <p:sp>
           <p:nvSpPr>
-            <p:cNvPr id="33" name="tx33"/>
+            <p:cNvPr id="34" name="tx34"/>
             <p:cNvSpPr/>
             <p:nvPr/>
           </p:nvSpPr>
           <p:spPr>
             <a:xfrm>
-              <a:off x="6682478" y="5785772"/>
+              <a:off x="6646302" y="3522791"/>
               <a:ext cx="124358" cy="80101"/>
             </a:xfrm>
             <a:prstGeom prst="rect">
@@ -5022,13 +5057,13 @@
         </p:sp>
         <p:sp>
           <p:nvSpPr>
-            <p:cNvPr id="34" name="tx34"/>
+            <p:cNvPr id="35" name="tx35"/>
             <p:cNvSpPr/>
             <p:nvPr/>
           </p:nvSpPr>
           <p:spPr>
             <a:xfrm>
-              <a:off x="2928340" y="5925448"/>
+              <a:off x="2928340" y="3662467"/>
               <a:ext cx="3578047" cy="100218"/>
             </a:xfrm>
             <a:prstGeom prst="rect">
@@ -5068,13 +5103,13 @@
         </p:sp>
         <p:sp>
           <p:nvSpPr>
-            <p:cNvPr id="35" name="tx35"/>
+            <p:cNvPr id="36" name="tx36"/>
             <p:cNvSpPr/>
             <p:nvPr/>
           </p:nvSpPr>
           <p:spPr>
             <a:xfrm rot="-5400000">
-              <a:off x="68446" y="3848213"/>
+              <a:off x="138035" y="2751517"/>
               <a:ext cx="1016904" cy="100218"/>
             </a:xfrm>
             <a:prstGeom prst="rect">
@@ -5114,13 +5149,13 @@
         </p:sp>
         <p:sp>
           <p:nvSpPr>
-            <p:cNvPr id="36" name="tx36"/>
+            <p:cNvPr id="37" name="tx37"/>
             <p:cNvSpPr/>
             <p:nvPr/>
           </p:nvSpPr>
           <p:spPr>
             <a:xfrm>
-              <a:off x="817517" y="1896563"/>
+              <a:off x="887106" y="1966152"/>
               <a:ext cx="7052127" cy="82021"/>
             </a:xfrm>
             <a:prstGeom prst="rect">
@@ -5160,13 +5195,3703 @@
         </p:sp>
         <p:sp>
           <p:nvSpPr>
-            <p:cNvPr id="37" name="tx37"/>
+            <p:cNvPr id="38" name="tx38"/>
             <p:cNvSpPr/>
             <p:nvPr/>
           </p:nvSpPr>
           <p:spPr>
             <a:xfrm>
-              <a:off x="817517" y="1669789"/>
+              <a:off x="887106" y="1739378"/>
+              <a:ext cx="1806397" cy="120152"/>
+            </a:xfrm>
+            <a:prstGeom prst="rect">
+              <a:avLst/>
+            </a:prstGeom>
+            <a:noFill/>
+          </p:spPr>
+          <p:txBody>
+            <a:bodyPr lIns="0" rIns="0" tIns="0" bIns="0" anchorCtr="1" anchor="ctr" wrap="none"/>
+            <a:lstStyle/>
+            <a:p>
+              <a:pPr algn="l" marL="0" marR="0" indent="0">
+                <a:lnSpc>
+                  <a:spcPts val="1320"/>
+                </a:lnSpc>
+                <a:spcBef>
+                  <a:spcPts val="0"/>
+                </a:spcBef>
+                <a:spcAft>
+                  <a:spcPts val="0"/>
+                </a:spcAft>
+              </a:pPr>
+              <a:r>
+                <a:rPr sz="1320">
+                  <a:solidFill>
+                    <a:srgbClr val="000000">
+                      <a:alpha val="100000"/>
+                    </a:srgbClr>
+                  </a:solidFill>
+                  <a:latin typeface="Helvetica"/>
+                  <a:cs typeface="Helvetica"/>
+                </a:rPr>
+                <a:t>Composite Grade 2 AEs</a:t>
+              </a:r>
+            </a:p>
+          </p:txBody>
+        </p:sp>
+        <p:sp>
+          <p:nvSpPr>
+            <p:cNvPr id="39" name="pl39"/>
+            <p:cNvSpPr/>
+            <p:nvPr/>
+          </p:nvSpPr>
+          <p:spPr>
+            <a:xfrm>
+              <a:off x="887106" y="5444019"/>
+              <a:ext cx="7660515" cy="0"/>
+            </a:xfrm>
+            <a:custGeom>
+              <a:avLst/>
+              <a:pathLst>
+                <a:path w="7660515" h="0">
+                  <a:moveTo>
+                    <a:pt x="0" y="0"/>
+                  </a:moveTo>
+                  <a:lnTo>
+                    <a:pt x="7660515" y="0"/>
+                  </a:lnTo>
+                  <a:lnTo>
+                    <a:pt x="7660515" y="0"/>
+                  </a:lnTo>
+                </a:path>
+              </a:pathLst>
+            </a:custGeom>
+            <a:ln w="6775" cap="flat">
+              <a:solidFill>
+                <a:srgbClr val="EBEBEB">
+                  <a:alpha val="100000"/>
+                </a:srgbClr>
+              </a:solidFill>
+              <a:prstDash val="solid"/>
+              <a:round/>
+            </a:ln>
+          </p:spPr>
+          <p:txBody>
+            <a:bodyPr/>
+            <a:lstStyle/>
+            <a:p/>
+          </p:txBody>
+        </p:sp>
+        <p:sp>
+          <p:nvSpPr>
+            <p:cNvPr id="40" name="pl40"/>
+            <p:cNvSpPr/>
+            <p:nvPr/>
+          </p:nvSpPr>
+          <p:spPr>
+            <a:xfrm>
+              <a:off x="887106" y="5144686"/>
+              <a:ext cx="7660515" cy="0"/>
+            </a:xfrm>
+            <a:custGeom>
+              <a:avLst/>
+              <a:pathLst>
+                <a:path w="7660515" h="0">
+                  <a:moveTo>
+                    <a:pt x="0" y="0"/>
+                  </a:moveTo>
+                  <a:lnTo>
+                    <a:pt x="7660515" y="0"/>
+                  </a:lnTo>
+                  <a:lnTo>
+                    <a:pt x="7660515" y="0"/>
+                  </a:lnTo>
+                </a:path>
+              </a:pathLst>
+            </a:custGeom>
+            <a:ln w="6775" cap="flat">
+              <a:solidFill>
+                <a:srgbClr val="EBEBEB">
+                  <a:alpha val="100000"/>
+                </a:srgbClr>
+              </a:solidFill>
+              <a:prstDash val="solid"/>
+              <a:round/>
+            </a:ln>
+          </p:spPr>
+          <p:txBody>
+            <a:bodyPr/>
+            <a:lstStyle/>
+            <a:p/>
+          </p:txBody>
+        </p:sp>
+        <p:sp>
+          <p:nvSpPr>
+            <p:cNvPr id="41" name="pl41"/>
+            <p:cNvSpPr/>
+            <p:nvPr/>
+          </p:nvSpPr>
+          <p:spPr>
+            <a:xfrm>
+              <a:off x="887106" y="4845352"/>
+              <a:ext cx="7660515" cy="0"/>
+            </a:xfrm>
+            <a:custGeom>
+              <a:avLst/>
+              <a:pathLst>
+                <a:path w="7660515" h="0">
+                  <a:moveTo>
+                    <a:pt x="0" y="0"/>
+                  </a:moveTo>
+                  <a:lnTo>
+                    <a:pt x="7660515" y="0"/>
+                  </a:lnTo>
+                  <a:lnTo>
+                    <a:pt x="7660515" y="0"/>
+                  </a:lnTo>
+                </a:path>
+              </a:pathLst>
+            </a:custGeom>
+            <a:ln w="6775" cap="flat">
+              <a:solidFill>
+                <a:srgbClr val="EBEBEB">
+                  <a:alpha val="100000"/>
+                </a:srgbClr>
+              </a:solidFill>
+              <a:prstDash val="solid"/>
+              <a:round/>
+            </a:ln>
+          </p:spPr>
+          <p:txBody>
+            <a:bodyPr/>
+            <a:lstStyle/>
+            <a:p/>
+          </p:txBody>
+        </p:sp>
+        <p:sp>
+          <p:nvSpPr>
+            <p:cNvPr id="42" name="pl42"/>
+            <p:cNvSpPr/>
+            <p:nvPr/>
+          </p:nvSpPr>
+          <p:spPr>
+            <a:xfrm>
+              <a:off x="887106" y="4546018"/>
+              <a:ext cx="7660515" cy="0"/>
+            </a:xfrm>
+            <a:custGeom>
+              <a:avLst/>
+              <a:pathLst>
+                <a:path w="7660515" h="0">
+                  <a:moveTo>
+                    <a:pt x="0" y="0"/>
+                  </a:moveTo>
+                  <a:lnTo>
+                    <a:pt x="7660515" y="0"/>
+                  </a:lnTo>
+                  <a:lnTo>
+                    <a:pt x="7660515" y="0"/>
+                  </a:lnTo>
+                </a:path>
+              </a:pathLst>
+            </a:custGeom>
+            <a:ln w="6775" cap="flat">
+              <a:solidFill>
+                <a:srgbClr val="EBEBEB">
+                  <a:alpha val="100000"/>
+                </a:srgbClr>
+              </a:solidFill>
+              <a:prstDash val="solid"/>
+              <a:round/>
+            </a:ln>
+          </p:spPr>
+          <p:txBody>
+            <a:bodyPr/>
+            <a:lstStyle/>
+            <a:p/>
+          </p:txBody>
+        </p:sp>
+        <p:sp>
+          <p:nvSpPr>
+            <p:cNvPr id="43" name="pl43"/>
+            <p:cNvSpPr/>
+            <p:nvPr/>
+          </p:nvSpPr>
+          <p:spPr>
+            <a:xfrm>
+              <a:off x="1636763" y="4336484"/>
+              <a:ext cx="0" cy="1317069"/>
+            </a:xfrm>
+            <a:custGeom>
+              <a:avLst/>
+              <a:pathLst>
+                <a:path w="0" h="1317069">
+                  <a:moveTo>
+                    <a:pt x="0" y="1317069"/>
+                  </a:moveTo>
+                  <a:lnTo>
+                    <a:pt x="0" y="0"/>
+                  </a:lnTo>
+                  <a:lnTo>
+                    <a:pt x="0" y="0"/>
+                  </a:lnTo>
+                </a:path>
+              </a:pathLst>
+            </a:custGeom>
+            <a:ln w="6775" cap="flat">
+              <a:solidFill>
+                <a:srgbClr val="EBEBEB">
+                  <a:alpha val="100000"/>
+                </a:srgbClr>
+              </a:solidFill>
+              <a:prstDash val="solid"/>
+              <a:round/>
+            </a:ln>
+          </p:spPr>
+          <p:txBody>
+            <a:bodyPr/>
+            <a:lstStyle/>
+            <a:p/>
+          </p:txBody>
+        </p:sp>
+        <p:sp>
+          <p:nvSpPr>
+            <p:cNvPr id="44" name="pl44"/>
+            <p:cNvSpPr/>
+            <p:nvPr/>
+          </p:nvSpPr>
+          <p:spPr>
+            <a:xfrm>
+              <a:off x="2482050" y="4336484"/>
+              <a:ext cx="0" cy="1317069"/>
+            </a:xfrm>
+            <a:custGeom>
+              <a:avLst/>
+              <a:pathLst>
+                <a:path w="0" h="1317069">
+                  <a:moveTo>
+                    <a:pt x="0" y="1317069"/>
+                  </a:moveTo>
+                  <a:lnTo>
+                    <a:pt x="0" y="0"/>
+                  </a:lnTo>
+                  <a:lnTo>
+                    <a:pt x="0" y="0"/>
+                  </a:lnTo>
+                </a:path>
+              </a:pathLst>
+            </a:custGeom>
+            <a:ln w="6775" cap="flat">
+              <a:solidFill>
+                <a:srgbClr val="EBEBEB">
+                  <a:alpha val="100000"/>
+                </a:srgbClr>
+              </a:solidFill>
+              <a:prstDash val="solid"/>
+              <a:round/>
+            </a:ln>
+          </p:spPr>
+          <p:txBody>
+            <a:bodyPr/>
+            <a:lstStyle/>
+            <a:p/>
+          </p:txBody>
+        </p:sp>
+        <p:sp>
+          <p:nvSpPr>
+            <p:cNvPr id="45" name="pl45"/>
+            <p:cNvSpPr/>
+            <p:nvPr/>
+          </p:nvSpPr>
+          <p:spPr>
+            <a:xfrm>
+              <a:off x="3327336" y="4336484"/>
+              <a:ext cx="0" cy="1317069"/>
+            </a:xfrm>
+            <a:custGeom>
+              <a:avLst/>
+              <a:pathLst>
+                <a:path w="0" h="1317069">
+                  <a:moveTo>
+                    <a:pt x="0" y="1317069"/>
+                  </a:moveTo>
+                  <a:lnTo>
+                    <a:pt x="0" y="0"/>
+                  </a:lnTo>
+                  <a:lnTo>
+                    <a:pt x="0" y="0"/>
+                  </a:lnTo>
+                </a:path>
+              </a:pathLst>
+            </a:custGeom>
+            <a:ln w="6775" cap="flat">
+              <a:solidFill>
+                <a:srgbClr val="EBEBEB">
+                  <a:alpha val="100000"/>
+                </a:srgbClr>
+              </a:solidFill>
+              <a:prstDash val="solid"/>
+              <a:round/>
+            </a:ln>
+          </p:spPr>
+          <p:txBody>
+            <a:bodyPr/>
+            <a:lstStyle/>
+            <a:p/>
+          </p:txBody>
+        </p:sp>
+        <p:sp>
+          <p:nvSpPr>
+            <p:cNvPr id="46" name="pl46"/>
+            <p:cNvSpPr/>
+            <p:nvPr/>
+          </p:nvSpPr>
+          <p:spPr>
+            <a:xfrm>
+              <a:off x="4172622" y="4336484"/>
+              <a:ext cx="0" cy="1317069"/>
+            </a:xfrm>
+            <a:custGeom>
+              <a:avLst/>
+              <a:pathLst>
+                <a:path w="0" h="1317069">
+                  <a:moveTo>
+                    <a:pt x="0" y="1317069"/>
+                  </a:moveTo>
+                  <a:lnTo>
+                    <a:pt x="0" y="0"/>
+                  </a:lnTo>
+                  <a:lnTo>
+                    <a:pt x="0" y="0"/>
+                  </a:lnTo>
+                </a:path>
+              </a:pathLst>
+            </a:custGeom>
+            <a:ln w="6775" cap="flat">
+              <a:solidFill>
+                <a:srgbClr val="EBEBEB">
+                  <a:alpha val="100000"/>
+                </a:srgbClr>
+              </a:solidFill>
+              <a:prstDash val="solid"/>
+              <a:round/>
+            </a:ln>
+          </p:spPr>
+          <p:txBody>
+            <a:bodyPr/>
+            <a:lstStyle/>
+            <a:p/>
+          </p:txBody>
+        </p:sp>
+        <p:sp>
+          <p:nvSpPr>
+            <p:cNvPr id="47" name="pl47"/>
+            <p:cNvSpPr/>
+            <p:nvPr/>
+          </p:nvSpPr>
+          <p:spPr>
+            <a:xfrm>
+              <a:off x="5017909" y="4336484"/>
+              <a:ext cx="0" cy="1317069"/>
+            </a:xfrm>
+            <a:custGeom>
+              <a:avLst/>
+              <a:pathLst>
+                <a:path w="0" h="1317069">
+                  <a:moveTo>
+                    <a:pt x="0" y="1317069"/>
+                  </a:moveTo>
+                  <a:lnTo>
+                    <a:pt x="0" y="0"/>
+                  </a:lnTo>
+                  <a:lnTo>
+                    <a:pt x="0" y="0"/>
+                  </a:lnTo>
+                </a:path>
+              </a:pathLst>
+            </a:custGeom>
+            <a:ln w="6775" cap="flat">
+              <a:solidFill>
+                <a:srgbClr val="EBEBEB">
+                  <a:alpha val="100000"/>
+                </a:srgbClr>
+              </a:solidFill>
+              <a:prstDash val="solid"/>
+              <a:round/>
+            </a:ln>
+          </p:spPr>
+          <p:txBody>
+            <a:bodyPr/>
+            <a:lstStyle/>
+            <a:p/>
+          </p:txBody>
+        </p:sp>
+        <p:sp>
+          <p:nvSpPr>
+            <p:cNvPr id="48" name="pl48"/>
+            <p:cNvSpPr/>
+            <p:nvPr/>
+          </p:nvSpPr>
+          <p:spPr>
+            <a:xfrm>
+              <a:off x="5863195" y="4336484"/>
+              <a:ext cx="0" cy="1317069"/>
+            </a:xfrm>
+            <a:custGeom>
+              <a:avLst/>
+              <a:pathLst>
+                <a:path w="0" h="1317069">
+                  <a:moveTo>
+                    <a:pt x="0" y="1317069"/>
+                  </a:moveTo>
+                  <a:lnTo>
+                    <a:pt x="0" y="0"/>
+                  </a:lnTo>
+                  <a:lnTo>
+                    <a:pt x="0" y="0"/>
+                  </a:lnTo>
+                </a:path>
+              </a:pathLst>
+            </a:custGeom>
+            <a:ln w="6775" cap="flat">
+              <a:solidFill>
+                <a:srgbClr val="EBEBEB">
+                  <a:alpha val="100000"/>
+                </a:srgbClr>
+              </a:solidFill>
+              <a:prstDash val="solid"/>
+              <a:round/>
+            </a:ln>
+          </p:spPr>
+          <p:txBody>
+            <a:bodyPr/>
+            <a:lstStyle/>
+            <a:p/>
+          </p:txBody>
+        </p:sp>
+        <p:sp>
+          <p:nvSpPr>
+            <p:cNvPr id="49" name="pl49"/>
+            <p:cNvSpPr/>
+            <p:nvPr/>
+          </p:nvSpPr>
+          <p:spPr>
+            <a:xfrm>
+              <a:off x="6708482" y="4336484"/>
+              <a:ext cx="0" cy="1317069"/>
+            </a:xfrm>
+            <a:custGeom>
+              <a:avLst/>
+              <a:pathLst>
+                <a:path w="0" h="1317069">
+                  <a:moveTo>
+                    <a:pt x="0" y="1317069"/>
+                  </a:moveTo>
+                  <a:lnTo>
+                    <a:pt x="0" y="0"/>
+                  </a:lnTo>
+                  <a:lnTo>
+                    <a:pt x="0" y="0"/>
+                  </a:lnTo>
+                </a:path>
+              </a:pathLst>
+            </a:custGeom>
+            <a:ln w="6775" cap="flat">
+              <a:solidFill>
+                <a:srgbClr val="EBEBEB">
+                  <a:alpha val="100000"/>
+                </a:srgbClr>
+              </a:solidFill>
+              <a:prstDash val="solid"/>
+              <a:round/>
+            </a:ln>
+          </p:spPr>
+          <p:txBody>
+            <a:bodyPr/>
+            <a:lstStyle/>
+            <a:p/>
+          </p:txBody>
+        </p:sp>
+        <p:sp>
+          <p:nvSpPr>
+            <p:cNvPr id="50" name="pl50"/>
+            <p:cNvSpPr/>
+            <p:nvPr/>
+          </p:nvSpPr>
+          <p:spPr>
+            <a:xfrm>
+              <a:off x="7553768" y="4336484"/>
+              <a:ext cx="0" cy="1317069"/>
+            </a:xfrm>
+            <a:custGeom>
+              <a:avLst/>
+              <a:pathLst>
+                <a:path w="0" h="1317069">
+                  <a:moveTo>
+                    <a:pt x="0" y="1317069"/>
+                  </a:moveTo>
+                  <a:lnTo>
+                    <a:pt x="0" y="0"/>
+                  </a:lnTo>
+                  <a:lnTo>
+                    <a:pt x="0" y="0"/>
+                  </a:lnTo>
+                </a:path>
+              </a:pathLst>
+            </a:custGeom>
+            <a:ln w="6775" cap="flat">
+              <a:solidFill>
+                <a:srgbClr val="EBEBEB">
+                  <a:alpha val="100000"/>
+                </a:srgbClr>
+              </a:solidFill>
+              <a:prstDash val="solid"/>
+              <a:round/>
+            </a:ln>
+          </p:spPr>
+          <p:txBody>
+            <a:bodyPr/>
+            <a:lstStyle/>
+            <a:p/>
+          </p:txBody>
+        </p:sp>
+        <p:sp>
+          <p:nvSpPr>
+            <p:cNvPr id="51" name="pl51"/>
+            <p:cNvSpPr/>
+            <p:nvPr/>
+          </p:nvSpPr>
+          <p:spPr>
+            <a:xfrm>
+              <a:off x="8399054" y="4336484"/>
+              <a:ext cx="0" cy="1317069"/>
+            </a:xfrm>
+            <a:custGeom>
+              <a:avLst/>
+              <a:pathLst>
+                <a:path w="0" h="1317069">
+                  <a:moveTo>
+                    <a:pt x="0" y="1317069"/>
+                  </a:moveTo>
+                  <a:lnTo>
+                    <a:pt x="0" y="0"/>
+                  </a:lnTo>
+                  <a:lnTo>
+                    <a:pt x="0" y="0"/>
+                  </a:lnTo>
+                </a:path>
+              </a:pathLst>
+            </a:custGeom>
+            <a:ln w="6775" cap="flat">
+              <a:solidFill>
+                <a:srgbClr val="EBEBEB">
+                  <a:alpha val="100000"/>
+                </a:srgbClr>
+              </a:solidFill>
+              <a:prstDash val="solid"/>
+              <a:round/>
+            </a:ln>
+          </p:spPr>
+          <p:txBody>
+            <a:bodyPr/>
+            <a:lstStyle/>
+            <a:p/>
+          </p:txBody>
+        </p:sp>
+        <p:sp>
+          <p:nvSpPr>
+            <p:cNvPr id="52" name="pl52"/>
+            <p:cNvSpPr/>
+            <p:nvPr/>
+          </p:nvSpPr>
+          <p:spPr>
+            <a:xfrm>
+              <a:off x="887106" y="5593686"/>
+              <a:ext cx="7660515" cy="0"/>
+            </a:xfrm>
+            <a:custGeom>
+              <a:avLst/>
+              <a:pathLst>
+                <a:path w="7660515" h="0">
+                  <a:moveTo>
+                    <a:pt x="0" y="0"/>
+                  </a:moveTo>
+                  <a:lnTo>
+                    <a:pt x="7660515" y="0"/>
+                  </a:lnTo>
+                  <a:lnTo>
+                    <a:pt x="7660515" y="0"/>
+                  </a:lnTo>
+                </a:path>
+              </a:pathLst>
+            </a:custGeom>
+            <a:ln w="13550" cap="flat">
+              <a:solidFill>
+                <a:srgbClr val="EBEBEB">
+                  <a:alpha val="100000"/>
+                </a:srgbClr>
+              </a:solidFill>
+              <a:prstDash val="solid"/>
+              <a:round/>
+            </a:ln>
+          </p:spPr>
+          <p:txBody>
+            <a:bodyPr/>
+            <a:lstStyle/>
+            <a:p/>
+          </p:txBody>
+        </p:sp>
+        <p:sp>
+          <p:nvSpPr>
+            <p:cNvPr id="53" name="pl53"/>
+            <p:cNvSpPr/>
+            <p:nvPr/>
+          </p:nvSpPr>
+          <p:spPr>
+            <a:xfrm>
+              <a:off x="887106" y="5294352"/>
+              <a:ext cx="7660515" cy="0"/>
+            </a:xfrm>
+            <a:custGeom>
+              <a:avLst/>
+              <a:pathLst>
+                <a:path w="7660515" h="0">
+                  <a:moveTo>
+                    <a:pt x="0" y="0"/>
+                  </a:moveTo>
+                  <a:lnTo>
+                    <a:pt x="7660515" y="0"/>
+                  </a:lnTo>
+                  <a:lnTo>
+                    <a:pt x="7660515" y="0"/>
+                  </a:lnTo>
+                </a:path>
+              </a:pathLst>
+            </a:custGeom>
+            <a:ln w="13550" cap="flat">
+              <a:solidFill>
+                <a:srgbClr val="EBEBEB">
+                  <a:alpha val="100000"/>
+                </a:srgbClr>
+              </a:solidFill>
+              <a:prstDash val="solid"/>
+              <a:round/>
+            </a:ln>
+          </p:spPr>
+          <p:txBody>
+            <a:bodyPr/>
+            <a:lstStyle/>
+            <a:p/>
+          </p:txBody>
+        </p:sp>
+        <p:sp>
+          <p:nvSpPr>
+            <p:cNvPr id="54" name="pl54"/>
+            <p:cNvSpPr/>
+            <p:nvPr/>
+          </p:nvSpPr>
+          <p:spPr>
+            <a:xfrm>
+              <a:off x="887106" y="4995019"/>
+              <a:ext cx="7660515" cy="0"/>
+            </a:xfrm>
+            <a:custGeom>
+              <a:avLst/>
+              <a:pathLst>
+                <a:path w="7660515" h="0">
+                  <a:moveTo>
+                    <a:pt x="0" y="0"/>
+                  </a:moveTo>
+                  <a:lnTo>
+                    <a:pt x="7660515" y="0"/>
+                  </a:lnTo>
+                  <a:lnTo>
+                    <a:pt x="7660515" y="0"/>
+                  </a:lnTo>
+                </a:path>
+              </a:pathLst>
+            </a:custGeom>
+            <a:ln w="13550" cap="flat">
+              <a:solidFill>
+                <a:srgbClr val="EBEBEB">
+                  <a:alpha val="100000"/>
+                </a:srgbClr>
+              </a:solidFill>
+              <a:prstDash val="solid"/>
+              <a:round/>
+            </a:ln>
+          </p:spPr>
+          <p:txBody>
+            <a:bodyPr/>
+            <a:lstStyle/>
+            <a:p/>
+          </p:txBody>
+        </p:sp>
+        <p:sp>
+          <p:nvSpPr>
+            <p:cNvPr id="55" name="pl55"/>
+            <p:cNvSpPr/>
+            <p:nvPr/>
+          </p:nvSpPr>
+          <p:spPr>
+            <a:xfrm>
+              <a:off x="887106" y="4695685"/>
+              <a:ext cx="7660515" cy="0"/>
+            </a:xfrm>
+            <a:custGeom>
+              <a:avLst/>
+              <a:pathLst>
+                <a:path w="7660515" h="0">
+                  <a:moveTo>
+                    <a:pt x="0" y="0"/>
+                  </a:moveTo>
+                  <a:lnTo>
+                    <a:pt x="7660515" y="0"/>
+                  </a:lnTo>
+                  <a:lnTo>
+                    <a:pt x="7660515" y="0"/>
+                  </a:lnTo>
+                </a:path>
+              </a:pathLst>
+            </a:custGeom>
+            <a:ln w="13550" cap="flat">
+              <a:solidFill>
+                <a:srgbClr val="EBEBEB">
+                  <a:alpha val="100000"/>
+                </a:srgbClr>
+              </a:solidFill>
+              <a:prstDash val="solid"/>
+              <a:round/>
+            </a:ln>
+          </p:spPr>
+          <p:txBody>
+            <a:bodyPr/>
+            <a:lstStyle/>
+            <a:p/>
+          </p:txBody>
+        </p:sp>
+        <p:sp>
+          <p:nvSpPr>
+            <p:cNvPr id="56" name="pl56"/>
+            <p:cNvSpPr/>
+            <p:nvPr/>
+          </p:nvSpPr>
+          <p:spPr>
+            <a:xfrm>
+              <a:off x="887106" y="4396351"/>
+              <a:ext cx="7660515" cy="0"/>
+            </a:xfrm>
+            <a:custGeom>
+              <a:avLst/>
+              <a:pathLst>
+                <a:path w="7660515" h="0">
+                  <a:moveTo>
+                    <a:pt x="0" y="0"/>
+                  </a:moveTo>
+                  <a:lnTo>
+                    <a:pt x="7660515" y="0"/>
+                  </a:lnTo>
+                  <a:lnTo>
+                    <a:pt x="7660515" y="0"/>
+                  </a:lnTo>
+                </a:path>
+              </a:pathLst>
+            </a:custGeom>
+            <a:ln w="13550" cap="flat">
+              <a:solidFill>
+                <a:srgbClr val="EBEBEB">
+                  <a:alpha val="100000"/>
+                </a:srgbClr>
+              </a:solidFill>
+              <a:prstDash val="solid"/>
+              <a:round/>
+            </a:ln>
+          </p:spPr>
+          <p:txBody>
+            <a:bodyPr/>
+            <a:lstStyle/>
+            <a:p/>
+          </p:txBody>
+        </p:sp>
+        <p:sp>
+          <p:nvSpPr>
+            <p:cNvPr id="57" name="pl57"/>
+            <p:cNvSpPr/>
+            <p:nvPr/>
+          </p:nvSpPr>
+          <p:spPr>
+            <a:xfrm>
+              <a:off x="1214120" y="4336484"/>
+              <a:ext cx="0" cy="1317069"/>
+            </a:xfrm>
+            <a:custGeom>
+              <a:avLst/>
+              <a:pathLst>
+                <a:path w="0" h="1317069">
+                  <a:moveTo>
+                    <a:pt x="0" y="1317069"/>
+                  </a:moveTo>
+                  <a:lnTo>
+                    <a:pt x="0" y="0"/>
+                  </a:lnTo>
+                  <a:lnTo>
+                    <a:pt x="0" y="0"/>
+                  </a:lnTo>
+                </a:path>
+              </a:pathLst>
+            </a:custGeom>
+            <a:ln w="13550" cap="flat">
+              <a:solidFill>
+                <a:srgbClr val="EBEBEB">
+                  <a:alpha val="100000"/>
+                </a:srgbClr>
+              </a:solidFill>
+              <a:prstDash val="solid"/>
+              <a:round/>
+            </a:ln>
+          </p:spPr>
+          <p:txBody>
+            <a:bodyPr/>
+            <a:lstStyle/>
+            <a:p/>
+          </p:txBody>
+        </p:sp>
+        <p:sp>
+          <p:nvSpPr>
+            <p:cNvPr id="58" name="pl58"/>
+            <p:cNvSpPr/>
+            <p:nvPr/>
+          </p:nvSpPr>
+          <p:spPr>
+            <a:xfrm>
+              <a:off x="2059406" y="4336484"/>
+              <a:ext cx="0" cy="1317069"/>
+            </a:xfrm>
+            <a:custGeom>
+              <a:avLst/>
+              <a:pathLst>
+                <a:path w="0" h="1317069">
+                  <a:moveTo>
+                    <a:pt x="0" y="1317069"/>
+                  </a:moveTo>
+                  <a:lnTo>
+                    <a:pt x="0" y="0"/>
+                  </a:lnTo>
+                  <a:lnTo>
+                    <a:pt x="0" y="0"/>
+                  </a:lnTo>
+                </a:path>
+              </a:pathLst>
+            </a:custGeom>
+            <a:ln w="13550" cap="flat">
+              <a:solidFill>
+                <a:srgbClr val="EBEBEB">
+                  <a:alpha val="100000"/>
+                </a:srgbClr>
+              </a:solidFill>
+              <a:prstDash val="solid"/>
+              <a:round/>
+            </a:ln>
+          </p:spPr>
+          <p:txBody>
+            <a:bodyPr/>
+            <a:lstStyle/>
+            <a:p/>
+          </p:txBody>
+        </p:sp>
+        <p:sp>
+          <p:nvSpPr>
+            <p:cNvPr id="59" name="pl59"/>
+            <p:cNvSpPr/>
+            <p:nvPr/>
+          </p:nvSpPr>
+          <p:spPr>
+            <a:xfrm>
+              <a:off x="2904693" y="4336484"/>
+              <a:ext cx="0" cy="1317069"/>
+            </a:xfrm>
+            <a:custGeom>
+              <a:avLst/>
+              <a:pathLst>
+                <a:path w="0" h="1317069">
+                  <a:moveTo>
+                    <a:pt x="0" y="1317069"/>
+                  </a:moveTo>
+                  <a:lnTo>
+                    <a:pt x="0" y="0"/>
+                  </a:lnTo>
+                  <a:lnTo>
+                    <a:pt x="0" y="0"/>
+                  </a:lnTo>
+                </a:path>
+              </a:pathLst>
+            </a:custGeom>
+            <a:ln w="13550" cap="flat">
+              <a:solidFill>
+                <a:srgbClr val="EBEBEB">
+                  <a:alpha val="100000"/>
+                </a:srgbClr>
+              </a:solidFill>
+              <a:prstDash val="solid"/>
+              <a:round/>
+            </a:ln>
+          </p:spPr>
+          <p:txBody>
+            <a:bodyPr/>
+            <a:lstStyle/>
+            <a:p/>
+          </p:txBody>
+        </p:sp>
+        <p:sp>
+          <p:nvSpPr>
+            <p:cNvPr id="60" name="pl60"/>
+            <p:cNvSpPr/>
+            <p:nvPr/>
+          </p:nvSpPr>
+          <p:spPr>
+            <a:xfrm>
+              <a:off x="3749979" y="4336484"/>
+              <a:ext cx="0" cy="1317069"/>
+            </a:xfrm>
+            <a:custGeom>
+              <a:avLst/>
+              <a:pathLst>
+                <a:path w="0" h="1317069">
+                  <a:moveTo>
+                    <a:pt x="0" y="1317069"/>
+                  </a:moveTo>
+                  <a:lnTo>
+                    <a:pt x="0" y="0"/>
+                  </a:lnTo>
+                  <a:lnTo>
+                    <a:pt x="0" y="0"/>
+                  </a:lnTo>
+                </a:path>
+              </a:pathLst>
+            </a:custGeom>
+            <a:ln w="13550" cap="flat">
+              <a:solidFill>
+                <a:srgbClr val="EBEBEB">
+                  <a:alpha val="100000"/>
+                </a:srgbClr>
+              </a:solidFill>
+              <a:prstDash val="solid"/>
+              <a:round/>
+            </a:ln>
+          </p:spPr>
+          <p:txBody>
+            <a:bodyPr/>
+            <a:lstStyle/>
+            <a:p/>
+          </p:txBody>
+        </p:sp>
+        <p:sp>
+          <p:nvSpPr>
+            <p:cNvPr id="61" name="pl61"/>
+            <p:cNvSpPr/>
+            <p:nvPr/>
+          </p:nvSpPr>
+          <p:spPr>
+            <a:xfrm>
+              <a:off x="4595266" y="4336484"/>
+              <a:ext cx="0" cy="1317069"/>
+            </a:xfrm>
+            <a:custGeom>
+              <a:avLst/>
+              <a:pathLst>
+                <a:path w="0" h="1317069">
+                  <a:moveTo>
+                    <a:pt x="0" y="1317069"/>
+                  </a:moveTo>
+                  <a:lnTo>
+                    <a:pt x="0" y="0"/>
+                  </a:lnTo>
+                  <a:lnTo>
+                    <a:pt x="0" y="0"/>
+                  </a:lnTo>
+                </a:path>
+              </a:pathLst>
+            </a:custGeom>
+            <a:ln w="13550" cap="flat">
+              <a:solidFill>
+                <a:srgbClr val="EBEBEB">
+                  <a:alpha val="100000"/>
+                </a:srgbClr>
+              </a:solidFill>
+              <a:prstDash val="solid"/>
+              <a:round/>
+            </a:ln>
+          </p:spPr>
+          <p:txBody>
+            <a:bodyPr/>
+            <a:lstStyle/>
+            <a:p/>
+          </p:txBody>
+        </p:sp>
+        <p:sp>
+          <p:nvSpPr>
+            <p:cNvPr id="62" name="pl62"/>
+            <p:cNvSpPr/>
+            <p:nvPr/>
+          </p:nvSpPr>
+          <p:spPr>
+            <a:xfrm>
+              <a:off x="5440552" y="4336484"/>
+              <a:ext cx="0" cy="1317069"/>
+            </a:xfrm>
+            <a:custGeom>
+              <a:avLst/>
+              <a:pathLst>
+                <a:path w="0" h="1317069">
+                  <a:moveTo>
+                    <a:pt x="0" y="1317069"/>
+                  </a:moveTo>
+                  <a:lnTo>
+                    <a:pt x="0" y="0"/>
+                  </a:lnTo>
+                  <a:lnTo>
+                    <a:pt x="0" y="0"/>
+                  </a:lnTo>
+                </a:path>
+              </a:pathLst>
+            </a:custGeom>
+            <a:ln w="13550" cap="flat">
+              <a:solidFill>
+                <a:srgbClr val="EBEBEB">
+                  <a:alpha val="100000"/>
+                </a:srgbClr>
+              </a:solidFill>
+              <a:prstDash val="solid"/>
+              <a:round/>
+            </a:ln>
+          </p:spPr>
+          <p:txBody>
+            <a:bodyPr/>
+            <a:lstStyle/>
+            <a:p/>
+          </p:txBody>
+        </p:sp>
+        <p:sp>
+          <p:nvSpPr>
+            <p:cNvPr id="63" name="pl63"/>
+            <p:cNvSpPr/>
+            <p:nvPr/>
+          </p:nvSpPr>
+          <p:spPr>
+            <a:xfrm>
+              <a:off x="6285838" y="4336484"/>
+              <a:ext cx="0" cy="1317069"/>
+            </a:xfrm>
+            <a:custGeom>
+              <a:avLst/>
+              <a:pathLst>
+                <a:path w="0" h="1317069">
+                  <a:moveTo>
+                    <a:pt x="0" y="1317069"/>
+                  </a:moveTo>
+                  <a:lnTo>
+                    <a:pt x="0" y="0"/>
+                  </a:lnTo>
+                  <a:lnTo>
+                    <a:pt x="0" y="0"/>
+                  </a:lnTo>
+                </a:path>
+              </a:pathLst>
+            </a:custGeom>
+            <a:ln w="13550" cap="flat">
+              <a:solidFill>
+                <a:srgbClr val="EBEBEB">
+                  <a:alpha val="100000"/>
+                </a:srgbClr>
+              </a:solidFill>
+              <a:prstDash val="solid"/>
+              <a:round/>
+            </a:ln>
+          </p:spPr>
+          <p:txBody>
+            <a:bodyPr/>
+            <a:lstStyle/>
+            <a:p/>
+          </p:txBody>
+        </p:sp>
+        <p:sp>
+          <p:nvSpPr>
+            <p:cNvPr id="64" name="pl64"/>
+            <p:cNvSpPr/>
+            <p:nvPr/>
+          </p:nvSpPr>
+          <p:spPr>
+            <a:xfrm>
+              <a:off x="7131125" y="4336484"/>
+              <a:ext cx="0" cy="1317069"/>
+            </a:xfrm>
+            <a:custGeom>
+              <a:avLst/>
+              <a:pathLst>
+                <a:path w="0" h="1317069">
+                  <a:moveTo>
+                    <a:pt x="0" y="1317069"/>
+                  </a:moveTo>
+                  <a:lnTo>
+                    <a:pt x="0" y="0"/>
+                  </a:lnTo>
+                  <a:lnTo>
+                    <a:pt x="0" y="0"/>
+                  </a:lnTo>
+                </a:path>
+              </a:pathLst>
+            </a:custGeom>
+            <a:ln w="13550" cap="flat">
+              <a:solidFill>
+                <a:srgbClr val="EBEBEB">
+                  <a:alpha val="100000"/>
+                </a:srgbClr>
+              </a:solidFill>
+              <a:prstDash val="solid"/>
+              <a:round/>
+            </a:ln>
+          </p:spPr>
+          <p:txBody>
+            <a:bodyPr/>
+            <a:lstStyle/>
+            <a:p/>
+          </p:txBody>
+        </p:sp>
+        <p:sp>
+          <p:nvSpPr>
+            <p:cNvPr id="65" name="pl65"/>
+            <p:cNvSpPr/>
+            <p:nvPr/>
+          </p:nvSpPr>
+          <p:spPr>
+            <a:xfrm>
+              <a:off x="7976411" y="4336484"/>
+              <a:ext cx="0" cy="1317069"/>
+            </a:xfrm>
+            <a:custGeom>
+              <a:avLst/>
+              <a:pathLst>
+                <a:path w="0" h="1317069">
+                  <a:moveTo>
+                    <a:pt x="0" y="1317069"/>
+                  </a:moveTo>
+                  <a:lnTo>
+                    <a:pt x="0" y="0"/>
+                  </a:lnTo>
+                  <a:lnTo>
+                    <a:pt x="0" y="0"/>
+                  </a:lnTo>
+                </a:path>
+              </a:pathLst>
+            </a:custGeom>
+            <a:ln w="13550" cap="flat">
+              <a:solidFill>
+                <a:srgbClr val="EBEBEB">
+                  <a:alpha val="100000"/>
+                </a:srgbClr>
+              </a:solidFill>
+              <a:prstDash val="solid"/>
+              <a:round/>
+            </a:ln>
+          </p:spPr>
+          <p:txBody>
+            <a:bodyPr/>
+            <a:lstStyle/>
+            <a:p/>
+          </p:txBody>
+        </p:sp>
+        <p:sp>
+          <p:nvSpPr>
+            <p:cNvPr id="66" name="pg66"/>
+            <p:cNvSpPr/>
+            <p:nvPr/>
+          </p:nvSpPr>
+          <p:spPr>
+            <a:xfrm>
+              <a:off x="1235312" y="4518910"/>
+              <a:ext cx="6964104" cy="999093"/>
+            </a:xfrm>
+            <a:custGeom>
+              <a:avLst/>
+              <a:pathLst>
+                <a:path w="6964104" h="999093">
+                  <a:moveTo>
+                    <a:pt x="0" y="0"/>
+                  </a:moveTo>
+                  <a:lnTo>
+                    <a:pt x="70344" y="28422"/>
+                  </a:lnTo>
+                  <a:lnTo>
+                    <a:pt x="140688" y="56093"/>
+                  </a:lnTo>
+                  <a:lnTo>
+                    <a:pt x="211033" y="83033"/>
+                  </a:lnTo>
+                  <a:lnTo>
+                    <a:pt x="281377" y="109259"/>
+                  </a:lnTo>
+                  <a:lnTo>
+                    <a:pt x="351722" y="134793"/>
+                  </a:lnTo>
+                  <a:lnTo>
+                    <a:pt x="422066" y="159651"/>
+                  </a:lnTo>
+                  <a:lnTo>
+                    <a:pt x="492411" y="183852"/>
+                  </a:lnTo>
+                  <a:lnTo>
+                    <a:pt x="562755" y="207412"/>
+                  </a:lnTo>
+                  <a:lnTo>
+                    <a:pt x="633100" y="230350"/>
+                  </a:lnTo>
+                  <a:lnTo>
+                    <a:pt x="703444" y="252681"/>
+                  </a:lnTo>
+                  <a:lnTo>
+                    <a:pt x="773789" y="274421"/>
+                  </a:lnTo>
+                  <a:lnTo>
+                    <a:pt x="844133" y="295587"/>
+                  </a:lnTo>
+                  <a:lnTo>
+                    <a:pt x="914478" y="316193"/>
+                  </a:lnTo>
+                  <a:lnTo>
+                    <a:pt x="984822" y="336254"/>
+                  </a:lnTo>
+                  <a:lnTo>
+                    <a:pt x="1055167" y="355784"/>
+                  </a:lnTo>
+                  <a:lnTo>
+                    <a:pt x="1125511" y="374798"/>
+                  </a:lnTo>
+                  <a:lnTo>
+                    <a:pt x="1195856" y="393309"/>
+                  </a:lnTo>
+                  <a:lnTo>
+                    <a:pt x="1266200" y="411331"/>
+                  </a:lnTo>
+                  <a:lnTo>
+                    <a:pt x="1336545" y="428876"/>
+                  </a:lnTo>
+                  <a:lnTo>
+                    <a:pt x="1406889" y="445957"/>
+                  </a:lnTo>
+                  <a:lnTo>
+                    <a:pt x="1477234" y="462586"/>
+                  </a:lnTo>
+                  <a:lnTo>
+                    <a:pt x="1547578" y="478775"/>
+                  </a:lnTo>
+                  <a:lnTo>
+                    <a:pt x="1617923" y="494537"/>
+                  </a:lnTo>
+                  <a:lnTo>
+                    <a:pt x="1688267" y="509881"/>
+                  </a:lnTo>
+                  <a:lnTo>
+                    <a:pt x="1758612" y="524820"/>
+                  </a:lnTo>
+                  <a:lnTo>
+                    <a:pt x="1828956" y="539364"/>
+                  </a:lnTo>
+                  <a:lnTo>
+                    <a:pt x="1899301" y="553523"/>
+                  </a:lnTo>
+                  <a:lnTo>
+                    <a:pt x="1969645" y="567308"/>
+                  </a:lnTo>
+                  <a:lnTo>
+                    <a:pt x="2039990" y="580728"/>
+                  </a:lnTo>
+                  <a:lnTo>
+                    <a:pt x="2110334" y="593793"/>
+                  </a:lnTo>
+                  <a:lnTo>
+                    <a:pt x="2180679" y="606513"/>
+                  </a:lnTo>
+                  <a:lnTo>
+                    <a:pt x="2251023" y="618896"/>
+                  </a:lnTo>
+                  <a:lnTo>
+                    <a:pt x="2321368" y="630952"/>
+                  </a:lnTo>
+                  <a:lnTo>
+                    <a:pt x="2391712" y="642689"/>
+                  </a:lnTo>
+                  <a:lnTo>
+                    <a:pt x="2462057" y="654116"/>
+                  </a:lnTo>
+                  <a:lnTo>
+                    <a:pt x="2532401" y="665240"/>
+                  </a:lnTo>
+                  <a:lnTo>
+                    <a:pt x="2602746" y="676070"/>
+                  </a:lnTo>
+                  <a:lnTo>
+                    <a:pt x="2673090" y="686614"/>
+                  </a:lnTo>
+                  <a:lnTo>
+                    <a:pt x="2743435" y="696879"/>
+                  </a:lnTo>
+                  <a:lnTo>
+                    <a:pt x="2813779" y="706873"/>
+                  </a:lnTo>
+                  <a:lnTo>
+                    <a:pt x="2884124" y="716602"/>
+                  </a:lnTo>
+                  <a:lnTo>
+                    <a:pt x="2954468" y="726074"/>
+                  </a:lnTo>
+                  <a:lnTo>
+                    <a:pt x="3024813" y="735295"/>
+                  </a:lnTo>
+                  <a:lnTo>
+                    <a:pt x="3095157" y="744273"/>
+                  </a:lnTo>
+                  <a:lnTo>
+                    <a:pt x="3165502" y="753013"/>
+                  </a:lnTo>
+                  <a:lnTo>
+                    <a:pt x="3235846" y="761522"/>
+                  </a:lnTo>
+                  <a:lnTo>
+                    <a:pt x="3306191" y="769806"/>
+                  </a:lnTo>
+                  <a:lnTo>
+                    <a:pt x="3376535" y="776884"/>
+                  </a:lnTo>
+                  <a:lnTo>
+                    <a:pt x="3446880" y="781576"/>
+                  </a:lnTo>
+                  <a:lnTo>
+                    <a:pt x="3517224" y="786195"/>
+                  </a:lnTo>
+                  <a:lnTo>
+                    <a:pt x="3587569" y="790741"/>
+                  </a:lnTo>
+                  <a:lnTo>
+                    <a:pt x="3657913" y="795216"/>
+                  </a:lnTo>
+                  <a:lnTo>
+                    <a:pt x="3728257" y="799620"/>
+                  </a:lnTo>
+                  <a:lnTo>
+                    <a:pt x="3798602" y="803954"/>
+                  </a:lnTo>
+                  <a:lnTo>
+                    <a:pt x="3868946" y="808220"/>
+                  </a:lnTo>
+                  <a:lnTo>
+                    <a:pt x="3939291" y="812419"/>
+                  </a:lnTo>
+                  <a:lnTo>
+                    <a:pt x="4009635" y="816552"/>
+                  </a:lnTo>
+                  <a:lnTo>
+                    <a:pt x="4079980" y="820620"/>
+                  </a:lnTo>
+                  <a:lnTo>
+                    <a:pt x="4150324" y="824624"/>
+                  </a:lnTo>
+                  <a:lnTo>
+                    <a:pt x="4220669" y="828564"/>
+                  </a:lnTo>
+                  <a:lnTo>
+                    <a:pt x="4291013" y="832443"/>
+                  </a:lnTo>
+                  <a:lnTo>
+                    <a:pt x="4361358" y="836261"/>
+                  </a:lnTo>
+                  <a:lnTo>
+                    <a:pt x="4431702" y="840018"/>
+                  </a:lnTo>
+                  <a:lnTo>
+                    <a:pt x="4502047" y="843716"/>
+                  </a:lnTo>
+                  <a:lnTo>
+                    <a:pt x="4572391" y="847356"/>
+                  </a:lnTo>
+                  <a:lnTo>
+                    <a:pt x="4642736" y="850938"/>
+                  </a:lnTo>
+                  <a:lnTo>
+                    <a:pt x="4713080" y="854465"/>
+                  </a:lnTo>
+                  <a:lnTo>
+                    <a:pt x="4783425" y="857935"/>
+                  </a:lnTo>
+                  <a:lnTo>
+                    <a:pt x="4853769" y="861351"/>
+                  </a:lnTo>
+                  <a:lnTo>
+                    <a:pt x="4924114" y="864713"/>
+                  </a:lnTo>
+                  <a:lnTo>
+                    <a:pt x="4994458" y="868022"/>
+                  </a:lnTo>
+                  <a:lnTo>
+                    <a:pt x="5064803" y="871279"/>
+                  </a:lnTo>
+                  <a:lnTo>
+                    <a:pt x="5135147" y="874485"/>
+                  </a:lnTo>
+                  <a:lnTo>
+                    <a:pt x="5205492" y="877640"/>
+                  </a:lnTo>
+                  <a:lnTo>
+                    <a:pt x="5275836" y="880746"/>
+                  </a:lnTo>
+                  <a:lnTo>
+                    <a:pt x="5346181" y="883802"/>
+                  </a:lnTo>
+                  <a:lnTo>
+                    <a:pt x="5416525" y="886811"/>
+                  </a:lnTo>
+                  <a:lnTo>
+                    <a:pt x="5486870" y="889772"/>
+                  </a:lnTo>
+                  <a:lnTo>
+                    <a:pt x="5557214" y="892686"/>
+                  </a:lnTo>
+                  <a:lnTo>
+                    <a:pt x="5627559" y="895554"/>
+                  </a:lnTo>
+                  <a:lnTo>
+                    <a:pt x="5697903" y="898378"/>
+                  </a:lnTo>
+                  <a:lnTo>
+                    <a:pt x="5768248" y="901157"/>
+                  </a:lnTo>
+                  <a:lnTo>
+                    <a:pt x="5838592" y="903892"/>
+                  </a:lnTo>
+                  <a:lnTo>
+                    <a:pt x="5908937" y="906583"/>
+                  </a:lnTo>
+                  <a:lnTo>
+                    <a:pt x="5979281" y="909233"/>
+                  </a:lnTo>
+                  <a:lnTo>
+                    <a:pt x="6049626" y="911841"/>
+                  </a:lnTo>
+                  <a:lnTo>
+                    <a:pt x="6119970" y="914408"/>
+                  </a:lnTo>
+                  <a:lnTo>
+                    <a:pt x="6190315" y="916934"/>
+                  </a:lnTo>
+                  <a:lnTo>
+                    <a:pt x="6260659" y="919420"/>
+                  </a:lnTo>
+                  <a:lnTo>
+                    <a:pt x="6331004" y="921868"/>
+                  </a:lnTo>
+                  <a:lnTo>
+                    <a:pt x="6401348" y="924276"/>
+                  </a:lnTo>
+                  <a:lnTo>
+                    <a:pt x="6471693" y="926647"/>
+                  </a:lnTo>
+                  <a:lnTo>
+                    <a:pt x="6542037" y="928981"/>
+                  </a:lnTo>
+                  <a:lnTo>
+                    <a:pt x="6612382" y="931277"/>
+                  </a:lnTo>
+                  <a:lnTo>
+                    <a:pt x="6682726" y="933538"/>
+                  </a:lnTo>
+                  <a:lnTo>
+                    <a:pt x="6753071" y="935763"/>
+                  </a:lnTo>
+                  <a:lnTo>
+                    <a:pt x="6823415" y="937953"/>
+                  </a:lnTo>
+                  <a:lnTo>
+                    <a:pt x="6893760" y="940108"/>
+                  </a:lnTo>
+                  <a:lnTo>
+                    <a:pt x="6964104" y="942230"/>
+                  </a:lnTo>
+                  <a:lnTo>
+                    <a:pt x="6964104" y="999093"/>
+                  </a:lnTo>
+                  <a:lnTo>
+                    <a:pt x="6893760" y="997037"/>
+                  </a:lnTo>
+                  <a:lnTo>
+                    <a:pt x="6823415" y="994926"/>
+                  </a:lnTo>
+                  <a:lnTo>
+                    <a:pt x="6753071" y="992757"/>
+                  </a:lnTo>
+                  <a:lnTo>
+                    <a:pt x="6682726" y="990529"/>
+                  </a:lnTo>
+                  <a:lnTo>
+                    <a:pt x="6612382" y="988240"/>
+                  </a:lnTo>
+                  <a:lnTo>
+                    <a:pt x="6542037" y="985890"/>
+                  </a:lnTo>
+                  <a:lnTo>
+                    <a:pt x="6471693" y="983475"/>
+                  </a:lnTo>
+                  <a:lnTo>
+                    <a:pt x="6401348" y="980995"/>
+                  </a:lnTo>
+                  <a:lnTo>
+                    <a:pt x="6331004" y="978448"/>
+                  </a:lnTo>
+                  <a:lnTo>
+                    <a:pt x="6260659" y="975831"/>
+                  </a:lnTo>
+                  <a:lnTo>
+                    <a:pt x="6190315" y="973143"/>
+                  </a:lnTo>
+                  <a:lnTo>
+                    <a:pt x="6119970" y="970383"/>
+                  </a:lnTo>
+                  <a:lnTo>
+                    <a:pt x="6049626" y="967547"/>
+                  </a:lnTo>
+                  <a:lnTo>
+                    <a:pt x="5979281" y="964634"/>
+                  </a:lnTo>
+                  <a:lnTo>
+                    <a:pt x="5908937" y="961643"/>
+                  </a:lnTo>
+                  <a:lnTo>
+                    <a:pt x="5838592" y="958569"/>
+                  </a:lnTo>
+                  <a:lnTo>
+                    <a:pt x="5768248" y="955413"/>
+                  </a:lnTo>
+                  <a:lnTo>
+                    <a:pt x="5697903" y="952171"/>
+                  </a:lnTo>
+                  <a:lnTo>
+                    <a:pt x="5627559" y="948840"/>
+                  </a:lnTo>
+                  <a:lnTo>
+                    <a:pt x="5557214" y="945419"/>
+                  </a:lnTo>
+                  <a:lnTo>
+                    <a:pt x="5486870" y="941905"/>
+                  </a:lnTo>
+                  <a:lnTo>
+                    <a:pt x="5416525" y="938296"/>
+                  </a:lnTo>
+                  <a:lnTo>
+                    <a:pt x="5346181" y="934589"/>
+                  </a:lnTo>
+                  <a:lnTo>
+                    <a:pt x="5275836" y="930781"/>
+                  </a:lnTo>
+                  <a:lnTo>
+                    <a:pt x="5205492" y="926870"/>
+                  </a:lnTo>
+                  <a:lnTo>
+                    <a:pt x="5135147" y="922852"/>
+                  </a:lnTo>
+                  <a:lnTo>
+                    <a:pt x="5064803" y="918725"/>
+                  </a:lnTo>
+                  <a:lnTo>
+                    <a:pt x="4994458" y="914486"/>
+                  </a:lnTo>
+                  <a:lnTo>
+                    <a:pt x="4924114" y="910132"/>
+                  </a:lnTo>
+                  <a:lnTo>
+                    <a:pt x="4853769" y="905660"/>
+                  </a:lnTo>
+                  <a:lnTo>
+                    <a:pt x="4783425" y="901066"/>
+                  </a:lnTo>
+                  <a:lnTo>
+                    <a:pt x="4713080" y="896347"/>
+                  </a:lnTo>
+                  <a:lnTo>
+                    <a:pt x="4642736" y="891501"/>
+                  </a:lnTo>
+                  <a:lnTo>
+                    <a:pt x="4572391" y="886522"/>
+                  </a:lnTo>
+                  <a:lnTo>
+                    <a:pt x="4502047" y="881409"/>
+                  </a:lnTo>
+                  <a:lnTo>
+                    <a:pt x="4431702" y="876156"/>
+                  </a:lnTo>
+                  <a:lnTo>
+                    <a:pt x="4361358" y="870761"/>
+                  </a:lnTo>
+                  <a:lnTo>
+                    <a:pt x="4291013" y="865219"/>
+                  </a:lnTo>
+                  <a:lnTo>
+                    <a:pt x="4220669" y="859527"/>
+                  </a:lnTo>
+                  <a:lnTo>
+                    <a:pt x="4150324" y="853680"/>
+                  </a:lnTo>
+                  <a:lnTo>
+                    <a:pt x="4079980" y="847674"/>
+                  </a:lnTo>
+                  <a:lnTo>
+                    <a:pt x="4009635" y="841505"/>
+                  </a:lnTo>
+                  <a:lnTo>
+                    <a:pt x="3939291" y="835169"/>
+                  </a:lnTo>
+                  <a:lnTo>
+                    <a:pt x="3868946" y="828660"/>
+                  </a:lnTo>
+                  <a:lnTo>
+                    <a:pt x="3798602" y="821975"/>
+                  </a:lnTo>
+                  <a:lnTo>
+                    <a:pt x="3728257" y="815108"/>
+                  </a:lnTo>
+                  <a:lnTo>
+                    <a:pt x="3657913" y="808054"/>
+                  </a:lnTo>
+                  <a:lnTo>
+                    <a:pt x="3587569" y="800809"/>
+                  </a:lnTo>
+                  <a:lnTo>
+                    <a:pt x="3517224" y="793367"/>
+                  </a:lnTo>
+                  <a:lnTo>
+                    <a:pt x="3446880" y="785723"/>
+                  </a:lnTo>
+                  <a:lnTo>
+                    <a:pt x="3376535" y="777871"/>
+                  </a:lnTo>
+                  <a:lnTo>
+                    <a:pt x="3306191" y="772116"/>
+                  </a:lnTo>
+                  <a:lnTo>
+                    <a:pt x="3235846" y="767272"/>
+                  </a:lnTo>
+                  <a:lnTo>
+                    <a:pt x="3165502" y="762350"/>
+                  </a:lnTo>
+                  <a:lnTo>
+                    <a:pt x="3095157" y="757350"/>
+                  </a:lnTo>
+                  <a:lnTo>
+                    <a:pt x="3024813" y="752269"/>
+                  </a:lnTo>
+                  <a:lnTo>
+                    <a:pt x="2954468" y="747107"/>
+                  </a:lnTo>
+                  <a:lnTo>
+                    <a:pt x="2884124" y="741863"/>
+                  </a:lnTo>
+                  <a:lnTo>
+                    <a:pt x="2813779" y="736535"/>
+                  </a:lnTo>
+                  <a:lnTo>
+                    <a:pt x="2743435" y="731121"/>
+                  </a:lnTo>
+                  <a:lnTo>
+                    <a:pt x="2673090" y="725621"/>
+                  </a:lnTo>
+                  <a:lnTo>
+                    <a:pt x="2602746" y="720033"/>
+                  </a:lnTo>
+                  <a:lnTo>
+                    <a:pt x="2532401" y="714355"/>
+                  </a:lnTo>
+                  <a:lnTo>
+                    <a:pt x="2462057" y="708586"/>
+                  </a:lnTo>
+                  <a:lnTo>
+                    <a:pt x="2391712" y="702725"/>
+                  </a:lnTo>
+                  <a:lnTo>
+                    <a:pt x="2321368" y="696771"/>
+                  </a:lnTo>
+                  <a:lnTo>
+                    <a:pt x="2251023" y="690721"/>
+                  </a:lnTo>
+                  <a:lnTo>
+                    <a:pt x="2180679" y="684574"/>
+                  </a:lnTo>
+                  <a:lnTo>
+                    <a:pt x="2110334" y="678329"/>
+                  </a:lnTo>
+                  <a:lnTo>
+                    <a:pt x="2039990" y="671983"/>
+                  </a:lnTo>
+                  <a:lnTo>
+                    <a:pt x="1969645" y="665537"/>
+                  </a:lnTo>
+                  <a:lnTo>
+                    <a:pt x="1899301" y="658987"/>
+                  </a:lnTo>
+                  <a:lnTo>
+                    <a:pt x="1828956" y="652332"/>
+                  </a:lnTo>
+                  <a:lnTo>
+                    <a:pt x="1758612" y="645571"/>
+                  </a:lnTo>
+                  <a:lnTo>
+                    <a:pt x="1688267" y="638701"/>
+                  </a:lnTo>
+                  <a:lnTo>
+                    <a:pt x="1617923" y="631722"/>
+                  </a:lnTo>
+                  <a:lnTo>
+                    <a:pt x="1547578" y="624631"/>
+                  </a:lnTo>
+                  <a:lnTo>
+                    <a:pt x="1477234" y="617426"/>
+                  </a:lnTo>
+                  <a:lnTo>
+                    <a:pt x="1406889" y="610106"/>
+                  </a:lnTo>
+                  <a:lnTo>
+                    <a:pt x="1336545" y="602669"/>
+                  </a:lnTo>
+                  <a:lnTo>
+                    <a:pt x="1266200" y="595113"/>
+                  </a:lnTo>
+                  <a:lnTo>
+                    <a:pt x="1195856" y="587436"/>
+                  </a:lnTo>
+                  <a:lnTo>
+                    <a:pt x="1125511" y="579636"/>
+                  </a:lnTo>
+                  <a:lnTo>
+                    <a:pt x="1055167" y="571711"/>
+                  </a:lnTo>
+                  <a:lnTo>
+                    <a:pt x="984822" y="563659"/>
+                  </a:lnTo>
+                  <a:lnTo>
+                    <a:pt x="914478" y="555479"/>
+                  </a:lnTo>
+                  <a:lnTo>
+                    <a:pt x="844133" y="547167"/>
+                  </a:lnTo>
+                  <a:lnTo>
+                    <a:pt x="773789" y="538723"/>
+                  </a:lnTo>
+                  <a:lnTo>
+                    <a:pt x="703444" y="530143"/>
+                  </a:lnTo>
+                  <a:lnTo>
+                    <a:pt x="633100" y="521426"/>
+                  </a:lnTo>
+                  <a:lnTo>
+                    <a:pt x="562755" y="512570"/>
+                  </a:lnTo>
+                  <a:lnTo>
+                    <a:pt x="492411" y="503572"/>
+                  </a:lnTo>
+                  <a:lnTo>
+                    <a:pt x="422066" y="494429"/>
+                  </a:lnTo>
+                  <a:lnTo>
+                    <a:pt x="351722" y="485141"/>
+                  </a:lnTo>
+                  <a:lnTo>
+                    <a:pt x="281377" y="475704"/>
+                  </a:lnTo>
+                  <a:lnTo>
+                    <a:pt x="211033" y="466115"/>
+                  </a:lnTo>
+                  <a:lnTo>
+                    <a:pt x="140688" y="456374"/>
+                  </a:lnTo>
+                  <a:lnTo>
+                    <a:pt x="70344" y="446476"/>
+                  </a:lnTo>
+                  <a:lnTo>
+                    <a:pt x="0" y="436420"/>
+                  </a:lnTo>
+                  <a:close/>
+                </a:path>
+              </a:pathLst>
+            </a:custGeom>
+            <a:solidFill>
+              <a:srgbClr val="FF8C00">
+                <a:alpha val="20000"/>
+              </a:srgbClr>
+            </a:solidFill>
+          </p:spPr>
+          <p:txBody>
+            <a:bodyPr/>
+            <a:lstStyle/>
+            <a:p/>
+          </p:txBody>
+        </p:sp>
+        <p:sp>
+          <p:nvSpPr>
+            <p:cNvPr id="67" name="pl67"/>
+            <p:cNvSpPr/>
+            <p:nvPr/>
+          </p:nvSpPr>
+          <p:spPr>
+            <a:xfrm>
+              <a:off x="1235312" y="4518910"/>
+              <a:ext cx="6964104" cy="942230"/>
+            </a:xfrm>
+            <a:custGeom>
+              <a:avLst/>
+              <a:pathLst>
+                <a:path w="6964104" h="942230">
+                  <a:moveTo>
+                    <a:pt x="0" y="0"/>
+                  </a:moveTo>
+                  <a:lnTo>
+                    <a:pt x="70344" y="28422"/>
+                  </a:lnTo>
+                  <a:lnTo>
+                    <a:pt x="140688" y="56093"/>
+                  </a:lnTo>
+                  <a:lnTo>
+                    <a:pt x="211033" y="83033"/>
+                  </a:lnTo>
+                  <a:lnTo>
+                    <a:pt x="281377" y="109259"/>
+                  </a:lnTo>
+                  <a:lnTo>
+                    <a:pt x="351722" y="134793"/>
+                  </a:lnTo>
+                  <a:lnTo>
+                    <a:pt x="422066" y="159651"/>
+                  </a:lnTo>
+                  <a:lnTo>
+                    <a:pt x="492411" y="183852"/>
+                  </a:lnTo>
+                  <a:lnTo>
+                    <a:pt x="562755" y="207412"/>
+                  </a:lnTo>
+                  <a:lnTo>
+                    <a:pt x="633100" y="230350"/>
+                  </a:lnTo>
+                  <a:lnTo>
+                    <a:pt x="703444" y="252681"/>
+                  </a:lnTo>
+                  <a:lnTo>
+                    <a:pt x="773789" y="274421"/>
+                  </a:lnTo>
+                  <a:lnTo>
+                    <a:pt x="844133" y="295587"/>
+                  </a:lnTo>
+                  <a:lnTo>
+                    <a:pt x="914478" y="316193"/>
+                  </a:lnTo>
+                  <a:lnTo>
+                    <a:pt x="984822" y="336254"/>
+                  </a:lnTo>
+                  <a:lnTo>
+                    <a:pt x="1055167" y="355784"/>
+                  </a:lnTo>
+                  <a:lnTo>
+                    <a:pt x="1125511" y="374798"/>
+                  </a:lnTo>
+                  <a:lnTo>
+                    <a:pt x="1195856" y="393309"/>
+                  </a:lnTo>
+                  <a:lnTo>
+                    <a:pt x="1266200" y="411331"/>
+                  </a:lnTo>
+                  <a:lnTo>
+                    <a:pt x="1336545" y="428876"/>
+                  </a:lnTo>
+                  <a:lnTo>
+                    <a:pt x="1406889" y="445957"/>
+                  </a:lnTo>
+                  <a:lnTo>
+                    <a:pt x="1477234" y="462586"/>
+                  </a:lnTo>
+                  <a:lnTo>
+                    <a:pt x="1547578" y="478775"/>
+                  </a:lnTo>
+                  <a:lnTo>
+                    <a:pt x="1617923" y="494537"/>
+                  </a:lnTo>
+                  <a:lnTo>
+                    <a:pt x="1688267" y="509881"/>
+                  </a:lnTo>
+                  <a:lnTo>
+                    <a:pt x="1758612" y="524820"/>
+                  </a:lnTo>
+                  <a:lnTo>
+                    <a:pt x="1828956" y="539364"/>
+                  </a:lnTo>
+                  <a:lnTo>
+                    <a:pt x="1899301" y="553523"/>
+                  </a:lnTo>
+                  <a:lnTo>
+                    <a:pt x="1969645" y="567308"/>
+                  </a:lnTo>
+                  <a:lnTo>
+                    <a:pt x="2039990" y="580728"/>
+                  </a:lnTo>
+                  <a:lnTo>
+                    <a:pt x="2110334" y="593793"/>
+                  </a:lnTo>
+                  <a:lnTo>
+                    <a:pt x="2180679" y="606513"/>
+                  </a:lnTo>
+                  <a:lnTo>
+                    <a:pt x="2251023" y="618896"/>
+                  </a:lnTo>
+                  <a:lnTo>
+                    <a:pt x="2321368" y="630952"/>
+                  </a:lnTo>
+                  <a:lnTo>
+                    <a:pt x="2391712" y="642689"/>
+                  </a:lnTo>
+                  <a:lnTo>
+                    <a:pt x="2462057" y="654116"/>
+                  </a:lnTo>
+                  <a:lnTo>
+                    <a:pt x="2532401" y="665240"/>
+                  </a:lnTo>
+                  <a:lnTo>
+                    <a:pt x="2602746" y="676070"/>
+                  </a:lnTo>
+                  <a:lnTo>
+                    <a:pt x="2673090" y="686614"/>
+                  </a:lnTo>
+                  <a:lnTo>
+                    <a:pt x="2743435" y="696879"/>
+                  </a:lnTo>
+                  <a:lnTo>
+                    <a:pt x="2813779" y="706873"/>
+                  </a:lnTo>
+                  <a:lnTo>
+                    <a:pt x="2884124" y="716602"/>
+                  </a:lnTo>
+                  <a:lnTo>
+                    <a:pt x="2954468" y="726074"/>
+                  </a:lnTo>
+                  <a:lnTo>
+                    <a:pt x="3024813" y="735295"/>
+                  </a:lnTo>
+                  <a:lnTo>
+                    <a:pt x="3095157" y="744273"/>
+                  </a:lnTo>
+                  <a:lnTo>
+                    <a:pt x="3165502" y="753013"/>
+                  </a:lnTo>
+                  <a:lnTo>
+                    <a:pt x="3235846" y="761522"/>
+                  </a:lnTo>
+                  <a:lnTo>
+                    <a:pt x="3306191" y="769806"/>
+                  </a:lnTo>
+                  <a:lnTo>
+                    <a:pt x="3376535" y="776884"/>
+                  </a:lnTo>
+                  <a:lnTo>
+                    <a:pt x="3446880" y="781576"/>
+                  </a:lnTo>
+                  <a:lnTo>
+                    <a:pt x="3517224" y="786195"/>
+                  </a:lnTo>
+                  <a:lnTo>
+                    <a:pt x="3587569" y="790741"/>
+                  </a:lnTo>
+                  <a:lnTo>
+                    <a:pt x="3657913" y="795216"/>
+                  </a:lnTo>
+                  <a:lnTo>
+                    <a:pt x="3728257" y="799620"/>
+                  </a:lnTo>
+                  <a:lnTo>
+                    <a:pt x="3798602" y="803954"/>
+                  </a:lnTo>
+                  <a:lnTo>
+                    <a:pt x="3868946" y="808220"/>
+                  </a:lnTo>
+                  <a:lnTo>
+                    <a:pt x="3939291" y="812419"/>
+                  </a:lnTo>
+                  <a:lnTo>
+                    <a:pt x="4009635" y="816552"/>
+                  </a:lnTo>
+                  <a:lnTo>
+                    <a:pt x="4079980" y="820620"/>
+                  </a:lnTo>
+                  <a:lnTo>
+                    <a:pt x="4150324" y="824624"/>
+                  </a:lnTo>
+                  <a:lnTo>
+                    <a:pt x="4220669" y="828564"/>
+                  </a:lnTo>
+                  <a:lnTo>
+                    <a:pt x="4291013" y="832443"/>
+                  </a:lnTo>
+                  <a:lnTo>
+                    <a:pt x="4361358" y="836261"/>
+                  </a:lnTo>
+                  <a:lnTo>
+                    <a:pt x="4431702" y="840018"/>
+                  </a:lnTo>
+                  <a:lnTo>
+                    <a:pt x="4502047" y="843716"/>
+                  </a:lnTo>
+                  <a:lnTo>
+                    <a:pt x="4572391" y="847356"/>
+                  </a:lnTo>
+                  <a:lnTo>
+                    <a:pt x="4642736" y="850938"/>
+                  </a:lnTo>
+                  <a:lnTo>
+                    <a:pt x="4713080" y="854465"/>
+                  </a:lnTo>
+                  <a:lnTo>
+                    <a:pt x="4783425" y="857935"/>
+                  </a:lnTo>
+                  <a:lnTo>
+                    <a:pt x="4853769" y="861351"/>
+                  </a:lnTo>
+                  <a:lnTo>
+                    <a:pt x="4924114" y="864713"/>
+                  </a:lnTo>
+                  <a:lnTo>
+                    <a:pt x="4994458" y="868022"/>
+                  </a:lnTo>
+                  <a:lnTo>
+                    <a:pt x="5064803" y="871279"/>
+                  </a:lnTo>
+                  <a:lnTo>
+                    <a:pt x="5135147" y="874485"/>
+                  </a:lnTo>
+                  <a:lnTo>
+                    <a:pt x="5205492" y="877640"/>
+                  </a:lnTo>
+                  <a:lnTo>
+                    <a:pt x="5275836" y="880746"/>
+                  </a:lnTo>
+                  <a:lnTo>
+                    <a:pt x="5346181" y="883802"/>
+                  </a:lnTo>
+                  <a:lnTo>
+                    <a:pt x="5416525" y="886811"/>
+                  </a:lnTo>
+                  <a:lnTo>
+                    <a:pt x="5486870" y="889772"/>
+                  </a:lnTo>
+                  <a:lnTo>
+                    <a:pt x="5557214" y="892686"/>
+                  </a:lnTo>
+                  <a:lnTo>
+                    <a:pt x="5627559" y="895554"/>
+                  </a:lnTo>
+                  <a:lnTo>
+                    <a:pt x="5697903" y="898378"/>
+                  </a:lnTo>
+                  <a:lnTo>
+                    <a:pt x="5768248" y="901157"/>
+                  </a:lnTo>
+                  <a:lnTo>
+                    <a:pt x="5838592" y="903892"/>
+                  </a:lnTo>
+                  <a:lnTo>
+                    <a:pt x="5908937" y="906583"/>
+                  </a:lnTo>
+                  <a:lnTo>
+                    <a:pt x="5979281" y="909233"/>
+                  </a:lnTo>
+                  <a:lnTo>
+                    <a:pt x="6049626" y="911841"/>
+                  </a:lnTo>
+                  <a:lnTo>
+                    <a:pt x="6119970" y="914408"/>
+                  </a:lnTo>
+                  <a:lnTo>
+                    <a:pt x="6190315" y="916934"/>
+                  </a:lnTo>
+                  <a:lnTo>
+                    <a:pt x="6260659" y="919420"/>
+                  </a:lnTo>
+                  <a:lnTo>
+                    <a:pt x="6331004" y="921868"/>
+                  </a:lnTo>
+                  <a:lnTo>
+                    <a:pt x="6401348" y="924276"/>
+                  </a:lnTo>
+                  <a:lnTo>
+                    <a:pt x="6471693" y="926647"/>
+                  </a:lnTo>
+                  <a:lnTo>
+                    <a:pt x="6542037" y="928981"/>
+                  </a:lnTo>
+                  <a:lnTo>
+                    <a:pt x="6612382" y="931277"/>
+                  </a:lnTo>
+                  <a:lnTo>
+                    <a:pt x="6682726" y="933538"/>
+                  </a:lnTo>
+                  <a:lnTo>
+                    <a:pt x="6753071" y="935763"/>
+                  </a:lnTo>
+                  <a:lnTo>
+                    <a:pt x="6823415" y="937953"/>
+                  </a:lnTo>
+                  <a:lnTo>
+                    <a:pt x="6893760" y="940108"/>
+                  </a:lnTo>
+                  <a:lnTo>
+                    <a:pt x="6964104" y="942230"/>
+                  </a:lnTo>
+                </a:path>
+              </a:pathLst>
+            </a:custGeom>
+          </p:spPr>
+          <p:txBody>
+            <a:bodyPr/>
+            <a:lstStyle/>
+            <a:p/>
+          </p:txBody>
+        </p:sp>
+        <p:sp>
+          <p:nvSpPr>
+            <p:cNvPr id="68" name="pl68"/>
+            <p:cNvSpPr/>
+            <p:nvPr/>
+          </p:nvSpPr>
+          <p:spPr>
+            <a:xfrm>
+              <a:off x="1235312" y="4955331"/>
+              <a:ext cx="6964104" cy="562673"/>
+            </a:xfrm>
+            <a:custGeom>
+              <a:avLst/>
+              <a:pathLst>
+                <a:path w="6964104" h="562673">
+                  <a:moveTo>
+                    <a:pt x="6964104" y="562673"/>
+                  </a:moveTo>
+                  <a:lnTo>
+                    <a:pt x="6893760" y="560617"/>
+                  </a:lnTo>
+                  <a:lnTo>
+                    <a:pt x="6823415" y="558505"/>
+                  </a:lnTo>
+                  <a:lnTo>
+                    <a:pt x="6753071" y="556336"/>
+                  </a:lnTo>
+                  <a:lnTo>
+                    <a:pt x="6682726" y="554108"/>
+                  </a:lnTo>
+                  <a:lnTo>
+                    <a:pt x="6612382" y="551820"/>
+                  </a:lnTo>
+                  <a:lnTo>
+                    <a:pt x="6542037" y="549469"/>
+                  </a:lnTo>
+                  <a:lnTo>
+                    <a:pt x="6471693" y="547055"/>
+                  </a:lnTo>
+                  <a:lnTo>
+                    <a:pt x="6401348" y="544575"/>
+                  </a:lnTo>
+                  <a:lnTo>
+                    <a:pt x="6331004" y="542027"/>
+                  </a:lnTo>
+                  <a:lnTo>
+                    <a:pt x="6260659" y="539411"/>
+                  </a:lnTo>
+                  <a:lnTo>
+                    <a:pt x="6190315" y="536723"/>
+                  </a:lnTo>
+                  <a:lnTo>
+                    <a:pt x="6119970" y="533962"/>
+                  </a:lnTo>
+                  <a:lnTo>
+                    <a:pt x="6049626" y="531127"/>
+                  </a:lnTo>
+                  <a:lnTo>
+                    <a:pt x="5979281" y="528214"/>
+                  </a:lnTo>
+                  <a:lnTo>
+                    <a:pt x="5908937" y="525222"/>
+                  </a:lnTo>
+                  <a:lnTo>
+                    <a:pt x="5838592" y="522149"/>
+                  </a:lnTo>
+                  <a:lnTo>
+                    <a:pt x="5768248" y="518992"/>
+                  </a:lnTo>
+                  <a:lnTo>
+                    <a:pt x="5697903" y="515750"/>
+                  </a:lnTo>
+                  <a:lnTo>
+                    <a:pt x="5627559" y="512420"/>
+                  </a:lnTo>
+                  <a:lnTo>
+                    <a:pt x="5557214" y="508999"/>
+                  </a:lnTo>
+                  <a:lnTo>
+                    <a:pt x="5486870" y="505485"/>
+                  </a:lnTo>
+                  <a:lnTo>
+                    <a:pt x="5416525" y="501876"/>
+                  </a:lnTo>
+                  <a:lnTo>
+                    <a:pt x="5346181" y="498168"/>
+                  </a:lnTo>
+                  <a:lnTo>
+                    <a:pt x="5275836" y="494360"/>
+                  </a:lnTo>
+                  <a:lnTo>
+                    <a:pt x="5205492" y="490449"/>
+                  </a:lnTo>
+                  <a:lnTo>
+                    <a:pt x="5135147" y="486431"/>
+                  </a:lnTo>
+                  <a:lnTo>
+                    <a:pt x="5064803" y="482305"/>
+                  </a:lnTo>
+                  <a:lnTo>
+                    <a:pt x="4994458" y="478066"/>
+                  </a:lnTo>
+                  <a:lnTo>
+                    <a:pt x="4924114" y="473712"/>
+                  </a:lnTo>
+                  <a:lnTo>
+                    <a:pt x="4853769" y="469239"/>
+                  </a:lnTo>
+                  <a:lnTo>
+                    <a:pt x="4783425" y="464646"/>
+                  </a:lnTo>
+                  <a:lnTo>
+                    <a:pt x="4713080" y="459927"/>
+                  </a:lnTo>
+                  <a:lnTo>
+                    <a:pt x="4642736" y="455080"/>
+                  </a:lnTo>
+                  <a:lnTo>
+                    <a:pt x="4572391" y="450102"/>
+                  </a:lnTo>
+                  <a:lnTo>
+                    <a:pt x="4502047" y="444988"/>
+                  </a:lnTo>
+                  <a:lnTo>
+                    <a:pt x="4431702" y="439736"/>
+                  </a:lnTo>
+                  <a:lnTo>
+                    <a:pt x="4361358" y="434340"/>
+                  </a:lnTo>
+                  <a:lnTo>
+                    <a:pt x="4291013" y="428799"/>
+                  </a:lnTo>
+                  <a:lnTo>
+                    <a:pt x="4220669" y="423106"/>
+                  </a:lnTo>
+                  <a:lnTo>
+                    <a:pt x="4150324" y="417259"/>
+                  </a:lnTo>
+                  <a:lnTo>
+                    <a:pt x="4079980" y="411254"/>
+                  </a:lnTo>
+                  <a:lnTo>
+                    <a:pt x="4009635" y="405085"/>
+                  </a:lnTo>
+                  <a:lnTo>
+                    <a:pt x="3939291" y="398748"/>
+                  </a:lnTo>
+                  <a:lnTo>
+                    <a:pt x="3868946" y="392240"/>
+                  </a:lnTo>
+                  <a:lnTo>
+                    <a:pt x="3798602" y="385554"/>
+                  </a:lnTo>
+                  <a:lnTo>
+                    <a:pt x="3728257" y="378687"/>
+                  </a:lnTo>
+                  <a:lnTo>
+                    <a:pt x="3657913" y="371634"/>
+                  </a:lnTo>
+                  <a:lnTo>
+                    <a:pt x="3587569" y="364389"/>
+                  </a:lnTo>
+                  <a:lnTo>
+                    <a:pt x="3517224" y="356947"/>
+                  </a:lnTo>
+                  <a:lnTo>
+                    <a:pt x="3446880" y="349303"/>
+                  </a:lnTo>
+                  <a:lnTo>
+                    <a:pt x="3376535" y="341451"/>
+                  </a:lnTo>
+                  <a:lnTo>
+                    <a:pt x="3306191" y="335695"/>
+                  </a:lnTo>
+                  <a:lnTo>
+                    <a:pt x="3235846" y="330851"/>
+                  </a:lnTo>
+                  <a:lnTo>
+                    <a:pt x="3165502" y="325930"/>
+                  </a:lnTo>
+                  <a:lnTo>
+                    <a:pt x="3095157" y="320929"/>
+                  </a:lnTo>
+                  <a:lnTo>
+                    <a:pt x="3024813" y="315849"/>
+                  </a:lnTo>
+                  <a:lnTo>
+                    <a:pt x="2954468" y="310687"/>
+                  </a:lnTo>
+                  <a:lnTo>
+                    <a:pt x="2884124" y="305443"/>
+                  </a:lnTo>
+                  <a:lnTo>
+                    <a:pt x="2813779" y="300114"/>
+                  </a:lnTo>
+                  <a:lnTo>
+                    <a:pt x="2743435" y="294701"/>
+                  </a:lnTo>
+                  <a:lnTo>
+                    <a:pt x="2673090" y="289200"/>
+                  </a:lnTo>
+                  <a:lnTo>
+                    <a:pt x="2602746" y="283612"/>
+                  </a:lnTo>
+                  <a:lnTo>
+                    <a:pt x="2532401" y="277934"/>
+                  </a:lnTo>
+                  <a:lnTo>
+                    <a:pt x="2462057" y="272166"/>
+                  </a:lnTo>
+                  <a:lnTo>
+                    <a:pt x="2391712" y="266305"/>
+                  </a:lnTo>
+                  <a:lnTo>
+                    <a:pt x="2321368" y="260350"/>
+                  </a:lnTo>
+                  <a:lnTo>
+                    <a:pt x="2251023" y="254300"/>
+                  </a:lnTo>
+                  <a:lnTo>
+                    <a:pt x="2180679" y="248153"/>
+                  </a:lnTo>
+                  <a:lnTo>
+                    <a:pt x="2110334" y="241908"/>
+                  </a:lnTo>
+                  <a:lnTo>
+                    <a:pt x="2039990" y="235563"/>
+                  </a:lnTo>
+                  <a:lnTo>
+                    <a:pt x="1969645" y="229116"/>
+                  </a:lnTo>
+                  <a:lnTo>
+                    <a:pt x="1899301" y="222566"/>
+                  </a:lnTo>
+                  <a:lnTo>
+                    <a:pt x="1828956" y="215911"/>
+                  </a:lnTo>
+                  <a:lnTo>
+                    <a:pt x="1758612" y="209150"/>
+                  </a:lnTo>
+                  <a:lnTo>
+                    <a:pt x="1688267" y="202281"/>
+                  </a:lnTo>
+                  <a:lnTo>
+                    <a:pt x="1617923" y="195301"/>
+                  </a:lnTo>
+                  <a:lnTo>
+                    <a:pt x="1547578" y="188210"/>
+                  </a:lnTo>
+                  <a:lnTo>
+                    <a:pt x="1477234" y="181005"/>
+                  </a:lnTo>
+                  <a:lnTo>
+                    <a:pt x="1406889" y="173685"/>
+                  </a:lnTo>
+                  <a:lnTo>
+                    <a:pt x="1336545" y="166248"/>
+                  </a:lnTo>
+                  <a:lnTo>
+                    <a:pt x="1266200" y="158692"/>
+                  </a:lnTo>
+                  <a:lnTo>
+                    <a:pt x="1195856" y="151015"/>
+                  </a:lnTo>
+                  <a:lnTo>
+                    <a:pt x="1125511" y="143215"/>
+                  </a:lnTo>
+                  <a:lnTo>
+                    <a:pt x="1055167" y="135290"/>
+                  </a:lnTo>
+                  <a:lnTo>
+                    <a:pt x="984822" y="127239"/>
+                  </a:lnTo>
+                  <a:lnTo>
+                    <a:pt x="914478" y="119058"/>
+                  </a:lnTo>
+                  <a:lnTo>
+                    <a:pt x="844133" y="110747"/>
+                  </a:lnTo>
+                  <a:lnTo>
+                    <a:pt x="773789" y="102302"/>
+                  </a:lnTo>
+                  <a:lnTo>
+                    <a:pt x="703444" y="93723"/>
+                  </a:lnTo>
+                  <a:lnTo>
+                    <a:pt x="633100" y="85006"/>
+                  </a:lnTo>
+                  <a:lnTo>
+                    <a:pt x="562755" y="76149"/>
+                  </a:lnTo>
+                  <a:lnTo>
+                    <a:pt x="492411" y="67151"/>
+                  </a:lnTo>
+                  <a:lnTo>
+                    <a:pt x="422066" y="58009"/>
+                  </a:lnTo>
+                  <a:lnTo>
+                    <a:pt x="351722" y="48720"/>
+                  </a:lnTo>
+                  <a:lnTo>
+                    <a:pt x="281377" y="39283"/>
+                  </a:lnTo>
+                  <a:lnTo>
+                    <a:pt x="211033" y="29695"/>
+                  </a:lnTo>
+                  <a:lnTo>
+                    <a:pt x="140688" y="19953"/>
+                  </a:lnTo>
+                  <a:lnTo>
+                    <a:pt x="70344" y="10056"/>
+                  </a:lnTo>
+                  <a:lnTo>
+                    <a:pt x="0" y="0"/>
+                  </a:lnTo>
+                </a:path>
+              </a:pathLst>
+            </a:custGeom>
+          </p:spPr>
+          <p:txBody>
+            <a:bodyPr/>
+            <a:lstStyle/>
+            <a:p/>
+          </p:txBody>
+        </p:sp>
+        <p:sp>
+          <p:nvSpPr>
+            <p:cNvPr id="69" name="pl69"/>
+            <p:cNvSpPr/>
+            <p:nvPr/>
+          </p:nvSpPr>
+          <p:spPr>
+            <a:xfrm>
+              <a:off x="1235312" y="4765381"/>
+              <a:ext cx="6964104" cy="728148"/>
+            </a:xfrm>
+            <a:custGeom>
+              <a:avLst/>
+              <a:pathLst>
+                <a:path w="6964104" h="728148">
+                  <a:moveTo>
+                    <a:pt x="0" y="0"/>
+                  </a:moveTo>
+                  <a:lnTo>
+                    <a:pt x="70344" y="17488"/>
+                  </a:lnTo>
+                  <a:lnTo>
+                    <a:pt x="140688" y="34607"/>
+                  </a:lnTo>
+                  <a:lnTo>
+                    <a:pt x="211033" y="51365"/>
+                  </a:lnTo>
+                  <a:lnTo>
+                    <a:pt x="281377" y="67769"/>
+                  </a:lnTo>
+                  <a:lnTo>
+                    <a:pt x="351722" y="83827"/>
+                  </a:lnTo>
+                  <a:lnTo>
+                    <a:pt x="422066" y="99546"/>
+                  </a:lnTo>
+                  <a:lnTo>
+                    <a:pt x="492411" y="114933"/>
+                  </a:lnTo>
+                  <a:lnTo>
+                    <a:pt x="562755" y="129995"/>
+                  </a:lnTo>
+                  <a:lnTo>
+                    <a:pt x="633100" y="144739"/>
+                  </a:lnTo>
+                  <a:lnTo>
+                    <a:pt x="703444" y="159171"/>
+                  </a:lnTo>
+                  <a:lnTo>
+                    <a:pt x="773789" y="173299"/>
+                  </a:lnTo>
+                  <a:lnTo>
+                    <a:pt x="844133" y="187129"/>
+                  </a:lnTo>
+                  <a:lnTo>
+                    <a:pt x="914478" y="200666"/>
+                  </a:lnTo>
+                  <a:lnTo>
+                    <a:pt x="984822" y="213918"/>
+                  </a:lnTo>
+                  <a:lnTo>
+                    <a:pt x="1055167" y="226890"/>
+                  </a:lnTo>
+                  <a:lnTo>
+                    <a:pt x="1125511" y="239588"/>
+                  </a:lnTo>
+                  <a:lnTo>
+                    <a:pt x="1195856" y="252018"/>
+                  </a:lnTo>
+                  <a:lnTo>
+                    <a:pt x="1266200" y="264186"/>
+                  </a:lnTo>
+                  <a:lnTo>
+                    <a:pt x="1336545" y="276097"/>
+                  </a:lnTo>
+                  <a:lnTo>
+                    <a:pt x="1406889" y="287756"/>
+                  </a:lnTo>
+                  <a:lnTo>
+                    <a:pt x="1477234" y="299169"/>
+                  </a:lnTo>
+                  <a:lnTo>
+                    <a:pt x="1547578" y="310341"/>
+                  </a:lnTo>
+                  <a:lnTo>
+                    <a:pt x="1617923" y="321277"/>
+                  </a:lnTo>
+                  <a:lnTo>
+                    <a:pt x="1688267" y="331982"/>
+                  </a:lnTo>
+                  <a:lnTo>
+                    <a:pt x="1758612" y="342461"/>
+                  </a:lnTo>
+                  <a:lnTo>
+                    <a:pt x="1828956" y="352719"/>
+                  </a:lnTo>
+                  <a:lnTo>
+                    <a:pt x="1899301" y="362761"/>
+                  </a:lnTo>
+                  <a:lnTo>
+                    <a:pt x="1969645" y="372590"/>
+                  </a:lnTo>
+                  <a:lnTo>
+                    <a:pt x="2039990" y="382212"/>
+                  </a:lnTo>
+                  <a:lnTo>
+                    <a:pt x="2110334" y="391631"/>
+                  </a:lnTo>
+                  <a:lnTo>
+                    <a:pt x="2180679" y="400850"/>
+                  </a:lnTo>
+                  <a:lnTo>
+                    <a:pt x="2251023" y="409876"/>
+                  </a:lnTo>
+                  <a:lnTo>
+                    <a:pt x="2321368" y="418710"/>
+                  </a:lnTo>
+                  <a:lnTo>
+                    <a:pt x="2391712" y="427358"/>
+                  </a:lnTo>
+                  <a:lnTo>
+                    <a:pt x="2462057" y="435824"/>
+                  </a:lnTo>
+                  <a:lnTo>
+                    <a:pt x="2532401" y="444111"/>
+                  </a:lnTo>
+                  <a:lnTo>
+                    <a:pt x="2602746" y="452222"/>
+                  </a:lnTo>
+                  <a:lnTo>
+                    <a:pt x="2673090" y="460163"/>
+                  </a:lnTo>
+                  <a:lnTo>
+                    <a:pt x="2743435" y="467936"/>
+                  </a:lnTo>
+                  <a:lnTo>
+                    <a:pt x="2813779" y="475544"/>
+                  </a:lnTo>
+                  <a:lnTo>
+                    <a:pt x="2884124" y="482992"/>
+                  </a:lnTo>
+                  <a:lnTo>
+                    <a:pt x="2954468" y="490283"/>
+                  </a:lnTo>
+                  <a:lnTo>
+                    <a:pt x="3024813" y="497420"/>
+                  </a:lnTo>
+                  <a:lnTo>
+                    <a:pt x="3095157" y="504406"/>
+                  </a:lnTo>
+                  <a:lnTo>
+                    <a:pt x="3165502" y="511245"/>
+                  </a:lnTo>
+                  <a:lnTo>
+                    <a:pt x="3235846" y="517939"/>
+                  </a:lnTo>
+                  <a:lnTo>
+                    <a:pt x="3306191" y="524492"/>
+                  </a:lnTo>
+                  <a:lnTo>
+                    <a:pt x="3376535" y="530907"/>
+                  </a:lnTo>
+                  <a:lnTo>
+                    <a:pt x="3446880" y="537186"/>
+                  </a:lnTo>
+                  <a:lnTo>
+                    <a:pt x="3517224" y="543333"/>
+                  </a:lnTo>
+                  <a:lnTo>
+                    <a:pt x="3587569" y="549350"/>
+                  </a:lnTo>
+                  <a:lnTo>
+                    <a:pt x="3657913" y="555239"/>
+                  </a:lnTo>
+                  <a:lnTo>
+                    <a:pt x="3728257" y="561005"/>
+                  </a:lnTo>
+                  <a:lnTo>
+                    <a:pt x="3798602" y="566649"/>
+                  </a:lnTo>
+                  <a:lnTo>
+                    <a:pt x="3868946" y="572173"/>
+                  </a:lnTo>
+                  <a:lnTo>
+                    <a:pt x="3939291" y="577581"/>
+                  </a:lnTo>
+                  <a:lnTo>
+                    <a:pt x="4009635" y="582875"/>
+                  </a:lnTo>
+                  <a:lnTo>
+                    <a:pt x="4079980" y="588057"/>
+                  </a:lnTo>
+                  <a:lnTo>
+                    <a:pt x="4150324" y="593129"/>
+                  </a:lnTo>
+                  <a:lnTo>
+                    <a:pt x="4220669" y="598095"/>
+                  </a:lnTo>
+                  <a:lnTo>
+                    <a:pt x="4291013" y="602955"/>
+                  </a:lnTo>
+                  <a:lnTo>
+                    <a:pt x="4361358" y="607713"/>
+                  </a:lnTo>
+                  <a:lnTo>
+                    <a:pt x="4431702" y="612371"/>
+                  </a:lnTo>
+                  <a:lnTo>
+                    <a:pt x="4502047" y="616930"/>
+                  </a:lnTo>
+                  <a:lnTo>
+                    <a:pt x="4572391" y="621393"/>
+                  </a:lnTo>
+                  <a:lnTo>
+                    <a:pt x="4642736" y="625761"/>
+                  </a:lnTo>
+                  <a:lnTo>
+                    <a:pt x="4713080" y="630038"/>
+                  </a:lnTo>
+                  <a:lnTo>
+                    <a:pt x="4783425" y="634224"/>
+                  </a:lnTo>
+                  <a:lnTo>
+                    <a:pt x="4853769" y="638322"/>
+                  </a:lnTo>
+                  <a:lnTo>
+                    <a:pt x="4924114" y="642333"/>
+                  </a:lnTo>
+                  <a:lnTo>
+                    <a:pt x="4994458" y="646260"/>
+                  </a:lnTo>
+                  <a:lnTo>
+                    <a:pt x="5064803" y="650103"/>
+                  </a:lnTo>
+                  <a:lnTo>
+                    <a:pt x="5135147" y="653866"/>
+                  </a:lnTo>
+                  <a:lnTo>
+                    <a:pt x="5205492" y="657549"/>
+                  </a:lnTo>
+                  <a:lnTo>
+                    <a:pt x="5275836" y="661154"/>
+                  </a:lnTo>
+                  <a:lnTo>
+                    <a:pt x="5346181" y="664683"/>
+                  </a:lnTo>
+                  <a:lnTo>
+                    <a:pt x="5416525" y="668138"/>
+                  </a:lnTo>
+                  <a:lnTo>
+                    <a:pt x="5486870" y="671520"/>
+                  </a:lnTo>
+                  <a:lnTo>
+                    <a:pt x="5557214" y="674830"/>
+                  </a:lnTo>
+                  <a:lnTo>
+                    <a:pt x="5627559" y="678070"/>
+                  </a:lnTo>
+                  <a:lnTo>
+                    <a:pt x="5697903" y="681242"/>
+                  </a:lnTo>
+                  <a:lnTo>
+                    <a:pt x="5768248" y="684347"/>
+                  </a:lnTo>
+                  <a:lnTo>
+                    <a:pt x="5838592" y="687387"/>
+                  </a:lnTo>
+                  <a:lnTo>
+                    <a:pt x="5908937" y="690362"/>
+                  </a:lnTo>
+                  <a:lnTo>
+                    <a:pt x="5979281" y="693275"/>
+                  </a:lnTo>
+                  <a:lnTo>
+                    <a:pt x="6049626" y="696126"/>
+                  </a:lnTo>
+                  <a:lnTo>
+                    <a:pt x="6119970" y="698917"/>
+                  </a:lnTo>
+                  <a:lnTo>
+                    <a:pt x="6190315" y="701648"/>
+                  </a:lnTo>
+                  <a:lnTo>
+                    <a:pt x="6260659" y="704323"/>
+                  </a:lnTo>
+                  <a:lnTo>
+                    <a:pt x="6331004" y="706940"/>
+                  </a:lnTo>
+                  <a:lnTo>
+                    <a:pt x="6401348" y="709503"/>
+                  </a:lnTo>
+                  <a:lnTo>
+                    <a:pt x="6471693" y="712011"/>
+                  </a:lnTo>
+                  <a:lnTo>
+                    <a:pt x="6542037" y="714467"/>
+                  </a:lnTo>
+                  <a:lnTo>
+                    <a:pt x="6612382" y="716870"/>
+                  </a:lnTo>
+                  <a:lnTo>
+                    <a:pt x="6682726" y="719223"/>
+                  </a:lnTo>
+                  <a:lnTo>
+                    <a:pt x="6753071" y="721526"/>
+                  </a:lnTo>
+                  <a:lnTo>
+                    <a:pt x="6823415" y="723780"/>
+                  </a:lnTo>
+                  <a:lnTo>
+                    <a:pt x="6893760" y="725987"/>
+                  </a:lnTo>
+                  <a:lnTo>
+                    <a:pt x="6964104" y="728148"/>
+                  </a:lnTo>
+                </a:path>
+              </a:pathLst>
+            </a:custGeom>
+            <a:ln w="27101" cap="flat">
+              <a:solidFill>
+                <a:srgbClr val="FF8C00">
+                  <a:alpha val="100000"/>
+                </a:srgbClr>
+              </a:solidFill>
+              <a:prstDash val="solid"/>
+              <a:round/>
+            </a:ln>
+          </p:spPr>
+          <p:txBody>
+            <a:bodyPr/>
+            <a:lstStyle/>
+            <a:p/>
+          </p:txBody>
+        </p:sp>
+        <p:sp>
+          <p:nvSpPr>
+            <p:cNvPr id="70" name="pl70"/>
+            <p:cNvSpPr/>
+            <p:nvPr/>
+          </p:nvSpPr>
+          <p:spPr>
+            <a:xfrm>
+              <a:off x="887106" y="5294352"/>
+              <a:ext cx="7660515" cy="0"/>
+            </a:xfrm>
+            <a:custGeom>
+              <a:avLst/>
+              <a:pathLst>
+                <a:path w="7660515" h="0">
+                  <a:moveTo>
+                    <a:pt x="0" y="0"/>
+                  </a:moveTo>
+                  <a:lnTo>
+                    <a:pt x="7660515" y="0"/>
+                  </a:lnTo>
+                  <a:lnTo>
+                    <a:pt x="7660515" y="0"/>
+                  </a:lnTo>
+                </a:path>
+              </a:pathLst>
+            </a:custGeom>
+            <a:ln w="13550" cap="flat">
+              <a:solidFill>
+                <a:srgbClr val="7F7F7F">
+                  <a:alpha val="100000"/>
+                </a:srgbClr>
+              </a:solidFill>
+              <a:prstDash val="dash"/>
+              <a:round/>
+            </a:ln>
+          </p:spPr>
+          <p:txBody>
+            <a:bodyPr/>
+            <a:lstStyle/>
+            <a:p/>
+          </p:txBody>
+        </p:sp>
+        <p:sp>
+          <p:nvSpPr>
+            <p:cNvPr id="71" name="pl71"/>
+            <p:cNvSpPr/>
+            <p:nvPr/>
+          </p:nvSpPr>
+          <p:spPr>
+            <a:xfrm>
+              <a:off x="4590457" y="4336484"/>
+              <a:ext cx="0" cy="1317069"/>
+            </a:xfrm>
+            <a:custGeom>
+              <a:avLst/>
+              <a:pathLst>
+                <a:path w="0" h="1317069">
+                  <a:moveTo>
+                    <a:pt x="0" y="1317069"/>
+                  </a:moveTo>
+                  <a:lnTo>
+                    <a:pt x="0" y="0"/>
+                  </a:lnTo>
+                  <a:lnTo>
+                    <a:pt x="0" y="0"/>
+                  </a:lnTo>
+                </a:path>
+              </a:pathLst>
+            </a:custGeom>
+            <a:ln w="13550" cap="flat">
+              <a:solidFill>
+                <a:srgbClr val="666666">
+                  <a:alpha val="100000"/>
+                </a:srgbClr>
+              </a:solidFill>
+              <a:prstDash val="dot"/>
+              <a:round/>
+            </a:ln>
+          </p:spPr>
+          <p:txBody>
+            <a:bodyPr/>
+            <a:lstStyle/>
+            <a:p/>
+          </p:txBody>
+        </p:sp>
+        <p:sp>
+          <p:nvSpPr>
+            <p:cNvPr id="72" name="tx72"/>
+            <p:cNvSpPr/>
+            <p:nvPr/>
+          </p:nvSpPr>
+          <p:spPr>
+            <a:xfrm>
+              <a:off x="762297" y="5553636"/>
+              <a:ext cx="62179" cy="80101"/>
+            </a:xfrm>
+            <a:prstGeom prst="rect">
+              <a:avLst/>
+            </a:prstGeom>
+            <a:noFill/>
+          </p:spPr>
+          <p:txBody>
+            <a:bodyPr lIns="0" rIns="0" tIns="0" bIns="0" anchorCtr="1" anchor="ctr" wrap="none"/>
+            <a:lstStyle/>
+            <a:p>
+              <a:pPr algn="l" marL="0" marR="0" indent="0">
+                <a:lnSpc>
+                  <a:spcPts val="880"/>
+                </a:lnSpc>
+                <a:spcBef>
+                  <a:spcPts val="0"/>
+                </a:spcBef>
+                <a:spcAft>
+                  <a:spcPts val="0"/>
+                </a:spcAft>
+              </a:pPr>
+              <a:r>
+                <a:rPr sz="880">
+                  <a:solidFill>
+                    <a:srgbClr val="4D4D4D">
+                      <a:alpha val="100000"/>
+                    </a:srgbClr>
+                  </a:solidFill>
+                  <a:latin typeface="Helvetica"/>
+                  <a:cs typeface="Helvetica"/>
+                </a:rPr>
+                <a:t>0</a:t>
+              </a:r>
+            </a:p>
+          </p:txBody>
+        </p:sp>
+        <p:sp>
+          <p:nvSpPr>
+            <p:cNvPr id="73" name="tx73"/>
+            <p:cNvSpPr/>
+            <p:nvPr/>
+          </p:nvSpPr>
+          <p:spPr>
+            <a:xfrm>
+              <a:off x="762297" y="5254302"/>
+              <a:ext cx="62179" cy="80101"/>
+            </a:xfrm>
+            <a:prstGeom prst="rect">
+              <a:avLst/>
+            </a:prstGeom>
+            <a:noFill/>
+          </p:spPr>
+          <p:txBody>
+            <a:bodyPr lIns="0" rIns="0" tIns="0" bIns="0" anchorCtr="1" anchor="ctr" wrap="none"/>
+            <a:lstStyle/>
+            <a:p>
+              <a:pPr algn="l" marL="0" marR="0" indent="0">
+                <a:lnSpc>
+                  <a:spcPts val="880"/>
+                </a:lnSpc>
+                <a:spcBef>
+                  <a:spcPts val="0"/>
+                </a:spcBef>
+                <a:spcAft>
+                  <a:spcPts val="0"/>
+                </a:spcAft>
+              </a:pPr>
+              <a:r>
+                <a:rPr sz="880">
+                  <a:solidFill>
+                    <a:srgbClr val="4D4D4D">
+                      <a:alpha val="100000"/>
+                    </a:srgbClr>
+                  </a:solidFill>
+                  <a:latin typeface="Helvetica"/>
+                  <a:cs typeface="Helvetica"/>
+                </a:rPr>
+                <a:t>1</a:t>
+              </a:r>
+            </a:p>
+          </p:txBody>
+        </p:sp>
+        <p:sp>
+          <p:nvSpPr>
+            <p:cNvPr id="74" name="tx74"/>
+            <p:cNvSpPr/>
+            <p:nvPr/>
+          </p:nvSpPr>
+          <p:spPr>
+            <a:xfrm>
+              <a:off x="762297" y="4954968"/>
+              <a:ext cx="62179" cy="80101"/>
+            </a:xfrm>
+            <a:prstGeom prst="rect">
+              <a:avLst/>
+            </a:prstGeom>
+            <a:noFill/>
+          </p:spPr>
+          <p:txBody>
+            <a:bodyPr lIns="0" rIns="0" tIns="0" bIns="0" anchorCtr="1" anchor="ctr" wrap="none"/>
+            <a:lstStyle/>
+            <a:p>
+              <a:pPr algn="l" marL="0" marR="0" indent="0">
+                <a:lnSpc>
+                  <a:spcPts val="880"/>
+                </a:lnSpc>
+                <a:spcBef>
+                  <a:spcPts val="0"/>
+                </a:spcBef>
+                <a:spcAft>
+                  <a:spcPts val="0"/>
+                </a:spcAft>
+              </a:pPr>
+              <a:r>
+                <a:rPr sz="880">
+                  <a:solidFill>
+                    <a:srgbClr val="4D4D4D">
+                      <a:alpha val="100000"/>
+                    </a:srgbClr>
+                  </a:solidFill>
+                  <a:latin typeface="Helvetica"/>
+                  <a:cs typeface="Helvetica"/>
+                </a:rPr>
+                <a:t>2</a:t>
+              </a:r>
+            </a:p>
+          </p:txBody>
+        </p:sp>
+        <p:sp>
+          <p:nvSpPr>
+            <p:cNvPr id="75" name="tx75"/>
+            <p:cNvSpPr/>
+            <p:nvPr/>
+          </p:nvSpPr>
+          <p:spPr>
+            <a:xfrm>
+              <a:off x="762297" y="4655634"/>
+              <a:ext cx="62179" cy="80101"/>
+            </a:xfrm>
+            <a:prstGeom prst="rect">
+              <a:avLst/>
+            </a:prstGeom>
+            <a:noFill/>
+          </p:spPr>
+          <p:txBody>
+            <a:bodyPr lIns="0" rIns="0" tIns="0" bIns="0" anchorCtr="1" anchor="ctr" wrap="none"/>
+            <a:lstStyle/>
+            <a:p>
+              <a:pPr algn="l" marL="0" marR="0" indent="0">
+                <a:lnSpc>
+                  <a:spcPts val="880"/>
+                </a:lnSpc>
+                <a:spcBef>
+                  <a:spcPts val="0"/>
+                </a:spcBef>
+                <a:spcAft>
+                  <a:spcPts val="0"/>
+                </a:spcAft>
+              </a:pPr>
+              <a:r>
+                <a:rPr sz="880">
+                  <a:solidFill>
+                    <a:srgbClr val="4D4D4D">
+                      <a:alpha val="100000"/>
+                    </a:srgbClr>
+                  </a:solidFill>
+                  <a:latin typeface="Helvetica"/>
+                  <a:cs typeface="Helvetica"/>
+                </a:rPr>
+                <a:t>3</a:t>
+              </a:r>
+            </a:p>
+          </p:txBody>
+        </p:sp>
+        <p:sp>
+          <p:nvSpPr>
+            <p:cNvPr id="76" name="tx76"/>
+            <p:cNvSpPr/>
+            <p:nvPr/>
+          </p:nvSpPr>
+          <p:spPr>
+            <a:xfrm>
+              <a:off x="762297" y="4356300"/>
+              <a:ext cx="62179" cy="80101"/>
+            </a:xfrm>
+            <a:prstGeom prst="rect">
+              <a:avLst/>
+            </a:prstGeom>
+            <a:noFill/>
+          </p:spPr>
+          <p:txBody>
+            <a:bodyPr lIns="0" rIns="0" tIns="0" bIns="0" anchorCtr="1" anchor="ctr" wrap="none"/>
+            <a:lstStyle/>
+            <a:p>
+              <a:pPr algn="l" marL="0" marR="0" indent="0">
+                <a:lnSpc>
+                  <a:spcPts val="880"/>
+                </a:lnSpc>
+                <a:spcBef>
+                  <a:spcPts val="0"/>
+                </a:spcBef>
+                <a:spcAft>
+                  <a:spcPts val="0"/>
+                </a:spcAft>
+              </a:pPr>
+              <a:r>
+                <a:rPr sz="880">
+                  <a:solidFill>
+                    <a:srgbClr val="4D4D4D">
+                      <a:alpha val="100000"/>
+                    </a:srgbClr>
+                  </a:solidFill>
+                  <a:latin typeface="Helvetica"/>
+                  <a:cs typeface="Helvetica"/>
+                </a:rPr>
+                <a:t>4</a:t>
+              </a:r>
+            </a:p>
+          </p:txBody>
+        </p:sp>
+        <p:sp>
+          <p:nvSpPr>
+            <p:cNvPr id="77" name="tx77"/>
+            <p:cNvSpPr/>
+            <p:nvPr/>
+          </p:nvSpPr>
+          <p:spPr>
+            <a:xfrm>
+              <a:off x="1133333" y="5716183"/>
+              <a:ext cx="161574" cy="80101"/>
+            </a:xfrm>
+            <a:prstGeom prst="rect">
+              <a:avLst/>
+            </a:prstGeom>
+            <a:noFill/>
+          </p:spPr>
+          <p:txBody>
+            <a:bodyPr lIns="0" rIns="0" tIns="0" bIns="0" anchorCtr="1" anchor="ctr" wrap="none"/>
+            <a:lstStyle/>
+            <a:p>
+              <a:pPr algn="l" marL="0" marR="0" indent="0">
+                <a:lnSpc>
+                  <a:spcPts val="880"/>
+                </a:lnSpc>
+                <a:spcBef>
+                  <a:spcPts val="0"/>
+                </a:spcBef>
+                <a:spcAft>
+                  <a:spcPts val="0"/>
+                </a:spcAft>
+              </a:pPr>
+              <a:r>
+                <a:rPr sz="880">
+                  <a:solidFill>
+                    <a:srgbClr val="4D4D4D">
+                      <a:alpha val="100000"/>
+                    </a:srgbClr>
+                  </a:solidFill>
+                  <a:latin typeface="Helvetica"/>
+                  <a:cs typeface="Helvetica"/>
+                </a:rPr>
+                <a:t>-40</a:t>
+              </a:r>
+            </a:p>
+          </p:txBody>
+        </p:sp>
+        <p:sp>
+          <p:nvSpPr>
+            <p:cNvPr id="78" name="tx78"/>
+            <p:cNvSpPr/>
+            <p:nvPr/>
+          </p:nvSpPr>
+          <p:spPr>
+            <a:xfrm>
+              <a:off x="1978619" y="5716183"/>
+              <a:ext cx="161574" cy="80101"/>
+            </a:xfrm>
+            <a:prstGeom prst="rect">
+              <a:avLst/>
+            </a:prstGeom>
+            <a:noFill/>
+          </p:spPr>
+          <p:txBody>
+            <a:bodyPr lIns="0" rIns="0" tIns="0" bIns="0" anchorCtr="1" anchor="ctr" wrap="none"/>
+            <a:lstStyle/>
+            <a:p>
+              <a:pPr algn="l" marL="0" marR="0" indent="0">
+                <a:lnSpc>
+                  <a:spcPts val="880"/>
+                </a:lnSpc>
+                <a:spcBef>
+                  <a:spcPts val="0"/>
+                </a:spcBef>
+                <a:spcAft>
+                  <a:spcPts val="0"/>
+                </a:spcAft>
+              </a:pPr>
+              <a:r>
+                <a:rPr sz="880">
+                  <a:solidFill>
+                    <a:srgbClr val="4D4D4D">
+                      <a:alpha val="100000"/>
+                    </a:srgbClr>
+                  </a:solidFill>
+                  <a:latin typeface="Helvetica"/>
+                  <a:cs typeface="Helvetica"/>
+                </a:rPr>
+                <a:t>-30</a:t>
+              </a:r>
+            </a:p>
+          </p:txBody>
+        </p:sp>
+        <p:sp>
+          <p:nvSpPr>
+            <p:cNvPr id="79" name="tx79"/>
+            <p:cNvSpPr/>
+            <p:nvPr/>
+          </p:nvSpPr>
+          <p:spPr>
+            <a:xfrm>
+              <a:off x="2823906" y="5716183"/>
+              <a:ext cx="161574" cy="80101"/>
+            </a:xfrm>
+            <a:prstGeom prst="rect">
+              <a:avLst/>
+            </a:prstGeom>
+            <a:noFill/>
+          </p:spPr>
+          <p:txBody>
+            <a:bodyPr lIns="0" rIns="0" tIns="0" bIns="0" anchorCtr="1" anchor="ctr" wrap="none"/>
+            <a:lstStyle/>
+            <a:p>
+              <a:pPr algn="l" marL="0" marR="0" indent="0">
+                <a:lnSpc>
+                  <a:spcPts val="880"/>
+                </a:lnSpc>
+                <a:spcBef>
+                  <a:spcPts val="0"/>
+                </a:spcBef>
+                <a:spcAft>
+                  <a:spcPts val="0"/>
+                </a:spcAft>
+              </a:pPr>
+              <a:r>
+                <a:rPr sz="880">
+                  <a:solidFill>
+                    <a:srgbClr val="4D4D4D">
+                      <a:alpha val="100000"/>
+                    </a:srgbClr>
+                  </a:solidFill>
+                  <a:latin typeface="Helvetica"/>
+                  <a:cs typeface="Helvetica"/>
+                </a:rPr>
+                <a:t>-20</a:t>
+              </a:r>
+            </a:p>
+          </p:txBody>
+        </p:sp>
+        <p:sp>
+          <p:nvSpPr>
+            <p:cNvPr id="80" name="tx80"/>
+            <p:cNvSpPr/>
+            <p:nvPr/>
+          </p:nvSpPr>
+          <p:spPr>
+            <a:xfrm>
+              <a:off x="3669192" y="5716183"/>
+              <a:ext cx="161574" cy="80101"/>
+            </a:xfrm>
+            <a:prstGeom prst="rect">
+              <a:avLst/>
+            </a:prstGeom>
+            <a:noFill/>
+          </p:spPr>
+          <p:txBody>
+            <a:bodyPr lIns="0" rIns="0" tIns="0" bIns="0" anchorCtr="1" anchor="ctr" wrap="none"/>
+            <a:lstStyle/>
+            <a:p>
+              <a:pPr algn="l" marL="0" marR="0" indent="0">
+                <a:lnSpc>
+                  <a:spcPts val="880"/>
+                </a:lnSpc>
+                <a:spcBef>
+                  <a:spcPts val="0"/>
+                </a:spcBef>
+                <a:spcAft>
+                  <a:spcPts val="0"/>
+                </a:spcAft>
+              </a:pPr>
+              <a:r>
+                <a:rPr sz="880">
+                  <a:solidFill>
+                    <a:srgbClr val="4D4D4D">
+                      <a:alpha val="100000"/>
+                    </a:srgbClr>
+                  </a:solidFill>
+                  <a:latin typeface="Helvetica"/>
+                  <a:cs typeface="Helvetica"/>
+                </a:rPr>
+                <a:t>-10</a:t>
+              </a:r>
+            </a:p>
+          </p:txBody>
+        </p:sp>
+        <p:sp>
+          <p:nvSpPr>
+            <p:cNvPr id="81" name="tx81"/>
+            <p:cNvSpPr/>
+            <p:nvPr/>
+          </p:nvSpPr>
+          <p:spPr>
+            <a:xfrm>
+              <a:off x="4564176" y="5716183"/>
+              <a:ext cx="62179" cy="80101"/>
+            </a:xfrm>
+            <a:prstGeom prst="rect">
+              <a:avLst/>
+            </a:prstGeom>
+            <a:noFill/>
+          </p:spPr>
+          <p:txBody>
+            <a:bodyPr lIns="0" rIns="0" tIns="0" bIns="0" anchorCtr="1" anchor="ctr" wrap="none"/>
+            <a:lstStyle/>
+            <a:p>
+              <a:pPr algn="l" marL="0" marR="0" indent="0">
+                <a:lnSpc>
+                  <a:spcPts val="880"/>
+                </a:lnSpc>
+                <a:spcBef>
+                  <a:spcPts val="0"/>
+                </a:spcBef>
+                <a:spcAft>
+                  <a:spcPts val="0"/>
+                </a:spcAft>
+              </a:pPr>
+              <a:r>
+                <a:rPr sz="880">
+                  <a:solidFill>
+                    <a:srgbClr val="4D4D4D">
+                      <a:alpha val="100000"/>
+                    </a:srgbClr>
+                  </a:solidFill>
+                  <a:latin typeface="Helvetica"/>
+                  <a:cs typeface="Helvetica"/>
+                </a:rPr>
+                <a:t>0</a:t>
+              </a:r>
+            </a:p>
+          </p:txBody>
+        </p:sp>
+        <p:sp>
+          <p:nvSpPr>
+            <p:cNvPr id="82" name="tx82"/>
+            <p:cNvSpPr/>
+            <p:nvPr/>
+          </p:nvSpPr>
+          <p:spPr>
+            <a:xfrm>
+              <a:off x="5378373" y="5716183"/>
+              <a:ext cx="124358" cy="80101"/>
+            </a:xfrm>
+            <a:prstGeom prst="rect">
+              <a:avLst/>
+            </a:prstGeom>
+            <a:noFill/>
+          </p:spPr>
+          <p:txBody>
+            <a:bodyPr lIns="0" rIns="0" tIns="0" bIns="0" anchorCtr="1" anchor="ctr" wrap="none"/>
+            <a:lstStyle/>
+            <a:p>
+              <a:pPr algn="l" marL="0" marR="0" indent="0">
+                <a:lnSpc>
+                  <a:spcPts val="880"/>
+                </a:lnSpc>
+                <a:spcBef>
+                  <a:spcPts val="0"/>
+                </a:spcBef>
+                <a:spcAft>
+                  <a:spcPts val="0"/>
+                </a:spcAft>
+              </a:pPr>
+              <a:r>
+                <a:rPr sz="880">
+                  <a:solidFill>
+                    <a:srgbClr val="4D4D4D">
+                      <a:alpha val="100000"/>
+                    </a:srgbClr>
+                  </a:solidFill>
+                  <a:latin typeface="Helvetica"/>
+                  <a:cs typeface="Helvetica"/>
+                </a:rPr>
+                <a:t>10</a:t>
+              </a:r>
+            </a:p>
+          </p:txBody>
+        </p:sp>
+        <p:sp>
+          <p:nvSpPr>
+            <p:cNvPr id="83" name="tx83"/>
+            <p:cNvSpPr/>
+            <p:nvPr/>
+          </p:nvSpPr>
+          <p:spPr>
+            <a:xfrm>
+              <a:off x="6223659" y="5716183"/>
+              <a:ext cx="124358" cy="80101"/>
+            </a:xfrm>
+            <a:prstGeom prst="rect">
+              <a:avLst/>
+            </a:prstGeom>
+            <a:noFill/>
+          </p:spPr>
+          <p:txBody>
+            <a:bodyPr lIns="0" rIns="0" tIns="0" bIns="0" anchorCtr="1" anchor="ctr" wrap="none"/>
+            <a:lstStyle/>
+            <a:p>
+              <a:pPr algn="l" marL="0" marR="0" indent="0">
+                <a:lnSpc>
+                  <a:spcPts val="880"/>
+                </a:lnSpc>
+                <a:spcBef>
+                  <a:spcPts val="0"/>
+                </a:spcBef>
+                <a:spcAft>
+                  <a:spcPts val="0"/>
+                </a:spcAft>
+              </a:pPr>
+              <a:r>
+                <a:rPr sz="880">
+                  <a:solidFill>
+                    <a:srgbClr val="4D4D4D">
+                      <a:alpha val="100000"/>
+                    </a:srgbClr>
+                  </a:solidFill>
+                  <a:latin typeface="Helvetica"/>
+                  <a:cs typeface="Helvetica"/>
+                </a:rPr>
+                <a:t>20</a:t>
+              </a:r>
+            </a:p>
+          </p:txBody>
+        </p:sp>
+        <p:sp>
+          <p:nvSpPr>
+            <p:cNvPr id="84" name="tx84"/>
+            <p:cNvSpPr/>
+            <p:nvPr/>
+          </p:nvSpPr>
+          <p:spPr>
+            <a:xfrm>
+              <a:off x="7068946" y="5716183"/>
+              <a:ext cx="124358" cy="80101"/>
+            </a:xfrm>
+            <a:prstGeom prst="rect">
+              <a:avLst/>
+            </a:prstGeom>
+            <a:noFill/>
+          </p:spPr>
+          <p:txBody>
+            <a:bodyPr lIns="0" rIns="0" tIns="0" bIns="0" anchorCtr="1" anchor="ctr" wrap="none"/>
+            <a:lstStyle/>
+            <a:p>
+              <a:pPr algn="l" marL="0" marR="0" indent="0">
+                <a:lnSpc>
+                  <a:spcPts val="880"/>
+                </a:lnSpc>
+                <a:spcBef>
+                  <a:spcPts val="0"/>
+                </a:spcBef>
+                <a:spcAft>
+                  <a:spcPts val="0"/>
+                </a:spcAft>
+              </a:pPr>
+              <a:r>
+                <a:rPr sz="880">
+                  <a:solidFill>
+                    <a:srgbClr val="4D4D4D">
+                      <a:alpha val="100000"/>
+                    </a:srgbClr>
+                  </a:solidFill>
+                  <a:latin typeface="Helvetica"/>
+                  <a:cs typeface="Helvetica"/>
+                </a:rPr>
+                <a:t>30</a:t>
+              </a:r>
+            </a:p>
+          </p:txBody>
+        </p:sp>
+        <p:sp>
+          <p:nvSpPr>
+            <p:cNvPr id="85" name="tx85"/>
+            <p:cNvSpPr/>
+            <p:nvPr/>
+          </p:nvSpPr>
+          <p:spPr>
+            <a:xfrm>
+              <a:off x="7914232" y="5716183"/>
+              <a:ext cx="124358" cy="80101"/>
+            </a:xfrm>
+            <a:prstGeom prst="rect">
+              <a:avLst/>
+            </a:prstGeom>
+            <a:noFill/>
+          </p:spPr>
+          <p:txBody>
+            <a:bodyPr lIns="0" rIns="0" tIns="0" bIns="0" anchorCtr="1" anchor="ctr" wrap="none"/>
+            <a:lstStyle/>
+            <a:p>
+              <a:pPr algn="l" marL="0" marR="0" indent="0">
+                <a:lnSpc>
+                  <a:spcPts val="880"/>
+                </a:lnSpc>
+                <a:spcBef>
+                  <a:spcPts val="0"/>
+                </a:spcBef>
+                <a:spcAft>
+                  <a:spcPts val="0"/>
+                </a:spcAft>
+              </a:pPr>
+              <a:r>
+                <a:rPr sz="880">
+                  <a:solidFill>
+                    <a:srgbClr val="4D4D4D">
+                      <a:alpha val="100000"/>
+                    </a:srgbClr>
+                  </a:solidFill>
+                  <a:latin typeface="Helvetica"/>
+                  <a:cs typeface="Helvetica"/>
+                </a:rPr>
+                <a:t>40</a:t>
+              </a:r>
+            </a:p>
+          </p:txBody>
+        </p:sp>
+        <p:sp>
+          <p:nvSpPr>
+            <p:cNvPr id="86" name="tx86"/>
+            <p:cNvSpPr/>
+            <p:nvPr/>
+          </p:nvSpPr>
+          <p:spPr>
+            <a:xfrm>
+              <a:off x="2928340" y="5855859"/>
+              <a:ext cx="3578047" cy="100218"/>
+            </a:xfrm>
+            <a:prstGeom prst="rect">
+              <a:avLst/>
+            </a:prstGeom>
+            <a:noFill/>
+          </p:spPr>
+          <p:txBody>
+            <a:bodyPr lIns="0" rIns="0" tIns="0" bIns="0" anchorCtr="1" anchor="ctr" wrap="none"/>
+            <a:lstStyle/>
+            <a:p>
+              <a:pPr algn="l" marL="0" marR="0" indent="0">
+                <a:lnSpc>
+                  <a:spcPts val="1100"/>
+                </a:lnSpc>
+                <a:spcBef>
+                  <a:spcPts val="0"/>
+                </a:spcBef>
+                <a:spcAft>
+                  <a:spcPts val="0"/>
+                </a:spcAft>
+              </a:pPr>
+              <a:r>
+                <a:rPr sz="1100">
+                  <a:solidFill>
+                    <a:srgbClr val="000000">
+                      <a:alpha val="100000"/>
+                    </a:srgbClr>
+                  </a:solidFill>
+                  <a:latin typeface="Helvetica"/>
+                  <a:cs typeface="Helvetica"/>
+                </a:rPr>
+                <a:t>eGFR difference (%): 100 × (CKD-EPI Cr-Cys − CG) / CG</a:t>
+              </a:r>
+            </a:p>
+          </p:txBody>
+        </p:sp>
+        <p:sp>
+          <p:nvSpPr>
+            <p:cNvPr id="87" name="tx87"/>
+            <p:cNvSpPr/>
+            <p:nvPr/>
+          </p:nvSpPr>
+          <p:spPr>
+            <a:xfrm rot="-5400000">
+              <a:off x="138035" y="4944909"/>
+              <a:ext cx="1016904" cy="100218"/>
+            </a:xfrm>
+            <a:prstGeom prst="rect">
+              <a:avLst/>
+            </a:prstGeom>
+            <a:noFill/>
+          </p:spPr>
+          <p:txBody>
+            <a:bodyPr lIns="0" rIns="0" tIns="0" bIns="0" anchorCtr="1" anchor="ctr" wrap="none"/>
+            <a:lstStyle/>
+            <a:p>
+              <a:pPr algn="l" marL="0" marR="0" indent="0">
+                <a:lnSpc>
+                  <a:spcPts val="1100"/>
+                </a:lnSpc>
+                <a:spcBef>
+                  <a:spcPts val="0"/>
+                </a:spcBef>
+                <a:spcAft>
+                  <a:spcPts val="0"/>
+                </a:spcAft>
+              </a:pPr>
+              <a:r>
+                <a:rPr sz="1100">
+                  <a:solidFill>
+                    <a:srgbClr val="000000">
+                      <a:alpha val="100000"/>
+                    </a:srgbClr>
+                  </a:solidFill>
+                  <a:latin typeface="Helvetica"/>
+                  <a:cs typeface="Helvetica"/>
+                </a:rPr>
+                <a:t>subHR (95% CI)</a:t>
+              </a:r>
+            </a:p>
+          </p:txBody>
+        </p:sp>
+        <p:sp>
+          <p:nvSpPr>
+            <p:cNvPr id="88" name="tx88"/>
+            <p:cNvSpPr/>
+            <p:nvPr/>
+          </p:nvSpPr>
+          <p:spPr>
+            <a:xfrm>
+              <a:off x="887106" y="4159544"/>
+              <a:ext cx="7052127" cy="82021"/>
+            </a:xfrm>
+            <a:prstGeom prst="rect">
+              <a:avLst/>
+            </a:prstGeom>
+            <a:noFill/>
+          </p:spPr>
+          <p:txBody>
+            <a:bodyPr lIns="0" rIns="0" tIns="0" bIns="0" anchorCtr="1" anchor="ctr" wrap="none"/>
+            <a:lstStyle/>
+            <a:p>
+              <a:pPr algn="l" marL="0" marR="0" indent="0">
+                <a:lnSpc>
+                  <a:spcPts val="900"/>
+                </a:lnSpc>
+                <a:spcBef>
+                  <a:spcPts val="0"/>
+                </a:spcBef>
+                <a:spcAft>
+                  <a:spcPts val="0"/>
+                </a:spcAft>
+              </a:pPr>
+              <a:r>
+                <a:rPr sz="900">
+                  <a:solidFill>
+                    <a:srgbClr val="404040">
+                      <a:alpha val="100000"/>
+                    </a:srgbClr>
+                  </a:solidFill>
+                  <a:latin typeface="Helvetica"/>
+                  <a:cs typeface="Helvetica"/>
+                </a:rPr>
+                <a:t>subHR per 10 % decline: 1.29 (1.21-1.38), p_Bonf = &lt;0.001 (n = 6)  |  per IQR decline (Δ = 29.3 %): 2.12 (1.75-2.57)  |  IQR: [-14.6, 14.7] %</a:t>
+              </a:r>
+            </a:p>
+          </p:txBody>
+        </p:sp>
+        <p:sp>
+          <p:nvSpPr>
+            <p:cNvPr id="89" name="tx89"/>
+            <p:cNvSpPr/>
+            <p:nvPr/>
+          </p:nvSpPr>
+          <p:spPr>
+            <a:xfrm>
+              <a:off x="887106" y="3932770"/>
               <a:ext cx="1806397" cy="120152"/>
             </a:xfrm>
             <a:prstGeom prst="rect">
